--- a/manuscript picture/workflow.pptx
+++ b/manuscript picture/workflow.pptx
@@ -5,10 +5,11 @@
     <p:sldMasterId id="2147483648" r:id="rId1"/>
   </p:sldMasterIdLst>
   <p:notesMasterIdLst>
-    <p:notesMasterId r:id="rId3"/>
+    <p:notesMasterId r:id="rId4"/>
   </p:notesMasterIdLst>
   <p:sldIdLst>
-    <p:sldId id="267" r:id="rId2"/>
+    <p:sldId id="271" r:id="rId2"/>
+    <p:sldId id="273" r:id="rId3"/>
   </p:sldIdLst>
   <p:sldSz cx="9144000" cy="5143500" type="screen16x9"/>
   <p:notesSz cx="5143500" cy="9144000"/>
@@ -557,7 +558,7 @@
         <p:cNvPr id="1" name="">
           <a:extLst>
             <a:ext uri="{FF2B5EF4-FFF2-40B4-BE49-F238E27FC236}">
-              <a16:creationId xmlns:a16="http://schemas.microsoft.com/office/drawing/2014/main" id="{B4538456-7A0E-4B01-ABF8-43FCE157DA24}"/>
+              <a16:creationId xmlns:a16="http://schemas.microsoft.com/office/drawing/2014/main" id="{53FF7E48-508B-EF66-4B66-FB0F8D4FC25B}"/>
             </a:ext>
           </a:extLst>
         </p:cNvPr>
@@ -577,7 +578,7 @@
           <p:cNvPr id="169" name="Shape 0">
             <a:extLst>
               <a:ext uri="{FF2B5EF4-FFF2-40B4-BE49-F238E27FC236}">
-                <a16:creationId xmlns:a16="http://schemas.microsoft.com/office/drawing/2014/main" id="{531B6D2A-5772-0FA7-7956-E9AEBDA07283}"/>
+                <a16:creationId xmlns:a16="http://schemas.microsoft.com/office/drawing/2014/main" id="{0E987EA4-F647-AA33-5EF1-CBFA300C5D57}"/>
               </a:ext>
             </a:extLst>
           </p:cNvPr>
@@ -586,7 +587,7 @@
         </p:nvSpPr>
         <p:spPr>
           <a:xfrm>
-            <a:off x="122548" y="357052"/>
+            <a:off x="122548" y="790685"/>
             <a:ext cx="8946038" cy="3222172"/>
           </a:xfrm>
           <a:prstGeom prst="roundRect">
@@ -617,7 +618,7 @@
           <p:cNvPr id="153" name="Shape 2">
             <a:extLst>
               <a:ext uri="{FF2B5EF4-FFF2-40B4-BE49-F238E27FC236}">
-                <a16:creationId xmlns:a16="http://schemas.microsoft.com/office/drawing/2014/main" id="{38AFD78F-7367-D450-79DF-E2311483CAB0}"/>
+                <a16:creationId xmlns:a16="http://schemas.microsoft.com/office/drawing/2014/main" id="{5F5DEFFD-EBA9-2752-B0E8-568650986599}"/>
               </a:ext>
             </a:extLst>
           </p:cNvPr>
@@ -626,7 +627,7 @@
         </p:nvSpPr>
         <p:spPr>
           <a:xfrm>
-            <a:off x="7825863" y="1569363"/>
+            <a:off x="7825863" y="2002996"/>
             <a:ext cx="1141529" cy="1094096"/>
           </a:xfrm>
           <a:prstGeom prst="roundRect">
@@ -635,9 +636,8 @@
             </a:avLst>
           </a:prstGeom>
           <a:solidFill>
-            <a:schemeClr val="accent1">
-              <a:lumMod val="20000"/>
-              <a:lumOff val="80000"/>
+            <a:schemeClr val="bg1">
+              <a:lumMod val="95000"/>
               <a:alpha val="95898"/>
             </a:schemeClr>
           </a:solidFill>
@@ -668,7 +668,7 @@
           <p:cNvPr id="152" name="Shape 5">
             <a:extLst>
               <a:ext uri="{FF2B5EF4-FFF2-40B4-BE49-F238E27FC236}">
-                <a16:creationId xmlns:a16="http://schemas.microsoft.com/office/drawing/2014/main" id="{0613D1A2-4CF6-C032-EAF8-34106918E351}"/>
+                <a16:creationId xmlns:a16="http://schemas.microsoft.com/office/drawing/2014/main" id="{50C7D68A-E297-BEB7-02C7-50BC919B4251}"/>
               </a:ext>
             </a:extLst>
           </p:cNvPr>
@@ -677,7 +677,7 @@
         </p:nvSpPr>
         <p:spPr>
           <a:xfrm>
-            <a:off x="5512435" y="1290729"/>
+            <a:off x="5512435" y="1724362"/>
             <a:ext cx="2028445" cy="1670588"/>
           </a:xfrm>
           <a:prstGeom prst="roundRect">
@@ -686,7 +686,9 @@
             </a:avLst>
           </a:prstGeom>
           <a:solidFill>
-            <a:srgbClr val="F7F5DE"/>
+            <a:srgbClr val="F7F5DE">
+              <a:alpha val="0"/>
+            </a:srgbClr>
           </a:solidFill>
           <a:ln w="9525">
             <a:solidFill>
@@ -715,7 +717,7 @@
           <p:cNvPr id="151" name="Shape 5">
             <a:extLst>
               <a:ext uri="{FF2B5EF4-FFF2-40B4-BE49-F238E27FC236}">
-                <a16:creationId xmlns:a16="http://schemas.microsoft.com/office/drawing/2014/main" id="{2A677DFE-1688-B880-B252-40290954509A}"/>
+                <a16:creationId xmlns:a16="http://schemas.microsoft.com/office/drawing/2014/main" id="{2DEE9611-5CDB-3B91-2477-9C082B8DF56C}"/>
               </a:ext>
             </a:extLst>
           </p:cNvPr>
@@ -724,7 +726,7 @@
         </p:nvSpPr>
         <p:spPr>
           <a:xfrm>
-            <a:off x="3656554" y="1303439"/>
+            <a:off x="3656554" y="1737072"/>
             <a:ext cx="1587236" cy="1657878"/>
           </a:xfrm>
           <a:prstGeom prst="roundRect">
@@ -733,7 +735,9 @@
             </a:avLst>
           </a:prstGeom>
           <a:solidFill>
-            <a:srgbClr val="F7F5DE"/>
+            <a:srgbClr val="F7F5DE">
+              <a:alpha val="0"/>
+            </a:srgbClr>
           </a:solidFill>
           <a:ln w="9525">
             <a:solidFill>
@@ -762,7 +766,7 @@
           <p:cNvPr id="3" name="Shape 2">
             <a:extLst>
               <a:ext uri="{FF2B5EF4-FFF2-40B4-BE49-F238E27FC236}">
-                <a16:creationId xmlns:a16="http://schemas.microsoft.com/office/drawing/2014/main" id="{E8F44A7B-8C33-2127-E906-3A18BD3D4190}"/>
+                <a16:creationId xmlns:a16="http://schemas.microsoft.com/office/drawing/2014/main" id="{8ECEDB44-42BE-71E7-1AF9-BD1417ABE33B}"/>
               </a:ext>
             </a:extLst>
           </p:cNvPr>
@@ -771,7 +775,7 @@
         </p:nvSpPr>
         <p:spPr>
           <a:xfrm>
-            <a:off x="176608" y="1546306"/>
+            <a:off x="176608" y="1979939"/>
             <a:ext cx="1280190" cy="1094096"/>
           </a:xfrm>
           <a:prstGeom prst="roundRect">
@@ -780,9 +784,8 @@
             </a:avLst>
           </a:prstGeom>
           <a:solidFill>
-            <a:schemeClr val="accent1">
-              <a:lumMod val="20000"/>
-              <a:lumOff val="80000"/>
+            <a:schemeClr val="bg1">
+              <a:lumMod val="95000"/>
               <a:alpha val="95898"/>
             </a:schemeClr>
           </a:solidFill>
@@ -813,7 +816,7 @@
           <p:cNvPr id="4" name="Text 3">
             <a:extLst>
               <a:ext uri="{FF2B5EF4-FFF2-40B4-BE49-F238E27FC236}">
-                <a16:creationId xmlns:a16="http://schemas.microsoft.com/office/drawing/2014/main" id="{B75D27E6-9216-E5D4-B05F-1EA7339B4E88}"/>
+                <a16:creationId xmlns:a16="http://schemas.microsoft.com/office/drawing/2014/main" id="{0583D485-02FB-D0CC-17E7-90573FBFACBB}"/>
               </a:ext>
             </a:extLst>
           </p:cNvPr>
@@ -822,7 +825,7 @@
         </p:nvSpPr>
         <p:spPr>
           <a:xfrm>
-            <a:off x="172908" y="1745776"/>
+            <a:off x="172908" y="2179409"/>
             <a:ext cx="1287589" cy="533666"/>
           </a:xfrm>
           <a:prstGeom prst="rect">
@@ -899,101 +902,6 @@
               <a:defRPr/>
             </a:pPr>
             <a:r>
-              <a:rPr kumimoji="0" lang="en-US" altLang="zh-CN" sz="1100" b="0" i="0" u="none" strike="noStrike" kern="1200" cap="none" spc="0" normalizeH="0" baseline="0" noProof="0" dirty="0">
-                <a:ln>
-                  <a:noFill/>
-                </a:ln>
-                <a:solidFill>
-                  <a:prstClr val="white">
-                    <a:lumMod val="50000"/>
-                  </a:prstClr>
-                </a:solidFill>
-                <a:effectLst/>
-                <a:uLnTx/>
-                <a:uFillTx/>
-                <a:latin typeface="Calibri" panose="020F0502020204030204"/>
-                <a:ea typeface="等线" panose="02010600030101010101" pitchFamily="2" charset="-122"/>
-                <a:cs typeface="+mn-cs"/>
-              </a:rPr>
-              <a:t>e</a:t>
-            </a:r>
-            <a:r>
-              <a:rPr kumimoji="0" lang="en-GB" sz="1100" b="0" i="0" u="none" strike="noStrike" kern="1200" cap="none" spc="0" normalizeH="0" baseline="0" noProof="0" dirty="0" err="1">
-                <a:ln>
-                  <a:noFill/>
-                </a:ln>
-                <a:solidFill>
-                  <a:prstClr val="white">
-                    <a:lumMod val="50000"/>
-                  </a:prstClr>
-                </a:solidFill>
-                <a:effectLst/>
-                <a:uLnTx/>
-                <a:uFillTx/>
-                <a:latin typeface="Calibri" panose="020F0502020204030204"/>
-                <a:ea typeface="+mn-ea"/>
-                <a:cs typeface="+mn-cs"/>
-              </a:rPr>
-              <a:t>coD</a:t>
-            </a:r>
-            <a:r>
-              <a:rPr kumimoji="0" lang="en-US" altLang="zh-CN" sz="1100" b="0" i="0" u="none" strike="noStrike" kern="1200" cap="none" spc="0" normalizeH="0" baseline="0" noProof="0" dirty="0" err="1">
-                <a:ln>
-                  <a:noFill/>
-                </a:ln>
-                <a:solidFill>
-                  <a:prstClr val="white">
-                    <a:lumMod val="50000"/>
-                  </a:prstClr>
-                </a:solidFill>
-                <a:effectLst/>
-                <a:uLnTx/>
-                <a:uFillTx/>
-                <a:latin typeface="Calibri" panose="020F0502020204030204"/>
-                <a:ea typeface="等线" panose="02010600030101010101" pitchFamily="2" charset="-122"/>
-                <a:cs typeface="+mn-cs"/>
-              </a:rPr>
-              <a:t>yn</a:t>
-            </a:r>
-            <a:r>
-              <a:rPr kumimoji="0" lang="en-US" altLang="zh-CN" sz="1100" b="0" i="0" u="none" strike="noStrike" kern="1200" cap="none" spc="0" normalizeH="0" baseline="0" noProof="0" dirty="0">
-                <a:ln>
-                  <a:noFill/>
-                </a:ln>
-                <a:solidFill>
-                  <a:prstClr val="white">
-                    <a:lumMod val="50000"/>
-                  </a:prstClr>
-                </a:solidFill>
-                <a:effectLst/>
-                <a:uLnTx/>
-                <a:uFillTx/>
-                <a:latin typeface="Calibri" panose="020F0502020204030204"/>
-                <a:ea typeface="等线" panose="02010600030101010101" pitchFamily="2" charset="-122"/>
-                <a:cs typeface="+mn-cs"/>
-              </a:rPr>
-              <a:t>()</a:t>
-            </a:r>
-          </a:p>
-          <a:p>
-            <a:pPr marL="0" marR="0" lvl="0" indent="0" algn="ctr" defTabSz="914400" rtl="0" eaLnBrk="1" fontAlgn="auto" latinLnBrk="0" hangingPunct="1">
-              <a:lnSpc>
-                <a:spcPct val="100000"/>
-              </a:lnSpc>
-              <a:spcBef>
-                <a:spcPts val="0"/>
-              </a:spcBef>
-              <a:spcAft>
-                <a:spcPts val="0"/>
-              </a:spcAft>
-              <a:buClrTx/>
-              <a:buSzTx/>
-              <a:buFontTx/>
-              <a:buNone/>
-              <a:tabLst/>
-              <a:defRPr/>
-            </a:pPr>
-            <a:r>
               <a:rPr lang="en-US" altLang="zh-CN" sz="1100" dirty="0">
                 <a:solidFill>
                   <a:prstClr val="white">
@@ -1029,7 +937,7 @@
           <p:cNvPr id="6" name="Shape 5">
             <a:extLst>
               <a:ext uri="{FF2B5EF4-FFF2-40B4-BE49-F238E27FC236}">
-                <a16:creationId xmlns:a16="http://schemas.microsoft.com/office/drawing/2014/main" id="{02560DBA-F4A0-A947-1215-2348646089DA}"/>
+                <a16:creationId xmlns:a16="http://schemas.microsoft.com/office/drawing/2014/main" id="{901399D3-1EA5-5EA5-6C1A-9FC482F96945}"/>
               </a:ext>
             </a:extLst>
           </p:cNvPr>
@@ -1038,7 +946,7 @@
         </p:nvSpPr>
         <p:spPr>
           <a:xfrm>
-            <a:off x="1717586" y="1290729"/>
+            <a:off x="1717586" y="1724362"/>
             <a:ext cx="1649866" cy="1670589"/>
           </a:xfrm>
           <a:prstGeom prst="roundRect">
@@ -1047,7 +955,9 @@
             </a:avLst>
           </a:prstGeom>
           <a:solidFill>
-            <a:srgbClr val="F7F5DE"/>
+            <a:srgbClr val="F7F5DE">
+              <a:alpha val="0"/>
+            </a:srgbClr>
           </a:solidFill>
           <a:ln w="9525">
             <a:solidFill>
@@ -1076,7 +986,7 @@
           <p:cNvPr id="7" name="Text 6">
             <a:extLst>
               <a:ext uri="{FF2B5EF4-FFF2-40B4-BE49-F238E27FC236}">
-                <a16:creationId xmlns:a16="http://schemas.microsoft.com/office/drawing/2014/main" id="{AF7C3C94-DE49-D65A-E587-185E94C5A052}"/>
+                <a16:creationId xmlns:a16="http://schemas.microsoft.com/office/drawing/2014/main" id="{EB293B96-D056-A1BD-505F-9076E69E0714}"/>
               </a:ext>
             </a:extLst>
           </p:cNvPr>
@@ -1085,7 +995,7 @@
         </p:nvSpPr>
         <p:spPr>
           <a:xfrm>
-            <a:off x="1598250" y="1290728"/>
+            <a:off x="3530232" y="1767478"/>
             <a:ext cx="1844903" cy="774687"/>
           </a:xfrm>
           <a:prstGeom prst="rect">
@@ -1101,7 +1011,7 @@
             <a:pPr algn="ctr"/>
             <a:r>
               <a:rPr lang="en-US" altLang="zh-CN" sz="1300" b="1" dirty="0"/>
-              <a:t>1.</a:t>
+              <a:t>2.</a:t>
             </a:r>
             <a:r>
               <a:rPr lang="zh-CN" altLang="en-US" sz="1300" b="1" dirty="0"/>
@@ -1154,6 +1064,101 @@
               </a:rPr>
               <a:t>()</a:t>
             </a:r>
+          </a:p>
+          <a:p>
+            <a:pPr marL="0" marR="0" lvl="0" indent="0" algn="ctr" defTabSz="914400" rtl="0" eaLnBrk="1" fontAlgn="auto" latinLnBrk="0" hangingPunct="1">
+              <a:lnSpc>
+                <a:spcPct val="100000"/>
+              </a:lnSpc>
+              <a:spcBef>
+                <a:spcPts val="0"/>
+              </a:spcBef>
+              <a:spcAft>
+                <a:spcPts val="0"/>
+              </a:spcAft>
+              <a:buClrTx/>
+              <a:buSzTx/>
+              <a:buFontTx/>
+              <a:buNone/>
+              <a:tabLst/>
+              <a:defRPr/>
+            </a:pPr>
+            <a:r>
+              <a:rPr kumimoji="0" lang="en-US" altLang="zh-CN" sz="1100" b="0" i="0" u="none" strike="noStrike" kern="1200" cap="none" spc="0" normalizeH="0" baseline="0" noProof="0" dirty="0">
+                <a:ln>
+                  <a:noFill/>
+                </a:ln>
+                <a:solidFill>
+                  <a:prstClr val="white">
+                    <a:lumMod val="50000"/>
+                  </a:prstClr>
+                </a:solidFill>
+                <a:effectLst/>
+                <a:uLnTx/>
+                <a:uFillTx/>
+                <a:latin typeface="Calibri" panose="020F0502020204030204"/>
+                <a:ea typeface="等线" panose="02010600030101010101" pitchFamily="2" charset="-122"/>
+                <a:cs typeface="+mn-cs"/>
+              </a:rPr>
+              <a:t>e</a:t>
+            </a:r>
+            <a:r>
+              <a:rPr kumimoji="0" lang="en-GB" sz="1100" b="0" i="0" u="none" strike="noStrike" kern="1200" cap="none" spc="0" normalizeH="0" baseline="0" noProof="0" dirty="0" err="1">
+                <a:ln>
+                  <a:noFill/>
+                </a:ln>
+                <a:solidFill>
+                  <a:prstClr val="white">
+                    <a:lumMod val="50000"/>
+                  </a:prstClr>
+                </a:solidFill>
+                <a:effectLst/>
+                <a:uLnTx/>
+                <a:uFillTx/>
+                <a:latin typeface="Calibri" panose="020F0502020204030204"/>
+                <a:ea typeface="+mn-ea"/>
+                <a:cs typeface="+mn-cs"/>
+              </a:rPr>
+              <a:t>coD</a:t>
+            </a:r>
+            <a:r>
+              <a:rPr kumimoji="0" lang="en-US" altLang="zh-CN" sz="1100" b="0" i="0" u="none" strike="noStrike" kern="1200" cap="none" spc="0" normalizeH="0" baseline="0" noProof="0" dirty="0" err="1">
+                <a:ln>
+                  <a:noFill/>
+                </a:ln>
+                <a:solidFill>
+                  <a:prstClr val="white">
+                    <a:lumMod val="50000"/>
+                  </a:prstClr>
+                </a:solidFill>
+                <a:effectLst/>
+                <a:uLnTx/>
+                <a:uFillTx/>
+                <a:latin typeface="Calibri" panose="020F0502020204030204"/>
+                <a:ea typeface="等线" panose="02010600030101010101" pitchFamily="2" charset="-122"/>
+                <a:cs typeface="+mn-cs"/>
+              </a:rPr>
+              <a:t>yn</a:t>
+            </a:r>
+            <a:r>
+              <a:rPr kumimoji="0" lang="en-US" altLang="zh-CN" sz="1100" b="0" i="0" u="none" strike="noStrike" kern="1200" cap="none" spc="0" normalizeH="0" baseline="0" noProof="0" dirty="0">
+                <a:ln>
+                  <a:noFill/>
+                </a:ln>
+                <a:solidFill>
+                  <a:prstClr val="white">
+                    <a:lumMod val="50000"/>
+                  </a:prstClr>
+                </a:solidFill>
+                <a:effectLst/>
+                <a:uLnTx/>
+                <a:uFillTx/>
+                <a:latin typeface="Calibri" panose="020F0502020204030204"/>
+                <a:ea typeface="等线" panose="02010600030101010101" pitchFamily="2" charset="-122"/>
+                <a:cs typeface="+mn-cs"/>
+              </a:rPr>
+              <a:t>()</a:t>
+            </a:r>
             <a:endParaRPr kumimoji="0" lang="en-US" sz="1300" b="0" i="0" u="none" strike="noStrike" kern="1200" cap="none" spc="0" normalizeH="0" baseline="0" noProof="0" dirty="0">
               <a:ln>
                 <a:noFill/>
@@ -1186,7 +1191,7 @@
           <p:cNvPr id="50" name="Text 9">
             <a:extLst>
               <a:ext uri="{FF2B5EF4-FFF2-40B4-BE49-F238E27FC236}">
-                <a16:creationId xmlns:a16="http://schemas.microsoft.com/office/drawing/2014/main" id="{23E8F4B3-B8B3-3E68-8CFC-90283910C496}"/>
+                <a16:creationId xmlns:a16="http://schemas.microsoft.com/office/drawing/2014/main" id="{D430FFBF-3F65-CB05-7E22-2C05FF0E8915}"/>
               </a:ext>
             </a:extLst>
           </p:cNvPr>
@@ -1195,7 +1200,7 @@
         </p:nvSpPr>
         <p:spPr>
           <a:xfrm>
-            <a:off x="3618077" y="1289009"/>
+            <a:off x="1727123" y="1705816"/>
             <a:ext cx="1647365" cy="594360"/>
           </a:xfrm>
           <a:prstGeom prst="rect">
@@ -1212,8 +1217,12 @@
               <a:buNone/>
             </a:pPr>
             <a:r>
+              <a:rPr lang="en-US" altLang="zh-CN" sz="1300" b="1" dirty="0"/>
+              <a:t>1</a:t>
+            </a:r>
+            <a:r>
               <a:rPr lang="en-US" sz="1300" b="1" dirty="0"/>
-              <a:t>2. Introduce mutant</a:t>
+              <a:t>. Introduce mutant</a:t>
             </a:r>
           </a:p>
           <a:p>
@@ -1270,7 +1279,7 @@
           <p:cNvPr id="52" name="Text 12">
             <a:extLst>
               <a:ext uri="{FF2B5EF4-FFF2-40B4-BE49-F238E27FC236}">
-                <a16:creationId xmlns:a16="http://schemas.microsoft.com/office/drawing/2014/main" id="{7CA0A194-2583-4970-FF3E-C88F8BEF5CE1}"/>
+                <a16:creationId xmlns:a16="http://schemas.microsoft.com/office/drawing/2014/main" id="{993CFA6F-DAFE-59CD-310A-08047E139F31}"/>
               </a:ext>
             </a:extLst>
           </p:cNvPr>
@@ -1279,7 +1288,7 @@
         </p:nvSpPr>
         <p:spPr>
           <a:xfrm>
-            <a:off x="5539126" y="1281090"/>
+            <a:off x="5539126" y="1714723"/>
             <a:ext cx="2006624" cy="576546"/>
           </a:xfrm>
           <a:prstGeom prst="rect">
@@ -1404,7 +1413,7 @@
           <p:cNvPr id="129" name="Text 20">
             <a:extLst>
               <a:ext uri="{FF2B5EF4-FFF2-40B4-BE49-F238E27FC236}">
-                <a16:creationId xmlns:a16="http://schemas.microsoft.com/office/drawing/2014/main" id="{8C8CF7C8-3799-78B0-9A79-D97792958A8F}"/>
+                <a16:creationId xmlns:a16="http://schemas.microsoft.com/office/drawing/2014/main" id="{1E20524C-C082-2572-FB87-DAAD4C712C88}"/>
               </a:ext>
             </a:extLst>
           </p:cNvPr>
@@ -1413,7 +1422,7 @@
         </p:nvSpPr>
         <p:spPr>
           <a:xfrm>
-            <a:off x="7832899" y="1546306"/>
+            <a:off x="7856096" y="2128365"/>
             <a:ext cx="1111296" cy="635754"/>
           </a:xfrm>
           <a:prstGeom prst="rect">
@@ -1495,7 +1504,7 @@
           <p:cNvPr id="162" name="Elbow Connector 161">
             <a:extLst>
               <a:ext uri="{FF2B5EF4-FFF2-40B4-BE49-F238E27FC236}">
-                <a16:creationId xmlns:a16="http://schemas.microsoft.com/office/drawing/2014/main" id="{EB97FF5D-1843-E76D-5013-06FE6209E0DB}"/>
+                <a16:creationId xmlns:a16="http://schemas.microsoft.com/office/drawing/2014/main" id="{25F05CAD-590A-0897-9B13-B4DDC0F8E900}"/>
               </a:ext>
             </a:extLst>
           </p:cNvPr>
@@ -1508,7 +1517,7 @@
         </p:nvCxnSpPr>
         <p:spPr>
           <a:xfrm rot="5400000" flipH="1" flipV="1">
-            <a:off x="4534587" y="969248"/>
+            <a:off x="4534587" y="1402881"/>
             <a:ext cx="1" cy="3984139"/>
           </a:xfrm>
           <a:prstGeom prst="bentConnector3">
@@ -1547,7 +1556,7 @@
           <p:cNvPr id="166" name="Text 17">
             <a:extLst>
               <a:ext uri="{FF2B5EF4-FFF2-40B4-BE49-F238E27FC236}">
-                <a16:creationId xmlns:a16="http://schemas.microsoft.com/office/drawing/2014/main" id="{CBF1FD57-E3CE-142B-3A1A-CDA36D9C2FF8}"/>
+                <a16:creationId xmlns:a16="http://schemas.microsoft.com/office/drawing/2014/main" id="{0DC40214-F713-9702-9945-438586CEDADC}"/>
               </a:ext>
             </a:extLst>
           </p:cNvPr>
@@ -1556,7 +1565,7 @@
         </p:nvSpPr>
         <p:spPr>
           <a:xfrm>
-            <a:off x="3989314" y="3160742"/>
+            <a:off x="3989314" y="3594375"/>
             <a:ext cx="640080" cy="274320"/>
           </a:xfrm>
           <a:prstGeom prst="rect">
@@ -1605,7 +1614,7 @@
           <p:cNvPr id="167" name="TextBox 166">
             <a:extLst>
               <a:ext uri="{FF2B5EF4-FFF2-40B4-BE49-F238E27FC236}">
-                <a16:creationId xmlns:a16="http://schemas.microsoft.com/office/drawing/2014/main" id="{072A0EDD-6B86-BDAC-B883-93B8204D9880}"/>
+                <a16:creationId xmlns:a16="http://schemas.microsoft.com/office/drawing/2014/main" id="{30EEB544-ACA2-1A59-6528-8D7A9420C31F}"/>
               </a:ext>
             </a:extLst>
           </p:cNvPr>
@@ -1614,7 +1623,7 @@
         </p:nvSpPr>
         <p:spPr>
           <a:xfrm>
-            <a:off x="3793519" y="984345"/>
+            <a:off x="5892509" y="1406156"/>
             <a:ext cx="1268296" cy="261610"/>
           </a:xfrm>
           <a:prstGeom prst="rect">
@@ -1649,7 +1658,7 @@
           <p:cNvPr id="168" name="Text 1">
             <a:extLst>
               <a:ext uri="{FF2B5EF4-FFF2-40B4-BE49-F238E27FC236}">
-                <a16:creationId xmlns:a16="http://schemas.microsoft.com/office/drawing/2014/main" id="{60295D1C-144B-0B59-D744-72F8D173DF28}"/>
+                <a16:creationId xmlns:a16="http://schemas.microsoft.com/office/drawing/2014/main" id="{3DE5583D-C40D-5908-123A-9FCFE21AE7FE}"/>
               </a:ext>
             </a:extLst>
           </p:cNvPr>
@@ -1658,7 +1667,7 @@
         </p:nvSpPr>
         <p:spPr>
           <a:xfrm>
-            <a:off x="312867" y="324764"/>
+            <a:off x="312867" y="758397"/>
             <a:ext cx="8229600" cy="256032"/>
           </a:xfrm>
           <a:prstGeom prst="rect">
@@ -1691,7 +1700,7 @@
           <p:cNvPr id="171" name="Straight Arrow Connector 170">
             <a:extLst>
               <a:ext uri="{FF2B5EF4-FFF2-40B4-BE49-F238E27FC236}">
-                <a16:creationId xmlns:a16="http://schemas.microsoft.com/office/drawing/2014/main" id="{1AB07D58-2DC0-A2A4-E3D1-D7273612E11A}"/>
+                <a16:creationId xmlns:a16="http://schemas.microsoft.com/office/drawing/2014/main" id="{620A742C-FC14-2CCC-A61A-6EB3D17DB92E}"/>
               </a:ext>
             </a:extLst>
           </p:cNvPr>
@@ -1702,7 +1711,7 @@
         </p:nvCxnSpPr>
         <p:spPr>
           <a:xfrm>
-            <a:off x="1510701" y="2101575"/>
+            <a:off x="1510701" y="2535208"/>
             <a:ext cx="193017" cy="0"/>
           </a:xfrm>
           <a:prstGeom prst="straightConnector1">
@@ -1735,7 +1744,7 @@
           <p:cNvPr id="172" name="Straight Arrow Connector 171">
             <a:extLst>
               <a:ext uri="{FF2B5EF4-FFF2-40B4-BE49-F238E27FC236}">
-                <a16:creationId xmlns:a16="http://schemas.microsoft.com/office/drawing/2014/main" id="{3B34F3A2-D604-3F99-9C14-6DF666A4F69A}"/>
+                <a16:creationId xmlns:a16="http://schemas.microsoft.com/office/drawing/2014/main" id="{DE59BD28-9FBC-845B-7903-A72C4FEE6319}"/>
               </a:ext>
             </a:extLst>
           </p:cNvPr>
@@ -1746,7 +1755,7 @@
         </p:nvCxnSpPr>
         <p:spPr>
           <a:xfrm>
-            <a:off x="3433470" y="2097594"/>
+            <a:off x="3433470" y="2531227"/>
             <a:ext cx="193017" cy="0"/>
           </a:xfrm>
           <a:prstGeom prst="straightConnector1">
@@ -1779,7 +1788,7 @@
           <p:cNvPr id="173" name="Straight Arrow Connector 172">
             <a:extLst>
               <a:ext uri="{FF2B5EF4-FFF2-40B4-BE49-F238E27FC236}">
-                <a16:creationId xmlns:a16="http://schemas.microsoft.com/office/drawing/2014/main" id="{24CDD8D0-BE3A-9454-0C1E-50196EFADDB3}"/>
+                <a16:creationId xmlns:a16="http://schemas.microsoft.com/office/drawing/2014/main" id="{627205FC-6C64-D7E0-3C12-65A2CAB15F12}"/>
               </a:ext>
             </a:extLst>
           </p:cNvPr>
@@ -1790,7 +1799,7 @@
         </p:nvCxnSpPr>
         <p:spPr>
           <a:xfrm>
-            <a:off x="5313929" y="2093353"/>
+            <a:off x="5291627" y="2526986"/>
             <a:ext cx="193017" cy="0"/>
           </a:xfrm>
           <a:prstGeom prst="straightConnector1">
@@ -1823,7 +1832,7 @@
           <p:cNvPr id="174" name="Straight Arrow Connector 173">
             <a:extLst>
               <a:ext uri="{FF2B5EF4-FFF2-40B4-BE49-F238E27FC236}">
-                <a16:creationId xmlns:a16="http://schemas.microsoft.com/office/drawing/2014/main" id="{8C899BC8-7A10-C936-74FE-CAB19401A45D}"/>
+                <a16:creationId xmlns:a16="http://schemas.microsoft.com/office/drawing/2014/main" id="{FCD5F150-E5AB-DF4E-A325-123247A731CB}"/>
               </a:ext>
             </a:extLst>
           </p:cNvPr>
@@ -1834,7 +1843,7 @@
         </p:nvCxnSpPr>
         <p:spPr>
           <a:xfrm>
-            <a:off x="7590381" y="2093353"/>
+            <a:off x="7590381" y="2526986"/>
             <a:ext cx="193017" cy="0"/>
           </a:xfrm>
           <a:prstGeom prst="straightConnector1">
@@ -1867,7 +1876,7 @@
           <p:cNvPr id="290" name="TextBox 289">
             <a:extLst>
               <a:ext uri="{FF2B5EF4-FFF2-40B4-BE49-F238E27FC236}">
-                <a16:creationId xmlns:a16="http://schemas.microsoft.com/office/drawing/2014/main" id="{11DF383E-DAE6-E033-9C64-D6FD52209DD2}"/>
+                <a16:creationId xmlns:a16="http://schemas.microsoft.com/office/drawing/2014/main" id="{090DD82D-1BA0-F65A-CC15-616BC0394277}"/>
               </a:ext>
             </a:extLst>
           </p:cNvPr>
@@ -1876,7 +1885,7 @@
         </p:nvSpPr>
         <p:spPr>
           <a:xfrm>
-            <a:off x="1887711" y="984345"/>
+            <a:off x="3870526" y="1406156"/>
             <a:ext cx="1159292" cy="261610"/>
           </a:xfrm>
           <a:prstGeom prst="rect">
@@ -1908,10 +1917,10 @@
       </p:sp>
       <p:grpSp>
         <p:nvGrpSpPr>
-          <p:cNvPr id="180" name="Group 179">
+          <p:cNvPr id="200" name="Group 199">
             <a:extLst>
               <a:ext uri="{FF2B5EF4-FFF2-40B4-BE49-F238E27FC236}">
-                <a16:creationId xmlns:a16="http://schemas.microsoft.com/office/drawing/2014/main" id="{7546B067-09C3-A0F5-C6FE-25F449BAACEB}"/>
+                <a16:creationId xmlns:a16="http://schemas.microsoft.com/office/drawing/2014/main" id="{BDA568DB-668B-BB6D-F9FB-DCF2F9368E01}"/>
               </a:ext>
             </a:extLst>
           </p:cNvPr>
@@ -1920,18 +1929,18 @@
         </p:nvGrpSpPr>
         <p:grpSpPr>
           <a:xfrm>
-            <a:off x="1989801" y="2073299"/>
-            <a:ext cx="975109" cy="596300"/>
-            <a:chOff x="871880" y="1444752"/>
-            <a:chExt cx="1331700" cy="761782"/>
+            <a:off x="1927809" y="2244634"/>
+            <a:ext cx="1704805" cy="1008947"/>
+            <a:chOff x="5512553" y="834494"/>
+            <a:chExt cx="2219565" cy="1303222"/>
           </a:xfrm>
         </p:grpSpPr>
         <p:grpSp>
           <p:nvGrpSpPr>
-            <p:cNvPr id="181" name="Group 180">
+            <p:cNvPr id="201" name="Group 200">
               <a:extLst>
                 <a:ext uri="{FF2B5EF4-FFF2-40B4-BE49-F238E27FC236}">
-                  <a16:creationId xmlns:a16="http://schemas.microsoft.com/office/drawing/2014/main" id="{EF7BA987-324F-A080-398C-E73AB4E0378B}"/>
+                  <a16:creationId xmlns:a16="http://schemas.microsoft.com/office/drawing/2014/main" id="{867D6272-C44F-D54E-D99E-C4F4A800058C}"/>
                 </a:ext>
               </a:extLst>
             </p:cNvPr>
@@ -1940,593 +1949,8 @@
           </p:nvGrpSpPr>
           <p:grpSpPr>
             <a:xfrm>
-              <a:off x="1467588" y="1510043"/>
-              <a:ext cx="201168" cy="201168"/>
-              <a:chOff x="1225296" y="1527048"/>
-              <a:chExt cx="201168" cy="201168"/>
-            </a:xfrm>
-          </p:grpSpPr>
-          <p:sp>
-            <p:nvSpPr>
-              <p:cNvPr id="197" name="Shape 15">
-                <a:extLst>
-                  <a:ext uri="{FF2B5EF4-FFF2-40B4-BE49-F238E27FC236}">
-                    <a16:creationId xmlns:a16="http://schemas.microsoft.com/office/drawing/2014/main" id="{9BD15F03-B4C8-A740-FCD9-BE8E7110D9A0}"/>
-                  </a:ext>
-                </a:extLst>
-              </p:cNvPr>
-              <p:cNvSpPr/>
-              <p:nvPr/>
-            </p:nvSpPr>
-            <p:spPr>
-              <a:xfrm>
-                <a:off x="1225296" y="1527048"/>
-                <a:ext cx="201168" cy="201168"/>
-              </a:xfrm>
-              <a:prstGeom prst="ellipse">
-                <a:avLst/>
-              </a:prstGeom>
-              <a:solidFill>
-                <a:srgbClr val="B5D4F4"/>
-              </a:solidFill>
-              <a:ln w="9525">
-                <a:solidFill>
-                  <a:srgbClr val="185FA5"/>
-                </a:solidFill>
-                <a:prstDash val="solid"/>
-              </a:ln>
-            </p:spPr>
-            <p:txBody>
-              <a:bodyPr/>
-              <a:lstStyle/>
-              <a:p>
-                <a:endParaRPr lang="en-US"/>
-              </a:p>
-            </p:txBody>
-          </p:sp>
-          <p:sp>
-            <p:nvSpPr>
-              <p:cNvPr id="198" name="Shape 16">
-                <a:extLst>
-                  <a:ext uri="{FF2B5EF4-FFF2-40B4-BE49-F238E27FC236}">
-                    <a16:creationId xmlns:a16="http://schemas.microsoft.com/office/drawing/2014/main" id="{D2C19647-14D9-9C5C-F394-CA0D7436E130}"/>
-                  </a:ext>
-                </a:extLst>
-              </p:cNvPr>
-              <p:cNvSpPr/>
-              <p:nvPr/>
-            </p:nvSpPr>
-            <p:spPr>
-              <a:xfrm>
-                <a:off x="1285646" y="1587398"/>
-                <a:ext cx="80467" cy="80467"/>
-              </a:xfrm>
-              <a:prstGeom prst="ellipse">
-                <a:avLst/>
-              </a:prstGeom>
-              <a:solidFill>
-                <a:srgbClr val="185FA5">
-                  <a:alpha val="50000"/>
-                </a:srgbClr>
-              </a:solidFill>
-              <a:ln/>
-            </p:spPr>
-            <p:txBody>
-              <a:bodyPr/>
-              <a:lstStyle/>
-              <a:p>
-                <a:endParaRPr lang="en-US"/>
-              </a:p>
-            </p:txBody>
-          </p:sp>
-        </p:grpSp>
-        <p:grpSp>
-          <p:nvGrpSpPr>
-            <p:cNvPr id="182" name="Group 181">
-              <a:extLst>
-                <a:ext uri="{FF2B5EF4-FFF2-40B4-BE49-F238E27FC236}">
-                  <a16:creationId xmlns:a16="http://schemas.microsoft.com/office/drawing/2014/main" id="{BDF35263-3316-E2EC-5864-51E307061995}"/>
-                </a:ext>
-              </a:extLst>
-            </p:cNvPr>
-            <p:cNvGrpSpPr/>
-            <p:nvPr/>
-          </p:nvGrpSpPr>
-          <p:grpSpPr>
-            <a:xfrm>
-              <a:off x="1874520" y="1444752"/>
-              <a:ext cx="182880" cy="182880"/>
-              <a:chOff x="1874520" y="1444752"/>
-              <a:chExt cx="182880" cy="182880"/>
-            </a:xfrm>
-          </p:grpSpPr>
-          <p:sp>
-            <p:nvSpPr>
-              <p:cNvPr id="195" name="Shape 23">
-                <a:extLst>
-                  <a:ext uri="{FF2B5EF4-FFF2-40B4-BE49-F238E27FC236}">
-                    <a16:creationId xmlns:a16="http://schemas.microsoft.com/office/drawing/2014/main" id="{2FC188F4-E3EB-B977-FD8E-FD0B960DF322}"/>
-                  </a:ext>
-                </a:extLst>
-              </p:cNvPr>
-              <p:cNvSpPr/>
-              <p:nvPr/>
-            </p:nvSpPr>
-            <p:spPr>
-              <a:xfrm>
-                <a:off x="1874520" y="1444752"/>
-                <a:ext cx="182880" cy="182880"/>
-              </a:xfrm>
-              <a:prstGeom prst="ellipse">
-                <a:avLst/>
-              </a:prstGeom>
-              <a:solidFill>
-                <a:srgbClr val="F0997B"/>
-              </a:solidFill>
-              <a:ln w="9525">
-                <a:solidFill>
-                  <a:srgbClr val="993C1D"/>
-                </a:solidFill>
-                <a:prstDash val="solid"/>
-              </a:ln>
-            </p:spPr>
-            <p:txBody>
-              <a:bodyPr/>
-              <a:lstStyle/>
-              <a:p>
-                <a:endParaRPr lang="en-US"/>
-              </a:p>
-            </p:txBody>
-          </p:sp>
-          <p:sp>
-            <p:nvSpPr>
-              <p:cNvPr id="196" name="Shape 24">
-                <a:extLst>
-                  <a:ext uri="{FF2B5EF4-FFF2-40B4-BE49-F238E27FC236}">
-                    <a16:creationId xmlns:a16="http://schemas.microsoft.com/office/drawing/2014/main" id="{D2BAE638-02E0-944F-0446-C4E489AEE08F}"/>
-                  </a:ext>
-                </a:extLst>
-              </p:cNvPr>
-              <p:cNvSpPr/>
-              <p:nvPr/>
-            </p:nvSpPr>
-            <p:spPr>
-              <a:xfrm>
-                <a:off x="1929384" y="1499616"/>
-                <a:ext cx="73152" cy="73152"/>
-              </a:xfrm>
-              <a:prstGeom prst="ellipse">
-                <a:avLst/>
-              </a:prstGeom>
-              <a:solidFill>
-                <a:srgbClr val="993C1D">
-                  <a:alpha val="50000"/>
-                </a:srgbClr>
-              </a:solidFill>
-              <a:ln/>
-            </p:spPr>
-            <p:txBody>
-              <a:bodyPr/>
-              <a:lstStyle/>
-              <a:p>
-                <a:endParaRPr lang="en-US"/>
-              </a:p>
-            </p:txBody>
-          </p:sp>
-        </p:grpSp>
-        <p:grpSp>
-          <p:nvGrpSpPr>
-            <p:cNvPr id="183" name="Group 182">
-              <a:extLst>
-                <a:ext uri="{FF2B5EF4-FFF2-40B4-BE49-F238E27FC236}">
-                  <a16:creationId xmlns:a16="http://schemas.microsoft.com/office/drawing/2014/main" id="{822DFE3A-6B91-7EB9-A8D6-111FD5DDED43}"/>
-                </a:ext>
-              </a:extLst>
-            </p:cNvPr>
-            <p:cNvGrpSpPr/>
-            <p:nvPr/>
-          </p:nvGrpSpPr>
-          <p:grpSpPr>
-            <a:xfrm>
-              <a:off x="978195" y="1975612"/>
-              <a:ext cx="201168" cy="201168"/>
-              <a:chOff x="1225296" y="1527048"/>
-              <a:chExt cx="201168" cy="201168"/>
-            </a:xfrm>
-          </p:grpSpPr>
-          <p:sp>
-            <p:nvSpPr>
-              <p:cNvPr id="193" name="Shape 15">
-                <a:extLst>
-                  <a:ext uri="{FF2B5EF4-FFF2-40B4-BE49-F238E27FC236}">
-                    <a16:creationId xmlns:a16="http://schemas.microsoft.com/office/drawing/2014/main" id="{9BFFD452-3B67-F629-951E-75D9239CE0D6}"/>
-                  </a:ext>
-                </a:extLst>
-              </p:cNvPr>
-              <p:cNvSpPr/>
-              <p:nvPr/>
-            </p:nvSpPr>
-            <p:spPr>
-              <a:xfrm>
-                <a:off x="1225296" y="1527048"/>
-                <a:ext cx="201168" cy="201168"/>
-              </a:xfrm>
-              <a:prstGeom prst="ellipse">
-                <a:avLst/>
-              </a:prstGeom>
-              <a:solidFill>
-                <a:srgbClr val="B5D4F4"/>
-              </a:solidFill>
-              <a:ln w="9525">
-                <a:solidFill>
-                  <a:srgbClr val="185FA5"/>
-                </a:solidFill>
-                <a:prstDash val="solid"/>
-              </a:ln>
-            </p:spPr>
-            <p:txBody>
-              <a:bodyPr/>
-              <a:lstStyle/>
-              <a:p>
-                <a:endParaRPr lang="en-US"/>
-              </a:p>
-            </p:txBody>
-          </p:sp>
-          <p:sp>
-            <p:nvSpPr>
-              <p:cNvPr id="194" name="Shape 16">
-                <a:extLst>
-                  <a:ext uri="{FF2B5EF4-FFF2-40B4-BE49-F238E27FC236}">
-                    <a16:creationId xmlns:a16="http://schemas.microsoft.com/office/drawing/2014/main" id="{71B2F20C-7CE1-9E54-48F8-071E8AAF8B99}"/>
-                  </a:ext>
-                </a:extLst>
-              </p:cNvPr>
-              <p:cNvSpPr/>
-              <p:nvPr/>
-            </p:nvSpPr>
-            <p:spPr>
-              <a:xfrm>
-                <a:off x="1285646" y="1587398"/>
-                <a:ext cx="80467" cy="80467"/>
-              </a:xfrm>
-              <a:prstGeom prst="ellipse">
-                <a:avLst/>
-              </a:prstGeom>
-              <a:solidFill>
-                <a:srgbClr val="185FA5">
-                  <a:alpha val="50000"/>
-                </a:srgbClr>
-              </a:solidFill>
-              <a:ln/>
-            </p:spPr>
-            <p:txBody>
-              <a:bodyPr/>
-              <a:lstStyle/>
-              <a:p>
-                <a:endParaRPr lang="en-US"/>
-              </a:p>
-            </p:txBody>
-          </p:sp>
-        </p:grpSp>
-        <p:grpSp>
-          <p:nvGrpSpPr>
-            <p:cNvPr id="184" name="Group 183">
-              <a:extLst>
-                <a:ext uri="{FF2B5EF4-FFF2-40B4-BE49-F238E27FC236}">
-                  <a16:creationId xmlns:a16="http://schemas.microsoft.com/office/drawing/2014/main" id="{FF9757E9-AB25-6690-DE86-3ED827D341E5}"/>
-                </a:ext>
-              </a:extLst>
-            </p:cNvPr>
-            <p:cNvGrpSpPr/>
-            <p:nvPr/>
-          </p:nvGrpSpPr>
-          <p:grpSpPr>
-            <a:xfrm>
-              <a:off x="871880" y="1632056"/>
-              <a:ext cx="182880" cy="182880"/>
-              <a:chOff x="1874520" y="1444752"/>
-              <a:chExt cx="182880" cy="182880"/>
-            </a:xfrm>
-          </p:grpSpPr>
-          <p:sp>
-            <p:nvSpPr>
-              <p:cNvPr id="191" name="Shape 23">
-                <a:extLst>
-                  <a:ext uri="{FF2B5EF4-FFF2-40B4-BE49-F238E27FC236}">
-                    <a16:creationId xmlns:a16="http://schemas.microsoft.com/office/drawing/2014/main" id="{3CF5D1E6-BC75-53F0-E1C3-1110AA6288EB}"/>
-                  </a:ext>
-                </a:extLst>
-              </p:cNvPr>
-              <p:cNvSpPr/>
-              <p:nvPr/>
-            </p:nvSpPr>
-            <p:spPr>
-              <a:xfrm>
-                <a:off x="1874520" y="1444752"/>
-                <a:ext cx="182880" cy="182880"/>
-              </a:xfrm>
-              <a:prstGeom prst="ellipse">
-                <a:avLst/>
-              </a:prstGeom>
-              <a:solidFill>
-                <a:srgbClr val="F0997B"/>
-              </a:solidFill>
-              <a:ln w="9525">
-                <a:solidFill>
-                  <a:srgbClr val="993C1D"/>
-                </a:solidFill>
-                <a:prstDash val="solid"/>
-              </a:ln>
-            </p:spPr>
-            <p:txBody>
-              <a:bodyPr/>
-              <a:lstStyle/>
-              <a:p>
-                <a:endParaRPr lang="en-US"/>
-              </a:p>
-            </p:txBody>
-          </p:sp>
-          <p:sp>
-            <p:nvSpPr>
-              <p:cNvPr id="192" name="Shape 24">
-                <a:extLst>
-                  <a:ext uri="{FF2B5EF4-FFF2-40B4-BE49-F238E27FC236}">
-                    <a16:creationId xmlns:a16="http://schemas.microsoft.com/office/drawing/2014/main" id="{DE475FB9-AEBF-BF0D-22BD-D290E48797D9}"/>
-                  </a:ext>
-                </a:extLst>
-              </p:cNvPr>
-              <p:cNvSpPr/>
-              <p:nvPr/>
-            </p:nvSpPr>
-            <p:spPr>
-              <a:xfrm>
-                <a:off x="1929384" y="1499616"/>
-                <a:ext cx="73152" cy="73152"/>
-              </a:xfrm>
-              <a:prstGeom prst="ellipse">
-                <a:avLst/>
-              </a:prstGeom>
-              <a:solidFill>
-                <a:srgbClr val="993C1D">
-                  <a:alpha val="50000"/>
-                </a:srgbClr>
-              </a:solidFill>
-              <a:ln/>
-            </p:spPr>
-            <p:txBody>
-              <a:bodyPr/>
-              <a:lstStyle/>
-              <a:p>
-                <a:endParaRPr lang="en-US"/>
-              </a:p>
-            </p:txBody>
-          </p:sp>
-        </p:grpSp>
-        <p:grpSp>
-          <p:nvGrpSpPr>
-            <p:cNvPr id="185" name="Group 184">
-              <a:extLst>
-                <a:ext uri="{FF2B5EF4-FFF2-40B4-BE49-F238E27FC236}">
-                  <a16:creationId xmlns:a16="http://schemas.microsoft.com/office/drawing/2014/main" id="{67BB5287-5943-B122-44A5-10A426AD5EEE}"/>
-                </a:ext>
-              </a:extLst>
-            </p:cNvPr>
-            <p:cNvGrpSpPr/>
-            <p:nvPr/>
-          </p:nvGrpSpPr>
-          <p:grpSpPr>
-            <a:xfrm>
-              <a:off x="1447471" y="2005366"/>
-              <a:ext cx="201168" cy="201168"/>
-              <a:chOff x="1225296" y="1527048"/>
-              <a:chExt cx="201168" cy="201168"/>
-            </a:xfrm>
-          </p:grpSpPr>
-          <p:sp>
-            <p:nvSpPr>
-              <p:cNvPr id="189" name="Shape 15">
-                <a:extLst>
-                  <a:ext uri="{FF2B5EF4-FFF2-40B4-BE49-F238E27FC236}">
-                    <a16:creationId xmlns:a16="http://schemas.microsoft.com/office/drawing/2014/main" id="{5A6F4697-E6DA-BA00-B86B-4172AC0B1EF6}"/>
-                  </a:ext>
-                </a:extLst>
-              </p:cNvPr>
-              <p:cNvSpPr/>
-              <p:nvPr/>
-            </p:nvSpPr>
-            <p:spPr>
-              <a:xfrm>
-                <a:off x="1225296" y="1527048"/>
-                <a:ext cx="201168" cy="201168"/>
-              </a:xfrm>
-              <a:prstGeom prst="ellipse">
-                <a:avLst/>
-              </a:prstGeom>
-              <a:solidFill>
-                <a:srgbClr val="B5D4F4"/>
-              </a:solidFill>
-              <a:ln w="9525">
-                <a:solidFill>
-                  <a:srgbClr val="185FA5"/>
-                </a:solidFill>
-                <a:prstDash val="solid"/>
-              </a:ln>
-            </p:spPr>
-            <p:txBody>
-              <a:bodyPr/>
-              <a:lstStyle/>
-              <a:p>
-                <a:endParaRPr lang="en-US"/>
-              </a:p>
-            </p:txBody>
-          </p:sp>
-          <p:sp>
-            <p:nvSpPr>
-              <p:cNvPr id="190" name="Shape 16">
-                <a:extLst>
-                  <a:ext uri="{FF2B5EF4-FFF2-40B4-BE49-F238E27FC236}">
-                    <a16:creationId xmlns:a16="http://schemas.microsoft.com/office/drawing/2014/main" id="{00425469-EAAE-36EB-D8C6-82223CF22B77}"/>
-                  </a:ext>
-                </a:extLst>
-              </p:cNvPr>
-              <p:cNvSpPr/>
-              <p:nvPr/>
-            </p:nvSpPr>
-            <p:spPr>
-              <a:xfrm>
-                <a:off x="1285646" y="1587398"/>
-                <a:ext cx="80467" cy="80467"/>
-              </a:xfrm>
-              <a:prstGeom prst="ellipse">
-                <a:avLst/>
-              </a:prstGeom>
-              <a:solidFill>
-                <a:srgbClr val="185FA5">
-                  <a:alpha val="50000"/>
-                </a:srgbClr>
-              </a:solidFill>
-              <a:ln/>
-            </p:spPr>
-            <p:txBody>
-              <a:bodyPr/>
-              <a:lstStyle/>
-              <a:p>
-                <a:endParaRPr lang="en-US"/>
-              </a:p>
-            </p:txBody>
-          </p:sp>
-        </p:grpSp>
-        <p:grpSp>
-          <p:nvGrpSpPr>
-            <p:cNvPr id="186" name="Group 185">
-              <a:extLst>
-                <a:ext uri="{FF2B5EF4-FFF2-40B4-BE49-F238E27FC236}">
-                  <a16:creationId xmlns:a16="http://schemas.microsoft.com/office/drawing/2014/main" id="{7A9A02E8-E551-ED6F-183B-B2760C3E9589}"/>
-                </a:ext>
-              </a:extLst>
-            </p:cNvPr>
-            <p:cNvGrpSpPr/>
-            <p:nvPr/>
-          </p:nvGrpSpPr>
-          <p:grpSpPr>
-            <a:xfrm>
-              <a:off x="2002412" y="1913763"/>
-              <a:ext cx="201168" cy="201168"/>
-              <a:chOff x="1225296" y="1527048"/>
-              <a:chExt cx="201168" cy="201168"/>
-            </a:xfrm>
-          </p:grpSpPr>
-          <p:sp>
-            <p:nvSpPr>
-              <p:cNvPr id="187" name="Shape 15">
-                <a:extLst>
-                  <a:ext uri="{FF2B5EF4-FFF2-40B4-BE49-F238E27FC236}">
-                    <a16:creationId xmlns:a16="http://schemas.microsoft.com/office/drawing/2014/main" id="{0E3D6681-0DDA-9D67-D6A0-B74F9A4FA48F}"/>
-                  </a:ext>
-                </a:extLst>
-              </p:cNvPr>
-              <p:cNvSpPr/>
-              <p:nvPr/>
-            </p:nvSpPr>
-            <p:spPr>
-              <a:xfrm>
-                <a:off x="1225296" y="1527048"/>
-                <a:ext cx="201168" cy="201168"/>
-              </a:xfrm>
-              <a:prstGeom prst="ellipse">
-                <a:avLst/>
-              </a:prstGeom>
-              <a:solidFill>
-                <a:srgbClr val="B5D4F4"/>
-              </a:solidFill>
-              <a:ln w="9525">
-                <a:solidFill>
-                  <a:srgbClr val="185FA5"/>
-                </a:solidFill>
-                <a:prstDash val="solid"/>
-              </a:ln>
-            </p:spPr>
-            <p:txBody>
-              <a:bodyPr/>
-              <a:lstStyle/>
-              <a:p>
-                <a:endParaRPr lang="en-US"/>
-              </a:p>
-            </p:txBody>
-          </p:sp>
-          <p:sp>
-            <p:nvSpPr>
-              <p:cNvPr id="188" name="Shape 16">
-                <a:extLst>
-                  <a:ext uri="{FF2B5EF4-FFF2-40B4-BE49-F238E27FC236}">
-                    <a16:creationId xmlns:a16="http://schemas.microsoft.com/office/drawing/2014/main" id="{4DAAEB6D-E162-D8AB-A8DE-8232F95CC4DE}"/>
-                  </a:ext>
-                </a:extLst>
-              </p:cNvPr>
-              <p:cNvSpPr/>
-              <p:nvPr/>
-            </p:nvSpPr>
-            <p:spPr>
-              <a:xfrm>
-                <a:off x="1285646" y="1587398"/>
-                <a:ext cx="80467" cy="80467"/>
-              </a:xfrm>
-              <a:prstGeom prst="ellipse">
-                <a:avLst/>
-              </a:prstGeom>
-              <a:solidFill>
-                <a:srgbClr val="185FA5">
-                  <a:alpha val="50000"/>
-                </a:srgbClr>
-              </a:solidFill>
-              <a:ln/>
-            </p:spPr>
-            <p:txBody>
-              <a:bodyPr/>
-              <a:lstStyle/>
-              <a:p>
-                <a:endParaRPr lang="en-US"/>
-              </a:p>
-            </p:txBody>
-          </p:sp>
-        </p:grpSp>
-      </p:grpSp>
-      <p:grpSp>
-        <p:nvGrpSpPr>
-          <p:cNvPr id="200" name="Group 199">
-            <a:extLst>
-              <a:ext uri="{FF2B5EF4-FFF2-40B4-BE49-F238E27FC236}">
-                <a16:creationId xmlns:a16="http://schemas.microsoft.com/office/drawing/2014/main" id="{82C3B962-63E8-600E-DDFB-B86FADB8436D}"/>
-              </a:ext>
-            </a:extLst>
-          </p:cNvPr>
-          <p:cNvGrpSpPr/>
-          <p:nvPr/>
-        </p:nvGrpSpPr>
-        <p:grpSpPr>
-          <a:xfrm>
-            <a:off x="3807706" y="1870822"/>
-            <a:ext cx="1704802" cy="1008947"/>
-            <a:chOff x="5512572" y="834495"/>
-            <a:chExt cx="2219568" cy="1303224"/>
-          </a:xfrm>
-        </p:grpSpPr>
-        <p:grpSp>
-          <p:nvGrpSpPr>
-            <p:cNvPr id="201" name="Group 200">
-              <a:extLst>
-                <a:ext uri="{FF2B5EF4-FFF2-40B4-BE49-F238E27FC236}">
-                  <a16:creationId xmlns:a16="http://schemas.microsoft.com/office/drawing/2014/main" id="{DDC5F1F8-206F-67C7-D962-2CDC1EAEE680}"/>
-                </a:ext>
-              </a:extLst>
-            </p:cNvPr>
-            <p:cNvGrpSpPr/>
-            <p:nvPr/>
-          </p:nvGrpSpPr>
-          <p:grpSpPr>
-            <a:xfrm>
-              <a:off x="7019838" y="1167407"/>
-              <a:ext cx="179025" cy="162648"/>
+              <a:off x="7019815" y="1167405"/>
+              <a:ext cx="179024" cy="162648"/>
               <a:chOff x="7067843" y="717976"/>
               <a:chExt cx="201168" cy="206147"/>
             </a:xfrm>
@@ -2536,7 +1960,7 @@
               <p:cNvPr id="307" name="Shape 71">
                 <a:extLst>
                   <a:ext uri="{FF2B5EF4-FFF2-40B4-BE49-F238E27FC236}">
-                    <a16:creationId xmlns:a16="http://schemas.microsoft.com/office/drawing/2014/main" id="{F1AE5994-4DC1-CE0D-CD77-E9115D0A6958}"/>
+                    <a16:creationId xmlns:a16="http://schemas.microsoft.com/office/drawing/2014/main" id="{D25B75D0-AF82-24F4-36C5-3EED9A9F7006}"/>
                   </a:ext>
                 </a:extLst>
               </p:cNvPr>
@@ -2552,11 +1976,11 @@
                 <a:avLst/>
               </a:prstGeom>
               <a:solidFill>
-                <a:srgbClr val="FBEAF0"/>
+                <a:srgbClr val="FDEAE8"/>
               </a:solidFill>
               <a:ln w="22225">
                 <a:solidFill>
-                  <a:srgbClr val="993556"/>
+                  <a:srgbClr val="E56B5D"/>
                 </a:solidFill>
                 <a:prstDash val="solid"/>
               </a:ln>
@@ -2574,7 +1998,7 @@
               <p:cNvPr id="308" name="Shape 72">
                 <a:extLst>
                   <a:ext uri="{FF2B5EF4-FFF2-40B4-BE49-F238E27FC236}">
-                    <a16:creationId xmlns:a16="http://schemas.microsoft.com/office/drawing/2014/main" id="{3101C30B-FDB7-AF77-E18A-F7D02C3D4DB1}"/>
+                    <a16:creationId xmlns:a16="http://schemas.microsoft.com/office/drawing/2014/main" id="{D7D85E2C-3AAD-A0C6-FD13-BA763153B426}"/>
                   </a:ext>
                 </a:extLst>
               </p:cNvPr>
@@ -2590,7 +2014,7 @@
                 <a:avLst/>
               </a:prstGeom>
               <a:solidFill>
-                <a:srgbClr val="993556">
+                <a:srgbClr val="E56B5D">
                   <a:alpha val="50000"/>
                 </a:srgbClr>
               </a:solidFill>
@@ -2610,7 +2034,7 @@
             <p:cNvPr id="202" name="TextBox 201">
               <a:extLst>
                 <a:ext uri="{FF2B5EF4-FFF2-40B4-BE49-F238E27FC236}">
-                  <a16:creationId xmlns:a16="http://schemas.microsoft.com/office/drawing/2014/main" id="{3BAB490D-C246-6336-D359-E170AFFA2D82}"/>
+                  <a16:creationId xmlns:a16="http://schemas.microsoft.com/office/drawing/2014/main" id="{9C12D214-EF19-781C-924D-BE45F2B81560}"/>
                 </a:ext>
               </a:extLst>
             </p:cNvPr>
@@ -2619,8 +2043,8 @@
           </p:nvSpPr>
           <p:spPr>
             <a:xfrm>
-              <a:off x="6165693" y="834495"/>
-              <a:ext cx="1566447" cy="337913"/>
+              <a:off x="6165675" y="834494"/>
+              <a:ext cx="1566443" cy="337913"/>
             </a:xfrm>
             <a:prstGeom prst="rect">
               <a:avLst/>
@@ -2662,7 +2086,7 @@
             <p:cNvPr id="203" name="Curved Connector 202">
               <a:extLst>
                 <a:ext uri="{FF2B5EF4-FFF2-40B4-BE49-F238E27FC236}">
-                  <a16:creationId xmlns:a16="http://schemas.microsoft.com/office/drawing/2014/main" id="{9CD148C5-17AB-CC34-CCA3-0F6702E49D33}"/>
+                  <a16:creationId xmlns:a16="http://schemas.microsoft.com/office/drawing/2014/main" id="{B3A2A498-19F6-E569-DC08-BF903D8203ED}"/>
                 </a:ext>
               </a:extLst>
             </p:cNvPr>
@@ -2673,7 +2097,7 @@
           </p:nvCxnSpPr>
           <p:spPr>
             <a:xfrm rot="5400000" flipH="1" flipV="1">
-              <a:off x="6746370" y="1200193"/>
+              <a:off x="6746350" y="1200191"/>
               <a:ext cx="162647" cy="242445"/>
             </a:xfrm>
             <a:prstGeom prst="curvedConnector2">
@@ -2710,7 +2134,7 @@
             <p:cNvPr id="204" name="Group 203">
               <a:extLst>
                 <a:ext uri="{FF2B5EF4-FFF2-40B4-BE49-F238E27FC236}">
-                  <a16:creationId xmlns:a16="http://schemas.microsoft.com/office/drawing/2014/main" id="{9C578FD7-4008-D2F6-45B3-A8036EB76E9C}"/>
+                  <a16:creationId xmlns:a16="http://schemas.microsoft.com/office/drawing/2014/main" id="{4BCFDC75-B22C-B901-2FD4-58DAEEC78054}"/>
                 </a:ext>
               </a:extLst>
             </p:cNvPr>
@@ -2719,7 +2143,7 @@
           </p:nvGrpSpPr>
           <p:grpSpPr>
             <a:xfrm>
-              <a:off x="6209427" y="1482458"/>
+              <a:off x="6209408" y="1482455"/>
               <a:ext cx="186961" cy="186850"/>
               <a:chOff x="1225296" y="1527048"/>
               <a:chExt cx="201168" cy="201168"/>
@@ -2730,7 +2154,7 @@
               <p:cNvPr id="305" name="Shape 15">
                 <a:extLst>
                   <a:ext uri="{FF2B5EF4-FFF2-40B4-BE49-F238E27FC236}">
-                    <a16:creationId xmlns:a16="http://schemas.microsoft.com/office/drawing/2014/main" id="{176BA3BF-FABD-C3BC-2D98-B1548FE0B909}"/>
+                    <a16:creationId xmlns:a16="http://schemas.microsoft.com/office/drawing/2014/main" id="{20B6EAE3-E220-E2E7-B5D1-42413B5ED244}"/>
                   </a:ext>
                 </a:extLst>
               </p:cNvPr>
@@ -2746,11 +2170,11 @@
                 <a:avLst/>
               </a:prstGeom>
               <a:solidFill>
-                <a:srgbClr val="B5D4F4"/>
+                <a:srgbClr val="E8E6FF"/>
               </a:solidFill>
               <a:ln w="9525">
                 <a:solidFill>
-                  <a:srgbClr val="185FA5"/>
+                  <a:srgbClr val="0D0887"/>
                 </a:solidFill>
                 <a:prstDash val="solid"/>
               </a:ln>
@@ -2768,7 +2192,7 @@
               <p:cNvPr id="306" name="Shape 16">
                 <a:extLst>
                   <a:ext uri="{FF2B5EF4-FFF2-40B4-BE49-F238E27FC236}">
-                    <a16:creationId xmlns:a16="http://schemas.microsoft.com/office/drawing/2014/main" id="{3364FDB0-24BE-FDD8-4718-9C1B317A289C}"/>
+                    <a16:creationId xmlns:a16="http://schemas.microsoft.com/office/drawing/2014/main" id="{F706DDBC-C32F-AED1-EC17-BAAF17A6810D}"/>
                   </a:ext>
                 </a:extLst>
               </p:cNvPr>
@@ -2784,7 +2208,7 @@
                 <a:avLst/>
               </a:prstGeom>
               <a:solidFill>
-                <a:srgbClr val="185FA5">
+                <a:srgbClr val="0D0887">
                   <a:alpha val="50000"/>
                 </a:srgbClr>
               </a:solidFill>
@@ -2804,7 +2228,7 @@
             <p:cNvPr id="205" name="Group 204">
               <a:extLst>
                 <a:ext uri="{FF2B5EF4-FFF2-40B4-BE49-F238E27FC236}">
-                  <a16:creationId xmlns:a16="http://schemas.microsoft.com/office/drawing/2014/main" id="{765800D8-AAA2-12F4-4E96-9218B83591AC}"/>
+                  <a16:creationId xmlns:a16="http://schemas.microsoft.com/office/drawing/2014/main" id="{635AA92F-9707-7ECD-716F-3F43B5CEB823}"/>
                 </a:ext>
               </a:extLst>
             </p:cNvPr>
@@ -2813,7 +2237,7 @@
           </p:nvGrpSpPr>
           <p:grpSpPr>
             <a:xfrm>
-              <a:off x="6587620" y="1421814"/>
+              <a:off x="6587600" y="1421812"/>
               <a:ext cx="169964" cy="169864"/>
               <a:chOff x="1874520" y="1444752"/>
               <a:chExt cx="182880" cy="182880"/>
@@ -2824,7 +2248,7 @@
               <p:cNvPr id="303" name="Shape 23">
                 <a:extLst>
                   <a:ext uri="{FF2B5EF4-FFF2-40B4-BE49-F238E27FC236}">
-                    <a16:creationId xmlns:a16="http://schemas.microsoft.com/office/drawing/2014/main" id="{A1AD1450-5FDA-7C1E-BAE5-C0023EA1BF67}"/>
+                    <a16:creationId xmlns:a16="http://schemas.microsoft.com/office/drawing/2014/main" id="{BB02CD22-86E9-EA70-2B6F-EEE5071AA9CA}"/>
                   </a:ext>
                 </a:extLst>
               </p:cNvPr>
@@ -2840,11 +2264,11 @@
                 <a:avLst/>
               </a:prstGeom>
               <a:solidFill>
-                <a:srgbClr val="F0997B"/>
+                <a:srgbClr val="FDEBD0"/>
               </a:solidFill>
               <a:ln w="9525">
                 <a:solidFill>
-                  <a:srgbClr val="993C1D"/>
+                  <a:srgbClr val="F89441"/>
                 </a:solidFill>
                 <a:prstDash val="solid"/>
               </a:ln>
@@ -2862,7 +2286,7 @@
               <p:cNvPr id="304" name="Shape 24">
                 <a:extLst>
                   <a:ext uri="{FF2B5EF4-FFF2-40B4-BE49-F238E27FC236}">
-                    <a16:creationId xmlns:a16="http://schemas.microsoft.com/office/drawing/2014/main" id="{A9A1A06B-0E01-CD55-2584-95DAC4ABE74A}"/>
+                    <a16:creationId xmlns:a16="http://schemas.microsoft.com/office/drawing/2014/main" id="{FFDBA626-57E5-A2AF-4C8D-7670A8A1A75B}"/>
                   </a:ext>
                 </a:extLst>
               </p:cNvPr>
@@ -2878,7 +2302,7 @@
                 <a:avLst/>
               </a:prstGeom>
               <a:solidFill>
-                <a:srgbClr val="993C1D">
+                <a:srgbClr val="F89441">
                   <a:alpha val="50000"/>
                 </a:srgbClr>
               </a:solidFill>
@@ -2898,7 +2322,7 @@
             <p:cNvPr id="206" name="Group 205">
               <a:extLst>
                 <a:ext uri="{FF2B5EF4-FFF2-40B4-BE49-F238E27FC236}">
-                  <a16:creationId xmlns:a16="http://schemas.microsoft.com/office/drawing/2014/main" id="{93078588-A683-B090-BCE1-440873F96EFE}"/>
+                  <a16:creationId xmlns:a16="http://schemas.microsoft.com/office/drawing/2014/main" id="{FF691D7E-3735-6F52-080E-B940B95F7461}"/>
                 </a:ext>
               </a:extLst>
             </p:cNvPr>
@@ -2907,7 +2331,7 @@
           </p:nvGrpSpPr>
           <p:grpSpPr>
             <a:xfrm>
-              <a:off x="5754596" y="1914891"/>
+              <a:off x="5754578" y="1914888"/>
               <a:ext cx="186961" cy="186850"/>
               <a:chOff x="1225296" y="1527048"/>
               <a:chExt cx="201168" cy="201168"/>
@@ -2918,7 +2342,7 @@
               <p:cNvPr id="301" name="Shape 15">
                 <a:extLst>
                   <a:ext uri="{FF2B5EF4-FFF2-40B4-BE49-F238E27FC236}">
-                    <a16:creationId xmlns:a16="http://schemas.microsoft.com/office/drawing/2014/main" id="{E50CBFBF-0D11-6C1C-17A7-2BCD38996173}"/>
+                    <a16:creationId xmlns:a16="http://schemas.microsoft.com/office/drawing/2014/main" id="{AB6366CF-2F35-F998-0B57-0084768C3528}"/>
                   </a:ext>
                 </a:extLst>
               </p:cNvPr>
@@ -2934,11 +2358,11 @@
                 <a:avLst/>
               </a:prstGeom>
               <a:solidFill>
-                <a:srgbClr val="B5D4F4"/>
+                <a:srgbClr val="E8E6FF"/>
               </a:solidFill>
               <a:ln w="9525">
                 <a:solidFill>
-                  <a:srgbClr val="185FA5"/>
+                  <a:srgbClr val="0D0887"/>
                 </a:solidFill>
                 <a:prstDash val="solid"/>
               </a:ln>
@@ -2956,7 +2380,7 @@
               <p:cNvPr id="302" name="Shape 16">
                 <a:extLst>
                   <a:ext uri="{FF2B5EF4-FFF2-40B4-BE49-F238E27FC236}">
-                    <a16:creationId xmlns:a16="http://schemas.microsoft.com/office/drawing/2014/main" id="{08EF30B4-AFA2-E503-CECA-B156CA6162BE}"/>
+                    <a16:creationId xmlns:a16="http://schemas.microsoft.com/office/drawing/2014/main" id="{22EABC5F-013D-17E9-AA43-FE18DE577793}"/>
                   </a:ext>
                 </a:extLst>
               </p:cNvPr>
@@ -2972,7 +2396,7 @@
                 <a:avLst/>
               </a:prstGeom>
               <a:solidFill>
-                <a:srgbClr val="185FA5">
+                <a:srgbClr val="0D0887">
                   <a:alpha val="50000"/>
                 </a:srgbClr>
               </a:solidFill>
@@ -2992,7 +2416,7 @@
             <p:cNvPr id="207" name="Group 206">
               <a:extLst>
                 <a:ext uri="{FF2B5EF4-FFF2-40B4-BE49-F238E27FC236}">
-                  <a16:creationId xmlns:a16="http://schemas.microsoft.com/office/drawing/2014/main" id="{2466FBA2-3AC5-7BDB-042F-EEB8B39D6F9D}"/>
+                  <a16:creationId xmlns:a16="http://schemas.microsoft.com/office/drawing/2014/main" id="{12A64D69-0781-E8EA-1F59-85AF84E469AF}"/>
                 </a:ext>
               </a:extLst>
             </p:cNvPr>
@@ -3001,7 +2425,7 @@
           </p:nvGrpSpPr>
           <p:grpSpPr>
             <a:xfrm>
-              <a:off x="5512572" y="1636036"/>
+              <a:off x="5512556" y="1636033"/>
               <a:ext cx="169964" cy="169864"/>
               <a:chOff x="1874520" y="1444752"/>
               <a:chExt cx="182880" cy="182880"/>
@@ -3012,7 +2436,7 @@
               <p:cNvPr id="299" name="Shape 23">
                 <a:extLst>
                   <a:ext uri="{FF2B5EF4-FFF2-40B4-BE49-F238E27FC236}">
-                    <a16:creationId xmlns:a16="http://schemas.microsoft.com/office/drawing/2014/main" id="{7FD9A322-6180-C34C-5660-64656E7AA0E9}"/>
+                    <a16:creationId xmlns:a16="http://schemas.microsoft.com/office/drawing/2014/main" id="{2D205761-7F73-00B1-687D-006AFF1226EB}"/>
                   </a:ext>
                 </a:extLst>
               </p:cNvPr>
@@ -3028,11 +2452,11 @@
                 <a:avLst/>
               </a:prstGeom>
               <a:solidFill>
-                <a:srgbClr val="F0997B"/>
+                <a:srgbClr val="FDEBD0"/>
               </a:solidFill>
               <a:ln w="9525">
                 <a:solidFill>
-                  <a:srgbClr val="993C1D"/>
+                  <a:srgbClr val="F89441"/>
                 </a:solidFill>
                 <a:prstDash val="solid"/>
               </a:ln>
@@ -3050,7 +2474,7 @@
               <p:cNvPr id="300" name="Shape 24">
                 <a:extLst>
                   <a:ext uri="{FF2B5EF4-FFF2-40B4-BE49-F238E27FC236}">
-                    <a16:creationId xmlns:a16="http://schemas.microsoft.com/office/drawing/2014/main" id="{7A52ADC0-22EB-ADD3-11AE-9C84F3A8717E}"/>
+                    <a16:creationId xmlns:a16="http://schemas.microsoft.com/office/drawing/2014/main" id="{4A9259B1-4C68-84F1-78E1-F7EAA8F616B6}"/>
                   </a:ext>
                 </a:extLst>
               </p:cNvPr>
@@ -3066,7 +2490,7 @@
                 <a:avLst/>
               </a:prstGeom>
               <a:solidFill>
-                <a:srgbClr val="993C1D">
+                <a:srgbClr val="F89441">
                   <a:alpha val="50000"/>
                 </a:srgbClr>
               </a:solidFill>
@@ -3086,7 +2510,7 @@
             <p:cNvPr id="208" name="Group 207">
               <a:extLst>
                 <a:ext uri="{FF2B5EF4-FFF2-40B4-BE49-F238E27FC236}">
-                  <a16:creationId xmlns:a16="http://schemas.microsoft.com/office/drawing/2014/main" id="{9C3014CD-5EF0-2E8B-D611-4D3D6745F4C8}"/>
+                  <a16:creationId xmlns:a16="http://schemas.microsoft.com/office/drawing/2014/main" id="{2720BD8B-78F0-CEA8-B353-8C8D1BDE03F2}"/>
                 </a:ext>
               </a:extLst>
             </p:cNvPr>
@@ -3095,7 +2519,7 @@
           </p:nvGrpSpPr>
           <p:grpSpPr>
             <a:xfrm>
-              <a:off x="6291319" y="1950869"/>
+              <a:off x="6291301" y="1950866"/>
               <a:ext cx="186961" cy="186850"/>
               <a:chOff x="1225296" y="1527048"/>
               <a:chExt cx="201168" cy="201168"/>
@@ -3106,7 +2530,7 @@
               <p:cNvPr id="297" name="Shape 15">
                 <a:extLst>
                   <a:ext uri="{FF2B5EF4-FFF2-40B4-BE49-F238E27FC236}">
-                    <a16:creationId xmlns:a16="http://schemas.microsoft.com/office/drawing/2014/main" id="{FDF2EFC0-AE8D-3DDF-F814-7AE6B3625982}"/>
+                    <a16:creationId xmlns:a16="http://schemas.microsoft.com/office/drawing/2014/main" id="{D9B70BDF-4844-AACA-C9BC-2405860B6724}"/>
                   </a:ext>
                 </a:extLst>
               </p:cNvPr>
@@ -3122,11 +2546,11 @@
                 <a:avLst/>
               </a:prstGeom>
               <a:solidFill>
-                <a:srgbClr val="B5D4F4"/>
+                <a:srgbClr val="E8E6FF"/>
               </a:solidFill>
               <a:ln w="9525">
                 <a:solidFill>
-                  <a:srgbClr val="185FA5"/>
+                  <a:srgbClr val="0D0887"/>
                 </a:solidFill>
                 <a:prstDash val="solid"/>
               </a:ln>
@@ -3144,7 +2568,7 @@
               <p:cNvPr id="298" name="Shape 16">
                 <a:extLst>
                   <a:ext uri="{FF2B5EF4-FFF2-40B4-BE49-F238E27FC236}">
-                    <a16:creationId xmlns:a16="http://schemas.microsoft.com/office/drawing/2014/main" id="{2650C282-EC03-9977-9E9F-6F75BFD9C44A}"/>
+                    <a16:creationId xmlns:a16="http://schemas.microsoft.com/office/drawing/2014/main" id="{B4FC933E-DD5F-3F67-3910-AEE12A6D120E}"/>
                   </a:ext>
                 </a:extLst>
               </p:cNvPr>
@@ -3160,7 +2584,7 @@
                 <a:avLst/>
               </a:prstGeom>
               <a:solidFill>
-                <a:srgbClr val="185FA5">
+                <a:srgbClr val="0D0887">
                   <a:alpha val="50000"/>
                 </a:srgbClr>
               </a:solidFill>
@@ -3180,7 +2604,7 @@
             <p:cNvPr id="209" name="Group 208">
               <a:extLst>
                 <a:ext uri="{FF2B5EF4-FFF2-40B4-BE49-F238E27FC236}">
-                  <a16:creationId xmlns:a16="http://schemas.microsoft.com/office/drawing/2014/main" id="{1B072F60-D0E0-F03E-044A-3F8E1B6F9B77}"/>
+                  <a16:creationId xmlns:a16="http://schemas.microsoft.com/office/drawing/2014/main" id="{CA1BF2F4-F732-7750-74C3-9BD6CDB2CADC}"/>
                 </a:ext>
               </a:extLst>
             </p:cNvPr>
@@ -3189,7 +2613,7 @@
           </p:nvGrpSpPr>
           <p:grpSpPr>
             <a:xfrm>
-              <a:off x="6706480" y="1857444"/>
+              <a:off x="6706459" y="1857441"/>
               <a:ext cx="186961" cy="186850"/>
               <a:chOff x="1225296" y="1527048"/>
               <a:chExt cx="201168" cy="201168"/>
@@ -3200,7 +2624,7 @@
               <p:cNvPr id="295" name="Shape 15">
                 <a:extLst>
                   <a:ext uri="{FF2B5EF4-FFF2-40B4-BE49-F238E27FC236}">
-                    <a16:creationId xmlns:a16="http://schemas.microsoft.com/office/drawing/2014/main" id="{2738BBE6-CA8C-96E3-D620-D63B44B79DC5}"/>
+                    <a16:creationId xmlns:a16="http://schemas.microsoft.com/office/drawing/2014/main" id="{523598E4-5EA1-64B3-FAED-E60ADD22B0C1}"/>
                   </a:ext>
                 </a:extLst>
               </p:cNvPr>
@@ -3216,11 +2640,11 @@
                 <a:avLst/>
               </a:prstGeom>
               <a:solidFill>
-                <a:srgbClr val="B5D4F4"/>
+                <a:srgbClr val="E8E6FF"/>
               </a:solidFill>
               <a:ln w="9525">
                 <a:solidFill>
-                  <a:srgbClr val="185FA5"/>
+                  <a:srgbClr val="0D0887"/>
                 </a:solidFill>
                 <a:prstDash val="solid"/>
               </a:ln>
@@ -3238,7 +2662,7 @@
               <p:cNvPr id="296" name="Shape 16">
                 <a:extLst>
                   <a:ext uri="{FF2B5EF4-FFF2-40B4-BE49-F238E27FC236}">
-                    <a16:creationId xmlns:a16="http://schemas.microsoft.com/office/drawing/2014/main" id="{DB8F73C0-BF58-51BE-74C3-031696A9479C}"/>
+                    <a16:creationId xmlns:a16="http://schemas.microsoft.com/office/drawing/2014/main" id="{32A185A9-7027-B10C-5BC9-A2E61A8D9E2F}"/>
                   </a:ext>
                 </a:extLst>
               </p:cNvPr>
@@ -3254,7 +2678,7 @@
                 <a:avLst/>
               </a:prstGeom>
               <a:solidFill>
-                <a:srgbClr val="185FA5">
+                <a:srgbClr val="0D0887">
                   <a:alpha val="50000"/>
                 </a:srgbClr>
               </a:solidFill>
@@ -3274,7 +2698,7 @@
             <p:cNvPr id="210" name="Group 209">
               <a:extLst>
                 <a:ext uri="{FF2B5EF4-FFF2-40B4-BE49-F238E27FC236}">
-                  <a16:creationId xmlns:a16="http://schemas.microsoft.com/office/drawing/2014/main" id="{0584FA94-E72E-FFEE-38EE-3A7F0B621C1B}"/>
+                  <a16:creationId xmlns:a16="http://schemas.microsoft.com/office/drawing/2014/main" id="{67F748D4-7CD1-7F86-522C-47EB046C1409}"/>
                 </a:ext>
               </a:extLst>
             </p:cNvPr>
@@ -3283,7 +2707,7 @@
           </p:nvGrpSpPr>
           <p:grpSpPr>
             <a:xfrm>
-              <a:off x="5512572" y="1078604"/>
+              <a:off x="5512553" y="1078603"/>
               <a:ext cx="169964" cy="169864"/>
               <a:chOff x="1874520" y="1444752"/>
               <a:chExt cx="182880" cy="182880"/>
@@ -3294,7 +2718,7 @@
               <p:cNvPr id="293" name="Shape 23">
                 <a:extLst>
                   <a:ext uri="{FF2B5EF4-FFF2-40B4-BE49-F238E27FC236}">
-                    <a16:creationId xmlns:a16="http://schemas.microsoft.com/office/drawing/2014/main" id="{D98B8C3F-9AC5-5F99-A3FE-444806F3982C}"/>
+                    <a16:creationId xmlns:a16="http://schemas.microsoft.com/office/drawing/2014/main" id="{879D0947-2681-3E05-C445-40B0075A61DC}"/>
                   </a:ext>
                 </a:extLst>
               </p:cNvPr>
@@ -3310,11 +2734,11 @@
                 <a:avLst/>
               </a:prstGeom>
               <a:solidFill>
-                <a:srgbClr val="F0997B"/>
+                <a:srgbClr val="FDEBD0"/>
               </a:solidFill>
               <a:ln w="9525">
                 <a:solidFill>
-                  <a:srgbClr val="993C1D"/>
+                  <a:srgbClr val="F89441"/>
                 </a:solidFill>
                 <a:prstDash val="solid"/>
               </a:ln>
@@ -3332,7 +2756,7 @@
               <p:cNvPr id="294" name="Shape 24">
                 <a:extLst>
                   <a:ext uri="{FF2B5EF4-FFF2-40B4-BE49-F238E27FC236}">
-                    <a16:creationId xmlns:a16="http://schemas.microsoft.com/office/drawing/2014/main" id="{E5CF6F15-03A8-A200-2F0B-068F2B184DC3}"/>
+                    <a16:creationId xmlns:a16="http://schemas.microsoft.com/office/drawing/2014/main" id="{C8FC2C12-53AC-3663-D968-FE937EEC96B1}"/>
                   </a:ext>
                 </a:extLst>
               </p:cNvPr>
@@ -3348,7 +2772,7 @@
                 <a:avLst/>
               </a:prstGeom>
               <a:solidFill>
-                <a:srgbClr val="993C1D">
+                <a:srgbClr val="F89441">
                   <a:alpha val="50000"/>
                 </a:srgbClr>
               </a:solidFill>
@@ -3368,7 +2792,7 @@
             <p:cNvPr id="286" name="Group 285">
               <a:extLst>
                 <a:ext uri="{FF2B5EF4-FFF2-40B4-BE49-F238E27FC236}">
-                  <a16:creationId xmlns:a16="http://schemas.microsoft.com/office/drawing/2014/main" id="{F2AE0E09-7C9B-8530-A490-8C26D5BD78BF}"/>
+                  <a16:creationId xmlns:a16="http://schemas.microsoft.com/office/drawing/2014/main" id="{62C92EA3-481D-ECB0-5036-83BD29D2DF2C}"/>
                 </a:ext>
               </a:extLst>
             </p:cNvPr>
@@ -3377,7 +2801,7 @@
           </p:nvGrpSpPr>
           <p:grpSpPr>
             <a:xfrm>
-              <a:off x="5971477" y="1658721"/>
+              <a:off x="5971463" y="1658721"/>
               <a:ext cx="186961" cy="186850"/>
               <a:chOff x="1225296" y="1527048"/>
               <a:chExt cx="201168" cy="201168"/>
@@ -3388,7 +2812,7 @@
               <p:cNvPr id="291" name="Shape 15">
                 <a:extLst>
                   <a:ext uri="{FF2B5EF4-FFF2-40B4-BE49-F238E27FC236}">
-                    <a16:creationId xmlns:a16="http://schemas.microsoft.com/office/drawing/2014/main" id="{440A8F5D-2EF1-882C-634D-66A4EFD69F43}"/>
+                    <a16:creationId xmlns:a16="http://schemas.microsoft.com/office/drawing/2014/main" id="{8A4A5F92-79E0-9F83-8BE4-B500709B4050}"/>
                   </a:ext>
                 </a:extLst>
               </p:cNvPr>
@@ -3404,11 +2828,11 @@
                 <a:avLst/>
               </a:prstGeom>
               <a:solidFill>
-                <a:srgbClr val="B5D4F4"/>
+                <a:srgbClr val="E8E6FF"/>
               </a:solidFill>
               <a:ln w="9525">
                 <a:solidFill>
-                  <a:srgbClr val="185FA5"/>
+                  <a:srgbClr val="0D0887"/>
                 </a:solidFill>
                 <a:prstDash val="solid"/>
               </a:ln>
@@ -3426,7 +2850,7 @@
               <p:cNvPr id="292" name="Shape 16">
                 <a:extLst>
                   <a:ext uri="{FF2B5EF4-FFF2-40B4-BE49-F238E27FC236}">
-                    <a16:creationId xmlns:a16="http://schemas.microsoft.com/office/drawing/2014/main" id="{31AC08E2-4C6A-1664-E5AC-9EA9B353B588}"/>
+                    <a16:creationId xmlns:a16="http://schemas.microsoft.com/office/drawing/2014/main" id="{7B9E9D40-E461-3FCA-E742-EB6DE44DB1A9}"/>
                   </a:ext>
                 </a:extLst>
               </p:cNvPr>
@@ -3442,7 +2866,7 @@
                 <a:avLst/>
               </a:prstGeom>
               <a:solidFill>
-                <a:srgbClr val="185FA5">
+                <a:srgbClr val="0D0887">
                   <a:alpha val="50000"/>
                 </a:srgbClr>
               </a:solidFill>
@@ -3462,7 +2886,7 @@
             <p:cNvPr id="287" name="Group 286">
               <a:extLst>
                 <a:ext uri="{FF2B5EF4-FFF2-40B4-BE49-F238E27FC236}">
-                  <a16:creationId xmlns:a16="http://schemas.microsoft.com/office/drawing/2014/main" id="{8F0F4605-0542-7A0D-DD73-09A6F69EEE03}"/>
+                  <a16:creationId xmlns:a16="http://schemas.microsoft.com/office/drawing/2014/main" id="{776CD677-7CE0-55FD-BE71-D8AD41F90097}"/>
                 </a:ext>
               </a:extLst>
             </p:cNvPr>
@@ -3482,7 +2906,7 @@
               <p:cNvPr id="288" name="Shape 15">
                 <a:extLst>
                   <a:ext uri="{FF2B5EF4-FFF2-40B4-BE49-F238E27FC236}">
-                    <a16:creationId xmlns:a16="http://schemas.microsoft.com/office/drawing/2014/main" id="{A499F895-B15D-FCB9-72BC-D5042645D1B1}"/>
+                    <a16:creationId xmlns:a16="http://schemas.microsoft.com/office/drawing/2014/main" id="{83E2F9C4-7390-F52B-E146-E7F49DCC005F}"/>
                   </a:ext>
                 </a:extLst>
               </p:cNvPr>
@@ -3498,11 +2922,11 @@
                 <a:avLst/>
               </a:prstGeom>
               <a:solidFill>
-                <a:srgbClr val="B5D4F4"/>
+                <a:srgbClr val="E8E6FF"/>
               </a:solidFill>
               <a:ln w="9525">
                 <a:solidFill>
-                  <a:srgbClr val="185FA5"/>
+                  <a:srgbClr val="0D0887"/>
                 </a:solidFill>
                 <a:prstDash val="solid"/>
               </a:ln>
@@ -3520,7 +2944,7 @@
               <p:cNvPr id="289" name="Shape 16">
                 <a:extLst>
                   <a:ext uri="{FF2B5EF4-FFF2-40B4-BE49-F238E27FC236}">
-                    <a16:creationId xmlns:a16="http://schemas.microsoft.com/office/drawing/2014/main" id="{40732566-7A11-A98D-DED8-050F93DBE3B0}"/>
+                    <a16:creationId xmlns:a16="http://schemas.microsoft.com/office/drawing/2014/main" id="{9B5B0176-BC0D-FED6-FB63-3A442D35A509}"/>
                   </a:ext>
                 </a:extLst>
               </p:cNvPr>
@@ -3536,7 +2960,7 @@
                 <a:avLst/>
               </a:prstGeom>
               <a:solidFill>
-                <a:srgbClr val="185FA5">
+                <a:srgbClr val="0D0887">
                   <a:alpha val="50000"/>
                 </a:srgbClr>
               </a:solidFill>
@@ -3554,10 +2978,10 @@
       </p:grpSp>
       <p:grpSp>
         <p:nvGrpSpPr>
-          <p:cNvPr id="310" name="Group 309">
+          <p:cNvPr id="221" name="Group 220">
             <a:extLst>
               <a:ext uri="{FF2B5EF4-FFF2-40B4-BE49-F238E27FC236}">
-                <a16:creationId xmlns:a16="http://schemas.microsoft.com/office/drawing/2014/main" id="{9A54B9DA-32C5-1E7B-A211-9FA386A868FB}"/>
+                <a16:creationId xmlns:a16="http://schemas.microsoft.com/office/drawing/2014/main" id="{C588FC19-7913-4B2D-770D-748FAA894B6E}"/>
               </a:ext>
             </a:extLst>
           </p:cNvPr>
@@ -3566,10 +2990,10 @@
         </p:nvGrpSpPr>
         <p:grpSpPr>
           <a:xfrm>
-            <a:off x="5824142" y="1883369"/>
-            <a:ext cx="1435025" cy="997550"/>
-            <a:chOff x="753529" y="3465034"/>
-            <a:chExt cx="1435025" cy="997550"/>
+            <a:off x="3915589" y="2430391"/>
+            <a:ext cx="1126723" cy="834302"/>
+            <a:chOff x="3182631" y="3884716"/>
+            <a:chExt cx="1126723" cy="834302"/>
           </a:xfrm>
         </p:grpSpPr>
         <p:grpSp>
@@ -3577,7 +3001,7 @@
             <p:cNvPr id="311" name="Group 310">
               <a:extLst>
                 <a:ext uri="{FF2B5EF4-FFF2-40B4-BE49-F238E27FC236}">
-                  <a16:creationId xmlns:a16="http://schemas.microsoft.com/office/drawing/2014/main" id="{D9CAD6E6-0102-C697-7D60-283E6E02A8EE}"/>
+                  <a16:creationId xmlns:a16="http://schemas.microsoft.com/office/drawing/2014/main" id="{BE4E0AA6-421E-617B-B04E-2B0DF326C65E}"/>
                 </a:ext>
               </a:extLst>
             </p:cNvPr>
@@ -3586,7 +3010,7 @@
           </p:nvGrpSpPr>
           <p:grpSpPr>
             <a:xfrm>
-              <a:off x="1327716" y="3972192"/>
+              <a:off x="3457381" y="4277854"/>
               <a:ext cx="150129" cy="139837"/>
               <a:chOff x="1225296" y="1527048"/>
               <a:chExt cx="201168" cy="201168"/>
@@ -3597,7 +3021,7 @@
               <p:cNvPr id="366" name="Shape 15">
                 <a:extLst>
                   <a:ext uri="{FF2B5EF4-FFF2-40B4-BE49-F238E27FC236}">
-                    <a16:creationId xmlns:a16="http://schemas.microsoft.com/office/drawing/2014/main" id="{10C715DC-7D0A-7CBF-51F2-456C1D1F0E31}"/>
+                    <a16:creationId xmlns:a16="http://schemas.microsoft.com/office/drawing/2014/main" id="{752A3EB3-B28B-D0BC-BDF4-207F9691872A}"/>
                   </a:ext>
                 </a:extLst>
               </p:cNvPr>
@@ -3613,11 +3037,11 @@
                 <a:avLst/>
               </a:prstGeom>
               <a:solidFill>
-                <a:srgbClr val="B5D4F4"/>
+                <a:srgbClr val="E8E6FF"/>
               </a:solidFill>
               <a:ln w="9525">
                 <a:solidFill>
-                  <a:srgbClr val="185FA5"/>
+                  <a:srgbClr val="0D0887"/>
                 </a:solidFill>
                 <a:prstDash val="solid"/>
               </a:ln>
@@ -3635,7 +3059,7 @@
               <p:cNvPr id="367" name="Shape 16">
                 <a:extLst>
                   <a:ext uri="{FF2B5EF4-FFF2-40B4-BE49-F238E27FC236}">
-                    <a16:creationId xmlns:a16="http://schemas.microsoft.com/office/drawing/2014/main" id="{B0CE9103-B110-A0ED-F39F-FB992FAC3309}"/>
+                    <a16:creationId xmlns:a16="http://schemas.microsoft.com/office/drawing/2014/main" id="{E3EB238C-6E29-635F-818A-2F53AFE72BCF}"/>
                   </a:ext>
                 </a:extLst>
               </p:cNvPr>
@@ -3651,7 +3075,7 @@
                 <a:avLst/>
               </a:prstGeom>
               <a:solidFill>
-                <a:srgbClr val="185FA5">
+                <a:srgbClr val="0D0887">
                   <a:alpha val="50000"/>
                 </a:srgbClr>
               </a:solidFill>
@@ -3671,7 +3095,7 @@
             <p:cNvPr id="312" name="Group 311">
               <a:extLst>
                 <a:ext uri="{FF2B5EF4-FFF2-40B4-BE49-F238E27FC236}">
-                  <a16:creationId xmlns:a16="http://schemas.microsoft.com/office/drawing/2014/main" id="{DDC18F0D-8577-6461-E809-195C7124A76D}"/>
+                  <a16:creationId xmlns:a16="http://schemas.microsoft.com/office/drawing/2014/main" id="{16E798C7-D167-6CBF-BF96-30D234A7113E}"/>
                 </a:ext>
               </a:extLst>
             </p:cNvPr>
@@ -3680,7 +3104,7 @@
           </p:nvGrpSpPr>
           <p:grpSpPr>
             <a:xfrm>
-              <a:off x="1631405" y="3926806"/>
+              <a:off x="3745635" y="4346488"/>
               <a:ext cx="136481" cy="127125"/>
               <a:chOff x="1874520" y="1444752"/>
               <a:chExt cx="182880" cy="182880"/>
@@ -3691,7 +3115,7 @@
               <p:cNvPr id="364" name="Shape 23">
                 <a:extLst>
                   <a:ext uri="{FF2B5EF4-FFF2-40B4-BE49-F238E27FC236}">
-                    <a16:creationId xmlns:a16="http://schemas.microsoft.com/office/drawing/2014/main" id="{DB433AFB-646A-2C0A-0B19-7B8DE2640792}"/>
+                    <a16:creationId xmlns:a16="http://schemas.microsoft.com/office/drawing/2014/main" id="{AA034F28-B2D3-25ED-AA2A-0962A66C5708}"/>
                   </a:ext>
                 </a:extLst>
               </p:cNvPr>
@@ -3707,11 +3131,11 @@
                 <a:avLst/>
               </a:prstGeom>
               <a:solidFill>
-                <a:srgbClr val="F0997B"/>
+                <a:srgbClr val="FDEBD0"/>
               </a:solidFill>
               <a:ln w="9525">
                 <a:solidFill>
-                  <a:srgbClr val="993C1D"/>
+                  <a:srgbClr val="F89441"/>
                 </a:solidFill>
                 <a:prstDash val="solid"/>
               </a:ln>
@@ -3729,7 +3153,7 @@
               <p:cNvPr id="365" name="Shape 24">
                 <a:extLst>
                   <a:ext uri="{FF2B5EF4-FFF2-40B4-BE49-F238E27FC236}">
-                    <a16:creationId xmlns:a16="http://schemas.microsoft.com/office/drawing/2014/main" id="{F3C53301-7DE2-E7D4-ED00-5EDADD93DE43}"/>
+                    <a16:creationId xmlns:a16="http://schemas.microsoft.com/office/drawing/2014/main" id="{B788A94E-1899-73F5-FE82-9E096B33BE3F}"/>
                   </a:ext>
                 </a:extLst>
               </p:cNvPr>
@@ -3745,7 +3169,7 @@
                 <a:avLst/>
               </a:prstGeom>
               <a:solidFill>
-                <a:srgbClr val="993C1D">
+                <a:srgbClr val="F89441">
                   <a:alpha val="50000"/>
                 </a:srgbClr>
               </a:solidFill>
@@ -3755,17 +3179,17 @@
               <a:bodyPr/>
               <a:lstStyle/>
               <a:p>
-                <a:endParaRPr lang="en-US"/>
+                <a:endParaRPr lang="en-US" dirty="0"/>
               </a:p>
             </p:txBody>
           </p:sp>
         </p:grpSp>
         <p:grpSp>
           <p:nvGrpSpPr>
-            <p:cNvPr id="313" name="Group 312">
+            <p:cNvPr id="316" name="Group 315">
               <a:extLst>
                 <a:ext uri="{FF2B5EF4-FFF2-40B4-BE49-F238E27FC236}">
-                  <a16:creationId xmlns:a16="http://schemas.microsoft.com/office/drawing/2014/main" id="{EC80ED31-396C-B404-23FD-30B1D1DD2EE4}"/>
+                  <a16:creationId xmlns:a16="http://schemas.microsoft.com/office/drawing/2014/main" id="{6328153E-4CB2-D6CB-346A-A93F0201330A}"/>
                 </a:ext>
               </a:extLst>
             </p:cNvPr>
@@ -3774,7 +3198,7 @@
           </p:nvGrpSpPr>
           <p:grpSpPr>
             <a:xfrm>
-              <a:off x="962487" y="4295822"/>
+              <a:off x="3849631" y="4579181"/>
               <a:ext cx="150129" cy="139837"/>
               <a:chOff x="1225296" y="1527048"/>
               <a:chExt cx="201168" cy="201168"/>
@@ -3782,10 +3206,10 @@
           </p:grpSpPr>
           <p:sp>
             <p:nvSpPr>
-              <p:cNvPr id="362" name="Shape 15">
-                <a:extLst>
-                  <a:ext uri="{FF2B5EF4-FFF2-40B4-BE49-F238E27FC236}">
-                    <a16:creationId xmlns:a16="http://schemas.microsoft.com/office/drawing/2014/main" id="{AA9339AB-8D9D-FFE6-F507-2A9386A531C5}"/>
+              <p:cNvPr id="356" name="Shape 15">
+                <a:extLst>
+                  <a:ext uri="{FF2B5EF4-FFF2-40B4-BE49-F238E27FC236}">
+                    <a16:creationId xmlns:a16="http://schemas.microsoft.com/office/drawing/2014/main" id="{7C588529-72A2-3CA2-8347-7CE221047851}"/>
                   </a:ext>
                 </a:extLst>
               </p:cNvPr>
@@ -3801,11 +3225,11 @@
                 <a:avLst/>
               </a:prstGeom>
               <a:solidFill>
-                <a:srgbClr val="B5D4F4"/>
+                <a:srgbClr val="E8E6FF"/>
               </a:solidFill>
               <a:ln w="9525">
                 <a:solidFill>
-                  <a:srgbClr val="185FA5"/>
+                  <a:srgbClr val="0D0887"/>
                 </a:solidFill>
                 <a:prstDash val="solid"/>
               </a:ln>
@@ -3820,10 +3244,10 @@
           </p:sp>
           <p:sp>
             <p:nvSpPr>
-              <p:cNvPr id="363" name="Shape 16">
-                <a:extLst>
-                  <a:ext uri="{FF2B5EF4-FFF2-40B4-BE49-F238E27FC236}">
-                    <a16:creationId xmlns:a16="http://schemas.microsoft.com/office/drawing/2014/main" id="{B51CF8FA-118A-6D86-1312-451FA6FE236A}"/>
+              <p:cNvPr id="357" name="Shape 16">
+                <a:extLst>
+                  <a:ext uri="{FF2B5EF4-FFF2-40B4-BE49-F238E27FC236}">
+                    <a16:creationId xmlns:a16="http://schemas.microsoft.com/office/drawing/2014/main" id="{901236CE-B583-A6AE-6AFB-49233792A522}"/>
                   </a:ext>
                 </a:extLst>
               </p:cNvPr>
@@ -3839,7 +3263,7 @@
                 <a:avLst/>
               </a:prstGeom>
               <a:solidFill>
-                <a:srgbClr val="185FA5">
+                <a:srgbClr val="0D0887">
                   <a:alpha val="50000"/>
                 </a:srgbClr>
               </a:solidFill>
@@ -3856,10 +3280,10 @@
         </p:grpSp>
         <p:grpSp>
           <p:nvGrpSpPr>
-            <p:cNvPr id="314" name="Group 313">
+            <p:cNvPr id="317" name="Group 316">
               <a:extLst>
                 <a:ext uri="{FF2B5EF4-FFF2-40B4-BE49-F238E27FC236}">
-                  <a16:creationId xmlns:a16="http://schemas.microsoft.com/office/drawing/2014/main" id="{4C1E9734-CA7B-BD7F-C6F4-40CD440AB061}"/>
+                  <a16:creationId xmlns:a16="http://schemas.microsoft.com/office/drawing/2014/main" id="{9D7B8BAE-68C7-2F68-B672-C7B544820E22}"/>
                 </a:ext>
               </a:extLst>
             </p:cNvPr>
@@ -3868,38 +3292,38 @@
           </p:nvGrpSpPr>
           <p:grpSpPr>
             <a:xfrm>
-              <a:off x="768142" y="4087128"/>
-              <a:ext cx="136481" cy="127125"/>
-              <a:chOff x="1874520" y="1444752"/>
-              <a:chExt cx="182880" cy="182880"/>
+              <a:off x="3225924" y="4476784"/>
+              <a:ext cx="150129" cy="139837"/>
+              <a:chOff x="1225296" y="1527048"/>
+              <a:chExt cx="201168" cy="201168"/>
             </a:xfrm>
           </p:grpSpPr>
           <p:sp>
             <p:nvSpPr>
-              <p:cNvPr id="360" name="Shape 23">
-                <a:extLst>
-                  <a:ext uri="{FF2B5EF4-FFF2-40B4-BE49-F238E27FC236}">
-                    <a16:creationId xmlns:a16="http://schemas.microsoft.com/office/drawing/2014/main" id="{7865FCFC-DA45-626A-9FDB-3309BCE9EE0F}"/>
-                  </a:ext>
-                </a:extLst>
-              </p:cNvPr>
-              <p:cNvSpPr/>
-              <p:nvPr/>
-            </p:nvSpPr>
-            <p:spPr>
-              <a:xfrm>
-                <a:off x="1874520" y="1444752"/>
-                <a:ext cx="182880" cy="182880"/>
-              </a:xfrm>
-              <a:prstGeom prst="ellipse">
-                <a:avLst/>
-              </a:prstGeom>
-              <a:solidFill>
-                <a:srgbClr val="F0997B"/>
+              <p:cNvPr id="354" name="Shape 15">
+                <a:extLst>
+                  <a:ext uri="{FF2B5EF4-FFF2-40B4-BE49-F238E27FC236}">
+                    <a16:creationId xmlns:a16="http://schemas.microsoft.com/office/drawing/2014/main" id="{57C3DD55-DFFB-6AC5-E346-AA13D93BCDFC}"/>
+                  </a:ext>
+                </a:extLst>
+              </p:cNvPr>
+              <p:cNvSpPr/>
+              <p:nvPr/>
+            </p:nvSpPr>
+            <p:spPr>
+              <a:xfrm>
+                <a:off x="1225296" y="1527048"/>
+                <a:ext cx="201168" cy="201168"/>
+              </a:xfrm>
+              <a:prstGeom prst="ellipse">
+                <a:avLst/>
+              </a:prstGeom>
+              <a:solidFill>
+                <a:srgbClr val="E8E6FF"/>
               </a:solidFill>
               <a:ln w="9525">
                 <a:solidFill>
-                  <a:srgbClr val="993C1D"/>
+                  <a:srgbClr val="0D0887"/>
                 </a:solidFill>
                 <a:prstDash val="solid"/>
               </a:ln>
@@ -3914,26 +3338,26 @@
           </p:sp>
           <p:sp>
             <p:nvSpPr>
-              <p:cNvPr id="361" name="Shape 24">
-                <a:extLst>
-                  <a:ext uri="{FF2B5EF4-FFF2-40B4-BE49-F238E27FC236}">
-                    <a16:creationId xmlns:a16="http://schemas.microsoft.com/office/drawing/2014/main" id="{99DC5AFC-C681-0AA3-809E-368D8577032C}"/>
-                  </a:ext>
-                </a:extLst>
-              </p:cNvPr>
-              <p:cNvSpPr/>
-              <p:nvPr/>
-            </p:nvSpPr>
-            <p:spPr>
-              <a:xfrm>
-                <a:off x="1929384" y="1499616"/>
-                <a:ext cx="73152" cy="73152"/>
-              </a:xfrm>
-              <a:prstGeom prst="ellipse">
-                <a:avLst/>
-              </a:prstGeom>
-              <a:solidFill>
-                <a:srgbClr val="993C1D">
+              <p:cNvPr id="355" name="Shape 16">
+                <a:extLst>
+                  <a:ext uri="{FF2B5EF4-FFF2-40B4-BE49-F238E27FC236}">
+                    <a16:creationId xmlns:a16="http://schemas.microsoft.com/office/drawing/2014/main" id="{F98F6E4C-CAF8-416B-A3F9-C7CFE8FB6CA5}"/>
+                  </a:ext>
+                </a:extLst>
+              </p:cNvPr>
+              <p:cNvSpPr/>
+              <p:nvPr/>
+            </p:nvSpPr>
+            <p:spPr>
+              <a:xfrm>
+                <a:off x="1285646" y="1587398"/>
+                <a:ext cx="80467" cy="80467"/>
+              </a:xfrm>
+              <a:prstGeom prst="ellipse">
+                <a:avLst/>
+              </a:prstGeom>
+              <a:solidFill>
+                <a:srgbClr val="0D0887">
                   <a:alpha val="50000"/>
                 </a:srgbClr>
               </a:solidFill>
@@ -3950,10 +3374,10 @@
         </p:grpSp>
         <p:grpSp>
           <p:nvGrpSpPr>
-            <p:cNvPr id="315" name="Group 314">
+            <p:cNvPr id="319" name="Group 318">
               <a:extLst>
                 <a:ext uri="{FF2B5EF4-FFF2-40B4-BE49-F238E27FC236}">
-                  <a16:creationId xmlns:a16="http://schemas.microsoft.com/office/drawing/2014/main" id="{00F60B4F-4300-856F-D498-A66E7F77B4EC}"/>
+                  <a16:creationId xmlns:a16="http://schemas.microsoft.com/office/drawing/2014/main" id="{2A0A3260-B236-5287-E574-0A65426EEE88}"/>
                 </a:ext>
               </a:extLst>
             </p:cNvPr>
@@ -3962,38 +3386,38 @@
           </p:nvGrpSpPr>
           <p:grpSpPr>
             <a:xfrm>
-              <a:off x="1393475" y="4322747"/>
-              <a:ext cx="150129" cy="139837"/>
-              <a:chOff x="1225296" y="1527048"/>
-              <a:chExt cx="201168" cy="201168"/>
+              <a:off x="4009096" y="4312572"/>
+              <a:ext cx="150129" cy="143298"/>
+              <a:chOff x="7067843" y="717976"/>
+              <a:chExt cx="201168" cy="206147"/>
             </a:xfrm>
           </p:grpSpPr>
           <p:sp>
             <p:nvSpPr>
-              <p:cNvPr id="358" name="Shape 15">
-                <a:extLst>
-                  <a:ext uri="{FF2B5EF4-FFF2-40B4-BE49-F238E27FC236}">
-                    <a16:creationId xmlns:a16="http://schemas.microsoft.com/office/drawing/2014/main" id="{588C630E-9982-8514-510A-EC2B721790D4}"/>
-                  </a:ext>
-                </a:extLst>
-              </p:cNvPr>
-              <p:cNvSpPr/>
-              <p:nvPr/>
-            </p:nvSpPr>
-            <p:spPr>
-              <a:xfrm>
-                <a:off x="1225296" y="1527048"/>
-                <a:ext cx="201168" cy="201168"/>
-              </a:xfrm>
-              <a:prstGeom prst="ellipse">
-                <a:avLst/>
-              </a:prstGeom>
-              <a:solidFill>
-                <a:srgbClr val="B5D4F4"/>
-              </a:solidFill>
-              <a:ln w="9525">
-                <a:solidFill>
-                  <a:srgbClr val="185FA5"/>
+              <p:cNvPr id="350" name="Shape 71">
+                <a:extLst>
+                  <a:ext uri="{FF2B5EF4-FFF2-40B4-BE49-F238E27FC236}">
+                    <a16:creationId xmlns:a16="http://schemas.microsoft.com/office/drawing/2014/main" id="{BBC323C6-FC67-E20D-89FF-B83AB1CC241A}"/>
+                  </a:ext>
+                </a:extLst>
+              </p:cNvPr>
+              <p:cNvSpPr/>
+              <p:nvPr/>
+            </p:nvSpPr>
+            <p:spPr>
+              <a:xfrm>
+                <a:off x="7067843" y="717976"/>
+                <a:ext cx="201168" cy="206147"/>
+              </a:xfrm>
+              <a:prstGeom prst="ellipse">
+                <a:avLst/>
+              </a:prstGeom>
+              <a:solidFill>
+                <a:srgbClr val="FDEAE8"/>
+              </a:solidFill>
+              <a:ln w="22225">
+                <a:solidFill>
+                  <a:srgbClr val="E56B5D"/>
                 </a:solidFill>
                 <a:prstDash val="solid"/>
               </a:ln>
@@ -4002,32 +3426,32 @@
               <a:bodyPr/>
               <a:lstStyle/>
               <a:p>
-                <a:endParaRPr lang="en-US"/>
-              </a:p>
-            </p:txBody>
-          </p:sp>
-          <p:sp>
-            <p:nvSpPr>
-              <p:cNvPr id="359" name="Shape 16">
-                <a:extLst>
-                  <a:ext uri="{FF2B5EF4-FFF2-40B4-BE49-F238E27FC236}">
-                    <a16:creationId xmlns:a16="http://schemas.microsoft.com/office/drawing/2014/main" id="{7DA951B9-AE9B-089B-67B5-1F947D1A2650}"/>
-                  </a:ext>
-                </a:extLst>
-              </p:cNvPr>
-              <p:cNvSpPr/>
-              <p:nvPr/>
-            </p:nvSpPr>
-            <p:spPr>
-              <a:xfrm>
-                <a:off x="1285646" y="1587398"/>
-                <a:ext cx="80467" cy="80467"/>
-              </a:xfrm>
-              <a:prstGeom prst="ellipse">
-                <a:avLst/>
-              </a:prstGeom>
-              <a:solidFill>
-                <a:srgbClr val="185FA5">
+                <a:endParaRPr lang="en-US" dirty="0"/>
+              </a:p>
+            </p:txBody>
+          </p:sp>
+          <p:sp>
+            <p:nvSpPr>
+              <p:cNvPr id="351" name="Shape 72">
+                <a:extLst>
+                  <a:ext uri="{FF2B5EF4-FFF2-40B4-BE49-F238E27FC236}">
+                    <a16:creationId xmlns:a16="http://schemas.microsoft.com/office/drawing/2014/main" id="{A666DF45-97A6-510E-083A-329FC928ADCE}"/>
+                  </a:ext>
+                </a:extLst>
+              </p:cNvPr>
+              <p:cNvSpPr/>
+              <p:nvPr/>
+            </p:nvSpPr>
+            <p:spPr>
+              <a:xfrm>
+                <a:off x="7128525" y="770321"/>
+                <a:ext cx="80467" cy="82459"/>
+              </a:xfrm>
+              <a:prstGeom prst="ellipse">
+                <a:avLst/>
+              </a:prstGeom>
+              <a:solidFill>
+                <a:srgbClr val="E56B5D">
                   <a:alpha val="50000"/>
                 </a:srgbClr>
               </a:solidFill>
@@ -4044,10 +3468,10 @@
         </p:grpSp>
         <p:grpSp>
           <p:nvGrpSpPr>
-            <p:cNvPr id="316" name="Group 315">
+            <p:cNvPr id="320" name="Group 319">
               <a:extLst>
                 <a:ext uri="{FF2B5EF4-FFF2-40B4-BE49-F238E27FC236}">
-                  <a16:creationId xmlns:a16="http://schemas.microsoft.com/office/drawing/2014/main" id="{60838928-7892-3AAA-AE9D-6040C35905BB}"/>
+                  <a16:creationId xmlns:a16="http://schemas.microsoft.com/office/drawing/2014/main" id="{03B9D047-FD13-E355-5C7A-3E43EE6442A9}"/>
                 </a:ext>
               </a:extLst>
             </p:cNvPr>
@@ -4056,38 +3480,38 @@
           </p:nvGrpSpPr>
           <p:grpSpPr>
             <a:xfrm>
-              <a:off x="1726849" y="4252829"/>
-              <a:ext cx="150129" cy="139837"/>
-              <a:chOff x="1225296" y="1527048"/>
-              <a:chExt cx="201168" cy="201168"/>
+              <a:off x="3590528" y="4102904"/>
+              <a:ext cx="150129" cy="143298"/>
+              <a:chOff x="7067843" y="717976"/>
+              <a:chExt cx="201168" cy="206147"/>
             </a:xfrm>
           </p:grpSpPr>
           <p:sp>
             <p:nvSpPr>
-              <p:cNvPr id="356" name="Shape 15">
-                <a:extLst>
-                  <a:ext uri="{FF2B5EF4-FFF2-40B4-BE49-F238E27FC236}">
-                    <a16:creationId xmlns:a16="http://schemas.microsoft.com/office/drawing/2014/main" id="{304A3F83-7B81-A9AC-B0E8-35E75E2EDF99}"/>
-                  </a:ext>
-                </a:extLst>
-              </p:cNvPr>
-              <p:cNvSpPr/>
-              <p:nvPr/>
-            </p:nvSpPr>
-            <p:spPr>
-              <a:xfrm>
-                <a:off x="1225296" y="1527048"/>
-                <a:ext cx="201168" cy="201168"/>
-              </a:xfrm>
-              <a:prstGeom prst="ellipse">
-                <a:avLst/>
-              </a:prstGeom>
-              <a:solidFill>
-                <a:srgbClr val="B5D4F4"/>
-              </a:solidFill>
-              <a:ln w="9525">
-                <a:solidFill>
-                  <a:srgbClr val="185FA5"/>
+              <p:cNvPr id="348" name="Shape 71">
+                <a:extLst>
+                  <a:ext uri="{FF2B5EF4-FFF2-40B4-BE49-F238E27FC236}">
+                    <a16:creationId xmlns:a16="http://schemas.microsoft.com/office/drawing/2014/main" id="{2014D82F-EC70-99DF-4BDA-98461A49453F}"/>
+                  </a:ext>
+                </a:extLst>
+              </p:cNvPr>
+              <p:cNvSpPr/>
+              <p:nvPr/>
+            </p:nvSpPr>
+            <p:spPr>
+              <a:xfrm>
+                <a:off x="7067843" y="717976"/>
+                <a:ext cx="201168" cy="206147"/>
+              </a:xfrm>
+              <a:prstGeom prst="ellipse">
+                <a:avLst/>
+              </a:prstGeom>
+              <a:solidFill>
+                <a:srgbClr val="FDEAE8"/>
+              </a:solidFill>
+              <a:ln w="22225">
+                <a:solidFill>
+                  <a:srgbClr val="E56B5D"/>
                 </a:solidFill>
                 <a:prstDash val="solid"/>
               </a:ln>
@@ -4096,32 +3520,32 @@
               <a:bodyPr/>
               <a:lstStyle/>
               <a:p>
-                <a:endParaRPr lang="en-US"/>
-              </a:p>
-            </p:txBody>
-          </p:sp>
-          <p:sp>
-            <p:nvSpPr>
-              <p:cNvPr id="357" name="Shape 16">
-                <a:extLst>
-                  <a:ext uri="{FF2B5EF4-FFF2-40B4-BE49-F238E27FC236}">
-                    <a16:creationId xmlns:a16="http://schemas.microsoft.com/office/drawing/2014/main" id="{CA782C46-B7AE-531C-982C-323E0CDE824B}"/>
-                  </a:ext>
-                </a:extLst>
-              </p:cNvPr>
-              <p:cNvSpPr/>
-              <p:nvPr/>
-            </p:nvSpPr>
-            <p:spPr>
-              <a:xfrm>
-                <a:off x="1285646" y="1587398"/>
-                <a:ext cx="80467" cy="80467"/>
-              </a:xfrm>
-              <a:prstGeom prst="ellipse">
-                <a:avLst/>
-              </a:prstGeom>
-              <a:solidFill>
-                <a:srgbClr val="185FA5">
+                <a:endParaRPr lang="en-US" dirty="0"/>
+              </a:p>
+            </p:txBody>
+          </p:sp>
+          <p:sp>
+            <p:nvSpPr>
+              <p:cNvPr id="349" name="Shape 72">
+                <a:extLst>
+                  <a:ext uri="{FF2B5EF4-FFF2-40B4-BE49-F238E27FC236}">
+                    <a16:creationId xmlns:a16="http://schemas.microsoft.com/office/drawing/2014/main" id="{01A08BF2-9674-42CD-694F-271E00380799}"/>
+                  </a:ext>
+                </a:extLst>
+              </p:cNvPr>
+              <p:cNvSpPr/>
+              <p:nvPr/>
+            </p:nvSpPr>
+            <p:spPr>
+              <a:xfrm>
+                <a:off x="7128525" y="770321"/>
+                <a:ext cx="80467" cy="82459"/>
+              </a:xfrm>
+              <a:prstGeom prst="ellipse">
+                <a:avLst/>
+              </a:prstGeom>
+              <a:solidFill>
+                <a:srgbClr val="E56B5D">
                   <a:alpha val="50000"/>
                 </a:srgbClr>
               </a:solidFill>
@@ -4138,10 +3562,10 @@
         </p:grpSp>
         <p:grpSp>
           <p:nvGrpSpPr>
-            <p:cNvPr id="317" name="Group 316">
+            <p:cNvPr id="321" name="Group 320">
               <a:extLst>
                 <a:ext uri="{FF2B5EF4-FFF2-40B4-BE49-F238E27FC236}">
-                  <a16:creationId xmlns:a16="http://schemas.microsoft.com/office/drawing/2014/main" id="{F61AF679-EB53-9B16-55F8-E213CA5376E8}"/>
+                  <a16:creationId xmlns:a16="http://schemas.microsoft.com/office/drawing/2014/main" id="{A826986D-36FC-0866-B8EF-DF9621AA75E8}"/>
                 </a:ext>
               </a:extLst>
             </p:cNvPr>
@@ -4150,38 +3574,38 @@
           </p:nvGrpSpPr>
           <p:grpSpPr>
             <a:xfrm>
-              <a:off x="1136642" y="4104105"/>
-              <a:ext cx="150129" cy="139837"/>
-              <a:chOff x="1225296" y="1527048"/>
-              <a:chExt cx="201168" cy="201168"/>
+              <a:off x="3874433" y="4039942"/>
+              <a:ext cx="150129" cy="143298"/>
+              <a:chOff x="7067843" y="717976"/>
+              <a:chExt cx="201168" cy="206147"/>
             </a:xfrm>
           </p:grpSpPr>
           <p:sp>
             <p:nvSpPr>
-              <p:cNvPr id="354" name="Shape 15">
-                <a:extLst>
-                  <a:ext uri="{FF2B5EF4-FFF2-40B4-BE49-F238E27FC236}">
-                    <a16:creationId xmlns:a16="http://schemas.microsoft.com/office/drawing/2014/main" id="{1D5C864F-64BE-A0C1-5D45-F856D67A9D69}"/>
-                  </a:ext>
-                </a:extLst>
-              </p:cNvPr>
-              <p:cNvSpPr/>
-              <p:nvPr/>
-            </p:nvSpPr>
-            <p:spPr>
-              <a:xfrm>
-                <a:off x="1225296" y="1527048"/>
-                <a:ext cx="201168" cy="201168"/>
-              </a:xfrm>
-              <a:prstGeom prst="ellipse">
-                <a:avLst/>
-              </a:prstGeom>
-              <a:solidFill>
-                <a:srgbClr val="B5D4F4"/>
-              </a:solidFill>
-              <a:ln w="9525">
-                <a:solidFill>
-                  <a:srgbClr val="185FA5"/>
+              <p:cNvPr id="346" name="Shape 71">
+                <a:extLst>
+                  <a:ext uri="{FF2B5EF4-FFF2-40B4-BE49-F238E27FC236}">
+                    <a16:creationId xmlns:a16="http://schemas.microsoft.com/office/drawing/2014/main" id="{8A4F341A-8E09-B1F1-9A54-9AB76B4A7F5A}"/>
+                  </a:ext>
+                </a:extLst>
+              </p:cNvPr>
+              <p:cNvSpPr/>
+              <p:nvPr/>
+            </p:nvSpPr>
+            <p:spPr>
+              <a:xfrm>
+                <a:off x="7067843" y="717976"/>
+                <a:ext cx="201168" cy="206147"/>
+              </a:xfrm>
+              <a:prstGeom prst="ellipse">
+                <a:avLst/>
+              </a:prstGeom>
+              <a:solidFill>
+                <a:srgbClr val="FDEAE8"/>
+              </a:solidFill>
+              <a:ln w="22225">
+                <a:solidFill>
+                  <a:srgbClr val="E56B5D"/>
                 </a:solidFill>
                 <a:prstDash val="solid"/>
               </a:ln>
@@ -4190,32 +3614,32 @@
               <a:bodyPr/>
               <a:lstStyle/>
               <a:p>
-                <a:endParaRPr lang="en-US"/>
-              </a:p>
-            </p:txBody>
-          </p:sp>
-          <p:sp>
-            <p:nvSpPr>
-              <p:cNvPr id="355" name="Shape 16">
-                <a:extLst>
-                  <a:ext uri="{FF2B5EF4-FFF2-40B4-BE49-F238E27FC236}">
-                    <a16:creationId xmlns:a16="http://schemas.microsoft.com/office/drawing/2014/main" id="{3FD3D180-95EF-A475-694F-90BFE5B74821}"/>
-                  </a:ext>
-                </a:extLst>
-              </p:cNvPr>
-              <p:cNvSpPr/>
-              <p:nvPr/>
-            </p:nvSpPr>
-            <p:spPr>
-              <a:xfrm>
-                <a:off x="1285646" y="1587398"/>
-                <a:ext cx="80467" cy="80467"/>
-              </a:xfrm>
-              <a:prstGeom prst="ellipse">
-                <a:avLst/>
-              </a:prstGeom>
-              <a:solidFill>
-                <a:srgbClr val="185FA5">
+                <a:endParaRPr lang="en-US" dirty="0"/>
+              </a:p>
+            </p:txBody>
+          </p:sp>
+          <p:sp>
+            <p:nvSpPr>
+              <p:cNvPr id="347" name="Shape 72">
+                <a:extLst>
+                  <a:ext uri="{FF2B5EF4-FFF2-40B4-BE49-F238E27FC236}">
+                    <a16:creationId xmlns:a16="http://schemas.microsoft.com/office/drawing/2014/main" id="{8BCE2C61-7FC7-39E8-00B6-4EFAA4BEB4B2}"/>
+                  </a:ext>
+                </a:extLst>
+              </p:cNvPr>
+              <p:cNvSpPr/>
+              <p:nvPr/>
+            </p:nvSpPr>
+            <p:spPr>
+              <a:xfrm>
+                <a:off x="7128525" y="770321"/>
+                <a:ext cx="80467" cy="82459"/>
+              </a:xfrm>
+              <a:prstGeom prst="ellipse">
+                <a:avLst/>
+              </a:prstGeom>
+              <a:solidFill>
+                <a:srgbClr val="E56B5D">
                   <a:alpha val="50000"/>
                 </a:srgbClr>
               </a:solidFill>
@@ -4232,10 +3656,10 @@
         </p:grpSp>
         <p:grpSp>
           <p:nvGrpSpPr>
-            <p:cNvPr id="318" name="Group 317">
+            <p:cNvPr id="322" name="Group 321">
               <a:extLst>
                 <a:ext uri="{FF2B5EF4-FFF2-40B4-BE49-F238E27FC236}">
-                  <a16:creationId xmlns:a16="http://schemas.microsoft.com/office/drawing/2014/main" id="{2C4D7502-F5C4-7DC9-BA60-771CD561BD4B}"/>
+                  <a16:creationId xmlns:a16="http://schemas.microsoft.com/office/drawing/2014/main" id="{FE023D18-3E7F-301A-AFCC-F6F292CAED1C}"/>
                 </a:ext>
               </a:extLst>
             </p:cNvPr>
@@ -4244,38 +3668,38 @@
           </p:nvGrpSpPr>
           <p:grpSpPr>
             <a:xfrm>
-              <a:off x="934509" y="3850531"/>
-              <a:ext cx="150129" cy="139837"/>
-              <a:chOff x="1225296" y="1527048"/>
-              <a:chExt cx="201168" cy="201168"/>
+              <a:off x="3537729" y="3884716"/>
+              <a:ext cx="150129" cy="143298"/>
+              <a:chOff x="7067843" y="717976"/>
+              <a:chExt cx="201168" cy="206147"/>
             </a:xfrm>
           </p:grpSpPr>
           <p:sp>
             <p:nvSpPr>
-              <p:cNvPr id="352" name="Shape 15">
-                <a:extLst>
-                  <a:ext uri="{FF2B5EF4-FFF2-40B4-BE49-F238E27FC236}">
-                    <a16:creationId xmlns:a16="http://schemas.microsoft.com/office/drawing/2014/main" id="{640E6451-149F-254C-6E01-231D51277B77}"/>
-                  </a:ext>
-                </a:extLst>
-              </p:cNvPr>
-              <p:cNvSpPr/>
-              <p:nvPr/>
-            </p:nvSpPr>
-            <p:spPr>
-              <a:xfrm>
-                <a:off x="1225296" y="1527048"/>
-                <a:ext cx="201168" cy="201168"/>
-              </a:xfrm>
-              <a:prstGeom prst="ellipse">
-                <a:avLst/>
-              </a:prstGeom>
-              <a:solidFill>
-                <a:srgbClr val="B5D4F4"/>
-              </a:solidFill>
-              <a:ln w="9525">
-                <a:solidFill>
-                  <a:srgbClr val="185FA5"/>
+              <p:cNvPr id="344" name="Shape 71">
+                <a:extLst>
+                  <a:ext uri="{FF2B5EF4-FFF2-40B4-BE49-F238E27FC236}">
+                    <a16:creationId xmlns:a16="http://schemas.microsoft.com/office/drawing/2014/main" id="{BAD4C809-1505-154F-8AB4-626D164A2FC9}"/>
+                  </a:ext>
+                </a:extLst>
+              </p:cNvPr>
+              <p:cNvSpPr/>
+              <p:nvPr/>
+            </p:nvSpPr>
+            <p:spPr>
+              <a:xfrm>
+                <a:off x="7067843" y="717976"/>
+                <a:ext cx="201168" cy="206147"/>
+              </a:xfrm>
+              <a:prstGeom prst="ellipse">
+                <a:avLst/>
+              </a:prstGeom>
+              <a:solidFill>
+                <a:srgbClr val="FDEAE8"/>
+              </a:solidFill>
+              <a:ln w="22225">
+                <a:solidFill>
+                  <a:srgbClr val="E56B5D"/>
                 </a:solidFill>
                 <a:prstDash val="solid"/>
               </a:ln>
@@ -4284,32 +3708,32 @@
               <a:bodyPr/>
               <a:lstStyle/>
               <a:p>
-                <a:endParaRPr lang="en-US"/>
-              </a:p>
-            </p:txBody>
-          </p:sp>
-          <p:sp>
-            <p:nvSpPr>
-              <p:cNvPr id="353" name="Shape 16">
-                <a:extLst>
-                  <a:ext uri="{FF2B5EF4-FFF2-40B4-BE49-F238E27FC236}">
-                    <a16:creationId xmlns:a16="http://schemas.microsoft.com/office/drawing/2014/main" id="{88566C66-CD8C-A430-9792-B854EBE3AEFA}"/>
-                  </a:ext>
-                </a:extLst>
-              </p:cNvPr>
-              <p:cNvSpPr/>
-              <p:nvPr/>
-            </p:nvSpPr>
-            <p:spPr>
-              <a:xfrm>
-                <a:off x="1285646" y="1587398"/>
-                <a:ext cx="80467" cy="80467"/>
-              </a:xfrm>
-              <a:prstGeom prst="ellipse">
-                <a:avLst/>
-              </a:prstGeom>
-              <a:solidFill>
-                <a:srgbClr val="185FA5">
+                <a:endParaRPr lang="en-US" dirty="0"/>
+              </a:p>
+            </p:txBody>
+          </p:sp>
+          <p:sp>
+            <p:nvSpPr>
+              <p:cNvPr id="345" name="Shape 72">
+                <a:extLst>
+                  <a:ext uri="{FF2B5EF4-FFF2-40B4-BE49-F238E27FC236}">
+                    <a16:creationId xmlns:a16="http://schemas.microsoft.com/office/drawing/2014/main" id="{2D59A206-25DC-FF01-E617-149B27F9A27D}"/>
+                  </a:ext>
+                </a:extLst>
+              </p:cNvPr>
+              <p:cNvSpPr/>
+              <p:nvPr/>
+            </p:nvSpPr>
+            <p:spPr>
+              <a:xfrm>
+                <a:off x="7128525" y="770321"/>
+                <a:ext cx="80467" cy="82459"/>
+              </a:xfrm>
+              <a:prstGeom prst="ellipse">
+                <a:avLst/>
+              </a:prstGeom>
+              <a:solidFill>
+                <a:srgbClr val="E56B5D">
                   <a:alpha val="50000"/>
                 </a:srgbClr>
               </a:solidFill>
@@ -4326,10 +3750,10 @@
         </p:grpSp>
         <p:grpSp>
           <p:nvGrpSpPr>
-            <p:cNvPr id="319" name="Group 318">
+            <p:cNvPr id="323" name="Group 322">
               <a:extLst>
                 <a:ext uri="{FF2B5EF4-FFF2-40B4-BE49-F238E27FC236}">
-                  <a16:creationId xmlns:a16="http://schemas.microsoft.com/office/drawing/2014/main" id="{F2DC29C7-70C9-6CBF-7A8D-C77B5190167A}"/>
+                  <a16:creationId xmlns:a16="http://schemas.microsoft.com/office/drawing/2014/main" id="{EBF49FF0-7BE2-11A8-8078-A1EFAD189989}"/>
                 </a:ext>
               </a:extLst>
             </p:cNvPr>
@@ -4338,38 +3762,38 @@
           </p:nvGrpSpPr>
           <p:grpSpPr>
             <a:xfrm>
-              <a:off x="1894866" y="3892890"/>
-              <a:ext cx="150129" cy="143298"/>
-              <a:chOff x="7067843" y="717976"/>
-              <a:chExt cx="201168" cy="206147"/>
+              <a:off x="3182631" y="4120907"/>
+              <a:ext cx="136481" cy="127125"/>
+              <a:chOff x="1874520" y="1444752"/>
+              <a:chExt cx="182880" cy="182880"/>
             </a:xfrm>
           </p:grpSpPr>
           <p:sp>
             <p:nvSpPr>
-              <p:cNvPr id="350" name="Shape 71">
-                <a:extLst>
-                  <a:ext uri="{FF2B5EF4-FFF2-40B4-BE49-F238E27FC236}">
-                    <a16:creationId xmlns:a16="http://schemas.microsoft.com/office/drawing/2014/main" id="{91A084A2-E204-FC37-6772-136F34B250B4}"/>
-                  </a:ext>
-                </a:extLst>
-              </p:cNvPr>
-              <p:cNvSpPr/>
-              <p:nvPr/>
-            </p:nvSpPr>
-            <p:spPr>
-              <a:xfrm>
-                <a:off x="7067843" y="717976"/>
-                <a:ext cx="201168" cy="206147"/>
-              </a:xfrm>
-              <a:prstGeom prst="ellipse">
-                <a:avLst/>
-              </a:prstGeom>
-              <a:solidFill>
-                <a:srgbClr val="FBEAF0"/>
-              </a:solidFill>
-              <a:ln w="22225">
-                <a:solidFill>
-                  <a:srgbClr val="993556"/>
+              <p:cNvPr id="342" name="Shape 23">
+                <a:extLst>
+                  <a:ext uri="{FF2B5EF4-FFF2-40B4-BE49-F238E27FC236}">
+                    <a16:creationId xmlns:a16="http://schemas.microsoft.com/office/drawing/2014/main" id="{5E139976-E56E-B369-2793-7B45B07CA1EE}"/>
+                  </a:ext>
+                </a:extLst>
+              </p:cNvPr>
+              <p:cNvSpPr/>
+              <p:nvPr/>
+            </p:nvSpPr>
+            <p:spPr>
+              <a:xfrm>
+                <a:off x="1874520" y="1444752"/>
+                <a:ext cx="182880" cy="182880"/>
+              </a:xfrm>
+              <a:prstGeom prst="ellipse">
+                <a:avLst/>
+              </a:prstGeom>
+              <a:solidFill>
+                <a:srgbClr val="FDEBD0"/>
+              </a:solidFill>
+              <a:ln w="9525">
+                <a:solidFill>
+                  <a:srgbClr val="F89441"/>
                 </a:solidFill>
                 <a:prstDash val="solid"/>
               </a:ln>
@@ -4378,32 +3802,32 @@
               <a:bodyPr/>
               <a:lstStyle/>
               <a:p>
-                <a:endParaRPr lang="en-US" dirty="0"/>
-              </a:p>
-            </p:txBody>
-          </p:sp>
-          <p:sp>
-            <p:nvSpPr>
-              <p:cNvPr id="351" name="Shape 72">
-                <a:extLst>
-                  <a:ext uri="{FF2B5EF4-FFF2-40B4-BE49-F238E27FC236}">
-                    <a16:creationId xmlns:a16="http://schemas.microsoft.com/office/drawing/2014/main" id="{A9401A38-CA94-8CE0-2BEC-C4D85954A3B8}"/>
-                  </a:ext>
-                </a:extLst>
-              </p:cNvPr>
-              <p:cNvSpPr/>
-              <p:nvPr/>
-            </p:nvSpPr>
-            <p:spPr>
-              <a:xfrm>
-                <a:off x="7128525" y="770321"/>
-                <a:ext cx="80467" cy="82459"/>
-              </a:xfrm>
-              <a:prstGeom prst="ellipse">
-                <a:avLst/>
-              </a:prstGeom>
-              <a:solidFill>
-                <a:srgbClr val="993556">
+                <a:endParaRPr lang="en-US"/>
+              </a:p>
+            </p:txBody>
+          </p:sp>
+          <p:sp>
+            <p:nvSpPr>
+              <p:cNvPr id="343" name="Shape 24">
+                <a:extLst>
+                  <a:ext uri="{FF2B5EF4-FFF2-40B4-BE49-F238E27FC236}">
+                    <a16:creationId xmlns:a16="http://schemas.microsoft.com/office/drawing/2014/main" id="{E90DB3D5-0FBC-F23B-A6D7-9A31EDC70250}"/>
+                  </a:ext>
+                </a:extLst>
+              </p:cNvPr>
+              <p:cNvSpPr/>
+              <p:nvPr/>
+            </p:nvSpPr>
+            <p:spPr>
+              <a:xfrm>
+                <a:off x="1929384" y="1499616"/>
+                <a:ext cx="73152" cy="73152"/>
+              </a:xfrm>
+              <a:prstGeom prst="ellipse">
+                <a:avLst/>
+              </a:prstGeom>
+              <a:solidFill>
+                <a:srgbClr val="F89441">
                   <a:alpha val="50000"/>
                 </a:srgbClr>
               </a:solidFill>
@@ -4420,10 +3844,10 @@
         </p:grpSp>
         <p:grpSp>
           <p:nvGrpSpPr>
-            <p:cNvPr id="320" name="Group 319">
+            <p:cNvPr id="328" name="Group 327">
               <a:extLst>
                 <a:ext uri="{FF2B5EF4-FFF2-40B4-BE49-F238E27FC236}">
-                  <a16:creationId xmlns:a16="http://schemas.microsoft.com/office/drawing/2014/main" id="{9BF024D1-EB6F-4A14-F029-B968FFA8B501}"/>
+                  <a16:creationId xmlns:a16="http://schemas.microsoft.com/office/drawing/2014/main" id="{C292E525-C8FD-BA2B-5D07-FD48454C8F5B}"/>
                 </a:ext>
               </a:extLst>
             </p:cNvPr>
@@ -4432,38 +3856,38 @@
           </p:nvGrpSpPr>
           <p:grpSpPr>
             <a:xfrm>
-              <a:off x="1639004" y="3683126"/>
-              <a:ext cx="150129" cy="143298"/>
-              <a:chOff x="7067843" y="717976"/>
-              <a:chExt cx="201168" cy="206147"/>
+              <a:off x="3590528" y="4551214"/>
+              <a:ext cx="150129" cy="139837"/>
+              <a:chOff x="1225296" y="1527048"/>
+              <a:chExt cx="201168" cy="201168"/>
             </a:xfrm>
           </p:grpSpPr>
           <p:sp>
             <p:nvSpPr>
-              <p:cNvPr id="348" name="Shape 71">
-                <a:extLst>
-                  <a:ext uri="{FF2B5EF4-FFF2-40B4-BE49-F238E27FC236}">
-                    <a16:creationId xmlns:a16="http://schemas.microsoft.com/office/drawing/2014/main" id="{0AF21DB3-7097-A290-4A9E-5895C8B81C31}"/>
-                  </a:ext>
-                </a:extLst>
-              </p:cNvPr>
-              <p:cNvSpPr/>
-              <p:nvPr/>
-            </p:nvSpPr>
-            <p:spPr>
-              <a:xfrm>
-                <a:off x="7067843" y="717976"/>
-                <a:ext cx="201168" cy="206147"/>
-              </a:xfrm>
-              <a:prstGeom prst="ellipse">
-                <a:avLst/>
-              </a:prstGeom>
-              <a:solidFill>
-                <a:srgbClr val="FBEAF0"/>
-              </a:solidFill>
-              <a:ln w="22225">
-                <a:solidFill>
-                  <a:srgbClr val="993556"/>
+              <p:cNvPr id="332" name="Shape 15">
+                <a:extLst>
+                  <a:ext uri="{FF2B5EF4-FFF2-40B4-BE49-F238E27FC236}">
+                    <a16:creationId xmlns:a16="http://schemas.microsoft.com/office/drawing/2014/main" id="{4F7145B9-5D49-6E63-39C6-81583E71324E}"/>
+                  </a:ext>
+                </a:extLst>
+              </p:cNvPr>
+              <p:cNvSpPr/>
+              <p:nvPr/>
+            </p:nvSpPr>
+            <p:spPr>
+              <a:xfrm>
+                <a:off x="1225296" y="1527048"/>
+                <a:ext cx="201168" cy="201168"/>
+              </a:xfrm>
+              <a:prstGeom prst="ellipse">
+                <a:avLst/>
+              </a:prstGeom>
+              <a:solidFill>
+                <a:srgbClr val="E8E6FF"/>
+              </a:solidFill>
+              <a:ln w="9525">
+                <a:solidFill>
+                  <a:srgbClr val="0D0887"/>
                 </a:solidFill>
                 <a:prstDash val="solid"/>
               </a:ln>
@@ -4472,32 +3896,32 @@
               <a:bodyPr/>
               <a:lstStyle/>
               <a:p>
-                <a:endParaRPr lang="en-US" dirty="0"/>
-              </a:p>
-            </p:txBody>
-          </p:sp>
-          <p:sp>
-            <p:nvSpPr>
-              <p:cNvPr id="349" name="Shape 72">
-                <a:extLst>
-                  <a:ext uri="{FF2B5EF4-FFF2-40B4-BE49-F238E27FC236}">
-                    <a16:creationId xmlns:a16="http://schemas.microsoft.com/office/drawing/2014/main" id="{E948EA77-5230-E756-5829-34D3DE4834FC}"/>
-                  </a:ext>
-                </a:extLst>
-              </p:cNvPr>
-              <p:cNvSpPr/>
-              <p:nvPr/>
-            </p:nvSpPr>
-            <p:spPr>
-              <a:xfrm>
-                <a:off x="7128525" y="770321"/>
-                <a:ext cx="80467" cy="82459"/>
-              </a:xfrm>
-              <a:prstGeom prst="ellipse">
-                <a:avLst/>
-              </a:prstGeom>
-              <a:solidFill>
-                <a:srgbClr val="993556">
+                <a:endParaRPr lang="en-US"/>
+              </a:p>
+            </p:txBody>
+          </p:sp>
+          <p:sp>
+            <p:nvSpPr>
+              <p:cNvPr id="333" name="Shape 16">
+                <a:extLst>
+                  <a:ext uri="{FF2B5EF4-FFF2-40B4-BE49-F238E27FC236}">
+                    <a16:creationId xmlns:a16="http://schemas.microsoft.com/office/drawing/2014/main" id="{C735F017-754C-D60D-75BD-F97D835B3E17}"/>
+                  </a:ext>
+                </a:extLst>
+              </p:cNvPr>
+              <p:cNvSpPr/>
+              <p:nvPr/>
+            </p:nvSpPr>
+            <p:spPr>
+              <a:xfrm>
+                <a:off x="1285646" y="1587398"/>
+                <a:ext cx="80467" cy="80467"/>
+              </a:xfrm>
+              <a:prstGeom prst="ellipse">
+                <a:avLst/>
+              </a:prstGeom>
+              <a:solidFill>
+                <a:srgbClr val="0D0887">
                   <a:alpha val="50000"/>
                 </a:srgbClr>
               </a:solidFill>
@@ -4514,10 +3938,10 @@
         </p:grpSp>
         <p:grpSp>
           <p:nvGrpSpPr>
-            <p:cNvPr id="321" name="Group 320">
+            <p:cNvPr id="329" name="Group 328">
               <a:extLst>
                 <a:ext uri="{FF2B5EF4-FFF2-40B4-BE49-F238E27FC236}">
-                  <a16:creationId xmlns:a16="http://schemas.microsoft.com/office/drawing/2014/main" id="{3A49F0A8-602F-0D8B-23E9-A5755E26A8E1}"/>
+                  <a16:creationId xmlns:a16="http://schemas.microsoft.com/office/drawing/2014/main" id="{45B1AA52-37A2-BBBB-1C1D-5EEB238E7035}"/>
                 </a:ext>
               </a:extLst>
             </p:cNvPr>
@@ -4526,7 +3950,7 @@
           </p:nvGrpSpPr>
           <p:grpSpPr>
             <a:xfrm>
-              <a:off x="1920301" y="3648457"/>
+              <a:off x="4152655" y="4496903"/>
               <a:ext cx="150129" cy="143298"/>
               <a:chOff x="7067843" y="717976"/>
               <a:chExt cx="201168" cy="206147"/>
@@ -4534,10 +3958,10 @@
           </p:grpSpPr>
           <p:sp>
             <p:nvSpPr>
-              <p:cNvPr id="346" name="Shape 71">
-                <a:extLst>
-                  <a:ext uri="{FF2B5EF4-FFF2-40B4-BE49-F238E27FC236}">
-                    <a16:creationId xmlns:a16="http://schemas.microsoft.com/office/drawing/2014/main" id="{B06C90E0-46C5-9C06-8A47-D5CFC2D81172}"/>
+              <p:cNvPr id="330" name="Shape 71">
+                <a:extLst>
+                  <a:ext uri="{FF2B5EF4-FFF2-40B4-BE49-F238E27FC236}">
+                    <a16:creationId xmlns:a16="http://schemas.microsoft.com/office/drawing/2014/main" id="{90F916C6-6BDE-1C01-A0A7-434E3E7541DC}"/>
                   </a:ext>
                 </a:extLst>
               </p:cNvPr>
@@ -4553,11 +3977,11 @@
                 <a:avLst/>
               </a:prstGeom>
               <a:solidFill>
-                <a:srgbClr val="FBEAF0"/>
+                <a:srgbClr val="FDEAE8"/>
               </a:solidFill>
               <a:ln w="22225">
                 <a:solidFill>
-                  <a:srgbClr val="993556"/>
+                  <a:srgbClr val="E56B5D"/>
                 </a:solidFill>
                 <a:prstDash val="solid"/>
               </a:ln>
@@ -4572,10 +3996,10 @@
           </p:sp>
           <p:sp>
             <p:nvSpPr>
-              <p:cNvPr id="347" name="Shape 72">
-                <a:extLst>
-                  <a:ext uri="{FF2B5EF4-FFF2-40B4-BE49-F238E27FC236}">
-                    <a16:creationId xmlns:a16="http://schemas.microsoft.com/office/drawing/2014/main" id="{805F0604-3F71-850B-615F-F08162314615}"/>
+              <p:cNvPr id="331" name="Shape 72">
+                <a:extLst>
+                  <a:ext uri="{FF2B5EF4-FFF2-40B4-BE49-F238E27FC236}">
+                    <a16:creationId xmlns:a16="http://schemas.microsoft.com/office/drawing/2014/main" id="{EEB37BF7-7413-19F5-5B65-E677863D6EE6}"/>
                   </a:ext>
                 </a:extLst>
               </p:cNvPr>
@@ -4591,7 +4015,7 @@
                 <a:avLst/>
               </a:prstGeom>
               <a:solidFill>
-                <a:srgbClr val="993556">
+                <a:srgbClr val="E56B5D">
                   <a:alpha val="50000"/>
                 </a:srgbClr>
               </a:solidFill>
@@ -4608,10 +4032,10 @@
         </p:grpSp>
         <p:grpSp>
           <p:nvGrpSpPr>
-            <p:cNvPr id="322" name="Group 321">
+            <p:cNvPr id="132" name="Group 131">
               <a:extLst>
                 <a:ext uri="{FF2B5EF4-FFF2-40B4-BE49-F238E27FC236}">
-                  <a16:creationId xmlns:a16="http://schemas.microsoft.com/office/drawing/2014/main" id="{2574CE83-6FE3-1F94-6CD3-A5078917061D}"/>
+                  <a16:creationId xmlns:a16="http://schemas.microsoft.com/office/drawing/2014/main" id="{6BDA7FA1-C538-4734-6E24-9787A58CFC40}"/>
                 </a:ext>
               </a:extLst>
             </p:cNvPr>
@@ -4620,7 +4044,7 @@
           </p:nvGrpSpPr>
           <p:grpSpPr>
             <a:xfrm>
-              <a:off x="1423499" y="3465034"/>
+              <a:off x="4159225" y="4055737"/>
               <a:ext cx="150129" cy="143298"/>
               <a:chOff x="7067843" y="717976"/>
               <a:chExt cx="201168" cy="206147"/>
@@ -4628,10 +4052,10 @@
           </p:grpSpPr>
           <p:sp>
             <p:nvSpPr>
-              <p:cNvPr id="344" name="Shape 71">
-                <a:extLst>
-                  <a:ext uri="{FF2B5EF4-FFF2-40B4-BE49-F238E27FC236}">
-                    <a16:creationId xmlns:a16="http://schemas.microsoft.com/office/drawing/2014/main" id="{F001F007-27E8-00B3-57DA-0D519F7C2EAA}"/>
+              <p:cNvPr id="133" name="Shape 71">
+                <a:extLst>
+                  <a:ext uri="{FF2B5EF4-FFF2-40B4-BE49-F238E27FC236}">
+                    <a16:creationId xmlns:a16="http://schemas.microsoft.com/office/drawing/2014/main" id="{D6C443CE-DD41-BE1C-7E95-CACA58190A1C}"/>
                   </a:ext>
                 </a:extLst>
               </p:cNvPr>
@@ -4647,11 +4071,11 @@
                 <a:avLst/>
               </a:prstGeom>
               <a:solidFill>
-                <a:srgbClr val="FBEAF0"/>
+                <a:srgbClr val="FDEAE8"/>
               </a:solidFill>
               <a:ln w="22225">
                 <a:solidFill>
-                  <a:srgbClr val="993556"/>
+                  <a:srgbClr val="E56B5D"/>
                 </a:solidFill>
                 <a:prstDash val="solid"/>
               </a:ln>
@@ -4666,10 +4090,10 @@
           </p:sp>
           <p:sp>
             <p:nvSpPr>
-              <p:cNvPr id="345" name="Shape 72">
-                <a:extLst>
-                  <a:ext uri="{FF2B5EF4-FFF2-40B4-BE49-F238E27FC236}">
-                    <a16:creationId xmlns:a16="http://schemas.microsoft.com/office/drawing/2014/main" id="{2DC84032-4464-1B32-3E76-8B4A7682598C}"/>
+              <p:cNvPr id="134" name="Shape 72">
+                <a:extLst>
+                  <a:ext uri="{FF2B5EF4-FFF2-40B4-BE49-F238E27FC236}">
+                    <a16:creationId xmlns:a16="http://schemas.microsoft.com/office/drawing/2014/main" id="{2998C28F-FEF3-9A4F-F586-62B19EE538AC}"/>
                   </a:ext>
                 </a:extLst>
               </p:cNvPr>
@@ -4685,7 +4109,7 @@
                 <a:avLst/>
               </a:prstGeom>
               <a:solidFill>
-                <a:srgbClr val="993556">
+                <a:srgbClr val="E56B5D">
                   <a:alpha val="50000"/>
                 </a:srgbClr>
               </a:solidFill>
@@ -4700,12 +4124,33 @@
             </p:txBody>
           </p:sp>
         </p:grpSp>
+      </p:grpSp>
+      <p:grpSp>
+        <p:nvGrpSpPr>
+          <p:cNvPr id="136" name="Group 135">
+            <a:extLst>
+              <a:ext uri="{FF2B5EF4-FFF2-40B4-BE49-F238E27FC236}">
+                <a16:creationId xmlns:a16="http://schemas.microsoft.com/office/drawing/2014/main" id="{CD17D603-0E2D-81A4-5ADE-93FD783AFF25}"/>
+              </a:ext>
+            </a:extLst>
+          </p:cNvPr>
+          <p:cNvGrpSpPr/>
+          <p:nvPr/>
+        </p:nvGrpSpPr>
+        <p:grpSpPr>
+          <a:xfrm>
+            <a:off x="5935813" y="2372528"/>
+            <a:ext cx="1146344" cy="834302"/>
+            <a:chOff x="5705688" y="3918032"/>
+            <a:chExt cx="1146344" cy="834302"/>
+          </a:xfrm>
+        </p:grpSpPr>
         <p:grpSp>
           <p:nvGrpSpPr>
-            <p:cNvPr id="323" name="Group 322">
+            <p:cNvPr id="137" name="Group 136">
               <a:extLst>
                 <a:ext uri="{FF2B5EF4-FFF2-40B4-BE49-F238E27FC236}">
-                  <a16:creationId xmlns:a16="http://schemas.microsoft.com/office/drawing/2014/main" id="{E1D38702-F9C7-CD28-831E-4492A8353FB1}"/>
+                  <a16:creationId xmlns:a16="http://schemas.microsoft.com/office/drawing/2014/main" id="{2790B2F5-9EFF-91EB-ECD6-57ECD6939391}"/>
                 </a:ext>
               </a:extLst>
             </p:cNvPr>
@@ -4714,38 +4159,38 @@
           </p:nvGrpSpPr>
           <p:grpSpPr>
             <a:xfrm>
-              <a:off x="900954" y="3625500"/>
-              <a:ext cx="136481" cy="127125"/>
-              <a:chOff x="1874520" y="1444752"/>
-              <a:chExt cx="182880" cy="182880"/>
+              <a:off x="6000059" y="4311170"/>
+              <a:ext cx="150129" cy="139837"/>
+              <a:chOff x="1225296" y="1527048"/>
+              <a:chExt cx="201168" cy="201168"/>
             </a:xfrm>
           </p:grpSpPr>
           <p:sp>
             <p:nvSpPr>
-              <p:cNvPr id="342" name="Shape 23">
-                <a:extLst>
-                  <a:ext uri="{FF2B5EF4-FFF2-40B4-BE49-F238E27FC236}">
-                    <a16:creationId xmlns:a16="http://schemas.microsoft.com/office/drawing/2014/main" id="{FFCCABB5-954C-B1D0-CF03-C1B8A2FA0AEF}"/>
-                  </a:ext>
-                </a:extLst>
-              </p:cNvPr>
-              <p:cNvSpPr/>
-              <p:nvPr/>
-            </p:nvSpPr>
-            <p:spPr>
-              <a:xfrm>
-                <a:off x="1874520" y="1444752"/>
-                <a:ext cx="182880" cy="182880"/>
-              </a:xfrm>
-              <a:prstGeom prst="ellipse">
-                <a:avLst/>
-              </a:prstGeom>
-              <a:solidFill>
-                <a:srgbClr val="F0997B"/>
+              <p:cNvPr id="219" name="Shape 15">
+                <a:extLst>
+                  <a:ext uri="{FF2B5EF4-FFF2-40B4-BE49-F238E27FC236}">
+                    <a16:creationId xmlns:a16="http://schemas.microsoft.com/office/drawing/2014/main" id="{37CB4B3C-BBFA-0C36-9978-CDD1660E9B79}"/>
+                  </a:ext>
+                </a:extLst>
+              </p:cNvPr>
+              <p:cNvSpPr/>
+              <p:nvPr/>
+            </p:nvSpPr>
+            <p:spPr>
+              <a:xfrm>
+                <a:off x="1225296" y="1527048"/>
+                <a:ext cx="201168" cy="201168"/>
+              </a:xfrm>
+              <a:prstGeom prst="ellipse">
+                <a:avLst/>
+              </a:prstGeom>
+              <a:solidFill>
+                <a:srgbClr val="E8E6FF"/>
               </a:solidFill>
               <a:ln w="9525">
                 <a:solidFill>
-                  <a:srgbClr val="993C1D"/>
+                  <a:srgbClr val="0D0887"/>
                 </a:solidFill>
                 <a:prstDash val="solid"/>
               </a:ln>
@@ -4760,26 +4205,26 @@
           </p:sp>
           <p:sp>
             <p:nvSpPr>
-              <p:cNvPr id="343" name="Shape 24">
-                <a:extLst>
-                  <a:ext uri="{FF2B5EF4-FFF2-40B4-BE49-F238E27FC236}">
-                    <a16:creationId xmlns:a16="http://schemas.microsoft.com/office/drawing/2014/main" id="{81E78B80-E8C1-B6EC-4D97-98BC9737C971}"/>
-                  </a:ext>
-                </a:extLst>
-              </p:cNvPr>
-              <p:cNvSpPr/>
-              <p:nvPr/>
-            </p:nvSpPr>
-            <p:spPr>
-              <a:xfrm>
-                <a:off x="1929384" y="1499616"/>
-                <a:ext cx="73152" cy="73152"/>
-              </a:xfrm>
-              <a:prstGeom prst="ellipse">
-                <a:avLst/>
-              </a:prstGeom>
-              <a:solidFill>
-                <a:srgbClr val="993C1D">
+              <p:cNvPr id="220" name="Shape 16">
+                <a:extLst>
+                  <a:ext uri="{FF2B5EF4-FFF2-40B4-BE49-F238E27FC236}">
+                    <a16:creationId xmlns:a16="http://schemas.microsoft.com/office/drawing/2014/main" id="{FBE5FA3B-5C0C-8B10-3A2F-A2D26563445B}"/>
+                  </a:ext>
+                </a:extLst>
+              </p:cNvPr>
+              <p:cNvSpPr/>
+              <p:nvPr/>
+            </p:nvSpPr>
+            <p:spPr>
+              <a:xfrm>
+                <a:off x="1285646" y="1587398"/>
+                <a:ext cx="80467" cy="80467"/>
+              </a:xfrm>
+              <a:prstGeom prst="ellipse">
+                <a:avLst/>
+              </a:prstGeom>
+              <a:solidFill>
+                <a:srgbClr val="0D0887">
                   <a:alpha val="50000"/>
                 </a:srgbClr>
               </a:solidFill>
@@ -4796,10 +4241,10 @@
         </p:grpSp>
         <p:grpSp>
           <p:nvGrpSpPr>
-            <p:cNvPr id="324" name="Group 323">
+            <p:cNvPr id="138" name="Group 137">
               <a:extLst>
                 <a:ext uri="{FF2B5EF4-FFF2-40B4-BE49-F238E27FC236}">
-                  <a16:creationId xmlns:a16="http://schemas.microsoft.com/office/drawing/2014/main" id="{DDE7A4B2-31AC-5A48-FDD2-DAB9E69CF373}"/>
+                  <a16:creationId xmlns:a16="http://schemas.microsoft.com/office/drawing/2014/main" id="{82A06E96-AFE5-8F0C-75BC-FAEB609ADB7C}"/>
                 </a:ext>
               </a:extLst>
             </p:cNvPr>
@@ -4808,7 +4253,759 @@
           </p:nvGrpSpPr>
           <p:grpSpPr>
             <a:xfrm>
-              <a:off x="881333" y="3616184"/>
+              <a:off x="6288313" y="4379804"/>
+              <a:ext cx="136481" cy="127125"/>
+              <a:chOff x="1874520" y="1444752"/>
+              <a:chExt cx="182880" cy="182880"/>
+            </a:xfrm>
+          </p:grpSpPr>
+          <p:sp>
+            <p:nvSpPr>
+              <p:cNvPr id="217" name="Shape 23">
+                <a:extLst>
+                  <a:ext uri="{FF2B5EF4-FFF2-40B4-BE49-F238E27FC236}">
+                    <a16:creationId xmlns:a16="http://schemas.microsoft.com/office/drawing/2014/main" id="{F6671689-1E27-3DBA-BC44-091814D59787}"/>
+                  </a:ext>
+                </a:extLst>
+              </p:cNvPr>
+              <p:cNvSpPr/>
+              <p:nvPr/>
+            </p:nvSpPr>
+            <p:spPr>
+              <a:xfrm>
+                <a:off x="1874520" y="1444752"/>
+                <a:ext cx="182880" cy="182880"/>
+              </a:xfrm>
+              <a:prstGeom prst="ellipse">
+                <a:avLst/>
+              </a:prstGeom>
+              <a:solidFill>
+                <a:srgbClr val="FDEBD0"/>
+              </a:solidFill>
+              <a:ln w="9525">
+                <a:solidFill>
+                  <a:srgbClr val="F89441"/>
+                </a:solidFill>
+                <a:prstDash val="solid"/>
+              </a:ln>
+            </p:spPr>
+            <p:txBody>
+              <a:bodyPr/>
+              <a:lstStyle/>
+              <a:p>
+                <a:endParaRPr lang="en-US"/>
+              </a:p>
+            </p:txBody>
+          </p:sp>
+          <p:sp>
+            <p:nvSpPr>
+              <p:cNvPr id="218" name="Shape 24">
+                <a:extLst>
+                  <a:ext uri="{FF2B5EF4-FFF2-40B4-BE49-F238E27FC236}">
+                    <a16:creationId xmlns:a16="http://schemas.microsoft.com/office/drawing/2014/main" id="{A47E33A5-FD66-7871-9AEF-656184227637}"/>
+                  </a:ext>
+                </a:extLst>
+              </p:cNvPr>
+              <p:cNvSpPr/>
+              <p:nvPr/>
+            </p:nvSpPr>
+            <p:spPr>
+              <a:xfrm>
+                <a:off x="1929384" y="1499616"/>
+                <a:ext cx="73152" cy="73152"/>
+              </a:xfrm>
+              <a:prstGeom prst="ellipse">
+                <a:avLst/>
+              </a:prstGeom>
+              <a:solidFill>
+                <a:srgbClr val="F89441">
+                  <a:alpha val="50000"/>
+                </a:srgbClr>
+              </a:solidFill>
+              <a:ln/>
+            </p:spPr>
+            <p:txBody>
+              <a:bodyPr/>
+              <a:lstStyle/>
+              <a:p>
+                <a:endParaRPr lang="en-US"/>
+              </a:p>
+            </p:txBody>
+          </p:sp>
+        </p:grpSp>
+        <p:grpSp>
+          <p:nvGrpSpPr>
+            <p:cNvPr id="139" name="Group 138">
+              <a:extLst>
+                <a:ext uri="{FF2B5EF4-FFF2-40B4-BE49-F238E27FC236}">
+                  <a16:creationId xmlns:a16="http://schemas.microsoft.com/office/drawing/2014/main" id="{537DEDA6-3424-5220-80B7-31D62DE43FC2}"/>
+                </a:ext>
+              </a:extLst>
+            </p:cNvPr>
+            <p:cNvGrpSpPr/>
+            <p:nvPr/>
+          </p:nvGrpSpPr>
+          <p:grpSpPr>
+            <a:xfrm>
+              <a:off x="6392309" y="4612497"/>
+              <a:ext cx="150129" cy="139837"/>
+              <a:chOff x="1225296" y="1527048"/>
+              <a:chExt cx="201168" cy="201168"/>
+            </a:xfrm>
+          </p:grpSpPr>
+          <p:sp>
+            <p:nvSpPr>
+              <p:cNvPr id="215" name="Shape 15">
+                <a:extLst>
+                  <a:ext uri="{FF2B5EF4-FFF2-40B4-BE49-F238E27FC236}">
+                    <a16:creationId xmlns:a16="http://schemas.microsoft.com/office/drawing/2014/main" id="{1934AC94-A97D-AF16-FEBE-5AB56C06EC36}"/>
+                  </a:ext>
+                </a:extLst>
+              </p:cNvPr>
+              <p:cNvSpPr/>
+              <p:nvPr/>
+            </p:nvSpPr>
+            <p:spPr>
+              <a:xfrm>
+                <a:off x="1225296" y="1527048"/>
+                <a:ext cx="201168" cy="201168"/>
+              </a:xfrm>
+              <a:prstGeom prst="ellipse">
+                <a:avLst/>
+              </a:prstGeom>
+              <a:solidFill>
+                <a:srgbClr val="E8E6FF"/>
+              </a:solidFill>
+              <a:ln w="9525">
+                <a:solidFill>
+                  <a:srgbClr val="0D0887"/>
+                </a:solidFill>
+                <a:prstDash val="solid"/>
+              </a:ln>
+            </p:spPr>
+            <p:txBody>
+              <a:bodyPr/>
+              <a:lstStyle/>
+              <a:p>
+                <a:endParaRPr lang="en-US"/>
+              </a:p>
+            </p:txBody>
+          </p:sp>
+          <p:sp>
+            <p:nvSpPr>
+              <p:cNvPr id="216" name="Shape 16">
+                <a:extLst>
+                  <a:ext uri="{FF2B5EF4-FFF2-40B4-BE49-F238E27FC236}">
+                    <a16:creationId xmlns:a16="http://schemas.microsoft.com/office/drawing/2014/main" id="{69ADF84E-7C25-0076-9632-C2C182294D41}"/>
+                  </a:ext>
+                </a:extLst>
+              </p:cNvPr>
+              <p:cNvSpPr/>
+              <p:nvPr/>
+            </p:nvSpPr>
+            <p:spPr>
+              <a:xfrm>
+                <a:off x="1285646" y="1587398"/>
+                <a:ext cx="80467" cy="80467"/>
+              </a:xfrm>
+              <a:prstGeom prst="ellipse">
+                <a:avLst/>
+              </a:prstGeom>
+              <a:solidFill>
+                <a:srgbClr val="0D0887">
+                  <a:alpha val="50000"/>
+                </a:srgbClr>
+              </a:solidFill>
+              <a:ln/>
+            </p:spPr>
+            <p:txBody>
+              <a:bodyPr/>
+              <a:lstStyle/>
+              <a:p>
+                <a:endParaRPr lang="en-US"/>
+              </a:p>
+            </p:txBody>
+          </p:sp>
+        </p:grpSp>
+        <p:grpSp>
+          <p:nvGrpSpPr>
+            <p:cNvPr id="140" name="Group 139">
+              <a:extLst>
+                <a:ext uri="{FF2B5EF4-FFF2-40B4-BE49-F238E27FC236}">
+                  <a16:creationId xmlns:a16="http://schemas.microsoft.com/office/drawing/2014/main" id="{7A576956-475A-25E7-0A61-DC4460C74B60}"/>
+                </a:ext>
+              </a:extLst>
+            </p:cNvPr>
+            <p:cNvGrpSpPr/>
+            <p:nvPr/>
+          </p:nvGrpSpPr>
+          <p:grpSpPr>
+            <a:xfrm>
+              <a:off x="5768602" y="4510100"/>
+              <a:ext cx="150129" cy="139837"/>
+              <a:chOff x="1225296" y="1527048"/>
+              <a:chExt cx="201168" cy="201168"/>
+            </a:xfrm>
+          </p:grpSpPr>
+          <p:sp>
+            <p:nvSpPr>
+              <p:cNvPr id="213" name="Shape 15">
+                <a:extLst>
+                  <a:ext uri="{FF2B5EF4-FFF2-40B4-BE49-F238E27FC236}">
+                    <a16:creationId xmlns:a16="http://schemas.microsoft.com/office/drawing/2014/main" id="{943C4D43-561A-7DE3-56A0-1BFE71DBDCAD}"/>
+                  </a:ext>
+                </a:extLst>
+              </p:cNvPr>
+              <p:cNvSpPr/>
+              <p:nvPr/>
+            </p:nvSpPr>
+            <p:spPr>
+              <a:xfrm>
+                <a:off x="1225296" y="1527048"/>
+                <a:ext cx="201168" cy="201168"/>
+              </a:xfrm>
+              <a:prstGeom prst="ellipse">
+                <a:avLst/>
+              </a:prstGeom>
+              <a:solidFill>
+                <a:srgbClr val="E8E6FF"/>
+              </a:solidFill>
+              <a:ln w="9525">
+                <a:solidFill>
+                  <a:srgbClr val="0D0887"/>
+                </a:solidFill>
+                <a:prstDash val="solid"/>
+              </a:ln>
+            </p:spPr>
+            <p:txBody>
+              <a:bodyPr/>
+              <a:lstStyle/>
+              <a:p>
+                <a:endParaRPr lang="en-US"/>
+              </a:p>
+            </p:txBody>
+          </p:sp>
+          <p:sp>
+            <p:nvSpPr>
+              <p:cNvPr id="214" name="Shape 16">
+                <a:extLst>
+                  <a:ext uri="{FF2B5EF4-FFF2-40B4-BE49-F238E27FC236}">
+                    <a16:creationId xmlns:a16="http://schemas.microsoft.com/office/drawing/2014/main" id="{A5ACCB96-9BE9-3DE7-322F-FBDBD648D593}"/>
+                  </a:ext>
+                </a:extLst>
+              </p:cNvPr>
+              <p:cNvSpPr/>
+              <p:nvPr/>
+            </p:nvSpPr>
+            <p:spPr>
+              <a:xfrm>
+                <a:off x="1285646" y="1587398"/>
+                <a:ext cx="80467" cy="80467"/>
+              </a:xfrm>
+              <a:prstGeom prst="ellipse">
+                <a:avLst/>
+              </a:prstGeom>
+              <a:solidFill>
+                <a:srgbClr val="0D0887">
+                  <a:alpha val="50000"/>
+                </a:srgbClr>
+              </a:solidFill>
+              <a:ln/>
+            </p:spPr>
+            <p:txBody>
+              <a:bodyPr/>
+              <a:lstStyle/>
+              <a:p>
+                <a:endParaRPr lang="en-US"/>
+              </a:p>
+            </p:txBody>
+          </p:sp>
+        </p:grpSp>
+        <p:grpSp>
+          <p:nvGrpSpPr>
+            <p:cNvPr id="141" name="Group 140">
+              <a:extLst>
+                <a:ext uri="{FF2B5EF4-FFF2-40B4-BE49-F238E27FC236}">
+                  <a16:creationId xmlns:a16="http://schemas.microsoft.com/office/drawing/2014/main" id="{02CC4A93-AB9C-34CD-6E24-3CF1D45B57E2}"/>
+                </a:ext>
+              </a:extLst>
+            </p:cNvPr>
+            <p:cNvGrpSpPr/>
+            <p:nvPr/>
+          </p:nvGrpSpPr>
+          <p:grpSpPr>
+            <a:xfrm>
+              <a:off x="6551774" y="4345888"/>
+              <a:ext cx="150129" cy="143298"/>
+              <a:chOff x="7067843" y="717976"/>
+              <a:chExt cx="201168" cy="206147"/>
+            </a:xfrm>
+          </p:grpSpPr>
+          <p:sp>
+            <p:nvSpPr>
+              <p:cNvPr id="211" name="Shape 71">
+                <a:extLst>
+                  <a:ext uri="{FF2B5EF4-FFF2-40B4-BE49-F238E27FC236}">
+                    <a16:creationId xmlns:a16="http://schemas.microsoft.com/office/drawing/2014/main" id="{9C56EC6E-DE77-0C83-9FF6-A03E2BF46F6C}"/>
+                  </a:ext>
+                </a:extLst>
+              </p:cNvPr>
+              <p:cNvSpPr/>
+              <p:nvPr/>
+            </p:nvSpPr>
+            <p:spPr>
+              <a:xfrm>
+                <a:off x="7067843" y="717976"/>
+                <a:ext cx="201168" cy="206147"/>
+              </a:xfrm>
+              <a:prstGeom prst="ellipse">
+                <a:avLst/>
+              </a:prstGeom>
+              <a:solidFill>
+                <a:srgbClr val="FDEAE8"/>
+              </a:solidFill>
+              <a:ln w="22225">
+                <a:solidFill>
+                  <a:srgbClr val="E56B5D"/>
+                </a:solidFill>
+                <a:prstDash val="solid"/>
+              </a:ln>
+            </p:spPr>
+            <p:txBody>
+              <a:bodyPr/>
+              <a:lstStyle/>
+              <a:p>
+                <a:endParaRPr lang="en-US" dirty="0"/>
+              </a:p>
+            </p:txBody>
+          </p:sp>
+          <p:sp>
+            <p:nvSpPr>
+              <p:cNvPr id="212" name="Shape 72">
+                <a:extLst>
+                  <a:ext uri="{FF2B5EF4-FFF2-40B4-BE49-F238E27FC236}">
+                    <a16:creationId xmlns:a16="http://schemas.microsoft.com/office/drawing/2014/main" id="{ECEA4EB9-34D7-1509-115F-81A2F899F1AF}"/>
+                  </a:ext>
+                </a:extLst>
+              </p:cNvPr>
+              <p:cNvSpPr/>
+              <p:nvPr/>
+            </p:nvSpPr>
+            <p:spPr>
+              <a:xfrm>
+                <a:off x="7128525" y="770321"/>
+                <a:ext cx="80467" cy="82459"/>
+              </a:xfrm>
+              <a:prstGeom prst="ellipse">
+                <a:avLst/>
+              </a:prstGeom>
+              <a:solidFill>
+                <a:srgbClr val="E56B5D">
+                  <a:alpha val="50000"/>
+                </a:srgbClr>
+              </a:solidFill>
+              <a:ln/>
+            </p:spPr>
+            <p:txBody>
+              <a:bodyPr/>
+              <a:lstStyle/>
+              <a:p>
+                <a:endParaRPr lang="en-US"/>
+              </a:p>
+            </p:txBody>
+          </p:sp>
+        </p:grpSp>
+        <p:grpSp>
+          <p:nvGrpSpPr>
+            <p:cNvPr id="142" name="Group 141">
+              <a:extLst>
+                <a:ext uri="{FF2B5EF4-FFF2-40B4-BE49-F238E27FC236}">
+                  <a16:creationId xmlns:a16="http://schemas.microsoft.com/office/drawing/2014/main" id="{72550B91-BA95-F1CE-AEBB-343FA74E1DCF}"/>
+                </a:ext>
+              </a:extLst>
+            </p:cNvPr>
+            <p:cNvGrpSpPr/>
+            <p:nvPr/>
+          </p:nvGrpSpPr>
+          <p:grpSpPr>
+            <a:xfrm>
+              <a:off x="6133206" y="4136220"/>
+              <a:ext cx="150129" cy="143298"/>
+              <a:chOff x="7067843" y="717976"/>
+              <a:chExt cx="201168" cy="206147"/>
+            </a:xfrm>
+          </p:grpSpPr>
+          <p:sp>
+            <p:nvSpPr>
+              <p:cNvPr id="179" name="Shape 71">
+                <a:extLst>
+                  <a:ext uri="{FF2B5EF4-FFF2-40B4-BE49-F238E27FC236}">
+                    <a16:creationId xmlns:a16="http://schemas.microsoft.com/office/drawing/2014/main" id="{45633C5C-8D29-7E5D-4F80-B0E7EB56A1CE}"/>
+                  </a:ext>
+                </a:extLst>
+              </p:cNvPr>
+              <p:cNvSpPr/>
+              <p:nvPr/>
+            </p:nvSpPr>
+            <p:spPr>
+              <a:xfrm>
+                <a:off x="7067843" y="717976"/>
+                <a:ext cx="201168" cy="206147"/>
+              </a:xfrm>
+              <a:prstGeom prst="ellipse">
+                <a:avLst/>
+              </a:prstGeom>
+              <a:solidFill>
+                <a:srgbClr val="FDEAE8"/>
+              </a:solidFill>
+              <a:ln w="22225">
+                <a:solidFill>
+                  <a:srgbClr val="E56B5D"/>
+                </a:solidFill>
+                <a:prstDash val="solid"/>
+              </a:ln>
+            </p:spPr>
+            <p:txBody>
+              <a:bodyPr/>
+              <a:lstStyle/>
+              <a:p>
+                <a:endParaRPr lang="en-US" dirty="0"/>
+              </a:p>
+            </p:txBody>
+          </p:sp>
+          <p:sp>
+            <p:nvSpPr>
+              <p:cNvPr id="199" name="Shape 72">
+                <a:extLst>
+                  <a:ext uri="{FF2B5EF4-FFF2-40B4-BE49-F238E27FC236}">
+                    <a16:creationId xmlns:a16="http://schemas.microsoft.com/office/drawing/2014/main" id="{C8126350-F6E1-9119-F0DA-5FCB8CB2A158}"/>
+                  </a:ext>
+                </a:extLst>
+              </p:cNvPr>
+              <p:cNvSpPr/>
+              <p:nvPr/>
+            </p:nvSpPr>
+            <p:spPr>
+              <a:xfrm>
+                <a:off x="7128525" y="770321"/>
+                <a:ext cx="80467" cy="82459"/>
+              </a:xfrm>
+              <a:prstGeom prst="ellipse">
+                <a:avLst/>
+              </a:prstGeom>
+              <a:solidFill>
+                <a:srgbClr val="E56B5D">
+                  <a:alpha val="50000"/>
+                </a:srgbClr>
+              </a:solidFill>
+              <a:ln/>
+            </p:spPr>
+            <p:txBody>
+              <a:bodyPr/>
+              <a:lstStyle/>
+              <a:p>
+                <a:endParaRPr lang="en-US"/>
+              </a:p>
+            </p:txBody>
+          </p:sp>
+        </p:grpSp>
+        <p:grpSp>
+          <p:nvGrpSpPr>
+            <p:cNvPr id="143" name="Group 142">
+              <a:extLst>
+                <a:ext uri="{FF2B5EF4-FFF2-40B4-BE49-F238E27FC236}">
+                  <a16:creationId xmlns:a16="http://schemas.microsoft.com/office/drawing/2014/main" id="{0FBF21F0-1808-2A6D-9385-76FA472BA363}"/>
+                </a:ext>
+              </a:extLst>
+            </p:cNvPr>
+            <p:cNvGrpSpPr/>
+            <p:nvPr/>
+          </p:nvGrpSpPr>
+          <p:grpSpPr>
+            <a:xfrm>
+              <a:off x="6417111" y="4073258"/>
+              <a:ext cx="150129" cy="143298"/>
+              <a:chOff x="7067843" y="717976"/>
+              <a:chExt cx="201168" cy="206147"/>
+            </a:xfrm>
+          </p:grpSpPr>
+          <p:sp>
+            <p:nvSpPr>
+              <p:cNvPr id="177" name="Shape 71">
+                <a:extLst>
+                  <a:ext uri="{FF2B5EF4-FFF2-40B4-BE49-F238E27FC236}">
+                    <a16:creationId xmlns:a16="http://schemas.microsoft.com/office/drawing/2014/main" id="{57B8834F-1292-A9C9-E6F4-8230533DD357}"/>
+                  </a:ext>
+                </a:extLst>
+              </p:cNvPr>
+              <p:cNvSpPr/>
+              <p:nvPr/>
+            </p:nvSpPr>
+            <p:spPr>
+              <a:xfrm>
+                <a:off x="7067843" y="717976"/>
+                <a:ext cx="201168" cy="206147"/>
+              </a:xfrm>
+              <a:prstGeom prst="ellipse">
+                <a:avLst/>
+              </a:prstGeom>
+              <a:solidFill>
+                <a:srgbClr val="FDEAE8"/>
+              </a:solidFill>
+              <a:ln w="22225">
+                <a:solidFill>
+                  <a:srgbClr val="E56B5D"/>
+                </a:solidFill>
+                <a:prstDash val="solid"/>
+              </a:ln>
+            </p:spPr>
+            <p:txBody>
+              <a:bodyPr/>
+              <a:lstStyle/>
+              <a:p>
+                <a:endParaRPr lang="en-US" dirty="0"/>
+              </a:p>
+            </p:txBody>
+          </p:sp>
+          <p:sp>
+            <p:nvSpPr>
+              <p:cNvPr id="178" name="Shape 72">
+                <a:extLst>
+                  <a:ext uri="{FF2B5EF4-FFF2-40B4-BE49-F238E27FC236}">
+                    <a16:creationId xmlns:a16="http://schemas.microsoft.com/office/drawing/2014/main" id="{3D2756C7-5135-684B-6F84-D468F0CD7575}"/>
+                  </a:ext>
+                </a:extLst>
+              </p:cNvPr>
+              <p:cNvSpPr/>
+              <p:nvPr/>
+            </p:nvSpPr>
+            <p:spPr>
+              <a:xfrm>
+                <a:off x="7128525" y="770321"/>
+                <a:ext cx="80467" cy="82459"/>
+              </a:xfrm>
+              <a:prstGeom prst="ellipse">
+                <a:avLst/>
+              </a:prstGeom>
+              <a:solidFill>
+                <a:srgbClr val="E56B5D">
+                  <a:alpha val="50000"/>
+                </a:srgbClr>
+              </a:solidFill>
+              <a:ln/>
+            </p:spPr>
+            <p:txBody>
+              <a:bodyPr/>
+              <a:lstStyle/>
+              <a:p>
+                <a:endParaRPr lang="en-US"/>
+              </a:p>
+            </p:txBody>
+          </p:sp>
+        </p:grpSp>
+        <p:grpSp>
+          <p:nvGrpSpPr>
+            <p:cNvPr id="144" name="Group 143">
+              <a:extLst>
+                <a:ext uri="{FF2B5EF4-FFF2-40B4-BE49-F238E27FC236}">
+                  <a16:creationId xmlns:a16="http://schemas.microsoft.com/office/drawing/2014/main" id="{401919C3-FA8D-A341-D35D-63A587FA79E2}"/>
+                </a:ext>
+              </a:extLst>
+            </p:cNvPr>
+            <p:cNvGrpSpPr/>
+            <p:nvPr/>
+          </p:nvGrpSpPr>
+          <p:grpSpPr>
+            <a:xfrm>
+              <a:off x="6080407" y="3918032"/>
+              <a:ext cx="150129" cy="143298"/>
+              <a:chOff x="7067843" y="717976"/>
+              <a:chExt cx="201168" cy="206147"/>
+            </a:xfrm>
+          </p:grpSpPr>
+          <p:sp>
+            <p:nvSpPr>
+              <p:cNvPr id="175" name="Shape 71">
+                <a:extLst>
+                  <a:ext uri="{FF2B5EF4-FFF2-40B4-BE49-F238E27FC236}">
+                    <a16:creationId xmlns:a16="http://schemas.microsoft.com/office/drawing/2014/main" id="{ABAC8FB9-979A-8ADF-E04F-297B16C07904}"/>
+                  </a:ext>
+                </a:extLst>
+              </p:cNvPr>
+              <p:cNvSpPr/>
+              <p:nvPr/>
+            </p:nvSpPr>
+            <p:spPr>
+              <a:xfrm>
+                <a:off x="7067843" y="717976"/>
+                <a:ext cx="201168" cy="206147"/>
+              </a:xfrm>
+              <a:prstGeom prst="ellipse">
+                <a:avLst/>
+              </a:prstGeom>
+              <a:solidFill>
+                <a:srgbClr val="FDEAE8"/>
+              </a:solidFill>
+              <a:ln w="22225">
+                <a:solidFill>
+                  <a:srgbClr val="E56B5D"/>
+                </a:solidFill>
+                <a:prstDash val="solid"/>
+              </a:ln>
+            </p:spPr>
+            <p:txBody>
+              <a:bodyPr/>
+              <a:lstStyle/>
+              <a:p>
+                <a:endParaRPr lang="en-US" dirty="0"/>
+              </a:p>
+            </p:txBody>
+          </p:sp>
+          <p:sp>
+            <p:nvSpPr>
+              <p:cNvPr id="176" name="Shape 72">
+                <a:extLst>
+                  <a:ext uri="{FF2B5EF4-FFF2-40B4-BE49-F238E27FC236}">
+                    <a16:creationId xmlns:a16="http://schemas.microsoft.com/office/drawing/2014/main" id="{BF7D4B27-661B-0B63-7A53-DF7979D2F6C0}"/>
+                  </a:ext>
+                </a:extLst>
+              </p:cNvPr>
+              <p:cNvSpPr/>
+              <p:nvPr/>
+            </p:nvSpPr>
+            <p:spPr>
+              <a:xfrm>
+                <a:off x="7128525" y="770321"/>
+                <a:ext cx="80467" cy="82459"/>
+              </a:xfrm>
+              <a:prstGeom prst="ellipse">
+                <a:avLst/>
+              </a:prstGeom>
+              <a:solidFill>
+                <a:srgbClr val="E56B5D">
+                  <a:alpha val="50000"/>
+                </a:srgbClr>
+              </a:solidFill>
+              <a:ln/>
+            </p:spPr>
+            <p:txBody>
+              <a:bodyPr/>
+              <a:lstStyle/>
+              <a:p>
+                <a:endParaRPr lang="en-US"/>
+              </a:p>
+            </p:txBody>
+          </p:sp>
+        </p:grpSp>
+        <p:grpSp>
+          <p:nvGrpSpPr>
+            <p:cNvPr id="145" name="Group 144">
+              <a:extLst>
+                <a:ext uri="{FF2B5EF4-FFF2-40B4-BE49-F238E27FC236}">
+                  <a16:creationId xmlns:a16="http://schemas.microsoft.com/office/drawing/2014/main" id="{807E6AF0-A093-8A85-45EE-88DE74B6E41C}"/>
+                </a:ext>
+              </a:extLst>
+            </p:cNvPr>
+            <p:cNvGrpSpPr/>
+            <p:nvPr/>
+          </p:nvGrpSpPr>
+          <p:grpSpPr>
+            <a:xfrm>
+              <a:off x="5725309" y="4154223"/>
+              <a:ext cx="136481" cy="127125"/>
+              <a:chOff x="1874520" y="1444752"/>
+              <a:chExt cx="182880" cy="182880"/>
+            </a:xfrm>
+          </p:grpSpPr>
+          <p:sp>
+            <p:nvSpPr>
+              <p:cNvPr id="165" name="Shape 23">
+                <a:extLst>
+                  <a:ext uri="{FF2B5EF4-FFF2-40B4-BE49-F238E27FC236}">
+                    <a16:creationId xmlns:a16="http://schemas.microsoft.com/office/drawing/2014/main" id="{FA3DB74C-9AF1-0E3A-8967-B71A2489CFBA}"/>
+                  </a:ext>
+                </a:extLst>
+              </p:cNvPr>
+              <p:cNvSpPr/>
+              <p:nvPr/>
+            </p:nvSpPr>
+            <p:spPr>
+              <a:xfrm>
+                <a:off x="1874520" y="1444752"/>
+                <a:ext cx="182880" cy="182880"/>
+              </a:xfrm>
+              <a:prstGeom prst="ellipse">
+                <a:avLst/>
+              </a:prstGeom>
+              <a:solidFill>
+                <a:srgbClr val="FDEBD0"/>
+              </a:solidFill>
+              <a:ln w="9525">
+                <a:solidFill>
+                  <a:srgbClr val="F89441"/>
+                </a:solidFill>
+                <a:prstDash val="solid"/>
+              </a:ln>
+            </p:spPr>
+            <p:txBody>
+              <a:bodyPr/>
+              <a:lstStyle/>
+              <a:p>
+                <a:endParaRPr lang="en-US"/>
+              </a:p>
+            </p:txBody>
+          </p:sp>
+          <p:sp>
+            <p:nvSpPr>
+              <p:cNvPr id="170" name="Shape 24">
+                <a:extLst>
+                  <a:ext uri="{FF2B5EF4-FFF2-40B4-BE49-F238E27FC236}">
+                    <a16:creationId xmlns:a16="http://schemas.microsoft.com/office/drawing/2014/main" id="{052150C1-19F5-72E4-6B64-AA02C2B26D87}"/>
+                  </a:ext>
+                </a:extLst>
+              </p:cNvPr>
+              <p:cNvSpPr/>
+              <p:nvPr/>
+            </p:nvSpPr>
+            <p:spPr>
+              <a:xfrm>
+                <a:off x="1929384" y="1499616"/>
+                <a:ext cx="73152" cy="73152"/>
+              </a:xfrm>
+              <a:prstGeom prst="ellipse">
+                <a:avLst/>
+              </a:prstGeom>
+              <a:solidFill>
+                <a:srgbClr val="F89441">
+                  <a:alpha val="50000"/>
+                </a:srgbClr>
+              </a:solidFill>
+              <a:ln/>
+            </p:spPr>
+            <p:txBody>
+              <a:bodyPr/>
+              <a:lstStyle/>
+              <a:p>
+                <a:endParaRPr lang="en-US"/>
+              </a:p>
+            </p:txBody>
+          </p:sp>
+        </p:grpSp>
+        <p:grpSp>
+          <p:nvGrpSpPr>
+            <p:cNvPr id="146" name="Group 145">
+              <a:extLst>
+                <a:ext uri="{FF2B5EF4-FFF2-40B4-BE49-F238E27FC236}">
+                  <a16:creationId xmlns:a16="http://schemas.microsoft.com/office/drawing/2014/main" id="{57436BF9-6003-A762-9EE6-17A1796775DB}"/>
+                </a:ext>
+              </a:extLst>
+            </p:cNvPr>
+            <p:cNvGrpSpPr/>
+            <p:nvPr/>
+          </p:nvGrpSpPr>
+          <p:grpSpPr>
+            <a:xfrm>
+              <a:off x="5705688" y="4144907"/>
               <a:ext cx="162307" cy="148115"/>
               <a:chOff x="2752253" y="2670772"/>
               <a:chExt cx="218792" cy="256515"/>
@@ -4816,10 +5013,10 @@
           </p:grpSpPr>
           <p:cxnSp>
             <p:nvCxnSpPr>
-              <p:cNvPr id="340" name="Straight Connector 339">
-                <a:extLst>
-                  <a:ext uri="{FF2B5EF4-FFF2-40B4-BE49-F238E27FC236}">
-                    <a16:creationId xmlns:a16="http://schemas.microsoft.com/office/drawing/2014/main" id="{B93B0ED2-C341-DCBB-A5CE-4908B04544A1}"/>
+              <p:cNvPr id="163" name="Straight Connector 162">
+                <a:extLst>
+                  <a:ext uri="{FF2B5EF4-FFF2-40B4-BE49-F238E27FC236}">
+                    <a16:creationId xmlns:a16="http://schemas.microsoft.com/office/drawing/2014/main" id="{8B890E26-2E89-5970-0EBE-BCA6FEBF600B}"/>
                   </a:ext>
                 </a:extLst>
               </p:cNvPr>
@@ -4838,7 +5035,9 @@
               </a:prstGeom>
               <a:ln w="25400" cmpd="sng">
                 <a:solidFill>
-                  <a:srgbClr val="FF0000"/>
+                  <a:schemeClr val="bg2">
+                    <a:lumMod val="50000"/>
+                  </a:schemeClr>
                 </a:solidFill>
               </a:ln>
             </p:spPr>
@@ -4859,10 +5058,10 @@
           </p:cxnSp>
           <p:cxnSp>
             <p:nvCxnSpPr>
-              <p:cNvPr id="341" name="Straight Connector 340">
-                <a:extLst>
-                  <a:ext uri="{FF2B5EF4-FFF2-40B4-BE49-F238E27FC236}">
-                    <a16:creationId xmlns:a16="http://schemas.microsoft.com/office/drawing/2014/main" id="{0D0A6E8E-58CF-165C-7D66-2817EBBCEF5E}"/>
+              <p:cNvPr id="164" name="Straight Connector 163">
+                <a:extLst>
+                  <a:ext uri="{FF2B5EF4-FFF2-40B4-BE49-F238E27FC236}">
+                    <a16:creationId xmlns:a16="http://schemas.microsoft.com/office/drawing/2014/main" id="{C6254783-B5F4-52A1-EE50-0539A132EAE7}"/>
                   </a:ext>
                 </a:extLst>
               </p:cNvPr>
@@ -4881,7 +5080,9 @@
               </a:prstGeom>
               <a:ln w="25400" cmpd="sng">
                 <a:solidFill>
-                  <a:srgbClr val="FF0000"/>
+                  <a:schemeClr val="bg2">
+                    <a:lumMod val="50000"/>
+                  </a:schemeClr>
                 </a:solidFill>
               </a:ln>
             </p:spPr>
@@ -4903,10 +5104,10 @@
         </p:grpSp>
         <p:grpSp>
           <p:nvGrpSpPr>
-            <p:cNvPr id="325" name="Group 324">
+            <p:cNvPr id="147" name="Group 146">
               <a:extLst>
                 <a:ext uri="{FF2B5EF4-FFF2-40B4-BE49-F238E27FC236}">
-                  <a16:creationId xmlns:a16="http://schemas.microsoft.com/office/drawing/2014/main" id="{51D7ADA6-AE02-CA09-8AF4-0DF5D1434213}"/>
+                  <a16:creationId xmlns:a16="http://schemas.microsoft.com/office/drawing/2014/main" id="{8349364D-D66F-2CF6-05AC-6E030BD8C8DE}"/>
                 </a:ext>
               </a:extLst>
             </p:cNvPr>
@@ -4915,7 +5116,7 @@
           </p:nvGrpSpPr>
           <p:grpSpPr>
             <a:xfrm>
-              <a:off x="753529" y="4072404"/>
+              <a:off x="6262411" y="4363954"/>
               <a:ext cx="162307" cy="148115"/>
               <a:chOff x="2752253" y="2670772"/>
               <a:chExt cx="218792" cy="256515"/>
@@ -4923,10 +5124,10 @@
           </p:grpSpPr>
           <p:cxnSp>
             <p:nvCxnSpPr>
-              <p:cNvPr id="338" name="Straight Connector 337">
-                <a:extLst>
-                  <a:ext uri="{FF2B5EF4-FFF2-40B4-BE49-F238E27FC236}">
-                    <a16:creationId xmlns:a16="http://schemas.microsoft.com/office/drawing/2014/main" id="{0F0C2AE6-495E-653D-CFE4-252E6AC6477B}"/>
+              <p:cNvPr id="160" name="Straight Connector 159">
+                <a:extLst>
+                  <a:ext uri="{FF2B5EF4-FFF2-40B4-BE49-F238E27FC236}">
+                    <a16:creationId xmlns:a16="http://schemas.microsoft.com/office/drawing/2014/main" id="{59AA00C0-9B26-499D-857F-6C01355B2364}"/>
                   </a:ext>
                 </a:extLst>
               </p:cNvPr>
@@ -4945,7 +5146,9 @@
               </a:prstGeom>
               <a:ln w="25400" cmpd="sng">
                 <a:solidFill>
-                  <a:srgbClr val="FF0000"/>
+                  <a:schemeClr val="bg2">
+                    <a:lumMod val="50000"/>
+                  </a:schemeClr>
                 </a:solidFill>
               </a:ln>
             </p:spPr>
@@ -4966,10 +5169,10 @@
           </p:cxnSp>
           <p:cxnSp>
             <p:nvCxnSpPr>
-              <p:cNvPr id="339" name="Straight Connector 338">
-                <a:extLst>
-                  <a:ext uri="{FF2B5EF4-FFF2-40B4-BE49-F238E27FC236}">
-                    <a16:creationId xmlns:a16="http://schemas.microsoft.com/office/drawing/2014/main" id="{D0FBEEC2-5225-4820-897D-6D4655490CA8}"/>
+              <p:cNvPr id="161" name="Straight Connector 160">
+                <a:extLst>
+                  <a:ext uri="{FF2B5EF4-FFF2-40B4-BE49-F238E27FC236}">
+                    <a16:creationId xmlns:a16="http://schemas.microsoft.com/office/drawing/2014/main" id="{475E2102-CE4A-65C9-0A22-508F54A35BFF}"/>
                   </a:ext>
                 </a:extLst>
               </p:cNvPr>
@@ -4988,7 +5191,9 @@
               </a:prstGeom>
               <a:ln w="25400" cmpd="sng">
                 <a:solidFill>
-                  <a:srgbClr val="FF0000"/>
+                  <a:schemeClr val="bg2">
+                    <a:lumMod val="50000"/>
+                  </a:schemeClr>
                 </a:solidFill>
               </a:ln>
             </p:spPr>
@@ -5010,10 +5215,10 @@
         </p:grpSp>
         <p:grpSp>
           <p:nvGrpSpPr>
-            <p:cNvPr id="326" name="Group 325">
+            <p:cNvPr id="148" name="Group 147">
               <a:extLst>
                 <a:ext uri="{FF2B5EF4-FFF2-40B4-BE49-F238E27FC236}">
-                  <a16:creationId xmlns:a16="http://schemas.microsoft.com/office/drawing/2014/main" id="{E9479445-29DA-4BE6-A4C8-8D89E136DBA2}"/>
+                  <a16:creationId xmlns:a16="http://schemas.microsoft.com/office/drawing/2014/main" id="{1FF52893-092F-EA21-CBF1-D93EAFC1984E}"/>
                 </a:ext>
               </a:extLst>
             </p:cNvPr>
@@ -5022,7 +5227,4738 @@
           </p:nvGrpSpPr>
           <p:grpSpPr>
             <a:xfrm>
-              <a:off x="1605503" y="3910956"/>
+              <a:off x="6133206" y="4584530"/>
+              <a:ext cx="150129" cy="139837"/>
+              <a:chOff x="1225296" y="1527048"/>
+              <a:chExt cx="201168" cy="201168"/>
+            </a:xfrm>
+          </p:grpSpPr>
+          <p:sp>
+            <p:nvSpPr>
+              <p:cNvPr id="158" name="Shape 15">
+                <a:extLst>
+                  <a:ext uri="{FF2B5EF4-FFF2-40B4-BE49-F238E27FC236}">
+                    <a16:creationId xmlns:a16="http://schemas.microsoft.com/office/drawing/2014/main" id="{ECB44F24-98E1-9080-D6ED-E3212BAB33ED}"/>
+                  </a:ext>
+                </a:extLst>
+              </p:cNvPr>
+              <p:cNvSpPr/>
+              <p:nvPr/>
+            </p:nvSpPr>
+            <p:spPr>
+              <a:xfrm>
+                <a:off x="1225296" y="1527048"/>
+                <a:ext cx="201168" cy="201168"/>
+              </a:xfrm>
+              <a:prstGeom prst="ellipse">
+                <a:avLst/>
+              </a:prstGeom>
+              <a:solidFill>
+                <a:srgbClr val="E8E6FF"/>
+              </a:solidFill>
+              <a:ln w="9525">
+                <a:solidFill>
+                  <a:srgbClr val="0D0887"/>
+                </a:solidFill>
+                <a:prstDash val="solid"/>
+              </a:ln>
+            </p:spPr>
+            <p:txBody>
+              <a:bodyPr/>
+              <a:lstStyle/>
+              <a:p>
+                <a:endParaRPr lang="en-US"/>
+              </a:p>
+            </p:txBody>
+          </p:sp>
+          <p:sp>
+            <p:nvSpPr>
+              <p:cNvPr id="159" name="Shape 16">
+                <a:extLst>
+                  <a:ext uri="{FF2B5EF4-FFF2-40B4-BE49-F238E27FC236}">
+                    <a16:creationId xmlns:a16="http://schemas.microsoft.com/office/drawing/2014/main" id="{3421D34E-3A49-EA5C-08EB-CC495A763F80}"/>
+                  </a:ext>
+                </a:extLst>
+              </p:cNvPr>
+              <p:cNvSpPr/>
+              <p:nvPr/>
+            </p:nvSpPr>
+            <p:spPr>
+              <a:xfrm>
+                <a:off x="1285646" y="1587398"/>
+                <a:ext cx="80467" cy="80467"/>
+              </a:xfrm>
+              <a:prstGeom prst="ellipse">
+                <a:avLst/>
+              </a:prstGeom>
+              <a:solidFill>
+                <a:srgbClr val="0D0887">
+                  <a:alpha val="50000"/>
+                </a:srgbClr>
+              </a:solidFill>
+              <a:ln/>
+            </p:spPr>
+            <p:txBody>
+              <a:bodyPr/>
+              <a:lstStyle/>
+              <a:p>
+                <a:endParaRPr lang="en-US"/>
+              </a:p>
+            </p:txBody>
+          </p:sp>
+        </p:grpSp>
+        <p:grpSp>
+          <p:nvGrpSpPr>
+            <p:cNvPr id="149" name="Group 148">
+              <a:extLst>
+                <a:ext uri="{FF2B5EF4-FFF2-40B4-BE49-F238E27FC236}">
+                  <a16:creationId xmlns:a16="http://schemas.microsoft.com/office/drawing/2014/main" id="{5285D054-9543-85A2-517C-D754106647BD}"/>
+                </a:ext>
+              </a:extLst>
+            </p:cNvPr>
+            <p:cNvGrpSpPr/>
+            <p:nvPr/>
+          </p:nvGrpSpPr>
+          <p:grpSpPr>
+            <a:xfrm>
+              <a:off x="6695333" y="4530219"/>
+              <a:ext cx="150129" cy="143298"/>
+              <a:chOff x="7067843" y="717976"/>
+              <a:chExt cx="201168" cy="206147"/>
+            </a:xfrm>
+          </p:grpSpPr>
+          <p:sp>
+            <p:nvSpPr>
+              <p:cNvPr id="156" name="Shape 71">
+                <a:extLst>
+                  <a:ext uri="{FF2B5EF4-FFF2-40B4-BE49-F238E27FC236}">
+                    <a16:creationId xmlns:a16="http://schemas.microsoft.com/office/drawing/2014/main" id="{7B9A95FC-8A59-4C08-0542-2D0A54073C17}"/>
+                  </a:ext>
+                </a:extLst>
+              </p:cNvPr>
+              <p:cNvSpPr/>
+              <p:nvPr/>
+            </p:nvSpPr>
+            <p:spPr>
+              <a:xfrm>
+                <a:off x="7067843" y="717976"/>
+                <a:ext cx="201168" cy="206147"/>
+              </a:xfrm>
+              <a:prstGeom prst="ellipse">
+                <a:avLst/>
+              </a:prstGeom>
+              <a:solidFill>
+                <a:srgbClr val="FDEAE8"/>
+              </a:solidFill>
+              <a:ln w="22225">
+                <a:solidFill>
+                  <a:srgbClr val="E56B5D"/>
+                </a:solidFill>
+                <a:prstDash val="solid"/>
+              </a:ln>
+            </p:spPr>
+            <p:txBody>
+              <a:bodyPr/>
+              <a:lstStyle/>
+              <a:p>
+                <a:endParaRPr lang="en-US" dirty="0"/>
+              </a:p>
+            </p:txBody>
+          </p:sp>
+          <p:sp>
+            <p:nvSpPr>
+              <p:cNvPr id="157" name="Shape 72">
+                <a:extLst>
+                  <a:ext uri="{FF2B5EF4-FFF2-40B4-BE49-F238E27FC236}">
+                    <a16:creationId xmlns:a16="http://schemas.microsoft.com/office/drawing/2014/main" id="{91D6A526-14AB-27D2-B38D-542B5D09AFC8}"/>
+                  </a:ext>
+                </a:extLst>
+              </p:cNvPr>
+              <p:cNvSpPr/>
+              <p:nvPr/>
+            </p:nvSpPr>
+            <p:spPr>
+              <a:xfrm>
+                <a:off x="7128525" y="770321"/>
+                <a:ext cx="80467" cy="82459"/>
+              </a:xfrm>
+              <a:prstGeom prst="ellipse">
+                <a:avLst/>
+              </a:prstGeom>
+              <a:solidFill>
+                <a:srgbClr val="E56B5D">
+                  <a:alpha val="50000"/>
+                </a:srgbClr>
+              </a:solidFill>
+              <a:ln/>
+            </p:spPr>
+            <p:txBody>
+              <a:bodyPr/>
+              <a:lstStyle/>
+              <a:p>
+                <a:endParaRPr lang="en-US"/>
+              </a:p>
+            </p:txBody>
+          </p:sp>
+        </p:grpSp>
+        <p:grpSp>
+          <p:nvGrpSpPr>
+            <p:cNvPr id="150" name="Group 149">
+              <a:extLst>
+                <a:ext uri="{FF2B5EF4-FFF2-40B4-BE49-F238E27FC236}">
+                  <a16:creationId xmlns:a16="http://schemas.microsoft.com/office/drawing/2014/main" id="{C1C880A8-43FC-894A-136F-59CA3EEDABB9}"/>
+                </a:ext>
+              </a:extLst>
+            </p:cNvPr>
+            <p:cNvGrpSpPr/>
+            <p:nvPr/>
+          </p:nvGrpSpPr>
+          <p:grpSpPr>
+            <a:xfrm>
+              <a:off x="6701903" y="4089053"/>
+              <a:ext cx="150129" cy="143298"/>
+              <a:chOff x="7067843" y="717976"/>
+              <a:chExt cx="201168" cy="206147"/>
+            </a:xfrm>
+          </p:grpSpPr>
+          <p:sp>
+            <p:nvSpPr>
+              <p:cNvPr id="154" name="Shape 71">
+                <a:extLst>
+                  <a:ext uri="{FF2B5EF4-FFF2-40B4-BE49-F238E27FC236}">
+                    <a16:creationId xmlns:a16="http://schemas.microsoft.com/office/drawing/2014/main" id="{E5B9A8C0-0DCD-A341-28A3-09800D34B01E}"/>
+                  </a:ext>
+                </a:extLst>
+              </p:cNvPr>
+              <p:cNvSpPr/>
+              <p:nvPr/>
+            </p:nvSpPr>
+            <p:spPr>
+              <a:xfrm>
+                <a:off x="7067843" y="717976"/>
+                <a:ext cx="201168" cy="206147"/>
+              </a:xfrm>
+              <a:prstGeom prst="ellipse">
+                <a:avLst/>
+              </a:prstGeom>
+              <a:solidFill>
+                <a:srgbClr val="FDEAE8"/>
+              </a:solidFill>
+              <a:ln w="22225">
+                <a:solidFill>
+                  <a:srgbClr val="E56B5D"/>
+                </a:solidFill>
+                <a:prstDash val="solid"/>
+              </a:ln>
+            </p:spPr>
+            <p:txBody>
+              <a:bodyPr/>
+              <a:lstStyle/>
+              <a:p>
+                <a:endParaRPr lang="en-US" dirty="0"/>
+              </a:p>
+            </p:txBody>
+          </p:sp>
+          <p:sp>
+            <p:nvSpPr>
+              <p:cNvPr id="155" name="Shape 72">
+                <a:extLst>
+                  <a:ext uri="{FF2B5EF4-FFF2-40B4-BE49-F238E27FC236}">
+                    <a16:creationId xmlns:a16="http://schemas.microsoft.com/office/drawing/2014/main" id="{B663E185-185C-2B7F-C996-AA85C6439A75}"/>
+                  </a:ext>
+                </a:extLst>
+              </p:cNvPr>
+              <p:cNvSpPr/>
+              <p:nvPr/>
+            </p:nvSpPr>
+            <p:spPr>
+              <a:xfrm>
+                <a:off x="7128525" y="770321"/>
+                <a:ext cx="80467" cy="82459"/>
+              </a:xfrm>
+              <a:prstGeom prst="ellipse">
+                <a:avLst/>
+              </a:prstGeom>
+              <a:solidFill>
+                <a:srgbClr val="E56B5D">
+                  <a:alpha val="50000"/>
+                </a:srgbClr>
+              </a:solidFill>
+              <a:ln/>
+            </p:spPr>
+            <p:txBody>
+              <a:bodyPr/>
+              <a:lstStyle/>
+              <a:p>
+                <a:endParaRPr lang="en-US"/>
+              </a:p>
+            </p:txBody>
+          </p:sp>
+        </p:grpSp>
+      </p:grpSp>
+    </p:spTree>
+    <p:extLst>
+      <p:ext uri="{BB962C8B-B14F-4D97-AF65-F5344CB8AC3E}">
+        <p14:creationId xmlns:p14="http://schemas.microsoft.com/office/powerpoint/2010/main" val="3638366691"/>
+      </p:ext>
+    </p:extLst>
+  </p:cSld>
+  <p:clrMapOvr>
+    <a:masterClrMapping/>
+  </p:clrMapOvr>
+</p:sld>
+</file>
+
+<file path=ppt/slides/slide2.xml><?xml version="1.0" encoding="utf-8"?>
+<p:sld xmlns:a="http://schemas.openxmlformats.org/drawingml/2006/main" xmlns:r="http://schemas.openxmlformats.org/officeDocument/2006/relationships" xmlns:p="http://schemas.openxmlformats.org/presentationml/2006/main">
+  <p:cSld>
+    <p:spTree>
+      <p:nvGrpSpPr>
+        <p:cNvPr id="1" name="">
+          <a:extLst>
+            <a:ext uri="{FF2B5EF4-FFF2-40B4-BE49-F238E27FC236}">
+              <a16:creationId xmlns:a16="http://schemas.microsoft.com/office/drawing/2014/main" id="{53FF7E48-508B-EF66-4B66-FB0F8D4FC25B}"/>
+            </a:ext>
+          </a:extLst>
+        </p:cNvPr>
+        <p:cNvGrpSpPr/>
+        <p:nvPr/>
+      </p:nvGrpSpPr>
+      <p:grpSpPr>
+        <a:xfrm>
+          <a:off x="0" y="0"/>
+          <a:ext cx="0" cy="0"/>
+          <a:chOff x="0" y="0"/>
+          <a:chExt cx="0" cy="0"/>
+        </a:xfrm>
+      </p:grpSpPr>
+      <p:sp>
+        <p:nvSpPr>
+          <p:cNvPr id="169" name="Shape 0">
+            <a:extLst>
+              <a:ext uri="{FF2B5EF4-FFF2-40B4-BE49-F238E27FC236}">
+                <a16:creationId xmlns:a16="http://schemas.microsoft.com/office/drawing/2014/main" id="{0E987EA4-F647-AA33-5EF1-CBFA300C5D57}"/>
+              </a:ext>
+            </a:extLst>
+          </p:cNvPr>
+          <p:cNvSpPr/>
+          <p:nvPr/>
+        </p:nvSpPr>
+        <p:spPr>
+          <a:xfrm>
+            <a:off x="122548" y="752978"/>
+            <a:ext cx="8946038" cy="3222172"/>
+          </a:xfrm>
+          <a:prstGeom prst="roundRect">
+            <a:avLst>
+              <a:gd name="adj" fmla="val 2609"/>
+            </a:avLst>
+          </a:prstGeom>
+          <a:solidFill>
+            <a:schemeClr val="bg1"/>
+          </a:solidFill>
+          <a:ln w="12700">
+            <a:solidFill>
+              <a:schemeClr val="tx1"/>
+            </a:solidFill>
+            <a:prstDash val="dash"/>
+          </a:ln>
+        </p:spPr>
+        <p:txBody>
+          <a:bodyPr/>
+          <a:lstStyle/>
+          <a:p>
+            <a:endParaRPr lang="en-US" dirty="0"/>
+          </a:p>
+        </p:txBody>
+      </p:sp>
+      <p:sp>
+        <p:nvSpPr>
+          <p:cNvPr id="153" name="Shape 2">
+            <a:extLst>
+              <a:ext uri="{FF2B5EF4-FFF2-40B4-BE49-F238E27FC236}">
+                <a16:creationId xmlns:a16="http://schemas.microsoft.com/office/drawing/2014/main" id="{5F5DEFFD-EBA9-2752-B0E8-568650986599}"/>
+              </a:ext>
+            </a:extLst>
+          </p:cNvPr>
+          <p:cNvSpPr/>
+          <p:nvPr/>
+        </p:nvSpPr>
+        <p:spPr>
+          <a:xfrm>
+            <a:off x="7825863" y="1965289"/>
+            <a:ext cx="1141529" cy="1094096"/>
+          </a:xfrm>
+          <a:prstGeom prst="roundRect">
+            <a:avLst>
+              <a:gd name="adj" fmla="val 12308"/>
+            </a:avLst>
+          </a:prstGeom>
+          <a:solidFill>
+            <a:schemeClr val="bg1">
+              <a:lumMod val="95000"/>
+              <a:alpha val="95898"/>
+            </a:schemeClr>
+          </a:solidFill>
+          <a:ln w="9525">
+            <a:solidFill>
+              <a:schemeClr val="tx1"/>
+            </a:solidFill>
+            <a:prstDash val="solid"/>
+          </a:ln>
+          <a:effectLst>
+            <a:outerShdw blurRad="50800" dist="12700" dir="2700000" algn="bl" rotWithShape="0">
+              <a:srgbClr val="000000">
+                <a:alpha val="8000"/>
+              </a:srgbClr>
+            </a:outerShdw>
+          </a:effectLst>
+        </p:spPr>
+        <p:txBody>
+          <a:bodyPr/>
+          <a:lstStyle/>
+          <a:p>
+            <a:endParaRPr lang="en-US"/>
+          </a:p>
+        </p:txBody>
+      </p:sp>
+      <p:sp>
+        <p:nvSpPr>
+          <p:cNvPr id="152" name="Shape 5">
+            <a:extLst>
+              <a:ext uri="{FF2B5EF4-FFF2-40B4-BE49-F238E27FC236}">
+                <a16:creationId xmlns:a16="http://schemas.microsoft.com/office/drawing/2014/main" id="{50C7D68A-E297-BEB7-02C7-50BC919B4251}"/>
+              </a:ext>
+            </a:extLst>
+          </p:cNvPr>
+          <p:cNvSpPr/>
+          <p:nvPr/>
+        </p:nvSpPr>
+        <p:spPr>
+          <a:xfrm>
+            <a:off x="5512435" y="1686655"/>
+            <a:ext cx="2028445" cy="1670588"/>
+          </a:xfrm>
+          <a:prstGeom prst="roundRect">
+            <a:avLst>
+              <a:gd name="adj" fmla="val 12308"/>
+            </a:avLst>
+          </a:prstGeom>
+          <a:solidFill>
+            <a:schemeClr val="bg1"/>
+          </a:solidFill>
+          <a:ln w="9525">
+            <a:solidFill>
+              <a:schemeClr val="tx1"/>
+            </a:solidFill>
+            <a:prstDash val="solid"/>
+          </a:ln>
+          <a:effectLst>
+            <a:outerShdw blurRad="50800" dist="12700" dir="2700000" algn="bl" rotWithShape="0">
+              <a:srgbClr val="000000">
+                <a:alpha val="8000"/>
+              </a:srgbClr>
+            </a:outerShdw>
+          </a:effectLst>
+        </p:spPr>
+        <p:txBody>
+          <a:bodyPr/>
+          <a:lstStyle/>
+          <a:p>
+            <a:endParaRPr lang="en-US" dirty="0"/>
+          </a:p>
+        </p:txBody>
+      </p:sp>
+      <p:sp>
+        <p:nvSpPr>
+          <p:cNvPr id="151" name="Shape 5">
+            <a:extLst>
+              <a:ext uri="{FF2B5EF4-FFF2-40B4-BE49-F238E27FC236}">
+                <a16:creationId xmlns:a16="http://schemas.microsoft.com/office/drawing/2014/main" id="{2DEE9611-5CDB-3B91-2477-9C082B8DF56C}"/>
+              </a:ext>
+            </a:extLst>
+          </p:cNvPr>
+          <p:cNvSpPr/>
+          <p:nvPr/>
+        </p:nvSpPr>
+        <p:spPr>
+          <a:xfrm>
+            <a:off x="3656554" y="1699365"/>
+            <a:ext cx="1587236" cy="1657878"/>
+          </a:xfrm>
+          <a:prstGeom prst="roundRect">
+            <a:avLst>
+              <a:gd name="adj" fmla="val 12308"/>
+            </a:avLst>
+          </a:prstGeom>
+          <a:solidFill>
+            <a:schemeClr val="bg1"/>
+          </a:solidFill>
+          <a:ln w="9525">
+            <a:solidFill>
+              <a:schemeClr val="tx1"/>
+            </a:solidFill>
+            <a:prstDash val="solid"/>
+          </a:ln>
+          <a:effectLst>
+            <a:outerShdw blurRad="50800" dist="12700" dir="2700000" algn="bl" rotWithShape="0">
+              <a:srgbClr val="000000">
+                <a:alpha val="8000"/>
+              </a:srgbClr>
+            </a:outerShdw>
+          </a:effectLst>
+        </p:spPr>
+        <p:txBody>
+          <a:bodyPr/>
+          <a:lstStyle/>
+          <a:p>
+            <a:endParaRPr lang="en-US" dirty="0"/>
+          </a:p>
+        </p:txBody>
+      </p:sp>
+      <p:sp>
+        <p:nvSpPr>
+          <p:cNvPr id="3" name="Shape 2">
+            <a:extLst>
+              <a:ext uri="{FF2B5EF4-FFF2-40B4-BE49-F238E27FC236}">
+                <a16:creationId xmlns:a16="http://schemas.microsoft.com/office/drawing/2014/main" id="{8ECEDB44-42BE-71E7-1AF9-BD1417ABE33B}"/>
+              </a:ext>
+            </a:extLst>
+          </p:cNvPr>
+          <p:cNvSpPr/>
+          <p:nvPr/>
+        </p:nvSpPr>
+        <p:spPr>
+          <a:xfrm>
+            <a:off x="176608" y="1942232"/>
+            <a:ext cx="1280190" cy="1094096"/>
+          </a:xfrm>
+          <a:prstGeom prst="roundRect">
+            <a:avLst>
+              <a:gd name="adj" fmla="val 12308"/>
+            </a:avLst>
+          </a:prstGeom>
+          <a:solidFill>
+            <a:schemeClr val="bg1">
+              <a:lumMod val="95000"/>
+              <a:alpha val="95898"/>
+            </a:schemeClr>
+          </a:solidFill>
+          <a:ln w="9525">
+            <a:solidFill>
+              <a:schemeClr val="tx1"/>
+            </a:solidFill>
+            <a:prstDash val="solid"/>
+          </a:ln>
+          <a:effectLst>
+            <a:outerShdw blurRad="50800" dist="12700" dir="2700000" algn="bl" rotWithShape="0">
+              <a:srgbClr val="000000">
+                <a:alpha val="8000"/>
+              </a:srgbClr>
+            </a:outerShdw>
+          </a:effectLst>
+        </p:spPr>
+        <p:txBody>
+          <a:bodyPr/>
+          <a:lstStyle/>
+          <a:p>
+            <a:endParaRPr lang="en-US"/>
+          </a:p>
+        </p:txBody>
+      </p:sp>
+      <p:sp>
+        <p:nvSpPr>
+          <p:cNvPr id="4" name="Text 3">
+            <a:extLst>
+              <a:ext uri="{FF2B5EF4-FFF2-40B4-BE49-F238E27FC236}">
+                <a16:creationId xmlns:a16="http://schemas.microsoft.com/office/drawing/2014/main" id="{0583D485-02FB-D0CC-17E7-90573FBFACBB}"/>
+              </a:ext>
+            </a:extLst>
+          </p:cNvPr>
+          <p:cNvSpPr/>
+          <p:nvPr/>
+        </p:nvSpPr>
+        <p:spPr>
+          <a:xfrm>
+            <a:off x="172908" y="2141702"/>
+            <a:ext cx="1287589" cy="533666"/>
+          </a:xfrm>
+          <a:prstGeom prst="rect">
+            <a:avLst/>
+          </a:prstGeom>
+          <a:noFill/>
+          <a:ln/>
+        </p:spPr>
+        <p:txBody>
+          <a:bodyPr wrap="square" lIns="0" tIns="0" rIns="0" bIns="0" rtlCol="0" anchor="ctr"/>
+          <a:lstStyle/>
+          <a:p>
+            <a:pPr marL="0" indent="0" algn="ctr">
+              <a:buNone/>
+            </a:pPr>
+            <a:r>
+              <a:rPr lang="en-US" sz="1300" b="1" dirty="0"/>
+              <a:t>User-specified model</a:t>
+            </a:r>
+          </a:p>
+          <a:p>
+            <a:pPr marL="0" marR="0" lvl="0" indent="0" algn="ctr" defTabSz="914400" rtl="0" eaLnBrk="1" fontAlgn="auto" latinLnBrk="0" hangingPunct="1">
+              <a:lnSpc>
+                <a:spcPct val="100000"/>
+              </a:lnSpc>
+              <a:spcBef>
+                <a:spcPts val="0"/>
+              </a:spcBef>
+              <a:spcAft>
+                <a:spcPts val="0"/>
+              </a:spcAft>
+              <a:buClrTx/>
+              <a:buSzTx/>
+              <a:buFontTx/>
+              <a:buNone/>
+              <a:tabLst/>
+              <a:defRPr/>
+            </a:pPr>
+            <a:r>
+              <a:rPr kumimoji="0" lang="en-GB" altLang="zh-CN" sz="900" b="0" i="0" u="none" strike="noStrike" kern="1200" cap="none" spc="0" normalizeH="0" baseline="0" noProof="0" dirty="0">
+                <a:ln>
+                  <a:noFill/>
+                </a:ln>
+                <a:solidFill>
+                  <a:prstClr val="black"/>
+                </a:solidFill>
+                <a:effectLst/>
+                <a:uLnTx/>
+                <a:uFillTx/>
+                <a:latin typeface="Calibri" panose="020F0502020204030204"/>
+                <a:ea typeface="等线" panose="02010600030101010101" pitchFamily="2" charset="-122"/>
+                <a:cs typeface="+mn-cs"/>
+              </a:rPr>
+              <a:t>any model class accepted</a:t>
+            </a:r>
+            <a:endParaRPr lang="en-US" sz="1200" b="1" dirty="0"/>
+          </a:p>
+          <a:p>
+            <a:pPr marL="0" marR="0" lvl="0" indent="0" algn="ctr" defTabSz="914400" rtl="0" eaLnBrk="1" fontAlgn="auto" latinLnBrk="0" hangingPunct="1">
+              <a:lnSpc>
+                <a:spcPct val="100000"/>
+              </a:lnSpc>
+              <a:spcBef>
+                <a:spcPts val="0"/>
+              </a:spcBef>
+              <a:spcAft>
+                <a:spcPts val="0"/>
+              </a:spcAft>
+              <a:buClrTx/>
+              <a:buSzTx/>
+              <a:buFontTx/>
+              <a:buNone/>
+              <a:tabLst/>
+              <a:defRPr/>
+            </a:pPr>
+            <a:r>
+              <a:rPr lang="en-US" altLang="zh-CN" sz="1100" dirty="0">
+                <a:solidFill>
+                  <a:prstClr val="white">
+                    <a:lumMod val="50000"/>
+                  </a:prstClr>
+                </a:solidFill>
+                <a:latin typeface="Calibri" panose="020F0502020204030204"/>
+                <a:ea typeface="等线" panose="02010600030101010101" pitchFamily="2" charset="-122"/>
+              </a:rPr>
+              <a:t>community()</a:t>
+            </a:r>
+            <a:endParaRPr kumimoji="0" lang="en-US" altLang="zh-CN" sz="1100" b="0" i="0" u="none" strike="noStrike" kern="1200" cap="none" spc="0" normalizeH="0" baseline="0" noProof="0" dirty="0">
+              <a:ln>
+                <a:noFill/>
+              </a:ln>
+              <a:solidFill>
+                <a:prstClr val="white">
+                  <a:lumMod val="50000"/>
+                </a:prstClr>
+              </a:solidFill>
+              <a:effectLst/>
+              <a:uLnTx/>
+              <a:uFillTx/>
+              <a:latin typeface="Calibri" panose="020F0502020204030204"/>
+              <a:ea typeface="等线" panose="02010600030101010101" pitchFamily="2" charset="-122"/>
+              <a:cs typeface="+mn-cs"/>
+            </a:endParaRPr>
+          </a:p>
+        </p:txBody>
+      </p:sp>
+      <p:sp>
+        <p:nvSpPr>
+          <p:cNvPr id="6" name="Shape 5">
+            <a:extLst>
+              <a:ext uri="{FF2B5EF4-FFF2-40B4-BE49-F238E27FC236}">
+                <a16:creationId xmlns:a16="http://schemas.microsoft.com/office/drawing/2014/main" id="{901399D3-1EA5-5EA5-6C1A-9FC482F96945}"/>
+              </a:ext>
+            </a:extLst>
+          </p:cNvPr>
+          <p:cNvSpPr/>
+          <p:nvPr/>
+        </p:nvSpPr>
+        <p:spPr>
+          <a:xfrm>
+            <a:off x="1717586" y="1686655"/>
+            <a:ext cx="1649866" cy="1670589"/>
+          </a:xfrm>
+          <a:prstGeom prst="roundRect">
+            <a:avLst>
+              <a:gd name="adj" fmla="val 12308"/>
+            </a:avLst>
+          </a:prstGeom>
+          <a:solidFill>
+            <a:schemeClr val="bg1"/>
+          </a:solidFill>
+          <a:ln w="9525">
+            <a:solidFill>
+              <a:schemeClr val="tx1"/>
+            </a:solidFill>
+            <a:prstDash val="solid"/>
+          </a:ln>
+          <a:effectLst>
+            <a:outerShdw blurRad="50800" dist="12700" dir="2700000" algn="bl" rotWithShape="0">
+              <a:srgbClr val="000000">
+                <a:alpha val="8000"/>
+              </a:srgbClr>
+            </a:outerShdw>
+          </a:effectLst>
+        </p:spPr>
+        <p:txBody>
+          <a:bodyPr/>
+          <a:lstStyle/>
+          <a:p>
+            <a:endParaRPr lang="en-US" dirty="0"/>
+          </a:p>
+        </p:txBody>
+      </p:sp>
+      <p:sp>
+        <p:nvSpPr>
+          <p:cNvPr id="7" name="Text 6">
+            <a:extLst>
+              <a:ext uri="{FF2B5EF4-FFF2-40B4-BE49-F238E27FC236}">
+                <a16:creationId xmlns:a16="http://schemas.microsoft.com/office/drawing/2014/main" id="{EB293B96-D056-A1BD-505F-9076E69E0714}"/>
+              </a:ext>
+            </a:extLst>
+          </p:cNvPr>
+          <p:cNvSpPr/>
+          <p:nvPr/>
+        </p:nvSpPr>
+        <p:spPr>
+          <a:xfrm>
+            <a:off x="3530232" y="1729771"/>
+            <a:ext cx="1844903" cy="774687"/>
+          </a:xfrm>
+          <a:prstGeom prst="rect">
+            <a:avLst/>
+          </a:prstGeom>
+          <a:noFill/>
+          <a:ln/>
+        </p:spPr>
+        <p:txBody>
+          <a:bodyPr wrap="square" lIns="0" tIns="0" rIns="0" bIns="0" rtlCol="0" anchor="ctr"/>
+          <a:lstStyle/>
+          <a:p>
+            <a:pPr algn="ctr"/>
+            <a:r>
+              <a:rPr lang="en-US" altLang="zh-CN" sz="1300" b="1" dirty="0"/>
+              <a:t>2.</a:t>
+            </a:r>
+            <a:r>
+              <a:rPr lang="zh-CN" altLang="en-US" sz="1300" b="1" dirty="0"/>
+              <a:t> </a:t>
+            </a:r>
+            <a:r>
+              <a:rPr lang="en-US" sz="1300" b="1" dirty="0"/>
+              <a:t>Integrate dynamics</a:t>
+            </a:r>
+          </a:p>
+          <a:p>
+            <a:pPr marL="0" marR="0" lvl="0" indent="0" algn="ctr" defTabSz="914400" rtl="0" eaLnBrk="1" fontAlgn="auto" latinLnBrk="0" hangingPunct="1">
+              <a:lnSpc>
+                <a:spcPct val="100000"/>
+              </a:lnSpc>
+              <a:spcBef>
+                <a:spcPts val="0"/>
+              </a:spcBef>
+              <a:spcAft>
+                <a:spcPts val="0"/>
+              </a:spcAft>
+              <a:buClrTx/>
+              <a:buSzTx/>
+              <a:buFontTx/>
+              <a:buNone/>
+              <a:tabLst/>
+              <a:defRPr/>
+            </a:pPr>
+            <a:r>
+              <a:rPr lang="en-US" altLang="zh-CN" sz="1100" dirty="0" err="1">
+                <a:solidFill>
+                  <a:schemeClr val="bg1">
+                    <a:lumMod val="50000"/>
+                  </a:schemeClr>
+                </a:solidFill>
+                <a:latin typeface="Calibri" panose="020F0502020204030204"/>
+                <a:ea typeface="等线" panose="02010600030101010101" pitchFamily="2" charset="-122"/>
+              </a:rPr>
+              <a:t>integrationParams</a:t>
+            </a:r>
+            <a:r>
+              <a:rPr lang="en-US" altLang="zh-CN" sz="1100" dirty="0">
+                <a:solidFill>
+                  <a:srgbClr val="E7E6E6">
+                    <a:lumMod val="50000"/>
+                  </a:srgbClr>
+                </a:solidFill>
+                <a:latin typeface="Calibri" panose="020F0502020204030204"/>
+                <a:ea typeface="等线" panose="02010600030101010101" pitchFamily="2" charset="-122"/>
+              </a:rPr>
+              <a:t>()</a:t>
+            </a:r>
+          </a:p>
+          <a:p>
+            <a:pPr marL="0" marR="0" lvl="0" indent="0" algn="ctr" defTabSz="914400" rtl="0" eaLnBrk="1" fontAlgn="auto" latinLnBrk="0" hangingPunct="1">
+              <a:lnSpc>
+                <a:spcPct val="100000"/>
+              </a:lnSpc>
+              <a:spcBef>
+                <a:spcPts val="0"/>
+              </a:spcBef>
+              <a:spcAft>
+                <a:spcPts val="0"/>
+              </a:spcAft>
+              <a:buClrTx/>
+              <a:buSzTx/>
+              <a:buFontTx/>
+              <a:buNone/>
+              <a:tabLst/>
+              <a:defRPr/>
+            </a:pPr>
+            <a:r>
+              <a:rPr kumimoji="0" lang="en-US" altLang="zh-CN" sz="1100" b="0" i="0" u="none" strike="noStrike" kern="1200" cap="none" spc="0" normalizeH="0" baseline="0" noProof="0" dirty="0">
+                <a:ln>
+                  <a:noFill/>
+                </a:ln>
+                <a:solidFill>
+                  <a:prstClr val="white">
+                    <a:lumMod val="50000"/>
+                  </a:prstClr>
+                </a:solidFill>
+                <a:effectLst/>
+                <a:uLnTx/>
+                <a:uFillTx/>
+                <a:latin typeface="Calibri" panose="020F0502020204030204"/>
+                <a:ea typeface="等线" panose="02010600030101010101" pitchFamily="2" charset="-122"/>
+                <a:cs typeface="+mn-cs"/>
+              </a:rPr>
+              <a:t>e</a:t>
+            </a:r>
+            <a:r>
+              <a:rPr kumimoji="0" lang="en-GB" sz="1100" b="0" i="0" u="none" strike="noStrike" kern="1200" cap="none" spc="0" normalizeH="0" baseline="0" noProof="0" dirty="0" err="1">
+                <a:ln>
+                  <a:noFill/>
+                </a:ln>
+                <a:solidFill>
+                  <a:prstClr val="white">
+                    <a:lumMod val="50000"/>
+                  </a:prstClr>
+                </a:solidFill>
+                <a:effectLst/>
+                <a:uLnTx/>
+                <a:uFillTx/>
+                <a:latin typeface="Calibri" panose="020F0502020204030204"/>
+                <a:ea typeface="+mn-ea"/>
+                <a:cs typeface="+mn-cs"/>
+              </a:rPr>
+              <a:t>coD</a:t>
+            </a:r>
+            <a:r>
+              <a:rPr kumimoji="0" lang="en-US" altLang="zh-CN" sz="1100" b="0" i="0" u="none" strike="noStrike" kern="1200" cap="none" spc="0" normalizeH="0" baseline="0" noProof="0" dirty="0" err="1">
+                <a:ln>
+                  <a:noFill/>
+                </a:ln>
+                <a:solidFill>
+                  <a:prstClr val="white">
+                    <a:lumMod val="50000"/>
+                  </a:prstClr>
+                </a:solidFill>
+                <a:effectLst/>
+                <a:uLnTx/>
+                <a:uFillTx/>
+                <a:latin typeface="Calibri" panose="020F0502020204030204"/>
+                <a:ea typeface="等线" panose="02010600030101010101" pitchFamily="2" charset="-122"/>
+                <a:cs typeface="+mn-cs"/>
+              </a:rPr>
+              <a:t>yn</a:t>
+            </a:r>
+            <a:r>
+              <a:rPr kumimoji="0" lang="en-US" altLang="zh-CN" sz="1100" b="0" i="0" u="none" strike="noStrike" kern="1200" cap="none" spc="0" normalizeH="0" baseline="0" noProof="0" dirty="0">
+                <a:ln>
+                  <a:noFill/>
+                </a:ln>
+                <a:solidFill>
+                  <a:prstClr val="white">
+                    <a:lumMod val="50000"/>
+                  </a:prstClr>
+                </a:solidFill>
+                <a:effectLst/>
+                <a:uLnTx/>
+                <a:uFillTx/>
+                <a:latin typeface="Calibri" panose="020F0502020204030204"/>
+                <a:ea typeface="等线" panose="02010600030101010101" pitchFamily="2" charset="-122"/>
+                <a:cs typeface="+mn-cs"/>
+              </a:rPr>
+              <a:t>()</a:t>
+            </a:r>
+            <a:endParaRPr kumimoji="0" lang="en-US" sz="1300" b="0" i="0" u="none" strike="noStrike" kern="1200" cap="none" spc="0" normalizeH="0" baseline="0" noProof="0" dirty="0">
+              <a:ln>
+                <a:noFill/>
+              </a:ln>
+              <a:solidFill>
+                <a:prstClr val="black"/>
+              </a:solidFill>
+              <a:effectLst/>
+              <a:uLnTx/>
+              <a:uFillTx/>
+              <a:latin typeface="Calibri" panose="020F0502020204030204"/>
+              <a:ea typeface="+mn-ea"/>
+              <a:cs typeface="+mn-cs"/>
+            </a:endParaRPr>
+          </a:p>
+          <a:p>
+            <a:pPr algn="ctr"/>
+            <a:endParaRPr lang="en-US" sz="1100" dirty="0">
+              <a:solidFill>
+                <a:schemeClr val="bg1">
+                  <a:lumMod val="50000"/>
+                </a:schemeClr>
+              </a:solidFill>
+            </a:endParaRPr>
+          </a:p>
+        </p:txBody>
+      </p:sp>
+      <p:sp>
+        <p:nvSpPr>
+          <p:cNvPr id="50" name="Text 9">
+            <a:extLst>
+              <a:ext uri="{FF2B5EF4-FFF2-40B4-BE49-F238E27FC236}">
+                <a16:creationId xmlns:a16="http://schemas.microsoft.com/office/drawing/2014/main" id="{D430FFBF-3F65-CB05-7E22-2C05FF0E8915}"/>
+              </a:ext>
+            </a:extLst>
+          </p:cNvPr>
+          <p:cNvSpPr/>
+          <p:nvPr/>
+        </p:nvSpPr>
+        <p:spPr>
+          <a:xfrm>
+            <a:off x="1727123" y="1668109"/>
+            <a:ext cx="1647365" cy="594360"/>
+          </a:xfrm>
+          <a:prstGeom prst="rect">
+            <a:avLst/>
+          </a:prstGeom>
+          <a:noFill/>
+          <a:ln/>
+        </p:spPr>
+        <p:txBody>
+          <a:bodyPr wrap="square" lIns="0" tIns="0" rIns="0" bIns="0" rtlCol="0" anchor="ctr"/>
+          <a:lstStyle/>
+          <a:p>
+            <a:pPr marL="0" indent="0" algn="ctr">
+              <a:buNone/>
+            </a:pPr>
+            <a:r>
+              <a:rPr lang="en-US" altLang="zh-CN" sz="1300" b="1" dirty="0"/>
+              <a:t>1</a:t>
+            </a:r>
+            <a:r>
+              <a:rPr lang="en-US" sz="1300" b="1" dirty="0"/>
+              <a:t>. Introduce mutant</a:t>
+            </a:r>
+          </a:p>
+          <a:p>
+            <a:pPr algn="ctr"/>
+            <a:r>
+              <a:rPr lang="en-US" altLang="zh-CN" sz="1100" dirty="0">
+                <a:solidFill>
+                  <a:srgbClr val="E7E6E6">
+                    <a:lumMod val="50000"/>
+                  </a:srgbClr>
+                </a:solidFill>
+                <a:latin typeface="Calibri" panose="020F0502020204030204"/>
+                <a:ea typeface="等线" panose="02010600030101010101" pitchFamily="2" charset="-122"/>
+              </a:rPr>
+              <a:t>m</a:t>
+            </a:r>
+            <a:r>
+              <a:rPr kumimoji="0" lang="en-US" altLang="zh-CN" sz="1100" b="0" i="0" u="none" strike="noStrike" kern="1200" cap="none" spc="0" normalizeH="0" baseline="0" noProof="0" dirty="0" err="1">
+                <a:ln>
+                  <a:noFill/>
+                </a:ln>
+                <a:solidFill>
+                  <a:srgbClr val="E7E6E6">
+                    <a:lumMod val="50000"/>
+                  </a:srgbClr>
+                </a:solidFill>
+                <a:effectLst/>
+                <a:uLnTx/>
+                <a:uFillTx/>
+                <a:latin typeface="Calibri" panose="020F0502020204030204"/>
+                <a:ea typeface="等线" panose="02010600030101010101" pitchFamily="2" charset="-122"/>
+                <a:cs typeface="+mn-cs"/>
+              </a:rPr>
+              <a:t>utation</a:t>
+            </a:r>
+            <a:r>
+              <a:rPr lang="en-US" altLang="zh-CN" sz="1100" dirty="0">
+                <a:solidFill>
+                  <a:srgbClr val="E7E6E6">
+                    <a:lumMod val="50000"/>
+                  </a:srgbClr>
+                </a:solidFill>
+                <a:latin typeface="Calibri" panose="020F0502020204030204"/>
+                <a:ea typeface="等线" panose="02010600030101010101" pitchFamily="2" charset="-122"/>
+              </a:rPr>
+              <a:t>Generator()</a:t>
+            </a:r>
+            <a:endParaRPr lang="en-US" sz="1300" dirty="0"/>
+          </a:p>
+        </p:txBody>
+      </p:sp>
+      <p:sp>
+        <p:nvSpPr>
+          <p:cNvPr id="52" name="Text 12">
+            <a:extLst>
+              <a:ext uri="{FF2B5EF4-FFF2-40B4-BE49-F238E27FC236}">
+                <a16:creationId xmlns:a16="http://schemas.microsoft.com/office/drawing/2014/main" id="{993CFA6F-DAFE-59CD-310A-08047E139F31}"/>
+              </a:ext>
+            </a:extLst>
+          </p:cNvPr>
+          <p:cNvSpPr/>
+          <p:nvPr/>
+        </p:nvSpPr>
+        <p:spPr>
+          <a:xfrm>
+            <a:off x="5539126" y="1677016"/>
+            <a:ext cx="2006624" cy="576546"/>
+          </a:xfrm>
+          <a:prstGeom prst="rect">
+            <a:avLst/>
+          </a:prstGeom>
+          <a:noFill/>
+          <a:ln/>
+        </p:spPr>
+        <p:txBody>
+          <a:bodyPr wrap="square" lIns="0" tIns="0" rIns="0" bIns="0" rtlCol="0" anchor="ctr"/>
+          <a:lstStyle/>
+          <a:p>
+            <a:pPr marL="0" indent="0" algn="ctr">
+              <a:buNone/>
+            </a:pPr>
+            <a:r>
+              <a:rPr lang="en-US" sz="1300" b="1" dirty="0"/>
+              <a:t>3. Prune extinct phenotypes</a:t>
+            </a:r>
+          </a:p>
+          <a:p>
+            <a:pPr marL="0" marR="0" lvl="0" indent="0" algn="ctr" defTabSz="914400" rtl="0" eaLnBrk="1" fontAlgn="auto" latinLnBrk="0" hangingPunct="1">
+              <a:lnSpc>
+                <a:spcPct val="100000"/>
+              </a:lnSpc>
+              <a:spcBef>
+                <a:spcPts val="0"/>
+              </a:spcBef>
+              <a:spcAft>
+                <a:spcPts val="0"/>
+              </a:spcAft>
+              <a:buClrTx/>
+              <a:buSzTx/>
+              <a:buFontTx/>
+              <a:buNone/>
+              <a:tabLst/>
+              <a:defRPr/>
+            </a:pPr>
+            <a:r>
+              <a:rPr lang="en-US" altLang="zh-CN" sz="1100" dirty="0">
+                <a:solidFill>
+                  <a:srgbClr val="E7E6E6">
+                    <a:lumMod val="50000"/>
+                  </a:srgbClr>
+                </a:solidFill>
+                <a:latin typeface="Calibri" panose="020F0502020204030204"/>
+                <a:ea typeface="等线" panose="02010600030101010101" pitchFamily="2" charset="-122"/>
+              </a:rPr>
+              <a:t>b</a:t>
+            </a:r>
+            <a:r>
+              <a:rPr kumimoji="0" lang="en-US" altLang="zh-CN" sz="1100" b="0" i="0" u="none" strike="noStrike" kern="1200" cap="none" spc="0" normalizeH="0" baseline="0" noProof="0" dirty="0" err="1">
+                <a:ln>
+                  <a:noFill/>
+                </a:ln>
+                <a:solidFill>
+                  <a:srgbClr val="E7E6E6">
+                    <a:lumMod val="50000"/>
+                  </a:srgbClr>
+                </a:solidFill>
+                <a:effectLst/>
+                <a:uLnTx/>
+                <a:uFillTx/>
+                <a:latin typeface="Calibri" panose="020F0502020204030204"/>
+                <a:ea typeface="等线" panose="02010600030101010101" pitchFamily="2" charset="-122"/>
+                <a:cs typeface="+mn-cs"/>
+              </a:rPr>
+              <a:t>elow</a:t>
+            </a:r>
+            <a:r>
+              <a:rPr lang="zh-CN" altLang="en-US" sz="1100" dirty="0">
+                <a:solidFill>
+                  <a:srgbClr val="E7E6E6">
+                    <a:lumMod val="50000"/>
+                  </a:srgbClr>
+                </a:solidFill>
+                <a:latin typeface="Calibri" panose="020F0502020204030204"/>
+                <a:ea typeface="等线" panose="02010600030101010101" pitchFamily="2" charset="-122"/>
+              </a:rPr>
+              <a:t> </a:t>
+            </a:r>
+            <a:r>
+              <a:rPr kumimoji="0" lang="en-US" altLang="zh-CN" sz="1100" b="0" i="0" u="none" strike="noStrike" kern="1200" cap="none" spc="0" normalizeH="0" baseline="0" noProof="0" dirty="0" err="1">
+                <a:ln>
+                  <a:noFill/>
+                </a:ln>
+                <a:solidFill>
+                  <a:srgbClr val="E7E6E6">
+                    <a:lumMod val="50000"/>
+                  </a:srgbClr>
+                </a:solidFill>
+                <a:effectLst/>
+                <a:uLnTx/>
+                <a:uFillTx/>
+                <a:latin typeface="Calibri" panose="020F0502020204030204"/>
+                <a:ea typeface="等线" panose="02010600030101010101" pitchFamily="2" charset="-122"/>
+                <a:cs typeface="+mn-cs"/>
+              </a:rPr>
+              <a:t>extThreshold</a:t>
+            </a:r>
+            <a:endParaRPr kumimoji="0" lang="en-US" sz="1100" b="0" i="0" u="none" strike="noStrike" kern="1200" cap="none" spc="0" normalizeH="0" baseline="0" noProof="0" dirty="0">
+              <a:ln>
+                <a:noFill/>
+              </a:ln>
+              <a:solidFill>
+                <a:srgbClr val="E7E6E6">
+                  <a:lumMod val="50000"/>
+                </a:srgbClr>
+              </a:solidFill>
+              <a:effectLst/>
+              <a:uLnTx/>
+              <a:uFillTx/>
+              <a:latin typeface="Calibri" panose="020F0502020204030204"/>
+              <a:ea typeface="+mn-ea"/>
+              <a:cs typeface="+mn-cs"/>
+            </a:endParaRPr>
+          </a:p>
+        </p:txBody>
+      </p:sp>
+      <p:sp>
+        <p:nvSpPr>
+          <p:cNvPr id="129" name="Text 20">
+            <a:extLst>
+              <a:ext uri="{FF2B5EF4-FFF2-40B4-BE49-F238E27FC236}">
+                <a16:creationId xmlns:a16="http://schemas.microsoft.com/office/drawing/2014/main" id="{1E20524C-C082-2572-FB87-DAAD4C712C88}"/>
+              </a:ext>
+            </a:extLst>
+          </p:cNvPr>
+          <p:cNvSpPr/>
+          <p:nvPr/>
+        </p:nvSpPr>
+        <p:spPr>
+          <a:xfrm>
+            <a:off x="7856096" y="2090658"/>
+            <a:ext cx="1111296" cy="635754"/>
+          </a:xfrm>
+          <a:prstGeom prst="rect">
+            <a:avLst/>
+          </a:prstGeom>
+          <a:noFill/>
+          <a:ln/>
+        </p:spPr>
+        <p:txBody>
+          <a:bodyPr wrap="square" lIns="0" tIns="0" rIns="0" bIns="0" rtlCol="0" anchor="ctr"/>
+          <a:lstStyle/>
+          <a:p>
+            <a:pPr marL="0" indent="0" algn="ctr">
+              <a:buNone/>
+            </a:pPr>
+            <a:r>
+              <a:rPr lang="en-US" altLang="zh-CN" sz="1300" b="1" dirty="0"/>
+              <a:t>Evolutionary</a:t>
+            </a:r>
+            <a:r>
+              <a:rPr lang="zh-CN" altLang="en-US" sz="1300" b="1" dirty="0"/>
+              <a:t> </a:t>
+            </a:r>
+            <a:r>
+              <a:rPr lang="en-US" altLang="zh-CN" sz="1300" b="1" dirty="0"/>
+              <a:t>history</a:t>
+            </a:r>
+            <a:endParaRPr lang="en-US" sz="1300" b="1" dirty="0"/>
+          </a:p>
+          <a:p>
+            <a:pPr marL="0" indent="0" algn="ctr">
+              <a:buNone/>
+            </a:pPr>
+            <a:r>
+              <a:rPr lang="en-US" altLang="zh-CN" sz="1100" dirty="0" err="1">
+                <a:solidFill>
+                  <a:schemeClr val="bg2">
+                    <a:lumMod val="50000"/>
+                  </a:schemeClr>
+                </a:solidFill>
+              </a:rPr>
+              <a:t>EvoH</a:t>
+            </a:r>
+            <a:r>
+              <a:rPr lang="en-US" sz="1100" dirty="0" err="1">
+                <a:solidFill>
+                  <a:schemeClr val="bg2">
+                    <a:lumMod val="50000"/>
+                  </a:schemeClr>
+                </a:solidFill>
+              </a:rPr>
+              <a:t>ist</a:t>
+            </a:r>
+            <a:r>
+              <a:rPr lang="en-US" altLang="zh-CN" sz="1100" dirty="0" err="1">
+                <a:solidFill>
+                  <a:schemeClr val="bg2">
+                    <a:lumMod val="50000"/>
+                  </a:schemeClr>
+                </a:solidFill>
+              </a:rPr>
+              <a:t>ory</a:t>
+            </a:r>
+            <a:r>
+              <a:rPr lang="en-US" altLang="zh-CN" sz="1100" dirty="0">
+                <a:solidFill>
+                  <a:schemeClr val="bg2">
+                    <a:lumMod val="50000"/>
+                  </a:schemeClr>
+                </a:solidFill>
+              </a:rPr>
+              <a:t>()</a:t>
+            </a:r>
+          </a:p>
+        </p:txBody>
+      </p:sp>
+      <p:cxnSp>
+        <p:nvCxnSpPr>
+          <p:cNvPr id="162" name="Elbow Connector 161">
+            <a:extLst>
+              <a:ext uri="{FF2B5EF4-FFF2-40B4-BE49-F238E27FC236}">
+                <a16:creationId xmlns:a16="http://schemas.microsoft.com/office/drawing/2014/main" id="{25F05CAD-590A-0897-9B13-B4DDC0F8E900}"/>
+              </a:ext>
+            </a:extLst>
+          </p:cNvPr>
+          <p:cNvCxnSpPr>
+            <a:cxnSpLocks/>
+            <a:stCxn id="6" idx="2"/>
+            <a:endCxn id="152" idx="2"/>
+          </p:cNvCxnSpPr>
+          <p:nvPr/>
+        </p:nvCxnSpPr>
+        <p:spPr>
+          <a:xfrm rot="5400000" flipH="1" flipV="1">
+            <a:off x="4534587" y="1365174"/>
+            <a:ext cx="1" cy="3984139"/>
+          </a:xfrm>
+          <a:prstGeom prst="bentConnector3">
+            <a:avLst>
+              <a:gd name="adj1" fmla="val -22860000000"/>
+            </a:avLst>
+          </a:prstGeom>
+          <a:ln w="12700">
+            <a:solidFill>
+              <a:schemeClr val="bg2">
+                <a:lumMod val="50000"/>
+              </a:schemeClr>
+            </a:solidFill>
+            <a:prstDash val="lgDash"/>
+            <a:headEnd type="triangle"/>
+            <a:tailEnd type="none"/>
+          </a:ln>
+        </p:spPr>
+        <p:style>
+          <a:lnRef idx="1">
+            <a:schemeClr val="accent1"/>
+          </a:lnRef>
+          <a:fillRef idx="0">
+            <a:schemeClr val="accent1"/>
+          </a:fillRef>
+          <a:effectRef idx="0">
+            <a:schemeClr val="accent1"/>
+          </a:effectRef>
+          <a:fontRef idx="minor">
+            <a:schemeClr val="tx1"/>
+          </a:fontRef>
+        </p:style>
+      </p:cxnSp>
+      <p:sp>
+        <p:nvSpPr>
+          <p:cNvPr id="166" name="Text 17">
+            <a:extLst>
+              <a:ext uri="{FF2B5EF4-FFF2-40B4-BE49-F238E27FC236}">
+                <a16:creationId xmlns:a16="http://schemas.microsoft.com/office/drawing/2014/main" id="{0DC40214-F713-9702-9945-438586CEDADC}"/>
+              </a:ext>
+            </a:extLst>
+          </p:cNvPr>
+          <p:cNvSpPr/>
+          <p:nvPr/>
+        </p:nvSpPr>
+        <p:spPr>
+          <a:xfrm>
+            <a:off x="3989314" y="3556668"/>
+            <a:ext cx="640080" cy="274320"/>
+          </a:xfrm>
+          <a:prstGeom prst="rect">
+            <a:avLst/>
+          </a:prstGeom>
+          <a:noFill/>
+          <a:ln/>
+        </p:spPr>
+        <p:txBody>
+          <a:bodyPr wrap="square" lIns="0" tIns="0" rIns="0" bIns="0" rtlCol="0" anchor="ctr"/>
+          <a:lstStyle/>
+          <a:p>
+            <a:pPr marL="0" indent="0" algn="ctr">
+              <a:buNone/>
+            </a:pPr>
+            <a:r>
+              <a:rPr lang="en-US" altLang="zh-CN" sz="900" i="1" dirty="0">
+                <a:solidFill>
+                  <a:srgbClr val="5F5E5A"/>
+                </a:solidFill>
+              </a:rPr>
+              <a:t>inner</a:t>
+            </a:r>
+            <a:r>
+              <a:rPr lang="zh-CN" altLang="en-US" sz="900" i="1" dirty="0">
+                <a:solidFill>
+                  <a:srgbClr val="5F5E5A"/>
+                </a:solidFill>
+              </a:rPr>
+              <a:t> </a:t>
+            </a:r>
+            <a:r>
+              <a:rPr lang="en-US" altLang="zh-CN" sz="900" i="1" dirty="0">
+                <a:solidFill>
+                  <a:srgbClr val="5F5E5A"/>
+                </a:solidFill>
+              </a:rPr>
+              <a:t>loop</a:t>
+            </a:r>
+            <a:endParaRPr lang="en-US" sz="900" dirty="0"/>
+          </a:p>
+        </p:txBody>
+      </p:sp>
+      <p:sp>
+        <p:nvSpPr>
+          <p:cNvPr id="167" name="TextBox 166">
+            <a:extLst>
+              <a:ext uri="{FF2B5EF4-FFF2-40B4-BE49-F238E27FC236}">
+                <a16:creationId xmlns:a16="http://schemas.microsoft.com/office/drawing/2014/main" id="{30EEB544-ACA2-1A59-6528-8D7A9420C31F}"/>
+              </a:ext>
+            </a:extLst>
+          </p:cNvPr>
+          <p:cNvSpPr txBox="1"/>
+          <p:nvPr/>
+        </p:nvSpPr>
+        <p:spPr>
+          <a:xfrm>
+            <a:off x="5892509" y="1368449"/>
+            <a:ext cx="1268296" cy="261610"/>
+          </a:xfrm>
+          <a:prstGeom prst="rect">
+            <a:avLst/>
+          </a:prstGeom>
+          <a:noFill/>
+        </p:spPr>
+        <p:txBody>
+          <a:bodyPr wrap="none" rtlCol="0">
+            <a:spAutoFit/>
+          </a:bodyPr>
+          <a:lstStyle/>
+          <a:p>
+            <a:r>
+              <a:rPr lang="en-US" altLang="zh-CN" sz="1100" i="1" dirty="0"/>
+              <a:t>Evolutionary</a:t>
+            </a:r>
+            <a:r>
+              <a:rPr lang="zh-CN" altLang="en-US" sz="1100" i="1" dirty="0"/>
+              <a:t> </a:t>
+            </a:r>
+            <a:r>
+              <a:rPr lang="en-US" altLang="zh-CN" sz="1100" i="1" dirty="0"/>
+              <a:t>phase</a:t>
+            </a:r>
+            <a:endParaRPr lang="en-US" sz="1100" i="1" dirty="0"/>
+          </a:p>
+        </p:txBody>
+      </p:sp>
+      <p:sp>
+        <p:nvSpPr>
+          <p:cNvPr id="168" name="Text 1">
+            <a:extLst>
+              <a:ext uri="{FF2B5EF4-FFF2-40B4-BE49-F238E27FC236}">
+                <a16:creationId xmlns:a16="http://schemas.microsoft.com/office/drawing/2014/main" id="{3DE5583D-C40D-5908-123A-9FCFE21AE7FE}"/>
+              </a:ext>
+            </a:extLst>
+          </p:cNvPr>
+          <p:cNvSpPr/>
+          <p:nvPr/>
+        </p:nvSpPr>
+        <p:spPr>
+          <a:xfrm>
+            <a:off x="312867" y="720690"/>
+            <a:ext cx="8229600" cy="256032"/>
+          </a:xfrm>
+          <a:prstGeom prst="rect">
+            <a:avLst/>
+          </a:prstGeom>
+          <a:noFill/>
+          <a:ln/>
+        </p:spPr>
+        <p:txBody>
+          <a:bodyPr wrap="square" lIns="0" tIns="0" rIns="0" bIns="0" rtlCol="0" anchor="ctr"/>
+          <a:lstStyle/>
+          <a:p>
+            <a:pPr marL="0" indent="0" algn="ctr">
+              <a:buNone/>
+            </a:pPr>
+            <a:r>
+              <a:rPr lang="en-US" sz="1000" i="1" dirty="0">
+                <a:solidFill>
+                  <a:srgbClr val="5F5E5A"/>
+                </a:solidFill>
+              </a:rPr>
+              <a:t>outer loop — repeat for N mutation events</a:t>
+            </a:r>
+            <a:endParaRPr lang="en-US" sz="1000" dirty="0"/>
+          </a:p>
+        </p:txBody>
+      </p:sp>
+      <p:cxnSp>
+        <p:nvCxnSpPr>
+          <p:cNvPr id="171" name="Straight Arrow Connector 170">
+            <a:extLst>
+              <a:ext uri="{FF2B5EF4-FFF2-40B4-BE49-F238E27FC236}">
+                <a16:creationId xmlns:a16="http://schemas.microsoft.com/office/drawing/2014/main" id="{620A742C-FC14-2CCC-A61A-6EB3D17DB92E}"/>
+              </a:ext>
+            </a:extLst>
+          </p:cNvPr>
+          <p:cNvCxnSpPr>
+            <a:cxnSpLocks/>
+          </p:cNvCxnSpPr>
+          <p:nvPr/>
+        </p:nvCxnSpPr>
+        <p:spPr>
+          <a:xfrm>
+            <a:off x="1510701" y="2497501"/>
+            <a:ext cx="193017" cy="0"/>
+          </a:xfrm>
+          <a:prstGeom prst="straightConnector1">
+            <a:avLst/>
+          </a:prstGeom>
+          <a:ln w="12700">
+            <a:solidFill>
+              <a:schemeClr val="tx1"/>
+            </a:solidFill>
+            <a:tailEnd type="triangle"/>
+          </a:ln>
+        </p:spPr>
+        <p:style>
+          <a:lnRef idx="1">
+            <a:schemeClr val="accent1"/>
+          </a:lnRef>
+          <a:fillRef idx="0">
+            <a:schemeClr val="accent1"/>
+          </a:fillRef>
+          <a:effectRef idx="0">
+            <a:schemeClr val="accent1"/>
+          </a:effectRef>
+          <a:fontRef idx="minor">
+            <a:schemeClr val="tx1"/>
+          </a:fontRef>
+        </p:style>
+      </p:cxnSp>
+      <p:cxnSp>
+        <p:nvCxnSpPr>
+          <p:cNvPr id="172" name="Straight Arrow Connector 171">
+            <a:extLst>
+              <a:ext uri="{FF2B5EF4-FFF2-40B4-BE49-F238E27FC236}">
+                <a16:creationId xmlns:a16="http://schemas.microsoft.com/office/drawing/2014/main" id="{DE59BD28-9FBC-845B-7903-A72C4FEE6319}"/>
+              </a:ext>
+            </a:extLst>
+          </p:cNvPr>
+          <p:cNvCxnSpPr>
+            <a:cxnSpLocks/>
+          </p:cNvCxnSpPr>
+          <p:nvPr/>
+        </p:nvCxnSpPr>
+        <p:spPr>
+          <a:xfrm>
+            <a:off x="3421113" y="2493520"/>
+            <a:ext cx="193017" cy="0"/>
+          </a:xfrm>
+          <a:prstGeom prst="straightConnector1">
+            <a:avLst/>
+          </a:prstGeom>
+          <a:ln w="12700">
+            <a:solidFill>
+              <a:schemeClr val="tx1"/>
+            </a:solidFill>
+            <a:tailEnd type="triangle"/>
+          </a:ln>
+        </p:spPr>
+        <p:style>
+          <a:lnRef idx="1">
+            <a:schemeClr val="accent1"/>
+          </a:lnRef>
+          <a:fillRef idx="0">
+            <a:schemeClr val="accent1"/>
+          </a:fillRef>
+          <a:effectRef idx="0">
+            <a:schemeClr val="accent1"/>
+          </a:effectRef>
+          <a:fontRef idx="minor">
+            <a:schemeClr val="tx1"/>
+          </a:fontRef>
+        </p:style>
+      </p:cxnSp>
+      <p:cxnSp>
+        <p:nvCxnSpPr>
+          <p:cNvPr id="173" name="Straight Arrow Connector 172">
+            <a:extLst>
+              <a:ext uri="{FF2B5EF4-FFF2-40B4-BE49-F238E27FC236}">
+                <a16:creationId xmlns:a16="http://schemas.microsoft.com/office/drawing/2014/main" id="{627205FC-6C64-D7E0-3C12-65A2CAB15F12}"/>
+              </a:ext>
+            </a:extLst>
+          </p:cNvPr>
+          <p:cNvCxnSpPr>
+            <a:cxnSpLocks/>
+          </p:cNvCxnSpPr>
+          <p:nvPr/>
+        </p:nvCxnSpPr>
+        <p:spPr>
+          <a:xfrm>
+            <a:off x="5276858" y="2489279"/>
+            <a:ext cx="193017" cy="0"/>
+          </a:xfrm>
+          <a:prstGeom prst="straightConnector1">
+            <a:avLst/>
+          </a:prstGeom>
+          <a:ln w="12700">
+            <a:solidFill>
+              <a:schemeClr val="tx1"/>
+            </a:solidFill>
+            <a:tailEnd type="triangle"/>
+          </a:ln>
+        </p:spPr>
+        <p:style>
+          <a:lnRef idx="1">
+            <a:schemeClr val="accent1"/>
+          </a:lnRef>
+          <a:fillRef idx="0">
+            <a:schemeClr val="accent1"/>
+          </a:fillRef>
+          <a:effectRef idx="0">
+            <a:schemeClr val="accent1"/>
+          </a:effectRef>
+          <a:fontRef idx="minor">
+            <a:schemeClr val="tx1"/>
+          </a:fontRef>
+        </p:style>
+      </p:cxnSp>
+      <p:cxnSp>
+        <p:nvCxnSpPr>
+          <p:cNvPr id="174" name="Straight Arrow Connector 173">
+            <a:extLst>
+              <a:ext uri="{FF2B5EF4-FFF2-40B4-BE49-F238E27FC236}">
+                <a16:creationId xmlns:a16="http://schemas.microsoft.com/office/drawing/2014/main" id="{FCD5F150-E5AB-DF4E-A325-123247A731CB}"/>
+              </a:ext>
+            </a:extLst>
+          </p:cNvPr>
+          <p:cNvCxnSpPr>
+            <a:cxnSpLocks/>
+          </p:cNvCxnSpPr>
+          <p:nvPr/>
+        </p:nvCxnSpPr>
+        <p:spPr>
+          <a:xfrm>
+            <a:off x="7590381" y="2489279"/>
+            <a:ext cx="193017" cy="0"/>
+          </a:xfrm>
+          <a:prstGeom prst="straightConnector1">
+            <a:avLst/>
+          </a:prstGeom>
+          <a:ln w="12700">
+            <a:solidFill>
+              <a:schemeClr val="tx1"/>
+            </a:solidFill>
+            <a:tailEnd type="triangle"/>
+          </a:ln>
+        </p:spPr>
+        <p:style>
+          <a:lnRef idx="1">
+            <a:schemeClr val="accent1"/>
+          </a:lnRef>
+          <a:fillRef idx="0">
+            <a:schemeClr val="accent1"/>
+          </a:fillRef>
+          <a:effectRef idx="0">
+            <a:schemeClr val="accent1"/>
+          </a:effectRef>
+          <a:fontRef idx="minor">
+            <a:schemeClr val="tx1"/>
+          </a:fontRef>
+        </p:style>
+      </p:cxnSp>
+      <p:sp>
+        <p:nvSpPr>
+          <p:cNvPr id="290" name="TextBox 289">
+            <a:extLst>
+              <a:ext uri="{FF2B5EF4-FFF2-40B4-BE49-F238E27FC236}">
+                <a16:creationId xmlns:a16="http://schemas.microsoft.com/office/drawing/2014/main" id="{090DD82D-1BA0-F65A-CC15-616BC0394277}"/>
+              </a:ext>
+            </a:extLst>
+          </p:cNvPr>
+          <p:cNvSpPr txBox="1"/>
+          <p:nvPr/>
+        </p:nvSpPr>
+        <p:spPr>
+          <a:xfrm>
+            <a:off x="3870526" y="1368449"/>
+            <a:ext cx="1159292" cy="261610"/>
+          </a:xfrm>
+          <a:prstGeom prst="rect">
+            <a:avLst/>
+          </a:prstGeom>
+          <a:noFill/>
+        </p:spPr>
+        <p:txBody>
+          <a:bodyPr wrap="none" rtlCol="0">
+            <a:spAutoFit/>
+          </a:bodyPr>
+          <a:lstStyle/>
+          <a:p>
+            <a:r>
+              <a:rPr lang="en-US" altLang="zh-CN" sz="1100" i="1" dirty="0"/>
+              <a:t>Ecological</a:t>
+            </a:r>
+            <a:r>
+              <a:rPr lang="zh-CN" altLang="en-US" sz="1100" i="1" dirty="0"/>
+              <a:t> </a:t>
+            </a:r>
+            <a:r>
+              <a:rPr lang="en-US" altLang="zh-CN" sz="1100" i="1" dirty="0"/>
+              <a:t>phase</a:t>
+            </a:r>
+            <a:endParaRPr lang="en-US" sz="1100" i="1" dirty="0"/>
+          </a:p>
+        </p:txBody>
+      </p:sp>
+      <p:grpSp>
+        <p:nvGrpSpPr>
+          <p:cNvPr id="200" name="Group 199">
+            <a:extLst>
+              <a:ext uri="{FF2B5EF4-FFF2-40B4-BE49-F238E27FC236}">
+                <a16:creationId xmlns:a16="http://schemas.microsoft.com/office/drawing/2014/main" id="{BDA568DB-668B-BB6D-F9FB-DCF2F9368E01}"/>
+              </a:ext>
+            </a:extLst>
+          </p:cNvPr>
+          <p:cNvGrpSpPr/>
+          <p:nvPr/>
+        </p:nvGrpSpPr>
+        <p:grpSpPr>
+          <a:xfrm>
+            <a:off x="1927809" y="2206927"/>
+            <a:ext cx="1704805" cy="1008947"/>
+            <a:chOff x="5512553" y="834494"/>
+            <a:chExt cx="2219565" cy="1303222"/>
+          </a:xfrm>
+        </p:grpSpPr>
+        <p:grpSp>
+          <p:nvGrpSpPr>
+            <p:cNvPr id="201" name="Group 200">
+              <a:extLst>
+                <a:ext uri="{FF2B5EF4-FFF2-40B4-BE49-F238E27FC236}">
+                  <a16:creationId xmlns:a16="http://schemas.microsoft.com/office/drawing/2014/main" id="{867D6272-C44F-D54E-D99E-C4F4A800058C}"/>
+                </a:ext>
+              </a:extLst>
+            </p:cNvPr>
+            <p:cNvGrpSpPr/>
+            <p:nvPr/>
+          </p:nvGrpSpPr>
+          <p:grpSpPr>
+            <a:xfrm>
+              <a:off x="7019815" y="1167405"/>
+              <a:ext cx="179024" cy="162648"/>
+              <a:chOff x="7067843" y="717976"/>
+              <a:chExt cx="201168" cy="206147"/>
+            </a:xfrm>
+          </p:grpSpPr>
+          <p:sp>
+            <p:nvSpPr>
+              <p:cNvPr id="307" name="Shape 71">
+                <a:extLst>
+                  <a:ext uri="{FF2B5EF4-FFF2-40B4-BE49-F238E27FC236}">
+                    <a16:creationId xmlns:a16="http://schemas.microsoft.com/office/drawing/2014/main" id="{D25B75D0-AF82-24F4-36C5-3EED9A9F7006}"/>
+                  </a:ext>
+                </a:extLst>
+              </p:cNvPr>
+              <p:cNvSpPr/>
+              <p:nvPr/>
+            </p:nvSpPr>
+            <p:spPr>
+              <a:xfrm>
+                <a:off x="7067843" y="717976"/>
+                <a:ext cx="201168" cy="206147"/>
+              </a:xfrm>
+              <a:prstGeom prst="ellipse">
+                <a:avLst/>
+              </a:prstGeom>
+              <a:solidFill>
+                <a:srgbClr val="F9E0EE"/>
+              </a:solidFill>
+              <a:ln w="22225">
+                <a:solidFill>
+                  <a:srgbClr val="C0156E"/>
+                </a:solidFill>
+                <a:prstDash val="solid"/>
+              </a:ln>
+            </p:spPr>
+            <p:txBody>
+              <a:bodyPr/>
+              <a:lstStyle/>
+              <a:p>
+                <a:endParaRPr lang="en-US" dirty="0"/>
+              </a:p>
+            </p:txBody>
+          </p:sp>
+          <p:sp>
+            <p:nvSpPr>
+              <p:cNvPr id="308" name="Shape 72">
+                <a:extLst>
+                  <a:ext uri="{FF2B5EF4-FFF2-40B4-BE49-F238E27FC236}">
+                    <a16:creationId xmlns:a16="http://schemas.microsoft.com/office/drawing/2014/main" id="{D7D85E2C-3AAD-A0C6-FD13-BA763153B426}"/>
+                  </a:ext>
+                </a:extLst>
+              </p:cNvPr>
+              <p:cNvSpPr/>
+              <p:nvPr/>
+            </p:nvSpPr>
+            <p:spPr>
+              <a:xfrm>
+                <a:off x="7128525" y="770321"/>
+                <a:ext cx="80467" cy="82459"/>
+              </a:xfrm>
+              <a:prstGeom prst="ellipse">
+                <a:avLst/>
+              </a:prstGeom>
+              <a:solidFill>
+                <a:srgbClr val="C0156E">
+                  <a:alpha val="50000"/>
+                </a:srgbClr>
+              </a:solidFill>
+              <a:ln/>
+            </p:spPr>
+            <p:txBody>
+              <a:bodyPr/>
+              <a:lstStyle/>
+              <a:p>
+                <a:endParaRPr lang="en-US" dirty="0"/>
+              </a:p>
+            </p:txBody>
+          </p:sp>
+        </p:grpSp>
+        <p:sp>
+          <p:nvSpPr>
+            <p:cNvPr id="202" name="TextBox 201">
+              <a:extLst>
+                <a:ext uri="{FF2B5EF4-FFF2-40B4-BE49-F238E27FC236}">
+                  <a16:creationId xmlns:a16="http://schemas.microsoft.com/office/drawing/2014/main" id="{9C12D214-EF19-781C-924D-BE45F2B81560}"/>
+                </a:ext>
+              </a:extLst>
+            </p:cNvPr>
+            <p:cNvSpPr txBox="1"/>
+            <p:nvPr/>
+          </p:nvSpPr>
+          <p:spPr>
+            <a:xfrm>
+              <a:off x="6165675" y="834494"/>
+              <a:ext cx="1566443" cy="337913"/>
+            </a:xfrm>
+            <a:prstGeom prst="rect">
+              <a:avLst/>
+            </a:prstGeom>
+            <a:noFill/>
+          </p:spPr>
+          <p:txBody>
+            <a:bodyPr wrap="square" rtlCol="0">
+              <a:spAutoFit/>
+            </a:bodyPr>
+            <a:lstStyle/>
+            <a:p>
+              <a:r>
+                <a:rPr lang="en-US" altLang="zh-CN" sz="1100" dirty="0"/>
+                <a:t>a</a:t>
+              </a:r>
+              <a:r>
+                <a:rPr lang="zh-CN" altLang="en-US" sz="1100" dirty="0"/>
+                <a:t> </a:t>
+              </a:r>
+              <a:r>
+                <a:rPr lang="en-US" altLang="zh-CN" sz="1100" dirty="0"/>
+                <a:t>new</a:t>
+              </a:r>
+              <a:r>
+                <a:rPr lang="zh-CN" altLang="en-US" sz="1100" dirty="0"/>
+                <a:t> </a:t>
+              </a:r>
+              <a:r>
+                <a:rPr lang="en-US" altLang="zh-CN" sz="1100" dirty="0"/>
+                <a:t>mutant</a:t>
+              </a:r>
+              <a:endParaRPr lang="en-US" sz="1100" dirty="0"/>
+            </a:p>
+          </p:txBody>
+        </p:sp>
+        <p:cxnSp>
+          <p:nvCxnSpPr>
+            <p:cNvPr id="203" name="Curved Connector 202">
+              <a:extLst>
+                <a:ext uri="{FF2B5EF4-FFF2-40B4-BE49-F238E27FC236}">
+                  <a16:creationId xmlns:a16="http://schemas.microsoft.com/office/drawing/2014/main" id="{B3A2A498-19F6-E569-DC08-BF903D8203ED}"/>
+                </a:ext>
+              </a:extLst>
+            </p:cNvPr>
+            <p:cNvCxnSpPr>
+              <a:cxnSpLocks/>
+            </p:cNvCxnSpPr>
+            <p:nvPr/>
+          </p:nvCxnSpPr>
+          <p:spPr>
+            <a:xfrm rot="5400000" flipH="1" flipV="1">
+              <a:off x="6746350" y="1200191"/>
+              <a:ext cx="162647" cy="242445"/>
+            </a:xfrm>
+            <a:prstGeom prst="curvedConnector2">
+              <a:avLst/>
+            </a:prstGeom>
+            <a:ln w="9525">
+              <a:solidFill>
+                <a:schemeClr val="accent2">
+                  <a:lumMod val="50000"/>
+                  <a:alpha val="89000"/>
+                </a:schemeClr>
+              </a:solidFill>
+              <a:headEnd type="none"/>
+              <a:tailEnd type="stealth"/>
+            </a:ln>
+          </p:spPr>
+          <p:style>
+            <a:lnRef idx="1">
+              <a:schemeClr val="dk1"/>
+            </a:lnRef>
+            <a:fillRef idx="0">
+              <a:schemeClr val="dk1"/>
+            </a:fillRef>
+            <a:effectRef idx="0">
+              <a:schemeClr val="dk1"/>
+            </a:effectRef>
+            <a:fontRef idx="minor">
+              <a:schemeClr val="tx1"/>
+            </a:fontRef>
+          </p:style>
+        </p:cxnSp>
+        <p:grpSp>
+          <p:nvGrpSpPr>
+            <p:cNvPr id="204" name="Group 203">
+              <a:extLst>
+                <a:ext uri="{FF2B5EF4-FFF2-40B4-BE49-F238E27FC236}">
+                  <a16:creationId xmlns:a16="http://schemas.microsoft.com/office/drawing/2014/main" id="{4BCFDC75-B22C-B901-2FD4-58DAEEC78054}"/>
+                </a:ext>
+              </a:extLst>
+            </p:cNvPr>
+            <p:cNvGrpSpPr/>
+            <p:nvPr/>
+          </p:nvGrpSpPr>
+          <p:grpSpPr>
+            <a:xfrm>
+              <a:off x="6209408" y="1482455"/>
+              <a:ext cx="186961" cy="186850"/>
+              <a:chOff x="1225296" y="1527048"/>
+              <a:chExt cx="201168" cy="201168"/>
+            </a:xfrm>
+          </p:grpSpPr>
+          <p:sp>
+            <p:nvSpPr>
+              <p:cNvPr id="305" name="Shape 15">
+                <a:extLst>
+                  <a:ext uri="{FF2B5EF4-FFF2-40B4-BE49-F238E27FC236}">
+                    <a16:creationId xmlns:a16="http://schemas.microsoft.com/office/drawing/2014/main" id="{20B6EAE3-E220-E2E7-B5D1-42413B5ED244}"/>
+                  </a:ext>
+                </a:extLst>
+              </p:cNvPr>
+              <p:cNvSpPr/>
+              <p:nvPr/>
+            </p:nvSpPr>
+            <p:spPr>
+              <a:xfrm>
+                <a:off x="1225296" y="1527048"/>
+                <a:ext cx="201168" cy="201168"/>
+              </a:xfrm>
+              <a:prstGeom prst="ellipse">
+                <a:avLst/>
+              </a:prstGeom>
+              <a:solidFill>
+                <a:srgbClr val="E8E7F5"/>
+              </a:solidFill>
+              <a:ln w="9525">
+                <a:solidFill>
+                  <a:srgbClr val="2E2585"/>
+                </a:solidFill>
+                <a:prstDash val="solid"/>
+              </a:ln>
+            </p:spPr>
+            <p:txBody>
+              <a:bodyPr/>
+              <a:lstStyle/>
+              <a:p>
+                <a:endParaRPr lang="en-US"/>
+              </a:p>
+            </p:txBody>
+          </p:sp>
+          <p:sp>
+            <p:nvSpPr>
+              <p:cNvPr id="306" name="Shape 16">
+                <a:extLst>
+                  <a:ext uri="{FF2B5EF4-FFF2-40B4-BE49-F238E27FC236}">
+                    <a16:creationId xmlns:a16="http://schemas.microsoft.com/office/drawing/2014/main" id="{F706DDBC-C32F-AED1-EC17-BAAF17A6810D}"/>
+                  </a:ext>
+                </a:extLst>
+              </p:cNvPr>
+              <p:cNvSpPr/>
+              <p:nvPr/>
+            </p:nvSpPr>
+            <p:spPr>
+              <a:xfrm>
+                <a:off x="1285646" y="1587398"/>
+                <a:ext cx="80467" cy="80467"/>
+              </a:xfrm>
+              <a:prstGeom prst="ellipse">
+                <a:avLst/>
+              </a:prstGeom>
+              <a:solidFill>
+                <a:srgbClr val="2E2585">
+                  <a:alpha val="50000"/>
+                </a:srgbClr>
+              </a:solidFill>
+              <a:ln/>
+            </p:spPr>
+            <p:txBody>
+              <a:bodyPr/>
+              <a:lstStyle/>
+              <a:p>
+                <a:endParaRPr lang="en-US"/>
+              </a:p>
+            </p:txBody>
+          </p:sp>
+        </p:grpSp>
+        <p:grpSp>
+          <p:nvGrpSpPr>
+            <p:cNvPr id="205" name="Group 204">
+              <a:extLst>
+                <a:ext uri="{FF2B5EF4-FFF2-40B4-BE49-F238E27FC236}">
+                  <a16:creationId xmlns:a16="http://schemas.microsoft.com/office/drawing/2014/main" id="{635AA92F-9707-7ECD-716F-3F43B5CEB823}"/>
+                </a:ext>
+              </a:extLst>
+            </p:cNvPr>
+            <p:cNvGrpSpPr/>
+            <p:nvPr/>
+          </p:nvGrpSpPr>
+          <p:grpSpPr>
+            <a:xfrm>
+              <a:off x="6587600" y="1421812"/>
+              <a:ext cx="169964" cy="169864"/>
+              <a:chOff x="1874520" y="1444752"/>
+              <a:chExt cx="182880" cy="182880"/>
+            </a:xfrm>
+          </p:grpSpPr>
+          <p:sp>
+            <p:nvSpPr>
+              <p:cNvPr id="303" name="Shape 23">
+                <a:extLst>
+                  <a:ext uri="{FF2B5EF4-FFF2-40B4-BE49-F238E27FC236}">
+                    <a16:creationId xmlns:a16="http://schemas.microsoft.com/office/drawing/2014/main" id="{BB02CD22-86E9-EA70-2B6F-EEE5071AA9CA}"/>
+                  </a:ext>
+                </a:extLst>
+              </p:cNvPr>
+              <p:cNvSpPr/>
+              <p:nvPr/>
+            </p:nvSpPr>
+            <p:spPr>
+              <a:xfrm>
+                <a:off x="1874520" y="1444752"/>
+                <a:ext cx="182880" cy="182880"/>
+              </a:xfrm>
+              <a:prstGeom prst="ellipse">
+                <a:avLst/>
+              </a:prstGeom>
+              <a:solidFill>
+                <a:srgbClr val="FAE8E3"/>
+              </a:solidFill>
+              <a:ln w="9525">
+                <a:solidFill>
+                  <a:srgbClr val="DC4B1E"/>
+                </a:solidFill>
+                <a:prstDash val="solid"/>
+              </a:ln>
+            </p:spPr>
+            <p:txBody>
+              <a:bodyPr/>
+              <a:lstStyle/>
+              <a:p>
+                <a:endParaRPr lang="en-US"/>
+              </a:p>
+            </p:txBody>
+          </p:sp>
+          <p:sp>
+            <p:nvSpPr>
+              <p:cNvPr id="304" name="Shape 24">
+                <a:extLst>
+                  <a:ext uri="{FF2B5EF4-FFF2-40B4-BE49-F238E27FC236}">
+                    <a16:creationId xmlns:a16="http://schemas.microsoft.com/office/drawing/2014/main" id="{FFDBA626-57E5-A2AF-4C8D-7670A8A1A75B}"/>
+                  </a:ext>
+                </a:extLst>
+              </p:cNvPr>
+              <p:cNvSpPr/>
+              <p:nvPr/>
+            </p:nvSpPr>
+            <p:spPr>
+              <a:xfrm>
+                <a:off x="1929384" y="1499616"/>
+                <a:ext cx="73152" cy="73152"/>
+              </a:xfrm>
+              <a:prstGeom prst="ellipse">
+                <a:avLst/>
+              </a:prstGeom>
+              <a:solidFill>
+                <a:srgbClr val="DC4B1E">
+                  <a:alpha val="50000"/>
+                </a:srgbClr>
+              </a:solidFill>
+              <a:ln/>
+            </p:spPr>
+            <p:txBody>
+              <a:bodyPr/>
+              <a:lstStyle/>
+              <a:p>
+                <a:endParaRPr lang="en-US"/>
+              </a:p>
+            </p:txBody>
+          </p:sp>
+        </p:grpSp>
+        <p:grpSp>
+          <p:nvGrpSpPr>
+            <p:cNvPr id="206" name="Group 205">
+              <a:extLst>
+                <a:ext uri="{FF2B5EF4-FFF2-40B4-BE49-F238E27FC236}">
+                  <a16:creationId xmlns:a16="http://schemas.microsoft.com/office/drawing/2014/main" id="{FF691D7E-3735-6F52-080E-B940B95F7461}"/>
+                </a:ext>
+              </a:extLst>
+            </p:cNvPr>
+            <p:cNvGrpSpPr/>
+            <p:nvPr/>
+          </p:nvGrpSpPr>
+          <p:grpSpPr>
+            <a:xfrm>
+              <a:off x="5754578" y="1914888"/>
+              <a:ext cx="186961" cy="186850"/>
+              <a:chOff x="1225296" y="1527048"/>
+              <a:chExt cx="201168" cy="201168"/>
+            </a:xfrm>
+          </p:grpSpPr>
+          <p:sp>
+            <p:nvSpPr>
+              <p:cNvPr id="301" name="Shape 15">
+                <a:extLst>
+                  <a:ext uri="{FF2B5EF4-FFF2-40B4-BE49-F238E27FC236}">
+                    <a16:creationId xmlns:a16="http://schemas.microsoft.com/office/drawing/2014/main" id="{AB6366CF-2F35-F998-0B57-0084768C3528}"/>
+                  </a:ext>
+                </a:extLst>
+              </p:cNvPr>
+              <p:cNvSpPr/>
+              <p:nvPr/>
+            </p:nvSpPr>
+            <p:spPr>
+              <a:xfrm>
+                <a:off x="1225296" y="1527048"/>
+                <a:ext cx="201168" cy="201168"/>
+              </a:xfrm>
+              <a:prstGeom prst="ellipse">
+                <a:avLst/>
+              </a:prstGeom>
+              <a:solidFill>
+                <a:srgbClr val="E8E7F5"/>
+              </a:solidFill>
+              <a:ln w="9525">
+                <a:solidFill>
+                  <a:srgbClr val="2E2585"/>
+                </a:solidFill>
+                <a:prstDash val="solid"/>
+              </a:ln>
+            </p:spPr>
+            <p:txBody>
+              <a:bodyPr/>
+              <a:lstStyle/>
+              <a:p>
+                <a:endParaRPr lang="en-US"/>
+              </a:p>
+            </p:txBody>
+          </p:sp>
+          <p:sp>
+            <p:nvSpPr>
+              <p:cNvPr id="302" name="Shape 16">
+                <a:extLst>
+                  <a:ext uri="{FF2B5EF4-FFF2-40B4-BE49-F238E27FC236}">
+                    <a16:creationId xmlns:a16="http://schemas.microsoft.com/office/drawing/2014/main" id="{22EABC5F-013D-17E9-AA43-FE18DE577793}"/>
+                  </a:ext>
+                </a:extLst>
+              </p:cNvPr>
+              <p:cNvSpPr/>
+              <p:nvPr/>
+            </p:nvSpPr>
+            <p:spPr>
+              <a:xfrm>
+                <a:off x="1285646" y="1587398"/>
+                <a:ext cx="80467" cy="80467"/>
+              </a:xfrm>
+              <a:prstGeom prst="ellipse">
+                <a:avLst/>
+              </a:prstGeom>
+              <a:solidFill>
+                <a:srgbClr val="2E2585">
+                  <a:alpha val="50000"/>
+                </a:srgbClr>
+              </a:solidFill>
+              <a:ln/>
+            </p:spPr>
+            <p:txBody>
+              <a:bodyPr/>
+              <a:lstStyle/>
+              <a:p>
+                <a:endParaRPr lang="en-US"/>
+              </a:p>
+            </p:txBody>
+          </p:sp>
+        </p:grpSp>
+        <p:grpSp>
+          <p:nvGrpSpPr>
+            <p:cNvPr id="207" name="Group 206">
+              <a:extLst>
+                <a:ext uri="{FF2B5EF4-FFF2-40B4-BE49-F238E27FC236}">
+                  <a16:creationId xmlns:a16="http://schemas.microsoft.com/office/drawing/2014/main" id="{12A64D69-0781-E8EA-1F59-85AF84E469AF}"/>
+                </a:ext>
+              </a:extLst>
+            </p:cNvPr>
+            <p:cNvGrpSpPr/>
+            <p:nvPr/>
+          </p:nvGrpSpPr>
+          <p:grpSpPr>
+            <a:xfrm>
+              <a:off x="5512556" y="1636033"/>
+              <a:ext cx="169964" cy="169864"/>
+              <a:chOff x="1874520" y="1444752"/>
+              <a:chExt cx="182880" cy="182880"/>
+            </a:xfrm>
+          </p:grpSpPr>
+          <p:sp>
+            <p:nvSpPr>
+              <p:cNvPr id="299" name="Shape 23">
+                <a:extLst>
+                  <a:ext uri="{FF2B5EF4-FFF2-40B4-BE49-F238E27FC236}">
+                    <a16:creationId xmlns:a16="http://schemas.microsoft.com/office/drawing/2014/main" id="{2D205761-7F73-00B1-687D-006AFF1226EB}"/>
+                  </a:ext>
+                </a:extLst>
+              </p:cNvPr>
+              <p:cNvSpPr/>
+              <p:nvPr/>
+            </p:nvSpPr>
+            <p:spPr>
+              <a:xfrm>
+                <a:off x="1874520" y="1444752"/>
+                <a:ext cx="182880" cy="182880"/>
+              </a:xfrm>
+              <a:prstGeom prst="ellipse">
+                <a:avLst/>
+              </a:prstGeom>
+              <a:solidFill>
+                <a:srgbClr val="FAE8E3"/>
+              </a:solidFill>
+              <a:ln w="9525">
+                <a:solidFill>
+                  <a:srgbClr val="DC4B1E"/>
+                </a:solidFill>
+                <a:prstDash val="solid"/>
+              </a:ln>
+            </p:spPr>
+            <p:txBody>
+              <a:bodyPr/>
+              <a:lstStyle/>
+              <a:p>
+                <a:endParaRPr lang="en-US"/>
+              </a:p>
+            </p:txBody>
+          </p:sp>
+          <p:sp>
+            <p:nvSpPr>
+              <p:cNvPr id="300" name="Shape 24">
+                <a:extLst>
+                  <a:ext uri="{FF2B5EF4-FFF2-40B4-BE49-F238E27FC236}">
+                    <a16:creationId xmlns:a16="http://schemas.microsoft.com/office/drawing/2014/main" id="{4A9259B1-4C68-84F1-78E1-F7EAA8F616B6}"/>
+                  </a:ext>
+                </a:extLst>
+              </p:cNvPr>
+              <p:cNvSpPr/>
+              <p:nvPr/>
+            </p:nvSpPr>
+            <p:spPr>
+              <a:xfrm>
+                <a:off x="1929384" y="1499616"/>
+                <a:ext cx="73152" cy="73152"/>
+              </a:xfrm>
+              <a:prstGeom prst="ellipse">
+                <a:avLst/>
+              </a:prstGeom>
+              <a:solidFill>
+                <a:srgbClr val="DC4B1E">
+                  <a:alpha val="50000"/>
+                </a:srgbClr>
+              </a:solidFill>
+              <a:ln/>
+            </p:spPr>
+            <p:txBody>
+              <a:bodyPr/>
+              <a:lstStyle/>
+              <a:p>
+                <a:endParaRPr lang="en-US"/>
+              </a:p>
+            </p:txBody>
+          </p:sp>
+        </p:grpSp>
+        <p:grpSp>
+          <p:nvGrpSpPr>
+            <p:cNvPr id="208" name="Group 207">
+              <a:extLst>
+                <a:ext uri="{FF2B5EF4-FFF2-40B4-BE49-F238E27FC236}">
+                  <a16:creationId xmlns:a16="http://schemas.microsoft.com/office/drawing/2014/main" id="{2720BD8B-78F0-CEA8-B353-8C8D1BDE03F2}"/>
+                </a:ext>
+              </a:extLst>
+            </p:cNvPr>
+            <p:cNvGrpSpPr/>
+            <p:nvPr/>
+          </p:nvGrpSpPr>
+          <p:grpSpPr>
+            <a:xfrm>
+              <a:off x="6291301" y="1950866"/>
+              <a:ext cx="186961" cy="186850"/>
+              <a:chOff x="1225296" y="1527048"/>
+              <a:chExt cx="201168" cy="201168"/>
+            </a:xfrm>
+          </p:grpSpPr>
+          <p:sp>
+            <p:nvSpPr>
+              <p:cNvPr id="297" name="Shape 15">
+                <a:extLst>
+                  <a:ext uri="{FF2B5EF4-FFF2-40B4-BE49-F238E27FC236}">
+                    <a16:creationId xmlns:a16="http://schemas.microsoft.com/office/drawing/2014/main" id="{D9B70BDF-4844-AACA-C9BC-2405860B6724}"/>
+                  </a:ext>
+                </a:extLst>
+              </p:cNvPr>
+              <p:cNvSpPr/>
+              <p:nvPr/>
+            </p:nvSpPr>
+            <p:spPr>
+              <a:xfrm>
+                <a:off x="1225296" y="1527048"/>
+                <a:ext cx="201168" cy="201168"/>
+              </a:xfrm>
+              <a:prstGeom prst="ellipse">
+                <a:avLst/>
+              </a:prstGeom>
+              <a:solidFill>
+                <a:srgbClr val="E8E7F5"/>
+              </a:solidFill>
+              <a:ln w="9525">
+                <a:solidFill>
+                  <a:srgbClr val="2E2585"/>
+                </a:solidFill>
+                <a:prstDash val="solid"/>
+              </a:ln>
+            </p:spPr>
+            <p:txBody>
+              <a:bodyPr/>
+              <a:lstStyle/>
+              <a:p>
+                <a:endParaRPr lang="en-US"/>
+              </a:p>
+            </p:txBody>
+          </p:sp>
+          <p:sp>
+            <p:nvSpPr>
+              <p:cNvPr id="298" name="Shape 16">
+                <a:extLst>
+                  <a:ext uri="{FF2B5EF4-FFF2-40B4-BE49-F238E27FC236}">
+                    <a16:creationId xmlns:a16="http://schemas.microsoft.com/office/drawing/2014/main" id="{B4FC933E-DD5F-3F67-3910-AEE12A6D120E}"/>
+                  </a:ext>
+                </a:extLst>
+              </p:cNvPr>
+              <p:cNvSpPr/>
+              <p:nvPr/>
+            </p:nvSpPr>
+            <p:spPr>
+              <a:xfrm>
+                <a:off x="1285646" y="1587398"/>
+                <a:ext cx="80467" cy="80467"/>
+              </a:xfrm>
+              <a:prstGeom prst="ellipse">
+                <a:avLst/>
+              </a:prstGeom>
+              <a:solidFill>
+                <a:srgbClr val="2E2585">
+                  <a:alpha val="50000"/>
+                </a:srgbClr>
+              </a:solidFill>
+              <a:ln/>
+            </p:spPr>
+            <p:txBody>
+              <a:bodyPr/>
+              <a:lstStyle/>
+              <a:p>
+                <a:endParaRPr lang="en-US"/>
+              </a:p>
+            </p:txBody>
+          </p:sp>
+        </p:grpSp>
+        <p:grpSp>
+          <p:nvGrpSpPr>
+            <p:cNvPr id="209" name="Group 208">
+              <a:extLst>
+                <a:ext uri="{FF2B5EF4-FFF2-40B4-BE49-F238E27FC236}">
+                  <a16:creationId xmlns:a16="http://schemas.microsoft.com/office/drawing/2014/main" id="{CA1BF2F4-F732-7750-74C3-9BD6CDB2CADC}"/>
+                </a:ext>
+              </a:extLst>
+            </p:cNvPr>
+            <p:cNvGrpSpPr/>
+            <p:nvPr/>
+          </p:nvGrpSpPr>
+          <p:grpSpPr>
+            <a:xfrm>
+              <a:off x="6706459" y="1857441"/>
+              <a:ext cx="186961" cy="186850"/>
+              <a:chOff x="1225296" y="1527048"/>
+              <a:chExt cx="201168" cy="201168"/>
+            </a:xfrm>
+          </p:grpSpPr>
+          <p:sp>
+            <p:nvSpPr>
+              <p:cNvPr id="295" name="Shape 15">
+                <a:extLst>
+                  <a:ext uri="{FF2B5EF4-FFF2-40B4-BE49-F238E27FC236}">
+                    <a16:creationId xmlns:a16="http://schemas.microsoft.com/office/drawing/2014/main" id="{523598E4-5EA1-64B3-FAED-E60ADD22B0C1}"/>
+                  </a:ext>
+                </a:extLst>
+              </p:cNvPr>
+              <p:cNvSpPr/>
+              <p:nvPr/>
+            </p:nvSpPr>
+            <p:spPr>
+              <a:xfrm>
+                <a:off x="1225296" y="1527048"/>
+                <a:ext cx="201168" cy="201168"/>
+              </a:xfrm>
+              <a:prstGeom prst="ellipse">
+                <a:avLst/>
+              </a:prstGeom>
+              <a:solidFill>
+                <a:srgbClr val="E8E7F5"/>
+              </a:solidFill>
+              <a:ln w="9525">
+                <a:solidFill>
+                  <a:srgbClr val="2E2585"/>
+                </a:solidFill>
+                <a:prstDash val="solid"/>
+              </a:ln>
+            </p:spPr>
+            <p:txBody>
+              <a:bodyPr/>
+              <a:lstStyle/>
+              <a:p>
+                <a:endParaRPr lang="en-US"/>
+              </a:p>
+            </p:txBody>
+          </p:sp>
+          <p:sp>
+            <p:nvSpPr>
+              <p:cNvPr id="296" name="Shape 16">
+                <a:extLst>
+                  <a:ext uri="{FF2B5EF4-FFF2-40B4-BE49-F238E27FC236}">
+                    <a16:creationId xmlns:a16="http://schemas.microsoft.com/office/drawing/2014/main" id="{32A185A9-7027-B10C-5BC9-A2E61A8D9E2F}"/>
+                  </a:ext>
+                </a:extLst>
+              </p:cNvPr>
+              <p:cNvSpPr/>
+              <p:nvPr/>
+            </p:nvSpPr>
+            <p:spPr>
+              <a:xfrm>
+                <a:off x="1285646" y="1587398"/>
+                <a:ext cx="80467" cy="80467"/>
+              </a:xfrm>
+              <a:prstGeom prst="ellipse">
+                <a:avLst/>
+              </a:prstGeom>
+              <a:solidFill>
+                <a:srgbClr val="2E2585">
+                  <a:alpha val="50000"/>
+                </a:srgbClr>
+              </a:solidFill>
+              <a:ln/>
+            </p:spPr>
+            <p:txBody>
+              <a:bodyPr/>
+              <a:lstStyle/>
+              <a:p>
+                <a:endParaRPr lang="en-US"/>
+              </a:p>
+            </p:txBody>
+          </p:sp>
+        </p:grpSp>
+        <p:grpSp>
+          <p:nvGrpSpPr>
+            <p:cNvPr id="210" name="Group 209">
+              <a:extLst>
+                <a:ext uri="{FF2B5EF4-FFF2-40B4-BE49-F238E27FC236}">
+                  <a16:creationId xmlns:a16="http://schemas.microsoft.com/office/drawing/2014/main" id="{67F748D4-7CD1-7F86-522C-47EB046C1409}"/>
+                </a:ext>
+              </a:extLst>
+            </p:cNvPr>
+            <p:cNvGrpSpPr/>
+            <p:nvPr/>
+          </p:nvGrpSpPr>
+          <p:grpSpPr>
+            <a:xfrm>
+              <a:off x="5512553" y="1078603"/>
+              <a:ext cx="169964" cy="169864"/>
+              <a:chOff x="1874520" y="1444752"/>
+              <a:chExt cx="182880" cy="182880"/>
+            </a:xfrm>
+          </p:grpSpPr>
+          <p:sp>
+            <p:nvSpPr>
+              <p:cNvPr id="293" name="Shape 23">
+                <a:extLst>
+                  <a:ext uri="{FF2B5EF4-FFF2-40B4-BE49-F238E27FC236}">
+                    <a16:creationId xmlns:a16="http://schemas.microsoft.com/office/drawing/2014/main" id="{879D0947-2681-3E05-C445-40B0075A61DC}"/>
+                  </a:ext>
+                </a:extLst>
+              </p:cNvPr>
+              <p:cNvSpPr/>
+              <p:nvPr/>
+            </p:nvSpPr>
+            <p:spPr>
+              <a:xfrm>
+                <a:off x="1874520" y="1444752"/>
+                <a:ext cx="182880" cy="182880"/>
+              </a:xfrm>
+              <a:prstGeom prst="ellipse">
+                <a:avLst/>
+              </a:prstGeom>
+              <a:solidFill>
+                <a:srgbClr val="FAE8E3"/>
+              </a:solidFill>
+              <a:ln w="9525">
+                <a:solidFill>
+                  <a:srgbClr val="DC4B1E"/>
+                </a:solidFill>
+                <a:prstDash val="solid"/>
+              </a:ln>
+            </p:spPr>
+            <p:txBody>
+              <a:bodyPr/>
+              <a:lstStyle/>
+              <a:p>
+                <a:endParaRPr lang="en-US"/>
+              </a:p>
+            </p:txBody>
+          </p:sp>
+          <p:sp>
+            <p:nvSpPr>
+              <p:cNvPr id="294" name="Shape 24">
+                <a:extLst>
+                  <a:ext uri="{FF2B5EF4-FFF2-40B4-BE49-F238E27FC236}">
+                    <a16:creationId xmlns:a16="http://schemas.microsoft.com/office/drawing/2014/main" id="{C8FC2C12-53AC-3663-D968-FE937EEC96B1}"/>
+                  </a:ext>
+                </a:extLst>
+              </p:cNvPr>
+              <p:cNvSpPr/>
+              <p:nvPr/>
+            </p:nvSpPr>
+            <p:spPr>
+              <a:xfrm>
+                <a:off x="1929384" y="1499616"/>
+                <a:ext cx="73152" cy="73152"/>
+              </a:xfrm>
+              <a:prstGeom prst="ellipse">
+                <a:avLst/>
+              </a:prstGeom>
+              <a:solidFill>
+                <a:srgbClr val="DC4B1E">
+                  <a:alpha val="50000"/>
+                </a:srgbClr>
+              </a:solidFill>
+              <a:ln/>
+            </p:spPr>
+            <p:txBody>
+              <a:bodyPr/>
+              <a:lstStyle/>
+              <a:p>
+                <a:endParaRPr lang="en-US"/>
+              </a:p>
+            </p:txBody>
+          </p:sp>
+        </p:grpSp>
+        <p:grpSp>
+          <p:nvGrpSpPr>
+            <p:cNvPr id="286" name="Group 285">
+              <a:extLst>
+                <a:ext uri="{FF2B5EF4-FFF2-40B4-BE49-F238E27FC236}">
+                  <a16:creationId xmlns:a16="http://schemas.microsoft.com/office/drawing/2014/main" id="{62C92EA3-481D-ECB0-5036-83BD29D2DF2C}"/>
+                </a:ext>
+              </a:extLst>
+            </p:cNvPr>
+            <p:cNvGrpSpPr/>
+            <p:nvPr/>
+          </p:nvGrpSpPr>
+          <p:grpSpPr>
+            <a:xfrm>
+              <a:off x="5971463" y="1658721"/>
+              <a:ext cx="186961" cy="186850"/>
+              <a:chOff x="1225296" y="1527048"/>
+              <a:chExt cx="201168" cy="201168"/>
+            </a:xfrm>
+          </p:grpSpPr>
+          <p:sp>
+            <p:nvSpPr>
+              <p:cNvPr id="291" name="Shape 15">
+                <a:extLst>
+                  <a:ext uri="{FF2B5EF4-FFF2-40B4-BE49-F238E27FC236}">
+                    <a16:creationId xmlns:a16="http://schemas.microsoft.com/office/drawing/2014/main" id="{8A4A5F92-79E0-9F83-8BE4-B500709B4050}"/>
+                  </a:ext>
+                </a:extLst>
+              </p:cNvPr>
+              <p:cNvSpPr/>
+              <p:nvPr/>
+            </p:nvSpPr>
+            <p:spPr>
+              <a:xfrm>
+                <a:off x="1225296" y="1527048"/>
+                <a:ext cx="201168" cy="201168"/>
+              </a:xfrm>
+              <a:prstGeom prst="ellipse">
+                <a:avLst/>
+              </a:prstGeom>
+              <a:solidFill>
+                <a:srgbClr val="E8E7F5"/>
+              </a:solidFill>
+              <a:ln w="9525">
+                <a:solidFill>
+                  <a:srgbClr val="2E2585"/>
+                </a:solidFill>
+                <a:prstDash val="solid"/>
+              </a:ln>
+            </p:spPr>
+            <p:txBody>
+              <a:bodyPr/>
+              <a:lstStyle/>
+              <a:p>
+                <a:endParaRPr lang="en-US"/>
+              </a:p>
+            </p:txBody>
+          </p:sp>
+          <p:sp>
+            <p:nvSpPr>
+              <p:cNvPr id="292" name="Shape 16">
+                <a:extLst>
+                  <a:ext uri="{FF2B5EF4-FFF2-40B4-BE49-F238E27FC236}">
+                    <a16:creationId xmlns:a16="http://schemas.microsoft.com/office/drawing/2014/main" id="{7B9E9D40-E461-3FCA-E742-EB6DE44DB1A9}"/>
+                  </a:ext>
+                </a:extLst>
+              </p:cNvPr>
+              <p:cNvSpPr/>
+              <p:nvPr/>
+            </p:nvSpPr>
+            <p:spPr>
+              <a:xfrm>
+                <a:off x="1285646" y="1587398"/>
+                <a:ext cx="80467" cy="80467"/>
+              </a:xfrm>
+              <a:prstGeom prst="ellipse">
+                <a:avLst/>
+              </a:prstGeom>
+              <a:solidFill>
+                <a:srgbClr val="2E2585">
+                  <a:alpha val="50000"/>
+                </a:srgbClr>
+              </a:solidFill>
+              <a:ln/>
+            </p:spPr>
+            <p:txBody>
+              <a:bodyPr/>
+              <a:lstStyle/>
+              <a:p>
+                <a:endParaRPr lang="en-US"/>
+              </a:p>
+            </p:txBody>
+          </p:sp>
+        </p:grpSp>
+        <p:grpSp>
+          <p:nvGrpSpPr>
+            <p:cNvPr id="287" name="Group 286">
+              <a:extLst>
+                <a:ext uri="{FF2B5EF4-FFF2-40B4-BE49-F238E27FC236}">
+                  <a16:creationId xmlns:a16="http://schemas.microsoft.com/office/drawing/2014/main" id="{776CD677-7CE0-55FD-BE71-D8AD41F90097}"/>
+                </a:ext>
+              </a:extLst>
+            </p:cNvPr>
+            <p:cNvGrpSpPr/>
+            <p:nvPr/>
+          </p:nvGrpSpPr>
+          <p:grpSpPr>
+            <a:xfrm>
+              <a:off x="5719754" y="1319895"/>
+              <a:ext cx="186961" cy="186850"/>
+              <a:chOff x="1225296" y="1527048"/>
+              <a:chExt cx="201168" cy="201168"/>
+            </a:xfrm>
+          </p:grpSpPr>
+          <p:sp>
+            <p:nvSpPr>
+              <p:cNvPr id="288" name="Shape 15">
+                <a:extLst>
+                  <a:ext uri="{FF2B5EF4-FFF2-40B4-BE49-F238E27FC236}">
+                    <a16:creationId xmlns:a16="http://schemas.microsoft.com/office/drawing/2014/main" id="{83E2F9C4-7390-F52B-E146-E7F49DCC005F}"/>
+                  </a:ext>
+                </a:extLst>
+              </p:cNvPr>
+              <p:cNvSpPr/>
+              <p:nvPr/>
+            </p:nvSpPr>
+            <p:spPr>
+              <a:xfrm>
+                <a:off x="1225296" y="1527048"/>
+                <a:ext cx="201168" cy="201168"/>
+              </a:xfrm>
+              <a:prstGeom prst="ellipse">
+                <a:avLst/>
+              </a:prstGeom>
+              <a:solidFill>
+                <a:srgbClr val="E8E7F5"/>
+              </a:solidFill>
+              <a:ln w="9525">
+                <a:solidFill>
+                  <a:srgbClr val="2E2585"/>
+                </a:solidFill>
+                <a:prstDash val="solid"/>
+              </a:ln>
+            </p:spPr>
+            <p:txBody>
+              <a:bodyPr/>
+              <a:lstStyle/>
+              <a:p>
+                <a:endParaRPr lang="en-US"/>
+              </a:p>
+            </p:txBody>
+          </p:sp>
+          <p:sp>
+            <p:nvSpPr>
+              <p:cNvPr id="289" name="Shape 16">
+                <a:extLst>
+                  <a:ext uri="{FF2B5EF4-FFF2-40B4-BE49-F238E27FC236}">
+                    <a16:creationId xmlns:a16="http://schemas.microsoft.com/office/drawing/2014/main" id="{9B5B0176-BC0D-FED6-FB63-3A442D35A509}"/>
+                  </a:ext>
+                </a:extLst>
+              </p:cNvPr>
+              <p:cNvSpPr/>
+              <p:nvPr/>
+            </p:nvSpPr>
+            <p:spPr>
+              <a:xfrm>
+                <a:off x="1285646" y="1587398"/>
+                <a:ext cx="80467" cy="80467"/>
+              </a:xfrm>
+              <a:prstGeom prst="ellipse">
+                <a:avLst/>
+              </a:prstGeom>
+              <a:solidFill>
+                <a:srgbClr val="2E2585">
+                  <a:alpha val="50000"/>
+                </a:srgbClr>
+              </a:solidFill>
+              <a:ln/>
+            </p:spPr>
+            <p:txBody>
+              <a:bodyPr/>
+              <a:lstStyle/>
+              <a:p>
+                <a:endParaRPr lang="en-US"/>
+              </a:p>
+            </p:txBody>
+          </p:sp>
+        </p:grpSp>
+      </p:grpSp>
+      <p:grpSp>
+        <p:nvGrpSpPr>
+          <p:cNvPr id="221" name="Group 220">
+            <a:extLst>
+              <a:ext uri="{FF2B5EF4-FFF2-40B4-BE49-F238E27FC236}">
+                <a16:creationId xmlns:a16="http://schemas.microsoft.com/office/drawing/2014/main" id="{C588FC19-7913-4B2D-770D-748FAA894B6E}"/>
+              </a:ext>
+            </a:extLst>
+          </p:cNvPr>
+          <p:cNvGrpSpPr/>
+          <p:nvPr/>
+        </p:nvGrpSpPr>
+        <p:grpSpPr>
+          <a:xfrm>
+            <a:off x="3915589" y="2392684"/>
+            <a:ext cx="1126723" cy="834302"/>
+            <a:chOff x="3182631" y="3884716"/>
+            <a:chExt cx="1126723" cy="834302"/>
+          </a:xfrm>
+        </p:grpSpPr>
+        <p:grpSp>
+          <p:nvGrpSpPr>
+            <p:cNvPr id="311" name="Group 310">
+              <a:extLst>
+                <a:ext uri="{FF2B5EF4-FFF2-40B4-BE49-F238E27FC236}">
+                  <a16:creationId xmlns:a16="http://schemas.microsoft.com/office/drawing/2014/main" id="{BE4E0AA6-421E-617B-B04E-2B0DF326C65E}"/>
+                </a:ext>
+              </a:extLst>
+            </p:cNvPr>
+            <p:cNvGrpSpPr/>
+            <p:nvPr/>
+          </p:nvGrpSpPr>
+          <p:grpSpPr>
+            <a:xfrm>
+              <a:off x="3457381" y="4277854"/>
+              <a:ext cx="150129" cy="139837"/>
+              <a:chOff x="1225296" y="1527048"/>
+              <a:chExt cx="201168" cy="201168"/>
+            </a:xfrm>
+          </p:grpSpPr>
+          <p:sp>
+            <p:nvSpPr>
+              <p:cNvPr id="366" name="Shape 15">
+                <a:extLst>
+                  <a:ext uri="{FF2B5EF4-FFF2-40B4-BE49-F238E27FC236}">
+                    <a16:creationId xmlns:a16="http://schemas.microsoft.com/office/drawing/2014/main" id="{752A3EB3-B28B-D0BC-BDF4-207F9691872A}"/>
+                  </a:ext>
+                </a:extLst>
+              </p:cNvPr>
+              <p:cNvSpPr/>
+              <p:nvPr/>
+            </p:nvSpPr>
+            <p:spPr>
+              <a:xfrm>
+                <a:off x="1225296" y="1527048"/>
+                <a:ext cx="201168" cy="201168"/>
+              </a:xfrm>
+              <a:prstGeom prst="ellipse">
+                <a:avLst/>
+              </a:prstGeom>
+              <a:solidFill>
+                <a:srgbClr val="E8E7F5"/>
+              </a:solidFill>
+              <a:ln w="9525">
+                <a:solidFill>
+                  <a:srgbClr val="2E2585"/>
+                </a:solidFill>
+                <a:prstDash val="solid"/>
+              </a:ln>
+            </p:spPr>
+            <p:txBody>
+              <a:bodyPr/>
+              <a:lstStyle/>
+              <a:p>
+                <a:endParaRPr lang="en-US"/>
+              </a:p>
+            </p:txBody>
+          </p:sp>
+          <p:sp>
+            <p:nvSpPr>
+              <p:cNvPr id="367" name="Shape 16">
+                <a:extLst>
+                  <a:ext uri="{FF2B5EF4-FFF2-40B4-BE49-F238E27FC236}">
+                    <a16:creationId xmlns:a16="http://schemas.microsoft.com/office/drawing/2014/main" id="{E3EB238C-6E29-635F-818A-2F53AFE72BCF}"/>
+                  </a:ext>
+                </a:extLst>
+              </p:cNvPr>
+              <p:cNvSpPr/>
+              <p:nvPr/>
+            </p:nvSpPr>
+            <p:spPr>
+              <a:xfrm>
+                <a:off x="1285646" y="1587398"/>
+                <a:ext cx="80467" cy="80467"/>
+              </a:xfrm>
+              <a:prstGeom prst="ellipse">
+                <a:avLst/>
+              </a:prstGeom>
+              <a:solidFill>
+                <a:srgbClr val="2E2585">
+                  <a:alpha val="50000"/>
+                </a:srgbClr>
+              </a:solidFill>
+              <a:ln/>
+            </p:spPr>
+            <p:txBody>
+              <a:bodyPr/>
+              <a:lstStyle/>
+              <a:p>
+                <a:endParaRPr lang="en-US"/>
+              </a:p>
+            </p:txBody>
+          </p:sp>
+        </p:grpSp>
+        <p:grpSp>
+          <p:nvGrpSpPr>
+            <p:cNvPr id="312" name="Group 311">
+              <a:extLst>
+                <a:ext uri="{FF2B5EF4-FFF2-40B4-BE49-F238E27FC236}">
+                  <a16:creationId xmlns:a16="http://schemas.microsoft.com/office/drawing/2014/main" id="{16E798C7-D167-6CBF-BF96-30D234A7113E}"/>
+                </a:ext>
+              </a:extLst>
+            </p:cNvPr>
+            <p:cNvGrpSpPr/>
+            <p:nvPr/>
+          </p:nvGrpSpPr>
+          <p:grpSpPr>
+            <a:xfrm>
+              <a:off x="3745635" y="4346488"/>
+              <a:ext cx="136481" cy="127125"/>
+              <a:chOff x="1874520" y="1444752"/>
+              <a:chExt cx="182880" cy="182880"/>
+            </a:xfrm>
+          </p:grpSpPr>
+          <p:sp>
+            <p:nvSpPr>
+              <p:cNvPr id="364" name="Shape 23">
+                <a:extLst>
+                  <a:ext uri="{FF2B5EF4-FFF2-40B4-BE49-F238E27FC236}">
+                    <a16:creationId xmlns:a16="http://schemas.microsoft.com/office/drawing/2014/main" id="{AA034F28-B2D3-25ED-AA2A-0962A66C5708}"/>
+                  </a:ext>
+                </a:extLst>
+              </p:cNvPr>
+              <p:cNvSpPr/>
+              <p:nvPr/>
+            </p:nvSpPr>
+            <p:spPr>
+              <a:xfrm>
+                <a:off x="1874520" y="1444752"/>
+                <a:ext cx="182880" cy="182880"/>
+              </a:xfrm>
+              <a:prstGeom prst="ellipse">
+                <a:avLst/>
+              </a:prstGeom>
+              <a:solidFill>
+                <a:srgbClr val="FAE8E3"/>
+              </a:solidFill>
+              <a:ln w="9525">
+                <a:solidFill>
+                  <a:srgbClr val="DC4B1E"/>
+                </a:solidFill>
+                <a:prstDash val="solid"/>
+              </a:ln>
+            </p:spPr>
+            <p:txBody>
+              <a:bodyPr/>
+              <a:lstStyle/>
+              <a:p>
+                <a:endParaRPr lang="en-US"/>
+              </a:p>
+            </p:txBody>
+          </p:sp>
+          <p:sp>
+            <p:nvSpPr>
+              <p:cNvPr id="365" name="Shape 24">
+                <a:extLst>
+                  <a:ext uri="{FF2B5EF4-FFF2-40B4-BE49-F238E27FC236}">
+                    <a16:creationId xmlns:a16="http://schemas.microsoft.com/office/drawing/2014/main" id="{B788A94E-1899-73F5-FE82-9E096B33BE3F}"/>
+                  </a:ext>
+                </a:extLst>
+              </p:cNvPr>
+              <p:cNvSpPr/>
+              <p:nvPr/>
+            </p:nvSpPr>
+            <p:spPr>
+              <a:xfrm>
+                <a:off x="1929384" y="1499616"/>
+                <a:ext cx="73152" cy="73152"/>
+              </a:xfrm>
+              <a:prstGeom prst="ellipse">
+                <a:avLst/>
+              </a:prstGeom>
+              <a:solidFill>
+                <a:srgbClr val="DC4B1E">
+                  <a:alpha val="50000"/>
+                </a:srgbClr>
+              </a:solidFill>
+              <a:ln/>
+            </p:spPr>
+            <p:txBody>
+              <a:bodyPr/>
+              <a:lstStyle/>
+              <a:p>
+                <a:endParaRPr lang="en-US" dirty="0"/>
+              </a:p>
+            </p:txBody>
+          </p:sp>
+        </p:grpSp>
+        <p:grpSp>
+          <p:nvGrpSpPr>
+            <p:cNvPr id="316" name="Group 315">
+              <a:extLst>
+                <a:ext uri="{FF2B5EF4-FFF2-40B4-BE49-F238E27FC236}">
+                  <a16:creationId xmlns:a16="http://schemas.microsoft.com/office/drawing/2014/main" id="{6328153E-4CB2-D6CB-346A-A93F0201330A}"/>
+                </a:ext>
+              </a:extLst>
+            </p:cNvPr>
+            <p:cNvGrpSpPr/>
+            <p:nvPr/>
+          </p:nvGrpSpPr>
+          <p:grpSpPr>
+            <a:xfrm>
+              <a:off x="3849631" y="4579181"/>
+              <a:ext cx="150129" cy="139837"/>
+              <a:chOff x="1225296" y="1527048"/>
+              <a:chExt cx="201168" cy="201168"/>
+            </a:xfrm>
+          </p:grpSpPr>
+          <p:sp>
+            <p:nvSpPr>
+              <p:cNvPr id="356" name="Shape 15">
+                <a:extLst>
+                  <a:ext uri="{FF2B5EF4-FFF2-40B4-BE49-F238E27FC236}">
+                    <a16:creationId xmlns:a16="http://schemas.microsoft.com/office/drawing/2014/main" id="{7C588529-72A2-3CA2-8347-7CE221047851}"/>
+                  </a:ext>
+                </a:extLst>
+              </p:cNvPr>
+              <p:cNvSpPr/>
+              <p:nvPr/>
+            </p:nvSpPr>
+            <p:spPr>
+              <a:xfrm>
+                <a:off x="1225296" y="1527048"/>
+                <a:ext cx="201168" cy="201168"/>
+              </a:xfrm>
+              <a:prstGeom prst="ellipse">
+                <a:avLst/>
+              </a:prstGeom>
+              <a:solidFill>
+                <a:srgbClr val="E8E7F5"/>
+              </a:solidFill>
+              <a:ln w="9525">
+                <a:solidFill>
+                  <a:srgbClr val="2E2585"/>
+                </a:solidFill>
+                <a:prstDash val="solid"/>
+              </a:ln>
+            </p:spPr>
+            <p:txBody>
+              <a:bodyPr/>
+              <a:lstStyle/>
+              <a:p>
+                <a:endParaRPr lang="en-US"/>
+              </a:p>
+            </p:txBody>
+          </p:sp>
+          <p:sp>
+            <p:nvSpPr>
+              <p:cNvPr id="357" name="Shape 16">
+                <a:extLst>
+                  <a:ext uri="{FF2B5EF4-FFF2-40B4-BE49-F238E27FC236}">
+                    <a16:creationId xmlns:a16="http://schemas.microsoft.com/office/drawing/2014/main" id="{901236CE-B583-A6AE-6AFB-49233792A522}"/>
+                  </a:ext>
+                </a:extLst>
+              </p:cNvPr>
+              <p:cNvSpPr/>
+              <p:nvPr/>
+            </p:nvSpPr>
+            <p:spPr>
+              <a:xfrm>
+                <a:off x="1285646" y="1587398"/>
+                <a:ext cx="80467" cy="80467"/>
+              </a:xfrm>
+              <a:prstGeom prst="ellipse">
+                <a:avLst/>
+              </a:prstGeom>
+              <a:solidFill>
+                <a:srgbClr val="2E2585">
+                  <a:alpha val="50000"/>
+                </a:srgbClr>
+              </a:solidFill>
+              <a:ln/>
+            </p:spPr>
+            <p:txBody>
+              <a:bodyPr/>
+              <a:lstStyle/>
+              <a:p>
+                <a:endParaRPr lang="en-US"/>
+              </a:p>
+            </p:txBody>
+          </p:sp>
+        </p:grpSp>
+        <p:grpSp>
+          <p:nvGrpSpPr>
+            <p:cNvPr id="317" name="Group 316">
+              <a:extLst>
+                <a:ext uri="{FF2B5EF4-FFF2-40B4-BE49-F238E27FC236}">
+                  <a16:creationId xmlns:a16="http://schemas.microsoft.com/office/drawing/2014/main" id="{9D7B8BAE-68C7-2F68-B672-C7B544820E22}"/>
+                </a:ext>
+              </a:extLst>
+            </p:cNvPr>
+            <p:cNvGrpSpPr/>
+            <p:nvPr/>
+          </p:nvGrpSpPr>
+          <p:grpSpPr>
+            <a:xfrm>
+              <a:off x="3225924" y="4476784"/>
+              <a:ext cx="150129" cy="139837"/>
+              <a:chOff x="1225296" y="1527048"/>
+              <a:chExt cx="201168" cy="201168"/>
+            </a:xfrm>
+          </p:grpSpPr>
+          <p:sp>
+            <p:nvSpPr>
+              <p:cNvPr id="354" name="Shape 15">
+                <a:extLst>
+                  <a:ext uri="{FF2B5EF4-FFF2-40B4-BE49-F238E27FC236}">
+                    <a16:creationId xmlns:a16="http://schemas.microsoft.com/office/drawing/2014/main" id="{57C3DD55-DFFB-6AC5-E346-AA13D93BCDFC}"/>
+                  </a:ext>
+                </a:extLst>
+              </p:cNvPr>
+              <p:cNvSpPr/>
+              <p:nvPr/>
+            </p:nvSpPr>
+            <p:spPr>
+              <a:xfrm>
+                <a:off x="1225296" y="1527048"/>
+                <a:ext cx="201168" cy="201168"/>
+              </a:xfrm>
+              <a:prstGeom prst="ellipse">
+                <a:avLst/>
+              </a:prstGeom>
+              <a:solidFill>
+                <a:srgbClr val="E8E7F5"/>
+              </a:solidFill>
+              <a:ln w="9525">
+                <a:solidFill>
+                  <a:srgbClr val="2E2585"/>
+                </a:solidFill>
+                <a:prstDash val="solid"/>
+              </a:ln>
+            </p:spPr>
+            <p:txBody>
+              <a:bodyPr/>
+              <a:lstStyle/>
+              <a:p>
+                <a:endParaRPr lang="en-US"/>
+              </a:p>
+            </p:txBody>
+          </p:sp>
+          <p:sp>
+            <p:nvSpPr>
+              <p:cNvPr id="355" name="Shape 16">
+                <a:extLst>
+                  <a:ext uri="{FF2B5EF4-FFF2-40B4-BE49-F238E27FC236}">
+                    <a16:creationId xmlns:a16="http://schemas.microsoft.com/office/drawing/2014/main" id="{F98F6E4C-CAF8-416B-A3F9-C7CFE8FB6CA5}"/>
+                  </a:ext>
+                </a:extLst>
+              </p:cNvPr>
+              <p:cNvSpPr/>
+              <p:nvPr/>
+            </p:nvSpPr>
+            <p:spPr>
+              <a:xfrm>
+                <a:off x="1285646" y="1587398"/>
+                <a:ext cx="80467" cy="80467"/>
+              </a:xfrm>
+              <a:prstGeom prst="ellipse">
+                <a:avLst/>
+              </a:prstGeom>
+              <a:solidFill>
+                <a:srgbClr val="2E2585">
+                  <a:alpha val="50000"/>
+                </a:srgbClr>
+              </a:solidFill>
+              <a:ln/>
+            </p:spPr>
+            <p:txBody>
+              <a:bodyPr/>
+              <a:lstStyle/>
+              <a:p>
+                <a:endParaRPr lang="en-US"/>
+              </a:p>
+            </p:txBody>
+          </p:sp>
+        </p:grpSp>
+        <p:grpSp>
+          <p:nvGrpSpPr>
+            <p:cNvPr id="319" name="Group 318">
+              <a:extLst>
+                <a:ext uri="{FF2B5EF4-FFF2-40B4-BE49-F238E27FC236}">
+                  <a16:creationId xmlns:a16="http://schemas.microsoft.com/office/drawing/2014/main" id="{2A0A3260-B236-5287-E574-0A65426EEE88}"/>
+                </a:ext>
+              </a:extLst>
+            </p:cNvPr>
+            <p:cNvGrpSpPr/>
+            <p:nvPr/>
+          </p:nvGrpSpPr>
+          <p:grpSpPr>
+            <a:xfrm>
+              <a:off x="4009096" y="4312572"/>
+              <a:ext cx="150129" cy="143298"/>
+              <a:chOff x="7067843" y="717976"/>
+              <a:chExt cx="201168" cy="206147"/>
+            </a:xfrm>
+          </p:grpSpPr>
+          <p:sp>
+            <p:nvSpPr>
+              <p:cNvPr id="350" name="Shape 71">
+                <a:extLst>
+                  <a:ext uri="{FF2B5EF4-FFF2-40B4-BE49-F238E27FC236}">
+                    <a16:creationId xmlns:a16="http://schemas.microsoft.com/office/drawing/2014/main" id="{BBC323C6-FC67-E20D-89FF-B83AB1CC241A}"/>
+                  </a:ext>
+                </a:extLst>
+              </p:cNvPr>
+              <p:cNvSpPr/>
+              <p:nvPr/>
+            </p:nvSpPr>
+            <p:spPr>
+              <a:xfrm>
+                <a:off x="7067843" y="717976"/>
+                <a:ext cx="201168" cy="206147"/>
+              </a:xfrm>
+              <a:prstGeom prst="ellipse">
+                <a:avLst/>
+              </a:prstGeom>
+              <a:solidFill>
+                <a:srgbClr val="F9E0EE"/>
+              </a:solidFill>
+              <a:ln w="22225">
+                <a:solidFill>
+                  <a:srgbClr val="C0156E"/>
+                </a:solidFill>
+                <a:prstDash val="solid"/>
+              </a:ln>
+            </p:spPr>
+            <p:txBody>
+              <a:bodyPr/>
+              <a:lstStyle/>
+              <a:p>
+                <a:endParaRPr lang="en-US" dirty="0"/>
+              </a:p>
+            </p:txBody>
+          </p:sp>
+          <p:sp>
+            <p:nvSpPr>
+              <p:cNvPr id="351" name="Shape 72">
+                <a:extLst>
+                  <a:ext uri="{FF2B5EF4-FFF2-40B4-BE49-F238E27FC236}">
+                    <a16:creationId xmlns:a16="http://schemas.microsoft.com/office/drawing/2014/main" id="{A666DF45-97A6-510E-083A-329FC928ADCE}"/>
+                  </a:ext>
+                </a:extLst>
+              </p:cNvPr>
+              <p:cNvSpPr/>
+              <p:nvPr/>
+            </p:nvSpPr>
+            <p:spPr>
+              <a:xfrm>
+                <a:off x="7128525" y="770321"/>
+                <a:ext cx="80467" cy="82459"/>
+              </a:xfrm>
+              <a:prstGeom prst="ellipse">
+                <a:avLst/>
+              </a:prstGeom>
+              <a:solidFill>
+                <a:srgbClr val="C0156E">
+                  <a:alpha val="50000"/>
+                </a:srgbClr>
+              </a:solidFill>
+              <a:ln/>
+            </p:spPr>
+            <p:txBody>
+              <a:bodyPr/>
+              <a:lstStyle/>
+              <a:p>
+                <a:endParaRPr lang="en-US"/>
+              </a:p>
+            </p:txBody>
+          </p:sp>
+        </p:grpSp>
+        <p:grpSp>
+          <p:nvGrpSpPr>
+            <p:cNvPr id="320" name="Group 319">
+              <a:extLst>
+                <a:ext uri="{FF2B5EF4-FFF2-40B4-BE49-F238E27FC236}">
+                  <a16:creationId xmlns:a16="http://schemas.microsoft.com/office/drawing/2014/main" id="{03B9D047-FD13-E355-5C7A-3E43EE6442A9}"/>
+                </a:ext>
+              </a:extLst>
+            </p:cNvPr>
+            <p:cNvGrpSpPr/>
+            <p:nvPr/>
+          </p:nvGrpSpPr>
+          <p:grpSpPr>
+            <a:xfrm>
+              <a:off x="3590528" y="4102904"/>
+              <a:ext cx="150129" cy="143298"/>
+              <a:chOff x="7067843" y="717976"/>
+              <a:chExt cx="201168" cy="206147"/>
+            </a:xfrm>
+          </p:grpSpPr>
+          <p:sp>
+            <p:nvSpPr>
+              <p:cNvPr id="348" name="Shape 71">
+                <a:extLst>
+                  <a:ext uri="{FF2B5EF4-FFF2-40B4-BE49-F238E27FC236}">
+                    <a16:creationId xmlns:a16="http://schemas.microsoft.com/office/drawing/2014/main" id="{2014D82F-EC70-99DF-4BDA-98461A49453F}"/>
+                  </a:ext>
+                </a:extLst>
+              </p:cNvPr>
+              <p:cNvSpPr/>
+              <p:nvPr/>
+            </p:nvSpPr>
+            <p:spPr>
+              <a:xfrm>
+                <a:off x="7067843" y="717976"/>
+                <a:ext cx="201168" cy="206147"/>
+              </a:xfrm>
+              <a:prstGeom prst="ellipse">
+                <a:avLst/>
+              </a:prstGeom>
+              <a:solidFill>
+                <a:srgbClr val="F9E0EE"/>
+              </a:solidFill>
+              <a:ln w="22225">
+                <a:solidFill>
+                  <a:srgbClr val="C0156E"/>
+                </a:solidFill>
+                <a:prstDash val="solid"/>
+              </a:ln>
+            </p:spPr>
+            <p:txBody>
+              <a:bodyPr/>
+              <a:lstStyle/>
+              <a:p>
+                <a:endParaRPr lang="en-US" dirty="0"/>
+              </a:p>
+            </p:txBody>
+          </p:sp>
+          <p:sp>
+            <p:nvSpPr>
+              <p:cNvPr id="349" name="Shape 72">
+                <a:extLst>
+                  <a:ext uri="{FF2B5EF4-FFF2-40B4-BE49-F238E27FC236}">
+                    <a16:creationId xmlns:a16="http://schemas.microsoft.com/office/drawing/2014/main" id="{01A08BF2-9674-42CD-694F-271E00380799}"/>
+                  </a:ext>
+                </a:extLst>
+              </p:cNvPr>
+              <p:cNvSpPr/>
+              <p:nvPr/>
+            </p:nvSpPr>
+            <p:spPr>
+              <a:xfrm>
+                <a:off x="7128525" y="770321"/>
+                <a:ext cx="80467" cy="82459"/>
+              </a:xfrm>
+              <a:prstGeom prst="ellipse">
+                <a:avLst/>
+              </a:prstGeom>
+              <a:solidFill>
+                <a:srgbClr val="C0156E">
+                  <a:alpha val="50000"/>
+                </a:srgbClr>
+              </a:solidFill>
+              <a:ln/>
+            </p:spPr>
+            <p:txBody>
+              <a:bodyPr/>
+              <a:lstStyle/>
+              <a:p>
+                <a:endParaRPr lang="en-US"/>
+              </a:p>
+            </p:txBody>
+          </p:sp>
+        </p:grpSp>
+        <p:grpSp>
+          <p:nvGrpSpPr>
+            <p:cNvPr id="321" name="Group 320">
+              <a:extLst>
+                <a:ext uri="{FF2B5EF4-FFF2-40B4-BE49-F238E27FC236}">
+                  <a16:creationId xmlns:a16="http://schemas.microsoft.com/office/drawing/2014/main" id="{A826986D-36FC-0866-B8EF-DF9621AA75E8}"/>
+                </a:ext>
+              </a:extLst>
+            </p:cNvPr>
+            <p:cNvGrpSpPr/>
+            <p:nvPr/>
+          </p:nvGrpSpPr>
+          <p:grpSpPr>
+            <a:xfrm>
+              <a:off x="3874433" y="4039942"/>
+              <a:ext cx="150129" cy="143298"/>
+              <a:chOff x="7067843" y="717976"/>
+              <a:chExt cx="201168" cy="206147"/>
+            </a:xfrm>
+          </p:grpSpPr>
+          <p:sp>
+            <p:nvSpPr>
+              <p:cNvPr id="346" name="Shape 71">
+                <a:extLst>
+                  <a:ext uri="{FF2B5EF4-FFF2-40B4-BE49-F238E27FC236}">
+                    <a16:creationId xmlns:a16="http://schemas.microsoft.com/office/drawing/2014/main" id="{8A4F341A-8E09-B1F1-9A54-9AB76B4A7F5A}"/>
+                  </a:ext>
+                </a:extLst>
+              </p:cNvPr>
+              <p:cNvSpPr/>
+              <p:nvPr/>
+            </p:nvSpPr>
+            <p:spPr>
+              <a:xfrm>
+                <a:off x="7067843" y="717976"/>
+                <a:ext cx="201168" cy="206147"/>
+              </a:xfrm>
+              <a:prstGeom prst="ellipse">
+                <a:avLst/>
+              </a:prstGeom>
+              <a:solidFill>
+                <a:srgbClr val="F9E0EE"/>
+              </a:solidFill>
+              <a:ln w="22225">
+                <a:solidFill>
+                  <a:srgbClr val="C0156E"/>
+                </a:solidFill>
+                <a:prstDash val="solid"/>
+              </a:ln>
+            </p:spPr>
+            <p:txBody>
+              <a:bodyPr/>
+              <a:lstStyle/>
+              <a:p>
+                <a:endParaRPr lang="en-US" dirty="0"/>
+              </a:p>
+            </p:txBody>
+          </p:sp>
+          <p:sp>
+            <p:nvSpPr>
+              <p:cNvPr id="347" name="Shape 72">
+                <a:extLst>
+                  <a:ext uri="{FF2B5EF4-FFF2-40B4-BE49-F238E27FC236}">
+                    <a16:creationId xmlns:a16="http://schemas.microsoft.com/office/drawing/2014/main" id="{8BCE2C61-7FC7-39E8-00B6-4EFAA4BEB4B2}"/>
+                  </a:ext>
+                </a:extLst>
+              </p:cNvPr>
+              <p:cNvSpPr/>
+              <p:nvPr/>
+            </p:nvSpPr>
+            <p:spPr>
+              <a:xfrm>
+                <a:off x="7128525" y="770321"/>
+                <a:ext cx="80467" cy="82459"/>
+              </a:xfrm>
+              <a:prstGeom prst="ellipse">
+                <a:avLst/>
+              </a:prstGeom>
+              <a:solidFill>
+                <a:srgbClr val="C0156E">
+                  <a:alpha val="50000"/>
+                </a:srgbClr>
+              </a:solidFill>
+              <a:ln/>
+            </p:spPr>
+            <p:txBody>
+              <a:bodyPr/>
+              <a:lstStyle/>
+              <a:p>
+                <a:endParaRPr lang="en-US"/>
+              </a:p>
+            </p:txBody>
+          </p:sp>
+        </p:grpSp>
+        <p:grpSp>
+          <p:nvGrpSpPr>
+            <p:cNvPr id="322" name="Group 321">
+              <a:extLst>
+                <a:ext uri="{FF2B5EF4-FFF2-40B4-BE49-F238E27FC236}">
+                  <a16:creationId xmlns:a16="http://schemas.microsoft.com/office/drawing/2014/main" id="{FE023D18-3E7F-301A-AFCC-F6F292CAED1C}"/>
+                </a:ext>
+              </a:extLst>
+            </p:cNvPr>
+            <p:cNvGrpSpPr/>
+            <p:nvPr/>
+          </p:nvGrpSpPr>
+          <p:grpSpPr>
+            <a:xfrm>
+              <a:off x="3537729" y="3884716"/>
+              <a:ext cx="150129" cy="143298"/>
+              <a:chOff x="7067843" y="717976"/>
+              <a:chExt cx="201168" cy="206147"/>
+            </a:xfrm>
+          </p:grpSpPr>
+          <p:sp>
+            <p:nvSpPr>
+              <p:cNvPr id="344" name="Shape 71">
+                <a:extLst>
+                  <a:ext uri="{FF2B5EF4-FFF2-40B4-BE49-F238E27FC236}">
+                    <a16:creationId xmlns:a16="http://schemas.microsoft.com/office/drawing/2014/main" id="{BAD4C809-1505-154F-8AB4-626D164A2FC9}"/>
+                  </a:ext>
+                </a:extLst>
+              </p:cNvPr>
+              <p:cNvSpPr/>
+              <p:nvPr/>
+            </p:nvSpPr>
+            <p:spPr>
+              <a:xfrm>
+                <a:off x="7067843" y="717976"/>
+                <a:ext cx="201168" cy="206147"/>
+              </a:xfrm>
+              <a:prstGeom prst="ellipse">
+                <a:avLst/>
+              </a:prstGeom>
+              <a:solidFill>
+                <a:srgbClr val="F9E0EE"/>
+              </a:solidFill>
+              <a:ln w="22225">
+                <a:solidFill>
+                  <a:srgbClr val="C0156E"/>
+                </a:solidFill>
+                <a:prstDash val="solid"/>
+              </a:ln>
+            </p:spPr>
+            <p:txBody>
+              <a:bodyPr/>
+              <a:lstStyle/>
+              <a:p>
+                <a:endParaRPr lang="en-US" dirty="0"/>
+              </a:p>
+            </p:txBody>
+          </p:sp>
+          <p:sp>
+            <p:nvSpPr>
+              <p:cNvPr id="345" name="Shape 72">
+                <a:extLst>
+                  <a:ext uri="{FF2B5EF4-FFF2-40B4-BE49-F238E27FC236}">
+                    <a16:creationId xmlns:a16="http://schemas.microsoft.com/office/drawing/2014/main" id="{2D59A206-25DC-FF01-E617-149B27F9A27D}"/>
+                  </a:ext>
+                </a:extLst>
+              </p:cNvPr>
+              <p:cNvSpPr/>
+              <p:nvPr/>
+            </p:nvSpPr>
+            <p:spPr>
+              <a:xfrm>
+                <a:off x="7128525" y="770321"/>
+                <a:ext cx="80467" cy="82459"/>
+              </a:xfrm>
+              <a:prstGeom prst="ellipse">
+                <a:avLst/>
+              </a:prstGeom>
+              <a:solidFill>
+                <a:srgbClr val="C0156E">
+                  <a:alpha val="50000"/>
+                </a:srgbClr>
+              </a:solidFill>
+              <a:ln/>
+            </p:spPr>
+            <p:txBody>
+              <a:bodyPr/>
+              <a:lstStyle/>
+              <a:p>
+                <a:endParaRPr lang="en-US"/>
+              </a:p>
+            </p:txBody>
+          </p:sp>
+        </p:grpSp>
+        <p:grpSp>
+          <p:nvGrpSpPr>
+            <p:cNvPr id="323" name="Group 322">
+              <a:extLst>
+                <a:ext uri="{FF2B5EF4-FFF2-40B4-BE49-F238E27FC236}">
+                  <a16:creationId xmlns:a16="http://schemas.microsoft.com/office/drawing/2014/main" id="{EBF49FF0-7BE2-11A8-8078-A1EFAD189989}"/>
+                </a:ext>
+              </a:extLst>
+            </p:cNvPr>
+            <p:cNvGrpSpPr/>
+            <p:nvPr/>
+          </p:nvGrpSpPr>
+          <p:grpSpPr>
+            <a:xfrm>
+              <a:off x="3182631" y="4120907"/>
+              <a:ext cx="136481" cy="127125"/>
+              <a:chOff x="1874520" y="1444752"/>
+              <a:chExt cx="182880" cy="182880"/>
+            </a:xfrm>
+          </p:grpSpPr>
+          <p:sp>
+            <p:nvSpPr>
+              <p:cNvPr id="342" name="Shape 23">
+                <a:extLst>
+                  <a:ext uri="{FF2B5EF4-FFF2-40B4-BE49-F238E27FC236}">
+                    <a16:creationId xmlns:a16="http://schemas.microsoft.com/office/drawing/2014/main" id="{5E139976-E56E-B369-2793-7B45B07CA1EE}"/>
+                  </a:ext>
+                </a:extLst>
+              </p:cNvPr>
+              <p:cNvSpPr/>
+              <p:nvPr/>
+            </p:nvSpPr>
+            <p:spPr>
+              <a:xfrm>
+                <a:off x="1874520" y="1444752"/>
+                <a:ext cx="182880" cy="182880"/>
+              </a:xfrm>
+              <a:prstGeom prst="ellipse">
+                <a:avLst/>
+              </a:prstGeom>
+              <a:solidFill>
+                <a:srgbClr val="FAE8E3"/>
+              </a:solidFill>
+              <a:ln w="9525">
+                <a:solidFill>
+                  <a:srgbClr val="DC4B1E"/>
+                </a:solidFill>
+                <a:prstDash val="solid"/>
+              </a:ln>
+            </p:spPr>
+            <p:txBody>
+              <a:bodyPr/>
+              <a:lstStyle/>
+              <a:p>
+                <a:endParaRPr lang="en-US"/>
+              </a:p>
+            </p:txBody>
+          </p:sp>
+          <p:sp>
+            <p:nvSpPr>
+              <p:cNvPr id="343" name="Shape 24">
+                <a:extLst>
+                  <a:ext uri="{FF2B5EF4-FFF2-40B4-BE49-F238E27FC236}">
+                    <a16:creationId xmlns:a16="http://schemas.microsoft.com/office/drawing/2014/main" id="{E90DB3D5-0FBC-F23B-A6D7-9A31EDC70250}"/>
+                  </a:ext>
+                </a:extLst>
+              </p:cNvPr>
+              <p:cNvSpPr/>
+              <p:nvPr/>
+            </p:nvSpPr>
+            <p:spPr>
+              <a:xfrm>
+                <a:off x="1929384" y="1499616"/>
+                <a:ext cx="73152" cy="73152"/>
+              </a:xfrm>
+              <a:prstGeom prst="ellipse">
+                <a:avLst/>
+              </a:prstGeom>
+              <a:solidFill>
+                <a:srgbClr val="DC4B1E">
+                  <a:alpha val="50000"/>
+                </a:srgbClr>
+              </a:solidFill>
+              <a:ln/>
+            </p:spPr>
+            <p:txBody>
+              <a:bodyPr/>
+              <a:lstStyle/>
+              <a:p>
+                <a:endParaRPr lang="en-US"/>
+              </a:p>
+            </p:txBody>
+          </p:sp>
+        </p:grpSp>
+        <p:grpSp>
+          <p:nvGrpSpPr>
+            <p:cNvPr id="328" name="Group 327">
+              <a:extLst>
+                <a:ext uri="{FF2B5EF4-FFF2-40B4-BE49-F238E27FC236}">
+                  <a16:creationId xmlns:a16="http://schemas.microsoft.com/office/drawing/2014/main" id="{C292E525-C8FD-BA2B-5D07-FD48454C8F5B}"/>
+                </a:ext>
+              </a:extLst>
+            </p:cNvPr>
+            <p:cNvGrpSpPr/>
+            <p:nvPr/>
+          </p:nvGrpSpPr>
+          <p:grpSpPr>
+            <a:xfrm>
+              <a:off x="3590528" y="4551214"/>
+              <a:ext cx="150129" cy="139837"/>
+              <a:chOff x="1225296" y="1527048"/>
+              <a:chExt cx="201168" cy="201168"/>
+            </a:xfrm>
+          </p:grpSpPr>
+          <p:sp>
+            <p:nvSpPr>
+              <p:cNvPr id="332" name="Shape 15">
+                <a:extLst>
+                  <a:ext uri="{FF2B5EF4-FFF2-40B4-BE49-F238E27FC236}">
+                    <a16:creationId xmlns:a16="http://schemas.microsoft.com/office/drawing/2014/main" id="{4F7145B9-5D49-6E63-39C6-81583E71324E}"/>
+                  </a:ext>
+                </a:extLst>
+              </p:cNvPr>
+              <p:cNvSpPr/>
+              <p:nvPr/>
+            </p:nvSpPr>
+            <p:spPr>
+              <a:xfrm>
+                <a:off x="1225296" y="1527048"/>
+                <a:ext cx="201168" cy="201168"/>
+              </a:xfrm>
+              <a:prstGeom prst="ellipse">
+                <a:avLst/>
+              </a:prstGeom>
+              <a:solidFill>
+                <a:srgbClr val="E8E7F5"/>
+              </a:solidFill>
+              <a:ln w="9525">
+                <a:solidFill>
+                  <a:srgbClr val="2E2585"/>
+                </a:solidFill>
+                <a:prstDash val="solid"/>
+              </a:ln>
+            </p:spPr>
+            <p:txBody>
+              <a:bodyPr/>
+              <a:lstStyle/>
+              <a:p>
+                <a:endParaRPr lang="en-US"/>
+              </a:p>
+            </p:txBody>
+          </p:sp>
+          <p:sp>
+            <p:nvSpPr>
+              <p:cNvPr id="333" name="Shape 16">
+                <a:extLst>
+                  <a:ext uri="{FF2B5EF4-FFF2-40B4-BE49-F238E27FC236}">
+                    <a16:creationId xmlns:a16="http://schemas.microsoft.com/office/drawing/2014/main" id="{C735F017-754C-D60D-75BD-F97D835B3E17}"/>
+                  </a:ext>
+                </a:extLst>
+              </p:cNvPr>
+              <p:cNvSpPr/>
+              <p:nvPr/>
+            </p:nvSpPr>
+            <p:spPr>
+              <a:xfrm>
+                <a:off x="1285646" y="1587398"/>
+                <a:ext cx="80467" cy="80467"/>
+              </a:xfrm>
+              <a:prstGeom prst="ellipse">
+                <a:avLst/>
+              </a:prstGeom>
+              <a:solidFill>
+                <a:srgbClr val="2E2585">
+                  <a:alpha val="50000"/>
+                </a:srgbClr>
+              </a:solidFill>
+              <a:ln/>
+            </p:spPr>
+            <p:txBody>
+              <a:bodyPr/>
+              <a:lstStyle/>
+              <a:p>
+                <a:endParaRPr lang="en-US"/>
+              </a:p>
+            </p:txBody>
+          </p:sp>
+        </p:grpSp>
+        <p:grpSp>
+          <p:nvGrpSpPr>
+            <p:cNvPr id="329" name="Group 328">
+              <a:extLst>
+                <a:ext uri="{FF2B5EF4-FFF2-40B4-BE49-F238E27FC236}">
+                  <a16:creationId xmlns:a16="http://schemas.microsoft.com/office/drawing/2014/main" id="{45B1AA52-37A2-BBBB-1C1D-5EEB238E7035}"/>
+                </a:ext>
+              </a:extLst>
+            </p:cNvPr>
+            <p:cNvGrpSpPr/>
+            <p:nvPr/>
+          </p:nvGrpSpPr>
+          <p:grpSpPr>
+            <a:xfrm>
+              <a:off x="4152655" y="4496903"/>
+              <a:ext cx="150129" cy="143298"/>
+              <a:chOff x="7067843" y="717976"/>
+              <a:chExt cx="201168" cy="206147"/>
+            </a:xfrm>
+          </p:grpSpPr>
+          <p:sp>
+            <p:nvSpPr>
+              <p:cNvPr id="330" name="Shape 71">
+                <a:extLst>
+                  <a:ext uri="{FF2B5EF4-FFF2-40B4-BE49-F238E27FC236}">
+                    <a16:creationId xmlns:a16="http://schemas.microsoft.com/office/drawing/2014/main" id="{90F916C6-6BDE-1C01-A0A7-434E3E7541DC}"/>
+                  </a:ext>
+                </a:extLst>
+              </p:cNvPr>
+              <p:cNvSpPr/>
+              <p:nvPr/>
+            </p:nvSpPr>
+            <p:spPr>
+              <a:xfrm>
+                <a:off x="7067843" y="717976"/>
+                <a:ext cx="201168" cy="206147"/>
+              </a:xfrm>
+              <a:prstGeom prst="ellipse">
+                <a:avLst/>
+              </a:prstGeom>
+              <a:solidFill>
+                <a:srgbClr val="F9E0EE"/>
+              </a:solidFill>
+              <a:ln w="22225">
+                <a:solidFill>
+                  <a:srgbClr val="C0156E"/>
+                </a:solidFill>
+                <a:prstDash val="solid"/>
+              </a:ln>
+            </p:spPr>
+            <p:txBody>
+              <a:bodyPr/>
+              <a:lstStyle/>
+              <a:p>
+                <a:endParaRPr lang="en-US" dirty="0"/>
+              </a:p>
+            </p:txBody>
+          </p:sp>
+          <p:sp>
+            <p:nvSpPr>
+              <p:cNvPr id="331" name="Shape 72">
+                <a:extLst>
+                  <a:ext uri="{FF2B5EF4-FFF2-40B4-BE49-F238E27FC236}">
+                    <a16:creationId xmlns:a16="http://schemas.microsoft.com/office/drawing/2014/main" id="{EEB37BF7-7413-19F5-5B65-E677863D6EE6}"/>
+                  </a:ext>
+                </a:extLst>
+              </p:cNvPr>
+              <p:cNvSpPr/>
+              <p:nvPr/>
+            </p:nvSpPr>
+            <p:spPr>
+              <a:xfrm>
+                <a:off x="7128525" y="770321"/>
+                <a:ext cx="80467" cy="82459"/>
+              </a:xfrm>
+              <a:prstGeom prst="ellipse">
+                <a:avLst/>
+              </a:prstGeom>
+              <a:solidFill>
+                <a:srgbClr val="C0156E">
+                  <a:alpha val="50000"/>
+                </a:srgbClr>
+              </a:solidFill>
+              <a:ln/>
+            </p:spPr>
+            <p:txBody>
+              <a:bodyPr/>
+              <a:lstStyle/>
+              <a:p>
+                <a:endParaRPr lang="en-US"/>
+              </a:p>
+            </p:txBody>
+          </p:sp>
+        </p:grpSp>
+        <p:grpSp>
+          <p:nvGrpSpPr>
+            <p:cNvPr id="132" name="Group 131">
+              <a:extLst>
+                <a:ext uri="{FF2B5EF4-FFF2-40B4-BE49-F238E27FC236}">
+                  <a16:creationId xmlns:a16="http://schemas.microsoft.com/office/drawing/2014/main" id="{6BDA7FA1-C538-4734-6E24-9787A58CFC40}"/>
+                </a:ext>
+              </a:extLst>
+            </p:cNvPr>
+            <p:cNvGrpSpPr/>
+            <p:nvPr/>
+          </p:nvGrpSpPr>
+          <p:grpSpPr>
+            <a:xfrm>
+              <a:off x="4159225" y="4055737"/>
+              <a:ext cx="150129" cy="143298"/>
+              <a:chOff x="7067843" y="717976"/>
+              <a:chExt cx="201168" cy="206147"/>
+            </a:xfrm>
+          </p:grpSpPr>
+          <p:sp>
+            <p:nvSpPr>
+              <p:cNvPr id="133" name="Shape 71">
+                <a:extLst>
+                  <a:ext uri="{FF2B5EF4-FFF2-40B4-BE49-F238E27FC236}">
+                    <a16:creationId xmlns:a16="http://schemas.microsoft.com/office/drawing/2014/main" id="{D6C443CE-DD41-BE1C-7E95-CACA58190A1C}"/>
+                  </a:ext>
+                </a:extLst>
+              </p:cNvPr>
+              <p:cNvSpPr/>
+              <p:nvPr/>
+            </p:nvSpPr>
+            <p:spPr>
+              <a:xfrm>
+                <a:off x="7067843" y="717976"/>
+                <a:ext cx="201168" cy="206147"/>
+              </a:xfrm>
+              <a:prstGeom prst="ellipse">
+                <a:avLst/>
+              </a:prstGeom>
+              <a:solidFill>
+                <a:srgbClr val="F9E0EE"/>
+              </a:solidFill>
+              <a:ln w="22225">
+                <a:solidFill>
+                  <a:srgbClr val="C0156E"/>
+                </a:solidFill>
+                <a:prstDash val="solid"/>
+              </a:ln>
+            </p:spPr>
+            <p:txBody>
+              <a:bodyPr/>
+              <a:lstStyle/>
+              <a:p>
+                <a:endParaRPr lang="en-US" dirty="0"/>
+              </a:p>
+            </p:txBody>
+          </p:sp>
+          <p:sp>
+            <p:nvSpPr>
+              <p:cNvPr id="134" name="Shape 72">
+                <a:extLst>
+                  <a:ext uri="{FF2B5EF4-FFF2-40B4-BE49-F238E27FC236}">
+                    <a16:creationId xmlns:a16="http://schemas.microsoft.com/office/drawing/2014/main" id="{2998C28F-FEF3-9A4F-F586-62B19EE538AC}"/>
+                  </a:ext>
+                </a:extLst>
+              </p:cNvPr>
+              <p:cNvSpPr/>
+              <p:nvPr/>
+            </p:nvSpPr>
+            <p:spPr>
+              <a:xfrm>
+                <a:off x="7128525" y="770321"/>
+                <a:ext cx="80467" cy="82459"/>
+              </a:xfrm>
+              <a:prstGeom prst="ellipse">
+                <a:avLst/>
+              </a:prstGeom>
+              <a:solidFill>
+                <a:srgbClr val="C0156E">
+                  <a:alpha val="50000"/>
+                </a:srgbClr>
+              </a:solidFill>
+              <a:ln/>
+            </p:spPr>
+            <p:txBody>
+              <a:bodyPr/>
+              <a:lstStyle/>
+              <a:p>
+                <a:endParaRPr lang="en-US"/>
+              </a:p>
+            </p:txBody>
+          </p:sp>
+        </p:grpSp>
+      </p:grpSp>
+      <p:grpSp>
+        <p:nvGrpSpPr>
+          <p:cNvPr id="5" name="Group 4">
+            <a:extLst>
+              <a:ext uri="{FF2B5EF4-FFF2-40B4-BE49-F238E27FC236}">
+                <a16:creationId xmlns:a16="http://schemas.microsoft.com/office/drawing/2014/main" id="{1D4D29F0-CD60-AF47-DD8B-79F735CD6B6B}"/>
+              </a:ext>
+            </a:extLst>
+          </p:cNvPr>
+          <p:cNvGrpSpPr/>
+          <p:nvPr/>
+        </p:nvGrpSpPr>
+        <p:grpSpPr>
+          <a:xfrm>
+            <a:off x="5940799" y="2350733"/>
+            <a:ext cx="1146344" cy="834302"/>
+            <a:chOff x="4417778" y="4005680"/>
+            <a:chExt cx="1146344" cy="834302"/>
+          </a:xfrm>
+        </p:grpSpPr>
+        <p:grpSp>
+          <p:nvGrpSpPr>
+            <p:cNvPr id="137" name="Group 136">
+              <a:extLst>
+                <a:ext uri="{FF2B5EF4-FFF2-40B4-BE49-F238E27FC236}">
+                  <a16:creationId xmlns:a16="http://schemas.microsoft.com/office/drawing/2014/main" id="{2790B2F5-9EFF-91EB-ECD6-57ECD6939391}"/>
+                </a:ext>
+              </a:extLst>
+            </p:cNvPr>
+            <p:cNvGrpSpPr/>
+            <p:nvPr/>
+          </p:nvGrpSpPr>
+          <p:grpSpPr>
+            <a:xfrm>
+              <a:off x="4712149" y="4398818"/>
+              <a:ext cx="150129" cy="139837"/>
+              <a:chOff x="1225296" y="1527048"/>
+              <a:chExt cx="201168" cy="201168"/>
+            </a:xfrm>
+          </p:grpSpPr>
+          <p:sp>
+            <p:nvSpPr>
+              <p:cNvPr id="219" name="Shape 15">
+                <a:extLst>
+                  <a:ext uri="{FF2B5EF4-FFF2-40B4-BE49-F238E27FC236}">
+                    <a16:creationId xmlns:a16="http://schemas.microsoft.com/office/drawing/2014/main" id="{37CB4B3C-BBFA-0C36-9978-CDD1660E9B79}"/>
+                  </a:ext>
+                </a:extLst>
+              </p:cNvPr>
+              <p:cNvSpPr/>
+              <p:nvPr/>
+            </p:nvSpPr>
+            <p:spPr>
+              <a:xfrm>
+                <a:off x="1225296" y="1527048"/>
+                <a:ext cx="201168" cy="201168"/>
+              </a:xfrm>
+              <a:prstGeom prst="ellipse">
+                <a:avLst/>
+              </a:prstGeom>
+              <a:solidFill>
+                <a:srgbClr val="E8E7F5"/>
+              </a:solidFill>
+              <a:ln w="9525">
+                <a:solidFill>
+                  <a:srgbClr val="2E2585"/>
+                </a:solidFill>
+                <a:prstDash val="solid"/>
+              </a:ln>
+            </p:spPr>
+            <p:txBody>
+              <a:bodyPr/>
+              <a:lstStyle/>
+              <a:p>
+                <a:endParaRPr lang="en-US"/>
+              </a:p>
+            </p:txBody>
+          </p:sp>
+          <p:sp>
+            <p:nvSpPr>
+              <p:cNvPr id="220" name="Shape 16">
+                <a:extLst>
+                  <a:ext uri="{FF2B5EF4-FFF2-40B4-BE49-F238E27FC236}">
+                    <a16:creationId xmlns:a16="http://schemas.microsoft.com/office/drawing/2014/main" id="{FBE5FA3B-5C0C-8B10-3A2F-A2D26563445B}"/>
+                  </a:ext>
+                </a:extLst>
+              </p:cNvPr>
+              <p:cNvSpPr/>
+              <p:nvPr/>
+            </p:nvSpPr>
+            <p:spPr>
+              <a:xfrm>
+                <a:off x="1285646" y="1587398"/>
+                <a:ext cx="80467" cy="80467"/>
+              </a:xfrm>
+              <a:prstGeom prst="ellipse">
+                <a:avLst/>
+              </a:prstGeom>
+              <a:solidFill>
+                <a:srgbClr val="2E2585">
+                  <a:alpha val="50000"/>
+                </a:srgbClr>
+              </a:solidFill>
+              <a:ln/>
+            </p:spPr>
+            <p:txBody>
+              <a:bodyPr/>
+              <a:lstStyle/>
+              <a:p>
+                <a:endParaRPr lang="en-US"/>
+              </a:p>
+            </p:txBody>
+          </p:sp>
+        </p:grpSp>
+        <p:grpSp>
+          <p:nvGrpSpPr>
+            <p:cNvPr id="138" name="Group 137">
+              <a:extLst>
+                <a:ext uri="{FF2B5EF4-FFF2-40B4-BE49-F238E27FC236}">
+                  <a16:creationId xmlns:a16="http://schemas.microsoft.com/office/drawing/2014/main" id="{82A06E96-AFE5-8F0C-75BC-FAEB609ADB7C}"/>
+                </a:ext>
+              </a:extLst>
+            </p:cNvPr>
+            <p:cNvGrpSpPr/>
+            <p:nvPr/>
+          </p:nvGrpSpPr>
+          <p:grpSpPr>
+            <a:xfrm>
+              <a:off x="5000403" y="4467452"/>
+              <a:ext cx="136481" cy="127125"/>
+              <a:chOff x="1874520" y="1444752"/>
+              <a:chExt cx="182880" cy="182880"/>
+            </a:xfrm>
+          </p:grpSpPr>
+          <p:sp>
+            <p:nvSpPr>
+              <p:cNvPr id="217" name="Shape 23">
+                <a:extLst>
+                  <a:ext uri="{FF2B5EF4-FFF2-40B4-BE49-F238E27FC236}">
+                    <a16:creationId xmlns:a16="http://schemas.microsoft.com/office/drawing/2014/main" id="{F6671689-1E27-3DBA-BC44-091814D59787}"/>
+                  </a:ext>
+                </a:extLst>
+              </p:cNvPr>
+              <p:cNvSpPr/>
+              <p:nvPr/>
+            </p:nvSpPr>
+            <p:spPr>
+              <a:xfrm>
+                <a:off x="1874520" y="1444752"/>
+                <a:ext cx="182880" cy="182880"/>
+              </a:xfrm>
+              <a:prstGeom prst="ellipse">
+                <a:avLst/>
+              </a:prstGeom>
+              <a:solidFill>
+                <a:srgbClr val="FAE8E3"/>
+              </a:solidFill>
+              <a:ln w="9525">
+                <a:solidFill>
+                  <a:srgbClr val="DC4B1E"/>
+                </a:solidFill>
+                <a:prstDash val="solid"/>
+              </a:ln>
+            </p:spPr>
+            <p:txBody>
+              <a:bodyPr/>
+              <a:lstStyle/>
+              <a:p>
+                <a:endParaRPr lang="en-US"/>
+              </a:p>
+            </p:txBody>
+          </p:sp>
+          <p:sp>
+            <p:nvSpPr>
+              <p:cNvPr id="218" name="Shape 24">
+                <a:extLst>
+                  <a:ext uri="{FF2B5EF4-FFF2-40B4-BE49-F238E27FC236}">
+                    <a16:creationId xmlns:a16="http://schemas.microsoft.com/office/drawing/2014/main" id="{A47E33A5-FD66-7871-9AEF-656184227637}"/>
+                  </a:ext>
+                </a:extLst>
+              </p:cNvPr>
+              <p:cNvSpPr/>
+              <p:nvPr/>
+            </p:nvSpPr>
+            <p:spPr>
+              <a:xfrm>
+                <a:off x="1929384" y="1499616"/>
+                <a:ext cx="73152" cy="73152"/>
+              </a:xfrm>
+              <a:prstGeom prst="ellipse">
+                <a:avLst/>
+              </a:prstGeom>
+              <a:solidFill>
+                <a:srgbClr val="DC4B1E">
+                  <a:alpha val="50000"/>
+                </a:srgbClr>
+              </a:solidFill>
+              <a:ln/>
+            </p:spPr>
+            <p:txBody>
+              <a:bodyPr/>
+              <a:lstStyle/>
+              <a:p>
+                <a:endParaRPr lang="en-US"/>
+              </a:p>
+            </p:txBody>
+          </p:sp>
+        </p:grpSp>
+        <p:grpSp>
+          <p:nvGrpSpPr>
+            <p:cNvPr id="139" name="Group 138">
+              <a:extLst>
+                <a:ext uri="{FF2B5EF4-FFF2-40B4-BE49-F238E27FC236}">
+                  <a16:creationId xmlns:a16="http://schemas.microsoft.com/office/drawing/2014/main" id="{537DEDA6-3424-5220-80B7-31D62DE43FC2}"/>
+                </a:ext>
+              </a:extLst>
+            </p:cNvPr>
+            <p:cNvGrpSpPr/>
+            <p:nvPr/>
+          </p:nvGrpSpPr>
+          <p:grpSpPr>
+            <a:xfrm>
+              <a:off x="5104399" y="4700145"/>
+              <a:ext cx="150129" cy="139837"/>
+              <a:chOff x="1225296" y="1527048"/>
+              <a:chExt cx="201168" cy="201168"/>
+            </a:xfrm>
+          </p:grpSpPr>
+          <p:sp>
+            <p:nvSpPr>
+              <p:cNvPr id="215" name="Shape 15">
+                <a:extLst>
+                  <a:ext uri="{FF2B5EF4-FFF2-40B4-BE49-F238E27FC236}">
+                    <a16:creationId xmlns:a16="http://schemas.microsoft.com/office/drawing/2014/main" id="{1934AC94-A97D-AF16-FEBE-5AB56C06EC36}"/>
+                  </a:ext>
+                </a:extLst>
+              </p:cNvPr>
+              <p:cNvSpPr/>
+              <p:nvPr/>
+            </p:nvSpPr>
+            <p:spPr>
+              <a:xfrm>
+                <a:off x="1225296" y="1527048"/>
+                <a:ext cx="201168" cy="201168"/>
+              </a:xfrm>
+              <a:prstGeom prst="ellipse">
+                <a:avLst/>
+              </a:prstGeom>
+              <a:solidFill>
+                <a:srgbClr val="E8E7F5"/>
+              </a:solidFill>
+              <a:ln w="9525">
+                <a:solidFill>
+                  <a:srgbClr val="2E2585"/>
+                </a:solidFill>
+                <a:prstDash val="solid"/>
+              </a:ln>
+            </p:spPr>
+            <p:txBody>
+              <a:bodyPr/>
+              <a:lstStyle/>
+              <a:p>
+                <a:endParaRPr lang="en-US"/>
+              </a:p>
+            </p:txBody>
+          </p:sp>
+          <p:sp>
+            <p:nvSpPr>
+              <p:cNvPr id="216" name="Shape 16">
+                <a:extLst>
+                  <a:ext uri="{FF2B5EF4-FFF2-40B4-BE49-F238E27FC236}">
+                    <a16:creationId xmlns:a16="http://schemas.microsoft.com/office/drawing/2014/main" id="{69ADF84E-7C25-0076-9632-C2C182294D41}"/>
+                  </a:ext>
+                </a:extLst>
+              </p:cNvPr>
+              <p:cNvSpPr/>
+              <p:nvPr/>
+            </p:nvSpPr>
+            <p:spPr>
+              <a:xfrm>
+                <a:off x="1285646" y="1587398"/>
+                <a:ext cx="80467" cy="80467"/>
+              </a:xfrm>
+              <a:prstGeom prst="ellipse">
+                <a:avLst/>
+              </a:prstGeom>
+              <a:solidFill>
+                <a:srgbClr val="2E2585">
+                  <a:alpha val="50000"/>
+                </a:srgbClr>
+              </a:solidFill>
+              <a:ln/>
+            </p:spPr>
+            <p:txBody>
+              <a:bodyPr/>
+              <a:lstStyle/>
+              <a:p>
+                <a:endParaRPr lang="en-US"/>
+              </a:p>
+            </p:txBody>
+          </p:sp>
+        </p:grpSp>
+        <p:grpSp>
+          <p:nvGrpSpPr>
+            <p:cNvPr id="140" name="Group 139">
+              <a:extLst>
+                <a:ext uri="{FF2B5EF4-FFF2-40B4-BE49-F238E27FC236}">
+                  <a16:creationId xmlns:a16="http://schemas.microsoft.com/office/drawing/2014/main" id="{7A576956-475A-25E7-0A61-DC4460C74B60}"/>
+                </a:ext>
+              </a:extLst>
+            </p:cNvPr>
+            <p:cNvGrpSpPr/>
+            <p:nvPr/>
+          </p:nvGrpSpPr>
+          <p:grpSpPr>
+            <a:xfrm>
+              <a:off x="4480692" y="4597748"/>
+              <a:ext cx="150129" cy="139837"/>
+              <a:chOff x="1225296" y="1527048"/>
+              <a:chExt cx="201168" cy="201168"/>
+            </a:xfrm>
+          </p:grpSpPr>
+          <p:sp>
+            <p:nvSpPr>
+              <p:cNvPr id="213" name="Shape 15">
+                <a:extLst>
+                  <a:ext uri="{FF2B5EF4-FFF2-40B4-BE49-F238E27FC236}">
+                    <a16:creationId xmlns:a16="http://schemas.microsoft.com/office/drawing/2014/main" id="{943C4D43-561A-7DE3-56A0-1BFE71DBDCAD}"/>
+                  </a:ext>
+                </a:extLst>
+              </p:cNvPr>
+              <p:cNvSpPr/>
+              <p:nvPr/>
+            </p:nvSpPr>
+            <p:spPr>
+              <a:xfrm>
+                <a:off x="1225296" y="1527048"/>
+                <a:ext cx="201168" cy="201168"/>
+              </a:xfrm>
+              <a:prstGeom prst="ellipse">
+                <a:avLst/>
+              </a:prstGeom>
+              <a:solidFill>
+                <a:srgbClr val="E8E7F5"/>
+              </a:solidFill>
+              <a:ln w="9525">
+                <a:solidFill>
+                  <a:srgbClr val="2E2585"/>
+                </a:solidFill>
+                <a:prstDash val="solid"/>
+              </a:ln>
+            </p:spPr>
+            <p:txBody>
+              <a:bodyPr/>
+              <a:lstStyle/>
+              <a:p>
+                <a:endParaRPr lang="en-US"/>
+              </a:p>
+            </p:txBody>
+          </p:sp>
+          <p:sp>
+            <p:nvSpPr>
+              <p:cNvPr id="214" name="Shape 16">
+                <a:extLst>
+                  <a:ext uri="{FF2B5EF4-FFF2-40B4-BE49-F238E27FC236}">
+                    <a16:creationId xmlns:a16="http://schemas.microsoft.com/office/drawing/2014/main" id="{A5ACCB96-9BE9-3DE7-322F-FBDBD648D593}"/>
+                  </a:ext>
+                </a:extLst>
+              </p:cNvPr>
+              <p:cNvSpPr/>
+              <p:nvPr/>
+            </p:nvSpPr>
+            <p:spPr>
+              <a:xfrm>
+                <a:off x="1285646" y="1587398"/>
+                <a:ext cx="80467" cy="80467"/>
+              </a:xfrm>
+              <a:prstGeom prst="ellipse">
+                <a:avLst/>
+              </a:prstGeom>
+              <a:solidFill>
+                <a:srgbClr val="2E2585">
+                  <a:alpha val="50000"/>
+                </a:srgbClr>
+              </a:solidFill>
+              <a:ln/>
+            </p:spPr>
+            <p:txBody>
+              <a:bodyPr/>
+              <a:lstStyle/>
+              <a:p>
+                <a:endParaRPr lang="en-US"/>
+              </a:p>
+            </p:txBody>
+          </p:sp>
+        </p:grpSp>
+        <p:grpSp>
+          <p:nvGrpSpPr>
+            <p:cNvPr id="141" name="Group 140">
+              <a:extLst>
+                <a:ext uri="{FF2B5EF4-FFF2-40B4-BE49-F238E27FC236}">
+                  <a16:creationId xmlns:a16="http://schemas.microsoft.com/office/drawing/2014/main" id="{02CC4A93-AB9C-34CD-6E24-3CF1D45B57E2}"/>
+                </a:ext>
+              </a:extLst>
+            </p:cNvPr>
+            <p:cNvGrpSpPr/>
+            <p:nvPr/>
+          </p:nvGrpSpPr>
+          <p:grpSpPr>
+            <a:xfrm>
+              <a:off x="5263864" y="4433536"/>
+              <a:ext cx="150129" cy="143298"/>
+              <a:chOff x="7067843" y="717976"/>
+              <a:chExt cx="201168" cy="206147"/>
+            </a:xfrm>
+          </p:grpSpPr>
+          <p:sp>
+            <p:nvSpPr>
+              <p:cNvPr id="211" name="Shape 71">
+                <a:extLst>
+                  <a:ext uri="{FF2B5EF4-FFF2-40B4-BE49-F238E27FC236}">
+                    <a16:creationId xmlns:a16="http://schemas.microsoft.com/office/drawing/2014/main" id="{9C56EC6E-DE77-0C83-9FF6-A03E2BF46F6C}"/>
+                  </a:ext>
+                </a:extLst>
+              </p:cNvPr>
+              <p:cNvSpPr/>
+              <p:nvPr/>
+            </p:nvSpPr>
+            <p:spPr>
+              <a:xfrm>
+                <a:off x="7067843" y="717976"/>
+                <a:ext cx="201168" cy="206147"/>
+              </a:xfrm>
+              <a:prstGeom prst="ellipse">
+                <a:avLst/>
+              </a:prstGeom>
+              <a:solidFill>
+                <a:srgbClr val="F9E0EE"/>
+              </a:solidFill>
+              <a:ln w="22225">
+                <a:solidFill>
+                  <a:srgbClr val="C0156E"/>
+                </a:solidFill>
+                <a:prstDash val="solid"/>
+              </a:ln>
+            </p:spPr>
+            <p:txBody>
+              <a:bodyPr/>
+              <a:lstStyle/>
+              <a:p>
+                <a:endParaRPr lang="en-US" dirty="0"/>
+              </a:p>
+            </p:txBody>
+          </p:sp>
+          <p:sp>
+            <p:nvSpPr>
+              <p:cNvPr id="212" name="Shape 72">
+                <a:extLst>
+                  <a:ext uri="{FF2B5EF4-FFF2-40B4-BE49-F238E27FC236}">
+                    <a16:creationId xmlns:a16="http://schemas.microsoft.com/office/drawing/2014/main" id="{ECEA4EB9-34D7-1509-115F-81A2F899F1AF}"/>
+                  </a:ext>
+                </a:extLst>
+              </p:cNvPr>
+              <p:cNvSpPr/>
+              <p:nvPr/>
+            </p:nvSpPr>
+            <p:spPr>
+              <a:xfrm>
+                <a:off x="7128525" y="770321"/>
+                <a:ext cx="80467" cy="82459"/>
+              </a:xfrm>
+              <a:prstGeom prst="ellipse">
+                <a:avLst/>
+              </a:prstGeom>
+              <a:solidFill>
+                <a:srgbClr val="C0156E">
+                  <a:alpha val="50000"/>
+                </a:srgbClr>
+              </a:solidFill>
+              <a:ln/>
+            </p:spPr>
+            <p:txBody>
+              <a:bodyPr/>
+              <a:lstStyle/>
+              <a:p>
+                <a:endParaRPr lang="en-US"/>
+              </a:p>
+            </p:txBody>
+          </p:sp>
+        </p:grpSp>
+        <p:grpSp>
+          <p:nvGrpSpPr>
+            <p:cNvPr id="142" name="Group 141">
+              <a:extLst>
+                <a:ext uri="{FF2B5EF4-FFF2-40B4-BE49-F238E27FC236}">
+                  <a16:creationId xmlns:a16="http://schemas.microsoft.com/office/drawing/2014/main" id="{72550B91-BA95-F1CE-AEBB-343FA74E1DCF}"/>
+                </a:ext>
+              </a:extLst>
+            </p:cNvPr>
+            <p:cNvGrpSpPr/>
+            <p:nvPr/>
+          </p:nvGrpSpPr>
+          <p:grpSpPr>
+            <a:xfrm>
+              <a:off x="4845296" y="4223868"/>
+              <a:ext cx="150129" cy="143298"/>
+              <a:chOff x="7067843" y="717976"/>
+              <a:chExt cx="201168" cy="206147"/>
+            </a:xfrm>
+          </p:grpSpPr>
+          <p:sp>
+            <p:nvSpPr>
+              <p:cNvPr id="179" name="Shape 71">
+                <a:extLst>
+                  <a:ext uri="{FF2B5EF4-FFF2-40B4-BE49-F238E27FC236}">
+                    <a16:creationId xmlns:a16="http://schemas.microsoft.com/office/drawing/2014/main" id="{45633C5C-8D29-7E5D-4F80-B0E7EB56A1CE}"/>
+                  </a:ext>
+                </a:extLst>
+              </p:cNvPr>
+              <p:cNvSpPr/>
+              <p:nvPr/>
+            </p:nvSpPr>
+            <p:spPr>
+              <a:xfrm>
+                <a:off x="7067843" y="717976"/>
+                <a:ext cx="201168" cy="206147"/>
+              </a:xfrm>
+              <a:prstGeom prst="ellipse">
+                <a:avLst/>
+              </a:prstGeom>
+              <a:solidFill>
+                <a:srgbClr val="F9E0EE"/>
+              </a:solidFill>
+              <a:ln w="22225">
+                <a:solidFill>
+                  <a:srgbClr val="C0156E"/>
+                </a:solidFill>
+                <a:prstDash val="solid"/>
+              </a:ln>
+            </p:spPr>
+            <p:txBody>
+              <a:bodyPr/>
+              <a:lstStyle/>
+              <a:p>
+                <a:endParaRPr lang="en-US" dirty="0"/>
+              </a:p>
+            </p:txBody>
+          </p:sp>
+          <p:sp>
+            <p:nvSpPr>
+              <p:cNvPr id="199" name="Shape 72">
+                <a:extLst>
+                  <a:ext uri="{FF2B5EF4-FFF2-40B4-BE49-F238E27FC236}">
+                    <a16:creationId xmlns:a16="http://schemas.microsoft.com/office/drawing/2014/main" id="{C8126350-F6E1-9119-F0DA-5FCB8CB2A158}"/>
+                  </a:ext>
+                </a:extLst>
+              </p:cNvPr>
+              <p:cNvSpPr/>
+              <p:nvPr/>
+            </p:nvSpPr>
+            <p:spPr>
+              <a:xfrm>
+                <a:off x="7128525" y="770321"/>
+                <a:ext cx="80467" cy="82459"/>
+              </a:xfrm>
+              <a:prstGeom prst="ellipse">
+                <a:avLst/>
+              </a:prstGeom>
+              <a:solidFill>
+                <a:srgbClr val="C0156E">
+                  <a:alpha val="50000"/>
+                </a:srgbClr>
+              </a:solidFill>
+              <a:ln/>
+            </p:spPr>
+            <p:txBody>
+              <a:bodyPr/>
+              <a:lstStyle/>
+              <a:p>
+                <a:endParaRPr lang="en-US"/>
+              </a:p>
+            </p:txBody>
+          </p:sp>
+        </p:grpSp>
+        <p:grpSp>
+          <p:nvGrpSpPr>
+            <p:cNvPr id="143" name="Group 142">
+              <a:extLst>
+                <a:ext uri="{FF2B5EF4-FFF2-40B4-BE49-F238E27FC236}">
+                  <a16:creationId xmlns:a16="http://schemas.microsoft.com/office/drawing/2014/main" id="{0FBF21F0-1808-2A6D-9385-76FA472BA363}"/>
+                </a:ext>
+              </a:extLst>
+            </p:cNvPr>
+            <p:cNvGrpSpPr/>
+            <p:nvPr/>
+          </p:nvGrpSpPr>
+          <p:grpSpPr>
+            <a:xfrm>
+              <a:off x="5129201" y="4160906"/>
+              <a:ext cx="150129" cy="143298"/>
+              <a:chOff x="7067843" y="717976"/>
+              <a:chExt cx="201168" cy="206147"/>
+            </a:xfrm>
+          </p:grpSpPr>
+          <p:sp>
+            <p:nvSpPr>
+              <p:cNvPr id="177" name="Shape 71">
+                <a:extLst>
+                  <a:ext uri="{FF2B5EF4-FFF2-40B4-BE49-F238E27FC236}">
+                    <a16:creationId xmlns:a16="http://schemas.microsoft.com/office/drawing/2014/main" id="{57B8834F-1292-A9C9-E6F4-8230533DD357}"/>
+                  </a:ext>
+                </a:extLst>
+              </p:cNvPr>
+              <p:cNvSpPr/>
+              <p:nvPr/>
+            </p:nvSpPr>
+            <p:spPr>
+              <a:xfrm>
+                <a:off x="7067843" y="717976"/>
+                <a:ext cx="201168" cy="206147"/>
+              </a:xfrm>
+              <a:prstGeom prst="ellipse">
+                <a:avLst/>
+              </a:prstGeom>
+              <a:solidFill>
+                <a:srgbClr val="F9E0EE"/>
+              </a:solidFill>
+              <a:ln w="22225">
+                <a:solidFill>
+                  <a:srgbClr val="C0156E"/>
+                </a:solidFill>
+                <a:prstDash val="solid"/>
+              </a:ln>
+            </p:spPr>
+            <p:txBody>
+              <a:bodyPr/>
+              <a:lstStyle/>
+              <a:p>
+                <a:endParaRPr lang="en-US" dirty="0"/>
+              </a:p>
+            </p:txBody>
+          </p:sp>
+          <p:sp>
+            <p:nvSpPr>
+              <p:cNvPr id="178" name="Shape 72">
+                <a:extLst>
+                  <a:ext uri="{FF2B5EF4-FFF2-40B4-BE49-F238E27FC236}">
+                    <a16:creationId xmlns:a16="http://schemas.microsoft.com/office/drawing/2014/main" id="{3D2756C7-5135-684B-6F84-D468F0CD7575}"/>
+                  </a:ext>
+                </a:extLst>
+              </p:cNvPr>
+              <p:cNvSpPr/>
+              <p:nvPr/>
+            </p:nvSpPr>
+            <p:spPr>
+              <a:xfrm>
+                <a:off x="7128525" y="770321"/>
+                <a:ext cx="80467" cy="82459"/>
+              </a:xfrm>
+              <a:prstGeom prst="ellipse">
+                <a:avLst/>
+              </a:prstGeom>
+              <a:solidFill>
+                <a:srgbClr val="C0156E">
+                  <a:alpha val="50000"/>
+                </a:srgbClr>
+              </a:solidFill>
+              <a:ln/>
+            </p:spPr>
+            <p:txBody>
+              <a:bodyPr/>
+              <a:lstStyle/>
+              <a:p>
+                <a:endParaRPr lang="en-US"/>
+              </a:p>
+            </p:txBody>
+          </p:sp>
+        </p:grpSp>
+        <p:grpSp>
+          <p:nvGrpSpPr>
+            <p:cNvPr id="144" name="Group 143">
+              <a:extLst>
+                <a:ext uri="{FF2B5EF4-FFF2-40B4-BE49-F238E27FC236}">
+                  <a16:creationId xmlns:a16="http://schemas.microsoft.com/office/drawing/2014/main" id="{401919C3-FA8D-A341-D35D-63A587FA79E2}"/>
+                </a:ext>
+              </a:extLst>
+            </p:cNvPr>
+            <p:cNvGrpSpPr/>
+            <p:nvPr/>
+          </p:nvGrpSpPr>
+          <p:grpSpPr>
+            <a:xfrm>
+              <a:off x="4792497" y="4005680"/>
+              <a:ext cx="150129" cy="143298"/>
+              <a:chOff x="7067843" y="717976"/>
+              <a:chExt cx="201168" cy="206147"/>
+            </a:xfrm>
+          </p:grpSpPr>
+          <p:sp>
+            <p:nvSpPr>
+              <p:cNvPr id="175" name="Shape 71">
+                <a:extLst>
+                  <a:ext uri="{FF2B5EF4-FFF2-40B4-BE49-F238E27FC236}">
+                    <a16:creationId xmlns:a16="http://schemas.microsoft.com/office/drawing/2014/main" id="{ABAC8FB9-979A-8ADF-E04F-297B16C07904}"/>
+                  </a:ext>
+                </a:extLst>
+              </p:cNvPr>
+              <p:cNvSpPr/>
+              <p:nvPr/>
+            </p:nvSpPr>
+            <p:spPr>
+              <a:xfrm>
+                <a:off x="7067843" y="717976"/>
+                <a:ext cx="201168" cy="206147"/>
+              </a:xfrm>
+              <a:prstGeom prst="ellipse">
+                <a:avLst/>
+              </a:prstGeom>
+              <a:solidFill>
+                <a:srgbClr val="F9E0EE"/>
+              </a:solidFill>
+              <a:ln w="22225">
+                <a:solidFill>
+                  <a:srgbClr val="C0156E"/>
+                </a:solidFill>
+                <a:prstDash val="solid"/>
+              </a:ln>
+            </p:spPr>
+            <p:txBody>
+              <a:bodyPr/>
+              <a:lstStyle/>
+              <a:p>
+                <a:endParaRPr lang="en-US" dirty="0"/>
+              </a:p>
+            </p:txBody>
+          </p:sp>
+          <p:sp>
+            <p:nvSpPr>
+              <p:cNvPr id="176" name="Shape 72">
+                <a:extLst>
+                  <a:ext uri="{FF2B5EF4-FFF2-40B4-BE49-F238E27FC236}">
+                    <a16:creationId xmlns:a16="http://schemas.microsoft.com/office/drawing/2014/main" id="{BF7D4B27-661B-0B63-7A53-DF7979D2F6C0}"/>
+                  </a:ext>
+                </a:extLst>
+              </p:cNvPr>
+              <p:cNvSpPr/>
+              <p:nvPr/>
+            </p:nvSpPr>
+            <p:spPr>
+              <a:xfrm>
+                <a:off x="7128525" y="770321"/>
+                <a:ext cx="80467" cy="82459"/>
+              </a:xfrm>
+              <a:prstGeom prst="ellipse">
+                <a:avLst/>
+              </a:prstGeom>
+              <a:solidFill>
+                <a:srgbClr val="C0156E">
+                  <a:alpha val="50000"/>
+                </a:srgbClr>
+              </a:solidFill>
+              <a:ln/>
+            </p:spPr>
+            <p:txBody>
+              <a:bodyPr/>
+              <a:lstStyle/>
+              <a:p>
+                <a:endParaRPr lang="en-US"/>
+              </a:p>
+            </p:txBody>
+          </p:sp>
+        </p:grpSp>
+        <p:grpSp>
+          <p:nvGrpSpPr>
+            <p:cNvPr id="145" name="Group 144">
+              <a:extLst>
+                <a:ext uri="{FF2B5EF4-FFF2-40B4-BE49-F238E27FC236}">
+                  <a16:creationId xmlns:a16="http://schemas.microsoft.com/office/drawing/2014/main" id="{807E6AF0-A093-8A85-45EE-88DE74B6E41C}"/>
+                </a:ext>
+              </a:extLst>
+            </p:cNvPr>
+            <p:cNvGrpSpPr/>
+            <p:nvPr/>
+          </p:nvGrpSpPr>
+          <p:grpSpPr>
+            <a:xfrm>
+              <a:off x="4437399" y="4241871"/>
+              <a:ext cx="136481" cy="127125"/>
+              <a:chOff x="1874520" y="1444752"/>
+              <a:chExt cx="182880" cy="182880"/>
+            </a:xfrm>
+          </p:grpSpPr>
+          <p:sp>
+            <p:nvSpPr>
+              <p:cNvPr id="165" name="Shape 23">
+                <a:extLst>
+                  <a:ext uri="{FF2B5EF4-FFF2-40B4-BE49-F238E27FC236}">
+                    <a16:creationId xmlns:a16="http://schemas.microsoft.com/office/drawing/2014/main" id="{FA3DB74C-9AF1-0E3A-8967-B71A2489CFBA}"/>
+                  </a:ext>
+                </a:extLst>
+              </p:cNvPr>
+              <p:cNvSpPr/>
+              <p:nvPr/>
+            </p:nvSpPr>
+            <p:spPr>
+              <a:xfrm>
+                <a:off x="1874520" y="1444752"/>
+                <a:ext cx="182880" cy="182880"/>
+              </a:xfrm>
+              <a:prstGeom prst="ellipse">
+                <a:avLst/>
+              </a:prstGeom>
+              <a:solidFill>
+                <a:srgbClr val="FAE8E3"/>
+              </a:solidFill>
+              <a:ln w="9525">
+                <a:solidFill>
+                  <a:srgbClr val="DC4B1E"/>
+                </a:solidFill>
+                <a:prstDash val="solid"/>
+              </a:ln>
+            </p:spPr>
+            <p:txBody>
+              <a:bodyPr/>
+              <a:lstStyle/>
+              <a:p>
+                <a:endParaRPr lang="en-US"/>
+              </a:p>
+            </p:txBody>
+          </p:sp>
+          <p:sp>
+            <p:nvSpPr>
+              <p:cNvPr id="170" name="Shape 24">
+                <a:extLst>
+                  <a:ext uri="{FF2B5EF4-FFF2-40B4-BE49-F238E27FC236}">
+                    <a16:creationId xmlns:a16="http://schemas.microsoft.com/office/drawing/2014/main" id="{052150C1-19F5-72E4-6B64-AA02C2B26D87}"/>
+                  </a:ext>
+                </a:extLst>
+              </p:cNvPr>
+              <p:cNvSpPr/>
+              <p:nvPr/>
+            </p:nvSpPr>
+            <p:spPr>
+              <a:xfrm>
+                <a:off x="1929384" y="1499616"/>
+                <a:ext cx="73152" cy="73152"/>
+              </a:xfrm>
+              <a:prstGeom prst="ellipse">
+                <a:avLst/>
+              </a:prstGeom>
+              <a:solidFill>
+                <a:srgbClr val="DC4B1E">
+                  <a:alpha val="50000"/>
+                </a:srgbClr>
+              </a:solidFill>
+              <a:ln/>
+            </p:spPr>
+            <p:txBody>
+              <a:bodyPr/>
+              <a:lstStyle/>
+              <a:p>
+                <a:endParaRPr lang="en-US"/>
+              </a:p>
+            </p:txBody>
+          </p:sp>
+        </p:grpSp>
+        <p:grpSp>
+          <p:nvGrpSpPr>
+            <p:cNvPr id="146" name="Group 145">
+              <a:extLst>
+                <a:ext uri="{FF2B5EF4-FFF2-40B4-BE49-F238E27FC236}">
+                  <a16:creationId xmlns:a16="http://schemas.microsoft.com/office/drawing/2014/main" id="{57436BF9-6003-A762-9EE6-17A1796775DB}"/>
+                </a:ext>
+              </a:extLst>
+            </p:cNvPr>
+            <p:cNvGrpSpPr/>
+            <p:nvPr/>
+          </p:nvGrpSpPr>
+          <p:grpSpPr>
+            <a:xfrm>
+              <a:off x="4417778" y="4232555"/>
               <a:ext cx="162307" cy="148115"/>
               <a:chOff x="2752253" y="2670772"/>
               <a:chExt cx="218792" cy="256515"/>
@@ -5030,10 +9966,10 @@
           </p:grpSpPr>
           <p:cxnSp>
             <p:nvCxnSpPr>
-              <p:cNvPr id="336" name="Straight Connector 335">
-                <a:extLst>
-                  <a:ext uri="{FF2B5EF4-FFF2-40B4-BE49-F238E27FC236}">
-                    <a16:creationId xmlns:a16="http://schemas.microsoft.com/office/drawing/2014/main" id="{CEC04705-D002-2DCE-457E-FB92A6D793BA}"/>
+              <p:cNvPr id="163" name="Straight Connector 162">
+                <a:extLst>
+                  <a:ext uri="{FF2B5EF4-FFF2-40B4-BE49-F238E27FC236}">
+                    <a16:creationId xmlns:a16="http://schemas.microsoft.com/office/drawing/2014/main" id="{8B890E26-2E89-5970-0EBE-BCA6FEBF600B}"/>
                   </a:ext>
                 </a:extLst>
               </p:cNvPr>
@@ -5052,7 +9988,9 @@
               </a:prstGeom>
               <a:ln w="25400" cmpd="sng">
                 <a:solidFill>
-                  <a:srgbClr val="FF0000"/>
+                  <a:schemeClr val="accent3">
+                    <a:lumMod val="75000"/>
+                  </a:schemeClr>
                 </a:solidFill>
               </a:ln>
             </p:spPr>
@@ -5073,10 +10011,10 @@
           </p:cxnSp>
           <p:cxnSp>
             <p:nvCxnSpPr>
-              <p:cNvPr id="337" name="Straight Connector 336">
-                <a:extLst>
-                  <a:ext uri="{FF2B5EF4-FFF2-40B4-BE49-F238E27FC236}">
-                    <a16:creationId xmlns:a16="http://schemas.microsoft.com/office/drawing/2014/main" id="{76E74411-BE77-7A36-60B2-D5E617944E55}"/>
+              <p:cNvPr id="164" name="Straight Connector 163">
+                <a:extLst>
+                  <a:ext uri="{FF2B5EF4-FFF2-40B4-BE49-F238E27FC236}">
+                    <a16:creationId xmlns:a16="http://schemas.microsoft.com/office/drawing/2014/main" id="{C6254783-B5F4-52A1-EE50-0539A132EAE7}"/>
                   </a:ext>
                 </a:extLst>
               </p:cNvPr>
@@ -5095,7 +10033,9 @@
               </a:prstGeom>
               <a:ln w="25400" cmpd="sng">
                 <a:solidFill>
-                  <a:srgbClr val="FF0000"/>
+                  <a:schemeClr val="accent3">
+                    <a:lumMod val="75000"/>
+                  </a:schemeClr>
                 </a:solidFill>
               </a:ln>
             </p:spPr>
@@ -5117,10 +10057,10 @@
         </p:grpSp>
         <p:grpSp>
           <p:nvGrpSpPr>
-            <p:cNvPr id="327" name="Group 326">
+            <p:cNvPr id="147" name="Group 146">
               <a:extLst>
                 <a:ext uri="{FF2B5EF4-FFF2-40B4-BE49-F238E27FC236}">
-                  <a16:creationId xmlns:a16="http://schemas.microsoft.com/office/drawing/2014/main" id="{23F15DCD-DB93-27DA-A2C7-845CF94E683D}"/>
+                  <a16:creationId xmlns:a16="http://schemas.microsoft.com/office/drawing/2014/main" id="{8349364D-D66F-2CF6-05AC-6E030BD8C8DE}"/>
                 </a:ext>
               </a:extLst>
             </p:cNvPr>
@@ -5129,92 +10069,109 @@
           </p:nvGrpSpPr>
           <p:grpSpPr>
             <a:xfrm>
-              <a:off x="1308799" y="3708205"/>
-              <a:ext cx="150129" cy="139837"/>
-              <a:chOff x="1225296" y="1527048"/>
-              <a:chExt cx="201168" cy="201168"/>
+              <a:off x="4974501" y="4451602"/>
+              <a:ext cx="162307" cy="148115"/>
+              <a:chOff x="2752253" y="2670772"/>
+              <a:chExt cx="218792" cy="256515"/>
             </a:xfrm>
           </p:grpSpPr>
-          <p:sp>
-            <p:nvSpPr>
-              <p:cNvPr id="334" name="Shape 15">
-                <a:extLst>
-                  <a:ext uri="{FF2B5EF4-FFF2-40B4-BE49-F238E27FC236}">
-                    <a16:creationId xmlns:a16="http://schemas.microsoft.com/office/drawing/2014/main" id="{B1485218-7B9D-6330-29F8-4961FA08FEB4}"/>
-                  </a:ext>
-                </a:extLst>
-              </p:cNvPr>
-              <p:cNvSpPr/>
-              <p:nvPr/>
-            </p:nvSpPr>
-            <p:spPr>
-              <a:xfrm>
-                <a:off x="1225296" y="1527048"/>
-                <a:ext cx="201168" cy="201168"/>
-              </a:xfrm>
-              <a:prstGeom prst="ellipse">
-                <a:avLst/>
-              </a:prstGeom>
-              <a:solidFill>
-                <a:srgbClr val="B5D4F4"/>
-              </a:solidFill>
-              <a:ln w="9525">
-                <a:solidFill>
-                  <a:srgbClr val="185FA5"/>
-                </a:solidFill>
-                <a:prstDash val="solid"/>
+          <p:cxnSp>
+            <p:nvCxnSpPr>
+              <p:cNvPr id="160" name="Straight Connector 159">
+                <a:extLst>
+                  <a:ext uri="{FF2B5EF4-FFF2-40B4-BE49-F238E27FC236}">
+                    <a16:creationId xmlns:a16="http://schemas.microsoft.com/office/drawing/2014/main" id="{59AA00C0-9B26-499D-857F-6C01355B2364}"/>
+                  </a:ext>
+                </a:extLst>
+              </p:cNvPr>
+              <p:cNvCxnSpPr>
+                <a:cxnSpLocks/>
+              </p:cNvCxnSpPr>
+              <p:nvPr/>
+            </p:nvCxnSpPr>
+            <p:spPr>
+              <a:xfrm>
+                <a:off x="2752253" y="2670772"/>
+                <a:ext cx="218792" cy="256515"/>
+              </a:xfrm>
+              <a:prstGeom prst="line">
+                <a:avLst/>
+              </a:prstGeom>
+              <a:ln w="25400" cmpd="sng">
+                <a:solidFill>
+                  <a:schemeClr val="accent3">
+                    <a:lumMod val="75000"/>
+                  </a:schemeClr>
+                </a:solidFill>
               </a:ln>
             </p:spPr>
-            <p:txBody>
-              <a:bodyPr/>
-              <a:lstStyle/>
-              <a:p>
-                <a:endParaRPr lang="en-US"/>
-              </a:p>
-            </p:txBody>
-          </p:sp>
-          <p:sp>
-            <p:nvSpPr>
-              <p:cNvPr id="335" name="Shape 16">
-                <a:extLst>
-                  <a:ext uri="{FF2B5EF4-FFF2-40B4-BE49-F238E27FC236}">
-                    <a16:creationId xmlns:a16="http://schemas.microsoft.com/office/drawing/2014/main" id="{E9EC9B26-8389-2B7B-F55E-ED427007CF1D}"/>
-                  </a:ext>
-                </a:extLst>
-              </p:cNvPr>
-              <p:cNvSpPr/>
-              <p:nvPr/>
-            </p:nvSpPr>
-            <p:spPr>
-              <a:xfrm>
-                <a:off x="1285646" y="1587398"/>
-                <a:ext cx="80467" cy="80467"/>
-              </a:xfrm>
-              <a:prstGeom prst="ellipse">
-                <a:avLst/>
-              </a:prstGeom>
-              <a:solidFill>
-                <a:srgbClr val="185FA5">
-                  <a:alpha val="50000"/>
-                </a:srgbClr>
-              </a:solidFill>
-              <a:ln/>
-            </p:spPr>
-            <p:txBody>
-              <a:bodyPr/>
-              <a:lstStyle/>
-              <a:p>
-                <a:endParaRPr lang="en-US"/>
-              </a:p>
-            </p:txBody>
-          </p:sp>
+            <p:style>
+              <a:lnRef idx="1">
+                <a:schemeClr val="accent1"/>
+              </a:lnRef>
+              <a:fillRef idx="0">
+                <a:schemeClr val="accent1"/>
+              </a:fillRef>
+              <a:effectRef idx="0">
+                <a:schemeClr val="accent1"/>
+              </a:effectRef>
+              <a:fontRef idx="minor">
+                <a:schemeClr val="tx1"/>
+              </a:fontRef>
+            </p:style>
+          </p:cxnSp>
+          <p:cxnSp>
+            <p:nvCxnSpPr>
+              <p:cNvPr id="161" name="Straight Connector 160">
+                <a:extLst>
+                  <a:ext uri="{FF2B5EF4-FFF2-40B4-BE49-F238E27FC236}">
+                    <a16:creationId xmlns:a16="http://schemas.microsoft.com/office/drawing/2014/main" id="{475E2102-CE4A-65C9-0A22-508F54A35BFF}"/>
+                  </a:ext>
+                </a:extLst>
+              </p:cNvPr>
+              <p:cNvCxnSpPr>
+                <a:cxnSpLocks/>
+              </p:cNvCxnSpPr>
+              <p:nvPr/>
+            </p:nvCxnSpPr>
+            <p:spPr>
+              <a:xfrm flipH="1">
+                <a:off x="2752253" y="2670772"/>
+                <a:ext cx="218792" cy="256515"/>
+              </a:xfrm>
+              <a:prstGeom prst="line">
+                <a:avLst/>
+              </a:prstGeom>
+              <a:ln w="25400" cmpd="sng">
+                <a:solidFill>
+                  <a:schemeClr val="accent3">
+                    <a:lumMod val="75000"/>
+                  </a:schemeClr>
+                </a:solidFill>
+              </a:ln>
+            </p:spPr>
+            <p:style>
+              <a:lnRef idx="1">
+                <a:schemeClr val="accent1"/>
+              </a:lnRef>
+              <a:fillRef idx="0">
+                <a:schemeClr val="accent1"/>
+              </a:fillRef>
+              <a:effectRef idx="0">
+                <a:schemeClr val="accent1"/>
+              </a:effectRef>
+              <a:fontRef idx="minor">
+                <a:schemeClr val="tx1"/>
+              </a:fontRef>
+            </p:style>
+          </p:cxnSp>
         </p:grpSp>
         <p:grpSp>
           <p:nvGrpSpPr>
-            <p:cNvPr id="328" name="Group 327">
+            <p:cNvPr id="148" name="Group 147">
               <a:extLst>
                 <a:ext uri="{FF2B5EF4-FFF2-40B4-BE49-F238E27FC236}">
-                  <a16:creationId xmlns:a16="http://schemas.microsoft.com/office/drawing/2014/main" id="{2B50F6E8-7306-82CA-5381-C4B70504F0CA}"/>
+                  <a16:creationId xmlns:a16="http://schemas.microsoft.com/office/drawing/2014/main" id="{1FF52893-092F-EA21-CBF1-D93EAFC1984E}"/>
                 </a:ext>
               </a:extLst>
             </p:cNvPr>
@@ -5223,7 +10180,7 @@
           </p:nvGrpSpPr>
           <p:grpSpPr>
             <a:xfrm>
-              <a:off x="1476298" y="4131532"/>
+              <a:off x="4845296" y="4672178"/>
               <a:ext cx="150129" cy="139837"/>
               <a:chOff x="1225296" y="1527048"/>
               <a:chExt cx="201168" cy="201168"/>
@@ -5231,10 +10188,10 @@
           </p:grpSpPr>
           <p:sp>
             <p:nvSpPr>
-              <p:cNvPr id="332" name="Shape 15">
-                <a:extLst>
-                  <a:ext uri="{FF2B5EF4-FFF2-40B4-BE49-F238E27FC236}">
-                    <a16:creationId xmlns:a16="http://schemas.microsoft.com/office/drawing/2014/main" id="{D57ED78D-4572-55AA-F518-EEA9809EFC1B}"/>
+              <p:cNvPr id="158" name="Shape 15">
+                <a:extLst>
+                  <a:ext uri="{FF2B5EF4-FFF2-40B4-BE49-F238E27FC236}">
+                    <a16:creationId xmlns:a16="http://schemas.microsoft.com/office/drawing/2014/main" id="{ECB44F24-98E1-9080-D6ED-E3212BAB33ED}"/>
                   </a:ext>
                 </a:extLst>
               </p:cNvPr>
@@ -5250,11 +10207,11 @@
                 <a:avLst/>
               </a:prstGeom>
               <a:solidFill>
-                <a:srgbClr val="B5D4F4"/>
+                <a:srgbClr val="E8E7F5"/>
               </a:solidFill>
               <a:ln w="9525">
                 <a:solidFill>
-                  <a:srgbClr val="185FA5"/>
+                  <a:srgbClr val="2E2585"/>
                 </a:solidFill>
                 <a:prstDash val="solid"/>
               </a:ln>
@@ -5269,10 +10226,10 @@
           </p:sp>
           <p:sp>
             <p:nvSpPr>
-              <p:cNvPr id="333" name="Shape 16">
-                <a:extLst>
-                  <a:ext uri="{FF2B5EF4-FFF2-40B4-BE49-F238E27FC236}">
-                    <a16:creationId xmlns:a16="http://schemas.microsoft.com/office/drawing/2014/main" id="{A1A31B02-3E60-2A3F-6AFC-CE7FF120DCDE}"/>
+              <p:cNvPr id="159" name="Shape 16">
+                <a:extLst>
+                  <a:ext uri="{FF2B5EF4-FFF2-40B4-BE49-F238E27FC236}">
+                    <a16:creationId xmlns:a16="http://schemas.microsoft.com/office/drawing/2014/main" id="{3421D34E-3A49-EA5C-08EB-CC495A763F80}"/>
                   </a:ext>
                 </a:extLst>
               </p:cNvPr>
@@ -5288,7 +10245,7 @@
                 <a:avLst/>
               </a:prstGeom>
               <a:solidFill>
-                <a:srgbClr val="185FA5">
+                <a:srgbClr val="2E2585">
                   <a:alpha val="50000"/>
                 </a:srgbClr>
               </a:solidFill>
@@ -5305,10 +10262,10 @@
         </p:grpSp>
         <p:grpSp>
           <p:nvGrpSpPr>
-            <p:cNvPr id="329" name="Group 328">
+            <p:cNvPr id="149" name="Group 148">
               <a:extLst>
                 <a:ext uri="{FF2B5EF4-FFF2-40B4-BE49-F238E27FC236}">
-                  <a16:creationId xmlns:a16="http://schemas.microsoft.com/office/drawing/2014/main" id="{DBE21087-F109-E4CC-4AD1-DDFD544C3DF9}"/>
+                  <a16:creationId xmlns:a16="http://schemas.microsoft.com/office/drawing/2014/main" id="{5285D054-9543-85A2-517C-D754106647BD}"/>
                 </a:ext>
               </a:extLst>
             </p:cNvPr>
@@ -5317,7 +10274,7 @@
           </p:nvGrpSpPr>
           <p:grpSpPr>
             <a:xfrm>
-              <a:off x="2038425" y="4077221"/>
+              <a:off x="5407423" y="4617867"/>
               <a:ext cx="150129" cy="143298"/>
               <a:chOff x="7067843" y="717976"/>
               <a:chExt cx="201168" cy="206147"/>
@@ -5325,10 +10282,10 @@
           </p:grpSpPr>
           <p:sp>
             <p:nvSpPr>
-              <p:cNvPr id="330" name="Shape 71">
-                <a:extLst>
-                  <a:ext uri="{FF2B5EF4-FFF2-40B4-BE49-F238E27FC236}">
-                    <a16:creationId xmlns:a16="http://schemas.microsoft.com/office/drawing/2014/main" id="{C9A50D87-803B-5213-92B3-906CAD9150F1}"/>
+              <p:cNvPr id="156" name="Shape 71">
+                <a:extLst>
+                  <a:ext uri="{FF2B5EF4-FFF2-40B4-BE49-F238E27FC236}">
+                    <a16:creationId xmlns:a16="http://schemas.microsoft.com/office/drawing/2014/main" id="{7B9A95FC-8A59-4C08-0542-2D0A54073C17}"/>
                   </a:ext>
                 </a:extLst>
               </p:cNvPr>
@@ -5344,11 +10301,11 @@
                 <a:avLst/>
               </a:prstGeom>
               <a:solidFill>
-                <a:srgbClr val="FBEAF0"/>
+                <a:srgbClr val="F9E0EE"/>
               </a:solidFill>
               <a:ln w="22225">
                 <a:solidFill>
-                  <a:srgbClr val="993556"/>
+                  <a:srgbClr val="C0156E"/>
                 </a:solidFill>
                 <a:prstDash val="solid"/>
               </a:ln>
@@ -5363,10 +10320,10 @@
           </p:sp>
           <p:sp>
             <p:nvSpPr>
-              <p:cNvPr id="331" name="Shape 72">
-                <a:extLst>
-                  <a:ext uri="{FF2B5EF4-FFF2-40B4-BE49-F238E27FC236}">
-                    <a16:creationId xmlns:a16="http://schemas.microsoft.com/office/drawing/2014/main" id="{1ABCB67B-F35E-6320-F9F9-2DF924F4BC64}"/>
+              <p:cNvPr id="157" name="Shape 72">
+                <a:extLst>
+                  <a:ext uri="{FF2B5EF4-FFF2-40B4-BE49-F238E27FC236}">
+                    <a16:creationId xmlns:a16="http://schemas.microsoft.com/office/drawing/2014/main" id="{91D6A526-14AB-27D2-B38D-542B5D09AFC8}"/>
                   </a:ext>
                 </a:extLst>
               </p:cNvPr>
@@ -5382,7 +10339,101 @@
                 <a:avLst/>
               </a:prstGeom>
               <a:solidFill>
-                <a:srgbClr val="993556">
+                <a:srgbClr val="C0156E">
+                  <a:alpha val="50000"/>
+                </a:srgbClr>
+              </a:solidFill>
+              <a:ln/>
+            </p:spPr>
+            <p:txBody>
+              <a:bodyPr/>
+              <a:lstStyle/>
+              <a:p>
+                <a:endParaRPr lang="en-US"/>
+              </a:p>
+            </p:txBody>
+          </p:sp>
+        </p:grpSp>
+        <p:grpSp>
+          <p:nvGrpSpPr>
+            <p:cNvPr id="150" name="Group 149">
+              <a:extLst>
+                <a:ext uri="{FF2B5EF4-FFF2-40B4-BE49-F238E27FC236}">
+                  <a16:creationId xmlns:a16="http://schemas.microsoft.com/office/drawing/2014/main" id="{C1C880A8-43FC-894A-136F-59CA3EEDABB9}"/>
+                </a:ext>
+              </a:extLst>
+            </p:cNvPr>
+            <p:cNvGrpSpPr/>
+            <p:nvPr/>
+          </p:nvGrpSpPr>
+          <p:grpSpPr>
+            <a:xfrm>
+              <a:off x="5413993" y="4176701"/>
+              <a:ext cx="150129" cy="143298"/>
+              <a:chOff x="7067843" y="717976"/>
+              <a:chExt cx="201168" cy="206147"/>
+            </a:xfrm>
+          </p:grpSpPr>
+          <p:sp>
+            <p:nvSpPr>
+              <p:cNvPr id="154" name="Shape 71">
+                <a:extLst>
+                  <a:ext uri="{FF2B5EF4-FFF2-40B4-BE49-F238E27FC236}">
+                    <a16:creationId xmlns:a16="http://schemas.microsoft.com/office/drawing/2014/main" id="{E5B9A8C0-0DCD-A341-28A3-09800D34B01E}"/>
+                  </a:ext>
+                </a:extLst>
+              </p:cNvPr>
+              <p:cNvSpPr/>
+              <p:nvPr/>
+            </p:nvSpPr>
+            <p:spPr>
+              <a:xfrm>
+                <a:off x="7067843" y="717976"/>
+                <a:ext cx="201168" cy="206147"/>
+              </a:xfrm>
+              <a:prstGeom prst="ellipse">
+                <a:avLst/>
+              </a:prstGeom>
+              <a:solidFill>
+                <a:srgbClr val="F9E0EE"/>
+              </a:solidFill>
+              <a:ln w="22225">
+                <a:solidFill>
+                  <a:srgbClr val="C0156E"/>
+                </a:solidFill>
+                <a:prstDash val="solid"/>
+              </a:ln>
+            </p:spPr>
+            <p:txBody>
+              <a:bodyPr/>
+              <a:lstStyle/>
+              <a:p>
+                <a:endParaRPr lang="en-US" dirty="0"/>
+              </a:p>
+            </p:txBody>
+          </p:sp>
+          <p:sp>
+            <p:nvSpPr>
+              <p:cNvPr id="155" name="Shape 72">
+                <a:extLst>
+                  <a:ext uri="{FF2B5EF4-FFF2-40B4-BE49-F238E27FC236}">
+                    <a16:creationId xmlns:a16="http://schemas.microsoft.com/office/drawing/2014/main" id="{B663E185-185C-2B7F-C996-AA85C6439A75}"/>
+                  </a:ext>
+                </a:extLst>
+              </p:cNvPr>
+              <p:cNvSpPr/>
+              <p:nvPr/>
+            </p:nvSpPr>
+            <p:spPr>
+              <a:xfrm>
+                <a:off x="7128525" y="770321"/>
+                <a:ext cx="80467" cy="82459"/>
+              </a:xfrm>
+              <a:prstGeom prst="ellipse">
+                <a:avLst/>
+              </a:prstGeom>
+              <a:solidFill>
+                <a:srgbClr val="C0156E">
                   <a:alpha val="50000"/>
                 </a:srgbClr>
               </a:solidFill>
@@ -5401,7 +10452,7 @@
     </p:spTree>
     <p:extLst>
       <p:ext uri="{BB962C8B-B14F-4D97-AF65-F5344CB8AC3E}">
-        <p14:creationId xmlns:p14="http://schemas.microsoft.com/office/powerpoint/2010/main" val="2235937185"/>
+        <p14:creationId xmlns:p14="http://schemas.microsoft.com/office/powerpoint/2010/main" val="2501796392"/>
       </p:ext>
     </p:extLst>
   </p:cSld>
